--- a/templates/21-budget-plan-budget-finance/21__nordic.pptx
+++ b/templates/21-budget-plan-budget-finance/21__nordic.pptx
@@ -3375,8 +3375,222 @@
     <a:masterClrMapping/>
   </p:clrMapOvr>
   <p:transition spd="med">
-    <p:fade/>
+    <p:circle dir="in"/>
   </p:transition>
+  <p:timing>
+    <p:tnLst>
+      <p:par>
+        <p:cTn id="1" dur="indefinite" restart="never" nodeType="tmRoot">
+          <p:childTnLst>
+            <p:seq concurrent="1" nextAc="seek">
+              <p:cTn id="2" dur="indefinite" nodeType="mainSeq">
+                <p:childTnLst>
+                  <p:par>
+                    <p:cTn id="3" fill="hold">
+                      <p:stCondLst>
+                        <p:cond delay="indefinite"/>
+                      </p:stCondLst>
+                      <p:childTnLst>
+                        <p:par>
+                          <p:cTn id="5" dur="810" fill="hold" nodeType="clickEffect" grpId="0" presetID="45" presetClass="entr" presetSubtype="1">
+                            <p:stCondLst>
+                              <p:cond delay="0"/>
+                            </p:stCondLst>
+                            <p:childTnLst>
+                              <p:set>
+                                <p:cBhvr>
+                                  <p:cTn id="6" dur="1" fill="hold">
+                                    <p:stCondLst>
+                                      <p:cond delay="0"/>
+                                    </p:stCondLst>
+                                  </p:cTn>
+                                  <p:tgtEl>
+                                    <p:spTgt spid="3"/>
+                                  </p:tgtEl>
+                                  <p:attrNameLst>
+                                    <p:attrName>style.visibility</p:attrName>
+                                  </p:attrNameLst>
+                                </p:cBhvr>
+                                <p:to>
+                                  <p:strVal val="visible"/>
+                                </p:to>
+                              </p:set>
+                              <p:animEffect transition="in" filter="barn(inHorizontal)">
+                                <p:cBhvr>
+                                  <p:cTn id="51" dur="810"/>
+                                  <p:tgtEl>
+                                    <p:spTgt spid="3"/>
+                                  </p:tgtEl>
+                                </p:cBhvr>
+                              </p:animEffect>
+                            </p:childTnLst>
+                          </p:cTn>
+                        </p:par>
+                        <p:par>
+                          <p:cTn id="7" dur="450" fill="hold" nodeType="afterEffect" grpId="0" presetID="22" presetClass="entr" presetSubtype="8">
+                            <p:stCondLst>
+                              <p:cond delay="130"/>
+                            </p:stCondLst>
+                            <p:childTnLst>
+                              <p:set>
+                                <p:cBhvr>
+                                  <p:cTn id="8" dur="1" fill="hold">
+                                    <p:stCondLst>
+                                      <p:cond delay="0"/>
+                                    </p:stCondLst>
+                                  </p:cTn>
+                                  <p:tgtEl>
+                                    <p:spTgt spid="4"/>
+                                  </p:tgtEl>
+                                  <p:attrNameLst>
+                                    <p:attrName>style.visibility</p:attrName>
+                                  </p:attrNameLst>
+                                </p:cBhvr>
+                                <p:to>
+                                  <p:strVal val="visible"/>
+                                </p:to>
+                              </p:set>
+                              <p:animEffect transition="in" filter="wipe(left)">
+                                <p:cBhvr>
+                                  <p:cTn id="71" dur="450"/>
+                                  <p:tgtEl>
+                                    <p:spTgt spid="4"/>
+                                  </p:tgtEl>
+                                </p:cBhvr>
+                              </p:animEffect>
+                            </p:childTnLst>
+                          </p:cTn>
+                        </p:par>
+                        <p:par>
+                          <p:cTn id="9" dur="570" fill="hold" nodeType="afterEffect" grpId="0" presetID="37" presetClass="entr" presetSubtype="0">
+                            <p:stCondLst>
+                              <p:cond delay="260"/>
+                            </p:stCondLst>
+                            <p:childTnLst>
+                              <p:set>
+                                <p:cBhvr>
+                                  <p:cTn id="10" dur="1" fill="hold">
+                                    <p:stCondLst>
+                                      <p:cond delay="0"/>
+                                    </p:stCondLst>
+                                  </p:cTn>
+                                  <p:tgtEl>
+                                    <p:spTgt spid="5"/>
+                                  </p:tgtEl>
+                                  <p:attrNameLst>
+                                    <p:attrName>style.visibility</p:attrName>
+                                  </p:attrNameLst>
+                                </p:cBhvr>
+                                <p:to>
+                                  <p:strVal val="visible"/>
+                                </p:to>
+                              </p:set>
+                              <p:animEffect transition="in" filter="wedge">
+                                <p:cBhvr>
+                                  <p:cTn id="91" dur="570"/>
+                                  <p:tgtEl>
+                                    <p:spTgt spid="5"/>
+                                  </p:tgtEl>
+                                </p:cBhvr>
+                              </p:animEffect>
+                            </p:childTnLst>
+                          </p:cTn>
+                        </p:par>
+                        <p:par>
+                          <p:cTn id="11" dur="690" fill="hold" nodeType="afterEffect" grpId="0" presetID="52" presetClass="entr" presetSubtype="0">
+                            <p:stCondLst>
+                              <p:cond delay="390"/>
+                            </p:stCondLst>
+                            <p:childTnLst>
+                              <p:set>
+                                <p:cBhvr>
+                                  <p:cTn id="12" dur="1" fill="hold">
+                                    <p:stCondLst>
+                                      <p:cond delay="0"/>
+                                    </p:stCondLst>
+                                  </p:cTn>
+                                  <p:tgtEl>
+                                    <p:spTgt spid="6"/>
+                                  </p:tgtEl>
+                                  <p:attrNameLst>
+                                    <p:attrName>style.visibility</p:attrName>
+                                  </p:attrNameLst>
+                                </p:cBhvr>
+                                <p:to>
+                                  <p:strVal val="visible"/>
+                                </p:to>
+                              </p:set>
+                              <p:animEffect transition="in" filter="randombar(horizontal)">
+                                <p:cBhvr>
+                                  <p:cTn id="111" dur="690"/>
+                                  <p:tgtEl>
+                                    <p:spTgt spid="6"/>
+                                  </p:tgtEl>
+                                </p:cBhvr>
+                              </p:animEffect>
+                            </p:childTnLst>
+                          </p:cTn>
+                        </p:par>
+                        <p:par>
+                          <p:cTn id="13" dur="810" fill="hold" nodeType="afterEffect" grpId="0" presetID="21" presetClass="entr" presetSubtype="1">
+                            <p:stCondLst>
+                              <p:cond delay="520"/>
+                            </p:stCondLst>
+                            <p:childTnLst>
+                              <p:set>
+                                <p:cBhvr>
+                                  <p:cTn id="14" dur="1" fill="hold">
+                                    <p:stCondLst>
+                                      <p:cond delay="0"/>
+                                    </p:stCondLst>
+                                  </p:cTn>
+                                  <p:tgtEl>
+                                    <p:spTgt spid="7"/>
+                                  </p:tgtEl>
+                                  <p:attrNameLst>
+                                    <p:attrName>style.visibility</p:attrName>
+                                  </p:attrNameLst>
+                                </p:cBhvr>
+                                <p:to>
+                                  <p:strVal val="visible"/>
+                                </p:to>
+                              </p:set>
+                              <p:animEffect transition="in" filter="wheel(1)">
+                                <p:cBhvr>
+                                  <p:cTn id="131" dur="810"/>
+                                  <p:tgtEl>
+                                    <p:spTgt spid="7"/>
+                                  </p:tgtEl>
+                                </p:cBhvr>
+                              </p:animEffect>
+                            </p:childTnLst>
+                          </p:cTn>
+                        </p:par>
+                      </p:childTnLst>
+                    </p:cTn>
+                  </p:par>
+                </p:childTnLst>
+              </p:cTn>
+              <p:prevCondLst>
+                <p:cond evt="onPrev" delay="0">
+                  <p:tgtEl>
+                    <p:sldTgt/>
+                  </p:tgtEl>
+                </p:cond>
+              </p:prevCondLst>
+              <p:nextCondLst>
+                <p:cond evt="onNext" delay="0">
+                  <p:tgtEl>
+                    <p:sldTgt/>
+                  </p:tgtEl>
+                </p:cond>
+              </p:nextCondLst>
+            </p:seq>
+          </p:childTnLst>
+        </p:cTn>
+      </p:par>
+    </p:tnLst>
+  </p:timing>
 </p:sld>
 </file>
 
@@ -4430,6 +4644,535 @@
   <p:transition spd="med">
     <p:fade/>
   </p:transition>
+  <p:timing>
+    <p:tnLst>
+      <p:par>
+        <p:cTn id="1" dur="indefinite" restart="never" nodeType="tmRoot">
+          <p:childTnLst>
+            <p:seq concurrent="1" nextAc="seek">
+              <p:cTn id="2" dur="indefinite" nodeType="mainSeq">
+                <p:childTnLst>
+                  <p:par>
+                    <p:cTn id="3" fill="hold">
+                      <p:stCondLst>
+                        <p:cond delay="indefinite"/>
+                      </p:stCondLst>
+                      <p:childTnLst>
+                        <p:par>
+                          <p:cTn id="5" dur="450" fill="hold" nodeType="clickEffect" grpId="0" presetID="22" presetClass="entr" presetSubtype="1">
+                            <p:stCondLst>
+                              <p:cond delay="0"/>
+                            </p:stCondLst>
+                            <p:childTnLst>
+                              <p:set>
+                                <p:cBhvr>
+                                  <p:cTn id="6" dur="1" fill="hold">
+                                    <p:stCondLst>
+                                      <p:cond delay="0"/>
+                                    </p:stCondLst>
+                                  </p:cTn>
+                                  <p:tgtEl>
+                                    <p:spTgt spid="3"/>
+                                  </p:tgtEl>
+                                  <p:attrNameLst>
+                                    <p:attrName>style.visibility</p:attrName>
+                                  </p:attrNameLst>
+                                </p:cBhvr>
+                                <p:to>
+                                  <p:strVal val="visible"/>
+                                </p:to>
+                              </p:set>
+                              <p:animEffect transition="in" filter="wipe(up)">
+                                <p:cBhvr>
+                                  <p:cTn id="51" dur="450"/>
+                                  <p:tgtEl>
+                                    <p:spTgt spid="3"/>
+                                  </p:tgtEl>
+                                </p:cBhvr>
+                              </p:animEffect>
+                            </p:childTnLst>
+                          </p:cTn>
+                        </p:par>
+                        <p:par>
+                          <p:cTn id="7" dur="570" fill="hold" nodeType="afterEffect" grpId="0" presetID="42" presetClass="entr" presetSubtype="10">
+                            <p:stCondLst>
+                              <p:cond delay="130"/>
+                            </p:stCondLst>
+                            <p:childTnLst>
+                              <p:set>
+                                <p:cBhvr>
+                                  <p:cTn id="8" dur="1" fill="hold">
+                                    <p:stCondLst>
+                                      <p:cond delay="0"/>
+                                    </p:stCondLst>
+                                  </p:cTn>
+                                  <p:tgtEl>
+                                    <p:spTgt spid="4"/>
+                                  </p:tgtEl>
+                                  <p:attrNameLst>
+                                    <p:attrName>style.visibility</p:attrName>
+                                  </p:attrNameLst>
+                                </p:cBhvr>
+                                <p:to>
+                                  <p:strVal val="visible"/>
+                                </p:to>
+                              </p:set>
+                              <p:animEffect transition="in" filter="blinds(horizontal)">
+                                <p:cBhvr>
+                                  <p:cTn id="71" dur="570"/>
+                                  <p:tgtEl>
+                                    <p:spTgt spid="4"/>
+                                  </p:tgtEl>
+                                </p:cBhvr>
+                              </p:animEffect>
+                            </p:childTnLst>
+                          </p:cTn>
+                        </p:par>
+                        <p:par>
+                          <p:cTn id="9" dur="690" fill="hold" nodeType="afterEffect" grpId="0" presetID="43" presetClass="entr" presetSubtype="0">
+                            <p:stCondLst>
+                              <p:cond delay="260"/>
+                            </p:stCondLst>
+                            <p:childTnLst>
+                              <p:set>
+                                <p:cBhvr>
+                                  <p:cTn id="10" dur="1" fill="hold">
+                                    <p:stCondLst>
+                                      <p:cond delay="0"/>
+                                    </p:stCondLst>
+                                  </p:cTn>
+                                  <p:tgtEl>
+                                    <p:spTgt spid="5"/>
+                                  </p:tgtEl>
+                                  <p:attrNameLst>
+                                    <p:attrName>style.visibility</p:attrName>
+                                  </p:attrNameLst>
+                                </p:cBhvr>
+                                <p:to>
+                                  <p:strVal val="visible"/>
+                                </p:to>
+                              </p:set>
+                              <p:animEffect transition="in" filter="checkerboard(across)">
+                                <p:cBhvr>
+                                  <p:cTn id="91" dur="690"/>
+                                  <p:tgtEl>
+                                    <p:spTgt spid="5"/>
+                                  </p:tgtEl>
+                                </p:cBhvr>
+                              </p:animEffect>
+                            </p:childTnLst>
+                          </p:cTn>
+                        </p:par>
+                        <p:par>
+                          <p:cTn id="11" dur="810" fill="hold" nodeType="afterEffect" grpId="0" presetID="21" presetClass="entr" presetSubtype="2">
+                            <p:stCondLst>
+                              <p:cond delay="390"/>
+                            </p:stCondLst>
+                            <p:childTnLst>
+                              <p:set>
+                                <p:cBhvr>
+                                  <p:cTn id="12" dur="1" fill="hold">
+                                    <p:stCondLst>
+                                      <p:cond delay="0"/>
+                                    </p:stCondLst>
+                                  </p:cTn>
+                                  <p:tgtEl>
+                                    <p:spTgt spid="6"/>
+                                  </p:tgtEl>
+                                  <p:attrNameLst>
+                                    <p:attrName>style.visibility</p:attrName>
+                                  </p:attrNameLst>
+                                </p:cBhvr>
+                                <p:to>
+                                  <p:strVal val="visible"/>
+                                </p:to>
+                              </p:set>
+                              <p:animEffect transition="in" filter="wheel(2)">
+                                <p:cBhvr>
+                                  <p:cTn id="111" dur="810"/>
+                                  <p:tgtEl>
+                                    <p:spTgt spid="6"/>
+                                  </p:tgtEl>
+                                </p:cBhvr>
+                              </p:animEffect>
+                            </p:childTnLst>
+                          </p:cTn>
+                        </p:par>
+                        <p:par>
+                          <p:cTn id="13" dur="450" fill="hold" nodeType="afterEffect" grpId="0" presetID="10" presetClass="entr" presetSubtype="0">
+                            <p:stCondLst>
+                              <p:cond delay="520"/>
+                            </p:stCondLst>
+                            <p:childTnLst>
+                              <p:set>
+                                <p:cBhvr>
+                                  <p:cTn id="14" dur="1" fill="hold">
+                                    <p:stCondLst>
+                                      <p:cond delay="0"/>
+                                    </p:stCondLst>
+                                  </p:cTn>
+                                  <p:tgtEl>
+                                    <p:spTgt spid="7"/>
+                                  </p:tgtEl>
+                                  <p:attrNameLst>
+                                    <p:attrName>style.visibility</p:attrName>
+                                  </p:attrNameLst>
+                                </p:cBhvr>
+                                <p:to>
+                                  <p:strVal val="visible"/>
+                                </p:to>
+                              </p:set>
+                              <p:animEffect transition="in" filter="dissolve">
+                                <p:cBhvr>
+                                  <p:cTn id="131" dur="450"/>
+                                  <p:tgtEl>
+                                    <p:spTgt spid="7"/>
+                                  </p:tgtEl>
+                                </p:cBhvr>
+                              </p:animEffect>
+                            </p:childTnLst>
+                          </p:cTn>
+                        </p:par>
+                        <p:par>
+                          <p:cTn id="15" dur="570" fill="hold" nodeType="afterEffect" grpId="0" presetID="25" presetClass="entr" presetSubtype="1">
+                            <p:stCondLst>
+                              <p:cond delay="650"/>
+                            </p:stCondLst>
+                            <p:childTnLst>
+                              <p:set>
+                                <p:cBhvr>
+                                  <p:cTn id="16" dur="1" fill="hold">
+                                    <p:stCondLst>
+                                      <p:cond delay="0"/>
+                                    </p:stCondLst>
+                                  </p:cTn>
+                                  <p:tgtEl>
+                                    <p:spTgt spid="8"/>
+                                  </p:tgtEl>
+                                  <p:attrNameLst>
+                                    <p:attrName>style.visibility</p:attrName>
+                                  </p:attrNameLst>
+                                </p:cBhvr>
+                                <p:to>
+                                  <p:strVal val="visible"/>
+                                </p:to>
+                              </p:set>
+                              <p:animEffect transition="in" filter="strips(downRight)">
+                                <p:cBhvr>
+                                  <p:cTn id="151" dur="570"/>
+                                  <p:tgtEl>
+                                    <p:spTgt spid="8"/>
+                                  </p:tgtEl>
+                                </p:cBhvr>
+                              </p:animEffect>
+                            </p:childTnLst>
+                          </p:cTn>
+                        </p:par>
+                        <p:par>
+                          <p:cTn id="17" dur="690" fill="hold" nodeType="afterEffect" grpId="0" presetID="45" presetClass="entr" presetSubtype="1">
+                            <p:stCondLst>
+                              <p:cond delay="780"/>
+                            </p:stCondLst>
+                            <p:childTnLst>
+                              <p:set>
+                                <p:cBhvr>
+                                  <p:cTn id="18" dur="1" fill="hold">
+                                    <p:stCondLst>
+                                      <p:cond delay="0"/>
+                                    </p:stCondLst>
+                                  </p:cTn>
+                                  <p:tgtEl>
+                                    <p:spTgt spid="9"/>
+                                  </p:tgtEl>
+                                  <p:attrNameLst>
+                                    <p:attrName>style.visibility</p:attrName>
+                                  </p:attrNameLst>
+                                </p:cBhvr>
+                                <p:to>
+                                  <p:strVal val="visible"/>
+                                </p:to>
+                              </p:set>
+                              <p:animEffect transition="in" filter="barn(inHorizontal)">
+                                <p:cBhvr>
+                                  <p:cTn id="171" dur="690"/>
+                                  <p:tgtEl>
+                                    <p:spTgt spid="9"/>
+                                  </p:tgtEl>
+                                </p:cBhvr>
+                              </p:animEffect>
+                            </p:childTnLst>
+                          </p:cTn>
+                        </p:par>
+                        <p:par>
+                          <p:cTn id="19" dur="810" fill="hold" nodeType="afterEffect" grpId="0" presetID="22" presetClass="entr" presetSubtype="8">
+                            <p:stCondLst>
+                              <p:cond delay="910"/>
+                            </p:stCondLst>
+                            <p:childTnLst>
+                              <p:set>
+                                <p:cBhvr>
+                                  <p:cTn id="20" dur="1" fill="hold">
+                                    <p:stCondLst>
+                                      <p:cond delay="0"/>
+                                    </p:stCondLst>
+                                  </p:cTn>
+                                  <p:tgtEl>
+                                    <p:spTgt spid="10"/>
+                                  </p:tgtEl>
+                                  <p:attrNameLst>
+                                    <p:attrName>style.visibility</p:attrName>
+                                  </p:attrNameLst>
+                                </p:cBhvr>
+                                <p:to>
+                                  <p:strVal val="visible"/>
+                                </p:to>
+                              </p:set>
+                              <p:animEffect transition="in" filter="wipe(left)">
+                                <p:cBhvr>
+                                  <p:cTn id="191" dur="810"/>
+                                  <p:tgtEl>
+                                    <p:spTgt spid="10"/>
+                                  </p:tgtEl>
+                                </p:cBhvr>
+                              </p:animEffect>
+                            </p:childTnLst>
+                          </p:cTn>
+                        </p:par>
+                        <p:par>
+                          <p:cTn id="21" dur="450" fill="hold" nodeType="afterEffect" grpId="0" presetID="37" presetClass="entr" presetSubtype="0">
+                            <p:stCondLst>
+                              <p:cond delay="1040"/>
+                            </p:stCondLst>
+                            <p:childTnLst>
+                              <p:set>
+                                <p:cBhvr>
+                                  <p:cTn id="22" dur="1" fill="hold">
+                                    <p:stCondLst>
+                                      <p:cond delay="0"/>
+                                    </p:stCondLst>
+                                  </p:cTn>
+                                  <p:tgtEl>
+                                    <p:spTgt spid="11"/>
+                                  </p:tgtEl>
+                                  <p:attrNameLst>
+                                    <p:attrName>style.visibility</p:attrName>
+                                  </p:attrNameLst>
+                                </p:cBhvr>
+                                <p:to>
+                                  <p:strVal val="visible"/>
+                                </p:to>
+                              </p:set>
+                              <p:animEffect transition="in" filter="wedge">
+                                <p:cBhvr>
+                                  <p:cTn id="211" dur="450"/>
+                                  <p:tgtEl>
+                                    <p:spTgt spid="11"/>
+                                  </p:tgtEl>
+                                </p:cBhvr>
+                              </p:animEffect>
+                            </p:childTnLst>
+                          </p:cTn>
+                        </p:par>
+                        <p:par>
+                          <p:cTn id="23" dur="570" fill="hold" nodeType="afterEffect" grpId="0" presetID="52" presetClass="entr" presetSubtype="0">
+                            <p:stCondLst>
+                              <p:cond delay="1170"/>
+                            </p:stCondLst>
+                            <p:childTnLst>
+                              <p:set>
+                                <p:cBhvr>
+                                  <p:cTn id="24" dur="1" fill="hold">
+                                    <p:stCondLst>
+                                      <p:cond delay="0"/>
+                                    </p:stCondLst>
+                                  </p:cTn>
+                                  <p:tgtEl>
+                                    <p:spTgt spid="12"/>
+                                  </p:tgtEl>
+                                  <p:attrNameLst>
+                                    <p:attrName>style.visibility</p:attrName>
+                                  </p:attrNameLst>
+                                </p:cBhvr>
+                                <p:to>
+                                  <p:strVal val="visible"/>
+                                </p:to>
+                              </p:set>
+                              <p:animEffect transition="in" filter="randombar(horizontal)">
+                                <p:cBhvr>
+                                  <p:cTn id="231" dur="570"/>
+                                  <p:tgtEl>
+                                    <p:spTgt spid="12"/>
+                                  </p:tgtEl>
+                                </p:cBhvr>
+                              </p:animEffect>
+                            </p:childTnLst>
+                          </p:cTn>
+                        </p:par>
+                        <p:par>
+                          <p:cTn id="25" dur="690" fill="hold" nodeType="afterEffect" grpId="0" presetID="21" presetClass="entr" presetSubtype="1">
+                            <p:stCondLst>
+                              <p:cond delay="1300"/>
+                            </p:stCondLst>
+                            <p:childTnLst>
+                              <p:set>
+                                <p:cBhvr>
+                                  <p:cTn id="26" dur="1" fill="hold">
+                                    <p:stCondLst>
+                                      <p:cond delay="0"/>
+                                    </p:stCondLst>
+                                  </p:cTn>
+                                  <p:tgtEl>
+                                    <p:spTgt spid="13"/>
+                                  </p:tgtEl>
+                                  <p:attrNameLst>
+                                    <p:attrName>style.visibility</p:attrName>
+                                  </p:attrNameLst>
+                                </p:cBhvr>
+                                <p:to>
+                                  <p:strVal val="visible"/>
+                                </p:to>
+                              </p:set>
+                              <p:animEffect transition="in" filter="wheel(1)">
+                                <p:cBhvr>
+                                  <p:cTn id="251" dur="690"/>
+                                  <p:tgtEl>
+                                    <p:spTgt spid="13"/>
+                                  </p:tgtEl>
+                                </p:cBhvr>
+                              </p:animEffect>
+                            </p:childTnLst>
+                          </p:cTn>
+                        </p:par>
+                        <p:par>
+                          <p:cTn id="27" dur="810" fill="hold" nodeType="afterEffect" grpId="0" presetID="22" presetClass="entr" presetSubtype="4">
+                            <p:stCondLst>
+                              <p:cond delay="1430"/>
+                            </p:stCondLst>
+                            <p:childTnLst>
+                              <p:set>
+                                <p:cBhvr>
+                                  <p:cTn id="28" dur="1" fill="hold">
+                                    <p:stCondLst>
+                                      <p:cond delay="0"/>
+                                    </p:stCondLst>
+                                  </p:cTn>
+                                  <p:tgtEl>
+                                    <p:spTgt spid="14"/>
+                                  </p:tgtEl>
+                                  <p:attrNameLst>
+                                    <p:attrName>style.visibility</p:attrName>
+                                  </p:attrNameLst>
+                                </p:cBhvr>
+                                <p:to>
+                                  <p:strVal val="visible"/>
+                                </p:to>
+                              </p:set>
+                              <p:animEffect transition="in" filter="wipe(down)">
+                                <p:cBhvr>
+                                  <p:cTn id="271" dur="810"/>
+                                  <p:tgtEl>
+                                    <p:spTgt spid="14"/>
+                                  </p:tgtEl>
+                                </p:cBhvr>
+                              </p:animEffect>
+                            </p:childTnLst>
+                          </p:cTn>
+                        </p:par>
+                        <p:par>
+                          <p:cTn id="29" dur="450" fill="hold" nodeType="afterEffect" grpId="0" presetID="9" presetClass="entr" presetSubtype="0">
+                            <p:stCondLst>
+                              <p:cond delay="1560"/>
+                            </p:stCondLst>
+                            <p:childTnLst>
+                              <p:set>
+                                <p:cBhvr>
+                                  <p:cTn id="30" dur="1" fill="hold">
+                                    <p:stCondLst>
+                                      <p:cond delay="0"/>
+                                    </p:stCondLst>
+                                  </p:cTn>
+                                  <p:tgtEl>
+                                    <p:spTgt spid="15"/>
+                                  </p:tgtEl>
+                                  <p:attrNameLst>
+                                    <p:attrName>style.visibility</p:attrName>
+                                  </p:attrNameLst>
+                                </p:cBhvr>
+                                <p:to>
+                                  <p:strVal val="visible"/>
+                                </p:to>
+                              </p:set>
+                              <p:animEffect transition="in" filter="fade">
+                                <p:cBhvr>
+                                  <p:cTn id="291" dur="450"/>
+                                  <p:tgtEl>
+                                    <p:spTgt spid="15"/>
+                                  </p:tgtEl>
+                                </p:cBhvr>
+                              </p:animEffect>
+                            </p:childTnLst>
+                          </p:cTn>
+                        </p:par>
+                        <p:par>
+                          <p:cTn id="31" dur="570" fill="hold" nodeType="afterEffect" grpId="0" presetID="22" presetClass="entr" presetSubtype="2">
+                            <p:stCondLst>
+                              <p:cond delay="1690"/>
+                            </p:stCondLst>
+                            <p:childTnLst>
+                              <p:set>
+                                <p:cBhvr>
+                                  <p:cTn id="32" dur="1" fill="hold">
+                                    <p:stCondLst>
+                                      <p:cond delay="0"/>
+                                    </p:stCondLst>
+                                  </p:cTn>
+                                  <p:tgtEl>
+                                    <p:spTgt spid="16"/>
+                                  </p:tgtEl>
+                                  <p:attrNameLst>
+                                    <p:attrName>style.visibility</p:attrName>
+                                  </p:attrNameLst>
+                                </p:cBhvr>
+                                <p:to>
+                                  <p:strVal val="visible"/>
+                                </p:to>
+                              </p:set>
+                              <p:animEffect transition="in" filter="wipe(right)">
+                                <p:cBhvr>
+                                  <p:cTn id="311" dur="570"/>
+                                  <p:tgtEl>
+                                    <p:spTgt spid="16"/>
+                                  </p:tgtEl>
+                                </p:cBhvr>
+                              </p:animEffect>
+                            </p:childTnLst>
+                          </p:cTn>
+                        </p:par>
+                      </p:childTnLst>
+                    </p:cTn>
+                  </p:par>
+                </p:childTnLst>
+              </p:cTn>
+              <p:prevCondLst>
+                <p:cond evt="onPrev" delay="0">
+                  <p:tgtEl>
+                    <p:sldTgt/>
+                  </p:tgtEl>
+                </p:cond>
+              </p:prevCondLst>
+              <p:nextCondLst>
+                <p:cond evt="onNext" delay="0">
+                  <p:tgtEl>
+                    <p:sldTgt/>
+                  </p:tgtEl>
+                </p:cond>
+              </p:nextCondLst>
+            </p:seq>
+          </p:childTnLst>
+        </p:cTn>
+      </p:par>
+    </p:tnLst>
+  </p:timing>
 </p:sld>
 </file>
 
@@ -5259,8 +6002,537 @@
     <a:masterClrMapping/>
   </p:clrMapOvr>
   <p:transition spd="med">
-    <p:fade/>
+    <p:push dir="l"/>
   </p:transition>
+  <p:timing>
+    <p:tnLst>
+      <p:par>
+        <p:cTn id="1" dur="indefinite" restart="never" nodeType="tmRoot">
+          <p:childTnLst>
+            <p:seq concurrent="1" nextAc="seek">
+              <p:cTn id="2" dur="indefinite" nodeType="mainSeq">
+                <p:childTnLst>
+                  <p:par>
+                    <p:cTn id="3" fill="hold">
+                      <p:stCondLst>
+                        <p:cond delay="indefinite"/>
+                      </p:stCondLst>
+                      <p:childTnLst>
+                        <p:par>
+                          <p:cTn id="5" dur="570" fill="hold" nodeType="clickEffect" grpId="0" presetID="42" presetClass="entr" presetSubtype="10">
+                            <p:stCondLst>
+                              <p:cond delay="0"/>
+                            </p:stCondLst>
+                            <p:childTnLst>
+                              <p:set>
+                                <p:cBhvr>
+                                  <p:cTn id="6" dur="1" fill="hold">
+                                    <p:stCondLst>
+                                      <p:cond delay="0"/>
+                                    </p:stCondLst>
+                                  </p:cTn>
+                                  <p:tgtEl>
+                                    <p:spTgt spid="3"/>
+                                  </p:tgtEl>
+                                  <p:attrNameLst>
+                                    <p:attrName>style.visibility</p:attrName>
+                                  </p:attrNameLst>
+                                </p:cBhvr>
+                                <p:to>
+                                  <p:strVal val="visible"/>
+                                </p:to>
+                              </p:set>
+                              <p:animEffect transition="in" filter="blinds(horizontal)">
+                                <p:cBhvr>
+                                  <p:cTn id="51" dur="570"/>
+                                  <p:tgtEl>
+                                    <p:spTgt spid="3"/>
+                                  </p:tgtEl>
+                                </p:cBhvr>
+                              </p:animEffect>
+                            </p:childTnLst>
+                          </p:cTn>
+                        </p:par>
+                        <p:par>
+                          <p:cTn id="7" dur="690" fill="hold" nodeType="afterEffect" grpId="0" presetID="43" presetClass="entr" presetSubtype="0">
+                            <p:stCondLst>
+                              <p:cond delay="130"/>
+                            </p:stCondLst>
+                            <p:childTnLst>
+                              <p:set>
+                                <p:cBhvr>
+                                  <p:cTn id="8" dur="1" fill="hold">
+                                    <p:stCondLst>
+                                      <p:cond delay="0"/>
+                                    </p:stCondLst>
+                                  </p:cTn>
+                                  <p:tgtEl>
+                                    <p:spTgt spid="4"/>
+                                  </p:tgtEl>
+                                  <p:attrNameLst>
+                                    <p:attrName>style.visibility</p:attrName>
+                                  </p:attrNameLst>
+                                </p:cBhvr>
+                                <p:to>
+                                  <p:strVal val="visible"/>
+                                </p:to>
+                              </p:set>
+                              <p:animEffect transition="in" filter="checkerboard(across)">
+                                <p:cBhvr>
+                                  <p:cTn id="71" dur="690"/>
+                                  <p:tgtEl>
+                                    <p:spTgt spid="4"/>
+                                  </p:tgtEl>
+                                </p:cBhvr>
+                              </p:animEffect>
+                            </p:childTnLst>
+                          </p:cTn>
+                        </p:par>
+                        <p:par>
+                          <p:cTn id="9" dur="810" fill="hold" nodeType="afterEffect" grpId="0" presetID="21" presetClass="entr" presetSubtype="2">
+                            <p:stCondLst>
+                              <p:cond delay="260"/>
+                            </p:stCondLst>
+                            <p:childTnLst>
+                              <p:set>
+                                <p:cBhvr>
+                                  <p:cTn id="10" dur="1" fill="hold">
+                                    <p:stCondLst>
+                                      <p:cond delay="0"/>
+                                    </p:stCondLst>
+                                  </p:cTn>
+                                  <p:tgtEl>
+                                    <p:spTgt spid="5"/>
+                                  </p:tgtEl>
+                                  <p:attrNameLst>
+                                    <p:attrName>style.visibility</p:attrName>
+                                  </p:attrNameLst>
+                                </p:cBhvr>
+                                <p:to>
+                                  <p:strVal val="visible"/>
+                                </p:to>
+                              </p:set>
+                              <p:animEffect transition="in" filter="wheel(2)">
+                                <p:cBhvr>
+                                  <p:cTn id="91" dur="810"/>
+                                  <p:tgtEl>
+                                    <p:spTgt spid="5"/>
+                                  </p:tgtEl>
+                                </p:cBhvr>
+                              </p:animEffect>
+                            </p:childTnLst>
+                          </p:cTn>
+                        </p:par>
+                        <p:par>
+                          <p:cTn id="11" dur="450" fill="hold" nodeType="afterEffect" grpId="0" presetID="10" presetClass="entr" presetSubtype="0">
+                            <p:stCondLst>
+                              <p:cond delay="390"/>
+                            </p:stCondLst>
+                            <p:childTnLst>
+                              <p:set>
+                                <p:cBhvr>
+                                  <p:cTn id="12" dur="1" fill="hold">
+                                    <p:stCondLst>
+                                      <p:cond delay="0"/>
+                                    </p:stCondLst>
+                                  </p:cTn>
+                                  <p:tgtEl>
+                                    <p:spTgt spid="6"/>
+                                  </p:tgtEl>
+                                  <p:attrNameLst>
+                                    <p:attrName>style.visibility</p:attrName>
+                                  </p:attrNameLst>
+                                </p:cBhvr>
+                                <p:to>
+                                  <p:strVal val="visible"/>
+                                </p:to>
+                              </p:set>
+                              <p:animEffect transition="in" filter="dissolve">
+                                <p:cBhvr>
+                                  <p:cTn id="111" dur="450"/>
+                                  <p:tgtEl>
+                                    <p:spTgt spid="6"/>
+                                  </p:tgtEl>
+                                </p:cBhvr>
+                              </p:animEffect>
+                            </p:childTnLst>
+                          </p:cTn>
+                        </p:par>
+                        <p:par>
+                          <p:cTn id="13" dur="570" fill="hold" nodeType="afterEffect" grpId="0" presetID="25" presetClass="entr" presetSubtype="1">
+                            <p:stCondLst>
+                              <p:cond delay="520"/>
+                            </p:stCondLst>
+                            <p:childTnLst>
+                              <p:set>
+                                <p:cBhvr>
+                                  <p:cTn id="14" dur="1" fill="hold">
+                                    <p:stCondLst>
+                                      <p:cond delay="0"/>
+                                    </p:stCondLst>
+                                  </p:cTn>
+                                  <p:tgtEl>
+                                    <p:spTgt spid="8"/>
+                                  </p:tgtEl>
+                                  <p:attrNameLst>
+                                    <p:attrName>style.visibility</p:attrName>
+                                  </p:attrNameLst>
+                                </p:cBhvr>
+                                <p:to>
+                                  <p:strVal val="visible"/>
+                                </p:to>
+                              </p:set>
+                              <p:animEffect transition="in" filter="strips(downRight)">
+                                <p:cBhvr>
+                                  <p:cTn id="131" dur="570"/>
+                                  <p:tgtEl>
+                                    <p:spTgt spid="8"/>
+                                  </p:tgtEl>
+                                </p:cBhvr>
+                              </p:animEffect>
+                            </p:childTnLst>
+                          </p:cTn>
+                        </p:par>
+                        <p:par>
+                          <p:cTn id="15" dur="690" fill="hold" nodeType="afterEffect" grpId="0" presetID="45" presetClass="entr" presetSubtype="1">
+                            <p:stCondLst>
+                              <p:cond delay="650"/>
+                            </p:stCondLst>
+                            <p:childTnLst>
+                              <p:set>
+                                <p:cBhvr>
+                                  <p:cTn id="16" dur="1" fill="hold">
+                                    <p:stCondLst>
+                                      <p:cond delay="0"/>
+                                    </p:stCondLst>
+                                  </p:cTn>
+                                  <p:tgtEl>
+                                    <p:spTgt spid="10"/>
+                                  </p:tgtEl>
+                                  <p:attrNameLst>
+                                    <p:attrName>style.visibility</p:attrName>
+                                  </p:attrNameLst>
+                                </p:cBhvr>
+                                <p:to>
+                                  <p:strVal val="visible"/>
+                                </p:to>
+                              </p:set>
+                              <p:animEffect transition="in" filter="barn(inHorizontal)">
+                                <p:cBhvr>
+                                  <p:cTn id="151" dur="690"/>
+                                  <p:tgtEl>
+                                    <p:spTgt spid="10"/>
+                                  </p:tgtEl>
+                                </p:cBhvr>
+                              </p:animEffect>
+                            </p:childTnLst>
+                          </p:cTn>
+                        </p:par>
+                        <p:par>
+                          <p:cTn id="17" dur="810" fill="hold" nodeType="afterEffect" grpId="0" presetID="22" presetClass="entr" presetSubtype="8">
+                            <p:stCondLst>
+                              <p:cond delay="780"/>
+                            </p:stCondLst>
+                            <p:childTnLst>
+                              <p:set>
+                                <p:cBhvr>
+                                  <p:cTn id="18" dur="1" fill="hold">
+                                    <p:stCondLst>
+                                      <p:cond delay="0"/>
+                                    </p:stCondLst>
+                                  </p:cTn>
+                                  <p:tgtEl>
+                                    <p:spTgt spid="7"/>
+                                  </p:tgtEl>
+                                  <p:attrNameLst>
+                                    <p:attrName>style.visibility</p:attrName>
+                                  </p:attrNameLst>
+                                </p:cBhvr>
+                                <p:to>
+                                  <p:strVal val="visible"/>
+                                </p:to>
+                              </p:set>
+                              <p:animEffect transition="in" filter="wipe(left)">
+                                <p:cBhvr>
+                                  <p:cTn id="171" dur="810"/>
+                                  <p:tgtEl>
+                                    <p:spTgt spid="7"/>
+                                  </p:tgtEl>
+                                </p:cBhvr>
+                              </p:animEffect>
+                            </p:childTnLst>
+                          </p:cTn>
+                        </p:par>
+                        <p:par>
+                          <p:cTn id="19" dur="450" fill="hold" nodeType="afterEffect" grpId="0" presetID="37" presetClass="entr" presetSubtype="0">
+                            <p:stCondLst>
+                              <p:cond delay="910"/>
+                            </p:stCondLst>
+                            <p:childTnLst>
+                              <p:set>
+                                <p:cBhvr>
+                                  <p:cTn id="20" dur="1" fill="hold">
+                                    <p:stCondLst>
+                                      <p:cond delay="0"/>
+                                    </p:stCondLst>
+                                  </p:cTn>
+                                  <p:tgtEl>
+                                    <p:spTgt spid="9"/>
+                                  </p:tgtEl>
+                                  <p:attrNameLst>
+                                    <p:attrName>style.visibility</p:attrName>
+                                  </p:attrNameLst>
+                                </p:cBhvr>
+                                <p:to>
+                                  <p:strVal val="visible"/>
+                                </p:to>
+                              </p:set>
+                              <p:animEffect transition="in" filter="wedge">
+                                <p:cBhvr>
+                                  <p:cTn id="191" dur="450"/>
+                                  <p:tgtEl>
+                                    <p:spTgt spid="9"/>
+                                  </p:tgtEl>
+                                </p:cBhvr>
+                              </p:animEffect>
+                            </p:childTnLst>
+                          </p:cTn>
+                        </p:par>
+                        <p:par>
+                          <p:cTn id="21" dur="570" fill="hold" nodeType="afterEffect" grpId="0" presetID="52" presetClass="entr" presetSubtype="0">
+                            <p:stCondLst>
+                              <p:cond delay="1040"/>
+                            </p:stCondLst>
+                            <p:childTnLst>
+                              <p:set>
+                                <p:cBhvr>
+                                  <p:cTn id="22" dur="1" fill="hold">
+                                    <p:stCondLst>
+                                      <p:cond delay="0"/>
+                                    </p:stCondLst>
+                                  </p:cTn>
+                                  <p:tgtEl>
+                                    <p:spTgt spid="11"/>
+                                  </p:tgtEl>
+                                  <p:attrNameLst>
+                                    <p:attrName>style.visibility</p:attrName>
+                                  </p:attrNameLst>
+                                </p:cBhvr>
+                                <p:to>
+                                  <p:strVal val="visible"/>
+                                </p:to>
+                              </p:set>
+                              <p:animEffect transition="in" filter="randombar(horizontal)">
+                                <p:cBhvr>
+                                  <p:cTn id="211" dur="570"/>
+                                  <p:tgtEl>
+                                    <p:spTgt spid="11"/>
+                                  </p:tgtEl>
+                                </p:cBhvr>
+                              </p:animEffect>
+                            </p:childTnLst>
+                          </p:cTn>
+                        </p:par>
+                        <p:par>
+                          <p:cTn id="23" dur="690" fill="hold" nodeType="afterEffect" grpId="0" presetID="21" presetClass="entr" presetSubtype="1">
+                            <p:stCondLst>
+                              <p:cond delay="1170"/>
+                            </p:stCondLst>
+                            <p:childTnLst>
+                              <p:set>
+                                <p:cBhvr>
+                                  <p:cTn id="24" dur="1" fill="hold">
+                                    <p:stCondLst>
+                                      <p:cond delay="0"/>
+                                    </p:stCondLst>
+                                  </p:cTn>
+                                  <p:tgtEl>
+                                    <p:spTgt spid="12"/>
+                                  </p:tgtEl>
+                                  <p:attrNameLst>
+                                    <p:attrName>style.visibility</p:attrName>
+                                  </p:attrNameLst>
+                                </p:cBhvr>
+                                <p:to>
+                                  <p:strVal val="visible"/>
+                                </p:to>
+                              </p:set>
+                              <p:animEffect transition="in" filter="wheel(1)">
+                                <p:cBhvr>
+                                  <p:cTn id="231" dur="690"/>
+                                  <p:tgtEl>
+                                    <p:spTgt spid="12"/>
+                                  </p:tgtEl>
+                                </p:cBhvr>
+                              </p:animEffect>
+                            </p:childTnLst>
+                          </p:cTn>
+                        </p:par>
+                        <p:par>
+                          <p:cTn id="25" dur="810" fill="hold" nodeType="afterEffect" grpId="0" presetID="22" presetClass="entr" presetSubtype="4">
+                            <p:stCondLst>
+                              <p:cond delay="1300"/>
+                            </p:stCondLst>
+                            <p:childTnLst>
+                              <p:set>
+                                <p:cBhvr>
+                                  <p:cTn id="26" dur="1" fill="hold">
+                                    <p:stCondLst>
+                                      <p:cond delay="0"/>
+                                    </p:stCondLst>
+                                  </p:cTn>
+                                  <p:tgtEl>
+                                    <p:spTgt spid="14"/>
+                                  </p:tgtEl>
+                                  <p:attrNameLst>
+                                    <p:attrName>style.visibility</p:attrName>
+                                  </p:attrNameLst>
+                                </p:cBhvr>
+                                <p:to>
+                                  <p:strVal val="visible"/>
+                                </p:to>
+                              </p:set>
+                              <p:animEffect transition="in" filter="wipe(down)">
+                                <p:cBhvr>
+                                  <p:cTn id="251" dur="810"/>
+                                  <p:tgtEl>
+                                    <p:spTgt spid="14"/>
+                                  </p:tgtEl>
+                                </p:cBhvr>
+                              </p:animEffect>
+                            </p:childTnLst>
+                          </p:cTn>
+                        </p:par>
+                        <p:par>
+                          <p:cTn id="27" dur="450" fill="hold" nodeType="afterEffect" grpId="0" presetID="9" presetClass="entr" presetSubtype="0">
+                            <p:stCondLst>
+                              <p:cond delay="1430"/>
+                            </p:stCondLst>
+                            <p:childTnLst>
+                              <p:set>
+                                <p:cBhvr>
+                                  <p:cTn id="28" dur="1" fill="hold">
+                                    <p:stCondLst>
+                                      <p:cond delay="0"/>
+                                    </p:stCondLst>
+                                  </p:cTn>
+                                  <p:tgtEl>
+                                    <p:spTgt spid="16"/>
+                                  </p:tgtEl>
+                                  <p:attrNameLst>
+                                    <p:attrName>style.visibility</p:attrName>
+                                  </p:attrNameLst>
+                                </p:cBhvr>
+                                <p:to>
+                                  <p:strVal val="visible"/>
+                                </p:to>
+                              </p:set>
+                              <p:animEffect transition="in" filter="fade">
+                                <p:cBhvr>
+                                  <p:cTn id="271" dur="450"/>
+                                  <p:tgtEl>
+                                    <p:spTgt spid="16"/>
+                                  </p:tgtEl>
+                                </p:cBhvr>
+                              </p:animEffect>
+                            </p:childTnLst>
+                          </p:cTn>
+                        </p:par>
+                        <p:par>
+                          <p:cTn id="29" dur="570" fill="hold" nodeType="afterEffect" grpId="0" presetID="22" presetClass="entr" presetSubtype="2">
+                            <p:stCondLst>
+                              <p:cond delay="1560"/>
+                            </p:stCondLst>
+                            <p:childTnLst>
+                              <p:set>
+                                <p:cBhvr>
+                                  <p:cTn id="30" dur="1" fill="hold">
+                                    <p:stCondLst>
+                                      <p:cond delay="0"/>
+                                    </p:stCondLst>
+                                  </p:cTn>
+                                  <p:tgtEl>
+                                    <p:spTgt spid="13"/>
+                                  </p:tgtEl>
+                                  <p:attrNameLst>
+                                    <p:attrName>style.visibility</p:attrName>
+                                  </p:attrNameLst>
+                                </p:cBhvr>
+                                <p:to>
+                                  <p:strVal val="visible"/>
+                                </p:to>
+                              </p:set>
+                              <p:animEffect transition="in" filter="wipe(right)">
+                                <p:cBhvr>
+                                  <p:cTn id="291" dur="570"/>
+                                  <p:tgtEl>
+                                    <p:spTgt spid="13"/>
+                                  </p:tgtEl>
+                                </p:cBhvr>
+                              </p:animEffect>
+                            </p:childTnLst>
+                          </p:cTn>
+                        </p:par>
+                        <p:par>
+                          <p:cTn id="31" dur="690" fill="hold" nodeType="afterEffect" grpId="0" presetID="18" presetClass="entr" presetSubtype="12">
+                            <p:stCondLst>
+                              <p:cond delay="1690"/>
+                            </p:stCondLst>
+                            <p:childTnLst>
+                              <p:set>
+                                <p:cBhvr>
+                                  <p:cTn id="32" dur="1" fill="hold">
+                                    <p:stCondLst>
+                                      <p:cond delay="0"/>
+                                    </p:stCondLst>
+                                  </p:cTn>
+                                  <p:tgtEl>
+                                    <p:spTgt spid="15"/>
+                                  </p:tgtEl>
+                                  <p:attrNameLst>
+                                    <p:attrName>style.visibility</p:attrName>
+                                  </p:attrNameLst>
+                                </p:cBhvr>
+                                <p:to>
+                                  <p:strVal val="visible"/>
+                                </p:to>
+                              </p:set>
+                              <p:animEffect transition="in" filter="circle(in)">
+                                <p:cBhvr>
+                                  <p:cTn id="311" dur="690"/>
+                                  <p:tgtEl>
+                                    <p:spTgt spid="15"/>
+                                  </p:tgtEl>
+                                </p:cBhvr>
+                              </p:animEffect>
+                            </p:childTnLst>
+                          </p:cTn>
+                        </p:par>
+                      </p:childTnLst>
+                    </p:cTn>
+                  </p:par>
+                </p:childTnLst>
+              </p:cTn>
+              <p:prevCondLst>
+                <p:cond evt="onPrev" delay="0">
+                  <p:tgtEl>
+                    <p:sldTgt/>
+                  </p:tgtEl>
+                </p:cond>
+              </p:prevCondLst>
+              <p:nextCondLst>
+                <p:cond evt="onNext" delay="0">
+                  <p:tgtEl>
+                    <p:sldTgt/>
+                  </p:tgtEl>
+                </p:cond>
+              </p:nextCondLst>
+            </p:seq>
+          </p:childTnLst>
+        </p:cTn>
+      </p:par>
+    </p:tnLst>
+  </p:timing>
 </p:sld>
 </file>
 
@@ -5632,8 +6904,292 @@
     <a:masterClrMapping/>
   </p:clrMapOvr>
   <p:transition spd="med">
-    <p:fade/>
+    <p:wipe dir="u"/>
   </p:transition>
+  <p:timing>
+    <p:tnLst>
+      <p:par>
+        <p:cTn id="1" dur="indefinite" restart="never" nodeType="tmRoot">
+          <p:childTnLst>
+            <p:seq concurrent="1" nextAc="seek">
+              <p:cTn id="2" dur="indefinite" nodeType="mainSeq">
+                <p:childTnLst>
+                  <p:par>
+                    <p:cTn id="3" fill="hold">
+                      <p:stCondLst>
+                        <p:cond delay="indefinite"/>
+                      </p:stCondLst>
+                      <p:childTnLst>
+                        <p:par>
+                          <p:cTn id="5" dur="690" fill="hold" nodeType="clickEffect" grpId="0" presetID="43" presetClass="entr" presetSubtype="0">
+                            <p:stCondLst>
+                              <p:cond delay="0"/>
+                            </p:stCondLst>
+                            <p:childTnLst>
+                              <p:set>
+                                <p:cBhvr>
+                                  <p:cTn id="6" dur="1" fill="hold">
+                                    <p:stCondLst>
+                                      <p:cond delay="0"/>
+                                    </p:stCondLst>
+                                  </p:cTn>
+                                  <p:tgtEl>
+                                    <p:spTgt spid="3"/>
+                                  </p:tgtEl>
+                                  <p:attrNameLst>
+                                    <p:attrName>style.visibility</p:attrName>
+                                  </p:attrNameLst>
+                                </p:cBhvr>
+                                <p:to>
+                                  <p:strVal val="visible"/>
+                                </p:to>
+                              </p:set>
+                              <p:animEffect transition="in" filter="checkerboard(across)">
+                                <p:cBhvr>
+                                  <p:cTn id="51" dur="690"/>
+                                  <p:tgtEl>
+                                    <p:spTgt spid="3"/>
+                                  </p:tgtEl>
+                                </p:cBhvr>
+                              </p:animEffect>
+                            </p:childTnLst>
+                          </p:cTn>
+                        </p:par>
+                        <p:par>
+                          <p:cTn id="7" dur="810" fill="hold" nodeType="afterEffect" grpId="0" presetID="21" presetClass="entr" presetSubtype="2">
+                            <p:stCondLst>
+                              <p:cond delay="130"/>
+                            </p:stCondLst>
+                            <p:childTnLst>
+                              <p:set>
+                                <p:cBhvr>
+                                  <p:cTn id="8" dur="1" fill="hold">
+                                    <p:stCondLst>
+                                      <p:cond delay="0"/>
+                                    </p:stCondLst>
+                                  </p:cTn>
+                                  <p:tgtEl>
+                                    <p:spTgt spid="4"/>
+                                  </p:tgtEl>
+                                  <p:attrNameLst>
+                                    <p:attrName>style.visibility</p:attrName>
+                                  </p:attrNameLst>
+                                </p:cBhvr>
+                                <p:to>
+                                  <p:strVal val="visible"/>
+                                </p:to>
+                              </p:set>
+                              <p:animEffect transition="in" filter="wheel(2)">
+                                <p:cBhvr>
+                                  <p:cTn id="71" dur="810"/>
+                                  <p:tgtEl>
+                                    <p:spTgt spid="4"/>
+                                  </p:tgtEl>
+                                </p:cBhvr>
+                              </p:animEffect>
+                            </p:childTnLst>
+                          </p:cTn>
+                        </p:par>
+                        <p:par>
+                          <p:cTn id="9" dur="450" fill="hold" nodeType="afterEffect" grpId="0" presetID="10" presetClass="entr" presetSubtype="0">
+                            <p:stCondLst>
+                              <p:cond delay="260"/>
+                            </p:stCondLst>
+                            <p:childTnLst>
+                              <p:set>
+                                <p:cBhvr>
+                                  <p:cTn id="10" dur="1" fill="hold">
+                                    <p:stCondLst>
+                                      <p:cond delay="0"/>
+                                    </p:stCondLst>
+                                  </p:cTn>
+                                  <p:tgtEl>
+                                    <p:spTgt spid="5"/>
+                                  </p:tgtEl>
+                                  <p:attrNameLst>
+                                    <p:attrName>style.visibility</p:attrName>
+                                  </p:attrNameLst>
+                                </p:cBhvr>
+                                <p:to>
+                                  <p:strVal val="visible"/>
+                                </p:to>
+                              </p:set>
+                              <p:animEffect transition="in" filter="dissolve">
+                                <p:cBhvr>
+                                  <p:cTn id="91" dur="450"/>
+                                  <p:tgtEl>
+                                    <p:spTgt spid="5"/>
+                                  </p:tgtEl>
+                                </p:cBhvr>
+                              </p:animEffect>
+                            </p:childTnLst>
+                          </p:cTn>
+                        </p:par>
+                        <p:par>
+                          <p:cTn id="11" dur="570" fill="hold" nodeType="afterEffect" grpId="0" presetID="25" presetClass="entr" presetSubtype="1">
+                            <p:stCondLst>
+                              <p:cond delay="390"/>
+                            </p:stCondLst>
+                            <p:childTnLst>
+                              <p:set>
+                                <p:cBhvr>
+                                  <p:cTn id="12" dur="1" fill="hold">
+                                    <p:stCondLst>
+                                      <p:cond delay="0"/>
+                                    </p:stCondLst>
+                                  </p:cTn>
+                                  <p:tgtEl>
+                                    <p:spTgt spid="6"/>
+                                  </p:tgtEl>
+                                  <p:attrNameLst>
+                                    <p:attrName>style.visibility</p:attrName>
+                                  </p:attrNameLst>
+                                </p:cBhvr>
+                                <p:to>
+                                  <p:strVal val="visible"/>
+                                </p:to>
+                              </p:set>
+                              <p:animEffect transition="in" filter="strips(downRight)">
+                                <p:cBhvr>
+                                  <p:cTn id="111" dur="570"/>
+                                  <p:tgtEl>
+                                    <p:spTgt spid="6"/>
+                                  </p:tgtEl>
+                                </p:cBhvr>
+                              </p:animEffect>
+                            </p:childTnLst>
+                          </p:cTn>
+                        </p:par>
+                        <p:par>
+                          <p:cTn id="13" dur="690" fill="hold" nodeType="afterEffect" grpId="0" presetID="45" presetClass="entr" presetSubtype="1">
+                            <p:stCondLst>
+                              <p:cond delay="520"/>
+                            </p:stCondLst>
+                            <p:childTnLst>
+                              <p:set>
+                                <p:cBhvr>
+                                  <p:cTn id="14" dur="1" fill="hold">
+                                    <p:stCondLst>
+                                      <p:cond delay="0"/>
+                                    </p:stCondLst>
+                                  </p:cTn>
+                                  <p:tgtEl>
+                                    <p:spTgt spid="7"/>
+                                  </p:tgtEl>
+                                  <p:attrNameLst>
+                                    <p:attrName>style.visibility</p:attrName>
+                                  </p:attrNameLst>
+                                </p:cBhvr>
+                                <p:to>
+                                  <p:strVal val="visible"/>
+                                </p:to>
+                              </p:set>
+                              <p:animEffect transition="in" filter="barn(inHorizontal)">
+                                <p:cBhvr>
+                                  <p:cTn id="131" dur="690"/>
+                                  <p:tgtEl>
+                                    <p:spTgt spid="7"/>
+                                  </p:tgtEl>
+                                </p:cBhvr>
+                              </p:animEffect>
+                            </p:childTnLst>
+                          </p:cTn>
+                        </p:par>
+                        <p:par>
+                          <p:cTn id="15" dur="810" fill="hold" nodeType="afterEffect" grpId="0" presetID="22" presetClass="entr" presetSubtype="8">
+                            <p:stCondLst>
+                              <p:cond delay="650"/>
+                            </p:stCondLst>
+                            <p:childTnLst>
+                              <p:set>
+                                <p:cBhvr>
+                                  <p:cTn id="16" dur="1" fill="hold">
+                                    <p:stCondLst>
+                                      <p:cond delay="0"/>
+                                    </p:stCondLst>
+                                  </p:cTn>
+                                  <p:tgtEl>
+                                    <p:spTgt spid="8"/>
+                                  </p:tgtEl>
+                                  <p:attrNameLst>
+                                    <p:attrName>style.visibility</p:attrName>
+                                  </p:attrNameLst>
+                                </p:cBhvr>
+                                <p:to>
+                                  <p:strVal val="visible"/>
+                                </p:to>
+                              </p:set>
+                              <p:animEffect transition="in" filter="wipe(left)">
+                                <p:cBhvr>
+                                  <p:cTn id="151" dur="810"/>
+                                  <p:tgtEl>
+                                    <p:spTgt spid="8"/>
+                                  </p:tgtEl>
+                                </p:cBhvr>
+                              </p:animEffect>
+                            </p:childTnLst>
+                          </p:cTn>
+                        </p:par>
+                        <p:par>
+                          <p:cTn id="17" dur="450" fill="hold" nodeType="afterEffect" grpId="0" presetID="37" presetClass="entr" presetSubtype="0">
+                            <p:stCondLst>
+                              <p:cond delay="780"/>
+                            </p:stCondLst>
+                            <p:childTnLst>
+                              <p:set>
+                                <p:cBhvr>
+                                  <p:cTn id="18" dur="1" fill="hold">
+                                    <p:stCondLst>
+                                      <p:cond delay="0"/>
+                                    </p:stCondLst>
+                                  </p:cTn>
+                                  <p:tgtEl>
+                                    <p:spTgt spid="9"/>
+                                  </p:tgtEl>
+                                  <p:attrNameLst>
+                                    <p:attrName>style.visibility</p:attrName>
+                                  </p:attrNameLst>
+                                </p:cBhvr>
+                                <p:to>
+                                  <p:strVal val="visible"/>
+                                </p:to>
+                              </p:set>
+                              <p:animEffect transition="in" filter="wedge">
+                                <p:cBhvr>
+                                  <p:cTn id="171" dur="450"/>
+                                  <p:tgtEl>
+                                    <p:spTgt spid="9"/>
+                                  </p:tgtEl>
+                                </p:cBhvr>
+                              </p:animEffect>
+                            </p:childTnLst>
+                          </p:cTn>
+                        </p:par>
+                      </p:childTnLst>
+                    </p:cTn>
+                  </p:par>
+                </p:childTnLst>
+              </p:cTn>
+              <p:prevCondLst>
+                <p:cond evt="onPrev" delay="0">
+                  <p:tgtEl>
+                    <p:sldTgt/>
+                  </p:tgtEl>
+                </p:cond>
+              </p:prevCondLst>
+              <p:nextCondLst>
+                <p:cond evt="onNext" delay="0">
+                  <p:tgtEl>
+                    <p:sldTgt/>
+                  </p:tgtEl>
+                </p:cond>
+              </p:nextCondLst>
+            </p:seq>
+          </p:childTnLst>
+        </p:cTn>
+      </p:par>
+    </p:tnLst>
+  </p:timing>
 </p:sld>
 </file>
 
@@ -6005,8 +7561,292 @@
     <a:masterClrMapping/>
   </p:clrMapOvr>
   <p:transition spd="med">
-    <p:fade/>
+    <p:split orient="horz"/>
   </p:transition>
+  <p:timing>
+    <p:tnLst>
+      <p:par>
+        <p:cTn id="1" dur="indefinite" restart="never" nodeType="tmRoot">
+          <p:childTnLst>
+            <p:seq concurrent="1" nextAc="seek">
+              <p:cTn id="2" dur="indefinite" nodeType="mainSeq">
+                <p:childTnLst>
+                  <p:par>
+                    <p:cTn id="3" fill="hold">
+                      <p:stCondLst>
+                        <p:cond delay="indefinite"/>
+                      </p:stCondLst>
+                      <p:childTnLst>
+                        <p:par>
+                          <p:cTn id="5" dur="810" fill="hold" nodeType="clickEffect" grpId="0" presetID="21" presetClass="entr" presetSubtype="2">
+                            <p:stCondLst>
+                              <p:cond delay="0"/>
+                            </p:stCondLst>
+                            <p:childTnLst>
+                              <p:set>
+                                <p:cBhvr>
+                                  <p:cTn id="6" dur="1" fill="hold">
+                                    <p:stCondLst>
+                                      <p:cond delay="0"/>
+                                    </p:stCondLst>
+                                  </p:cTn>
+                                  <p:tgtEl>
+                                    <p:spTgt spid="3"/>
+                                  </p:tgtEl>
+                                  <p:attrNameLst>
+                                    <p:attrName>style.visibility</p:attrName>
+                                  </p:attrNameLst>
+                                </p:cBhvr>
+                                <p:to>
+                                  <p:strVal val="visible"/>
+                                </p:to>
+                              </p:set>
+                              <p:animEffect transition="in" filter="wheel(2)">
+                                <p:cBhvr>
+                                  <p:cTn id="51" dur="810"/>
+                                  <p:tgtEl>
+                                    <p:spTgt spid="3"/>
+                                  </p:tgtEl>
+                                </p:cBhvr>
+                              </p:animEffect>
+                            </p:childTnLst>
+                          </p:cTn>
+                        </p:par>
+                        <p:par>
+                          <p:cTn id="7" dur="450" fill="hold" nodeType="afterEffect" grpId="0" presetID="10" presetClass="entr" presetSubtype="0">
+                            <p:stCondLst>
+                              <p:cond delay="130"/>
+                            </p:stCondLst>
+                            <p:childTnLst>
+                              <p:set>
+                                <p:cBhvr>
+                                  <p:cTn id="8" dur="1" fill="hold">
+                                    <p:stCondLst>
+                                      <p:cond delay="0"/>
+                                    </p:stCondLst>
+                                  </p:cTn>
+                                  <p:tgtEl>
+                                    <p:spTgt spid="4"/>
+                                  </p:tgtEl>
+                                  <p:attrNameLst>
+                                    <p:attrName>style.visibility</p:attrName>
+                                  </p:attrNameLst>
+                                </p:cBhvr>
+                                <p:to>
+                                  <p:strVal val="visible"/>
+                                </p:to>
+                              </p:set>
+                              <p:animEffect transition="in" filter="dissolve">
+                                <p:cBhvr>
+                                  <p:cTn id="71" dur="450"/>
+                                  <p:tgtEl>
+                                    <p:spTgt spid="4"/>
+                                  </p:tgtEl>
+                                </p:cBhvr>
+                              </p:animEffect>
+                            </p:childTnLst>
+                          </p:cTn>
+                        </p:par>
+                        <p:par>
+                          <p:cTn id="9" dur="570" fill="hold" nodeType="afterEffect" grpId="0" presetID="25" presetClass="entr" presetSubtype="1">
+                            <p:stCondLst>
+                              <p:cond delay="260"/>
+                            </p:stCondLst>
+                            <p:childTnLst>
+                              <p:set>
+                                <p:cBhvr>
+                                  <p:cTn id="10" dur="1" fill="hold">
+                                    <p:stCondLst>
+                                      <p:cond delay="0"/>
+                                    </p:stCondLst>
+                                  </p:cTn>
+                                  <p:tgtEl>
+                                    <p:spTgt spid="5"/>
+                                  </p:tgtEl>
+                                  <p:attrNameLst>
+                                    <p:attrName>style.visibility</p:attrName>
+                                  </p:attrNameLst>
+                                </p:cBhvr>
+                                <p:to>
+                                  <p:strVal val="visible"/>
+                                </p:to>
+                              </p:set>
+                              <p:animEffect transition="in" filter="strips(downRight)">
+                                <p:cBhvr>
+                                  <p:cTn id="91" dur="570"/>
+                                  <p:tgtEl>
+                                    <p:spTgt spid="5"/>
+                                  </p:tgtEl>
+                                </p:cBhvr>
+                              </p:animEffect>
+                            </p:childTnLst>
+                          </p:cTn>
+                        </p:par>
+                        <p:par>
+                          <p:cTn id="11" dur="690" fill="hold" nodeType="afterEffect" grpId="0" presetID="45" presetClass="entr" presetSubtype="1">
+                            <p:stCondLst>
+                              <p:cond delay="390"/>
+                            </p:stCondLst>
+                            <p:childTnLst>
+                              <p:set>
+                                <p:cBhvr>
+                                  <p:cTn id="12" dur="1" fill="hold">
+                                    <p:stCondLst>
+                                      <p:cond delay="0"/>
+                                    </p:stCondLst>
+                                  </p:cTn>
+                                  <p:tgtEl>
+                                    <p:spTgt spid="6"/>
+                                  </p:tgtEl>
+                                  <p:attrNameLst>
+                                    <p:attrName>style.visibility</p:attrName>
+                                  </p:attrNameLst>
+                                </p:cBhvr>
+                                <p:to>
+                                  <p:strVal val="visible"/>
+                                </p:to>
+                              </p:set>
+                              <p:animEffect transition="in" filter="barn(inHorizontal)">
+                                <p:cBhvr>
+                                  <p:cTn id="111" dur="690"/>
+                                  <p:tgtEl>
+                                    <p:spTgt spid="6"/>
+                                  </p:tgtEl>
+                                </p:cBhvr>
+                              </p:animEffect>
+                            </p:childTnLst>
+                          </p:cTn>
+                        </p:par>
+                        <p:par>
+                          <p:cTn id="13" dur="810" fill="hold" nodeType="afterEffect" grpId="0" presetID="22" presetClass="entr" presetSubtype="8">
+                            <p:stCondLst>
+                              <p:cond delay="520"/>
+                            </p:stCondLst>
+                            <p:childTnLst>
+                              <p:set>
+                                <p:cBhvr>
+                                  <p:cTn id="14" dur="1" fill="hold">
+                                    <p:stCondLst>
+                                      <p:cond delay="0"/>
+                                    </p:stCondLst>
+                                  </p:cTn>
+                                  <p:tgtEl>
+                                    <p:spTgt spid="7"/>
+                                  </p:tgtEl>
+                                  <p:attrNameLst>
+                                    <p:attrName>style.visibility</p:attrName>
+                                  </p:attrNameLst>
+                                </p:cBhvr>
+                                <p:to>
+                                  <p:strVal val="visible"/>
+                                </p:to>
+                              </p:set>
+                              <p:animEffect transition="in" filter="wipe(left)">
+                                <p:cBhvr>
+                                  <p:cTn id="131" dur="810"/>
+                                  <p:tgtEl>
+                                    <p:spTgt spid="7"/>
+                                  </p:tgtEl>
+                                </p:cBhvr>
+                              </p:animEffect>
+                            </p:childTnLst>
+                          </p:cTn>
+                        </p:par>
+                        <p:par>
+                          <p:cTn id="15" dur="450" fill="hold" nodeType="afterEffect" grpId="0" presetID="37" presetClass="entr" presetSubtype="0">
+                            <p:stCondLst>
+                              <p:cond delay="650"/>
+                            </p:stCondLst>
+                            <p:childTnLst>
+                              <p:set>
+                                <p:cBhvr>
+                                  <p:cTn id="16" dur="1" fill="hold">
+                                    <p:stCondLst>
+                                      <p:cond delay="0"/>
+                                    </p:stCondLst>
+                                  </p:cTn>
+                                  <p:tgtEl>
+                                    <p:spTgt spid="8"/>
+                                  </p:tgtEl>
+                                  <p:attrNameLst>
+                                    <p:attrName>style.visibility</p:attrName>
+                                  </p:attrNameLst>
+                                </p:cBhvr>
+                                <p:to>
+                                  <p:strVal val="visible"/>
+                                </p:to>
+                              </p:set>
+                              <p:animEffect transition="in" filter="wedge">
+                                <p:cBhvr>
+                                  <p:cTn id="151" dur="450"/>
+                                  <p:tgtEl>
+                                    <p:spTgt spid="8"/>
+                                  </p:tgtEl>
+                                </p:cBhvr>
+                              </p:animEffect>
+                            </p:childTnLst>
+                          </p:cTn>
+                        </p:par>
+                        <p:par>
+                          <p:cTn id="17" dur="570" fill="hold" nodeType="afterEffect" grpId="0" presetID="52" presetClass="entr" presetSubtype="0">
+                            <p:stCondLst>
+                              <p:cond delay="780"/>
+                            </p:stCondLst>
+                            <p:childTnLst>
+                              <p:set>
+                                <p:cBhvr>
+                                  <p:cTn id="18" dur="1" fill="hold">
+                                    <p:stCondLst>
+                                      <p:cond delay="0"/>
+                                    </p:stCondLst>
+                                  </p:cTn>
+                                  <p:tgtEl>
+                                    <p:spTgt spid="9"/>
+                                  </p:tgtEl>
+                                  <p:attrNameLst>
+                                    <p:attrName>style.visibility</p:attrName>
+                                  </p:attrNameLst>
+                                </p:cBhvr>
+                                <p:to>
+                                  <p:strVal val="visible"/>
+                                </p:to>
+                              </p:set>
+                              <p:animEffect transition="in" filter="randombar(horizontal)">
+                                <p:cBhvr>
+                                  <p:cTn id="171" dur="570"/>
+                                  <p:tgtEl>
+                                    <p:spTgt spid="9"/>
+                                  </p:tgtEl>
+                                </p:cBhvr>
+                              </p:animEffect>
+                            </p:childTnLst>
+                          </p:cTn>
+                        </p:par>
+                      </p:childTnLst>
+                    </p:cTn>
+                  </p:par>
+                </p:childTnLst>
+              </p:cTn>
+              <p:prevCondLst>
+                <p:cond evt="onPrev" delay="0">
+                  <p:tgtEl>
+                    <p:sldTgt/>
+                  </p:tgtEl>
+                </p:cond>
+              </p:prevCondLst>
+              <p:nextCondLst>
+                <p:cond evt="onNext" delay="0">
+                  <p:tgtEl>
+                    <p:sldTgt/>
+                  </p:tgtEl>
+                </p:cond>
+              </p:nextCondLst>
+            </p:seq>
+          </p:childTnLst>
+        </p:cTn>
+      </p:par>
+    </p:tnLst>
+  </p:timing>
 </p:sld>
 </file>
 
@@ -6962,8 +8802,537 @@
     <a:masterClrMapping/>
   </p:clrMapOvr>
   <p:transition spd="med">
-    <p:fade/>
+    <p:blinds dir="horz"/>
   </p:transition>
+  <p:timing>
+    <p:tnLst>
+      <p:par>
+        <p:cTn id="1" dur="indefinite" restart="never" nodeType="tmRoot">
+          <p:childTnLst>
+            <p:seq concurrent="1" nextAc="seek">
+              <p:cTn id="2" dur="indefinite" nodeType="mainSeq">
+                <p:childTnLst>
+                  <p:par>
+                    <p:cTn id="3" fill="hold">
+                      <p:stCondLst>
+                        <p:cond delay="indefinite"/>
+                      </p:stCondLst>
+                      <p:childTnLst>
+                        <p:par>
+                          <p:cTn id="5" dur="450" fill="hold" nodeType="clickEffect" grpId="0" presetID="10" presetClass="entr" presetSubtype="0">
+                            <p:stCondLst>
+                              <p:cond delay="0"/>
+                            </p:stCondLst>
+                            <p:childTnLst>
+                              <p:set>
+                                <p:cBhvr>
+                                  <p:cTn id="6" dur="1" fill="hold">
+                                    <p:stCondLst>
+                                      <p:cond delay="0"/>
+                                    </p:stCondLst>
+                                  </p:cTn>
+                                  <p:tgtEl>
+                                    <p:spTgt spid="3"/>
+                                  </p:tgtEl>
+                                  <p:attrNameLst>
+                                    <p:attrName>style.visibility</p:attrName>
+                                  </p:attrNameLst>
+                                </p:cBhvr>
+                                <p:to>
+                                  <p:strVal val="visible"/>
+                                </p:to>
+                              </p:set>
+                              <p:animEffect transition="in" filter="dissolve">
+                                <p:cBhvr>
+                                  <p:cTn id="51" dur="450"/>
+                                  <p:tgtEl>
+                                    <p:spTgt spid="3"/>
+                                  </p:tgtEl>
+                                </p:cBhvr>
+                              </p:animEffect>
+                            </p:childTnLst>
+                          </p:cTn>
+                        </p:par>
+                        <p:par>
+                          <p:cTn id="7" dur="570" fill="hold" nodeType="afterEffect" grpId="0" presetID="25" presetClass="entr" presetSubtype="1">
+                            <p:stCondLst>
+                              <p:cond delay="130"/>
+                            </p:stCondLst>
+                            <p:childTnLst>
+                              <p:set>
+                                <p:cBhvr>
+                                  <p:cTn id="8" dur="1" fill="hold">
+                                    <p:stCondLst>
+                                      <p:cond delay="0"/>
+                                    </p:stCondLst>
+                                  </p:cTn>
+                                  <p:tgtEl>
+                                    <p:spTgt spid="4"/>
+                                  </p:tgtEl>
+                                  <p:attrNameLst>
+                                    <p:attrName>style.visibility</p:attrName>
+                                  </p:attrNameLst>
+                                </p:cBhvr>
+                                <p:to>
+                                  <p:strVal val="visible"/>
+                                </p:to>
+                              </p:set>
+                              <p:animEffect transition="in" filter="strips(downRight)">
+                                <p:cBhvr>
+                                  <p:cTn id="71" dur="570"/>
+                                  <p:tgtEl>
+                                    <p:spTgt spid="4"/>
+                                  </p:tgtEl>
+                                </p:cBhvr>
+                              </p:animEffect>
+                            </p:childTnLst>
+                          </p:cTn>
+                        </p:par>
+                        <p:par>
+                          <p:cTn id="9" dur="690" fill="hold" nodeType="afterEffect" grpId="0" presetID="45" presetClass="entr" presetSubtype="1">
+                            <p:stCondLst>
+                              <p:cond delay="260"/>
+                            </p:stCondLst>
+                            <p:childTnLst>
+                              <p:set>
+                                <p:cBhvr>
+                                  <p:cTn id="10" dur="1" fill="hold">
+                                    <p:stCondLst>
+                                      <p:cond delay="0"/>
+                                    </p:stCondLst>
+                                  </p:cTn>
+                                  <p:tgtEl>
+                                    <p:spTgt spid="5"/>
+                                  </p:tgtEl>
+                                  <p:attrNameLst>
+                                    <p:attrName>style.visibility</p:attrName>
+                                  </p:attrNameLst>
+                                </p:cBhvr>
+                                <p:to>
+                                  <p:strVal val="visible"/>
+                                </p:to>
+                              </p:set>
+                              <p:animEffect transition="in" filter="barn(inHorizontal)">
+                                <p:cBhvr>
+                                  <p:cTn id="91" dur="690"/>
+                                  <p:tgtEl>
+                                    <p:spTgt spid="5"/>
+                                  </p:tgtEl>
+                                </p:cBhvr>
+                              </p:animEffect>
+                            </p:childTnLst>
+                          </p:cTn>
+                        </p:par>
+                        <p:par>
+                          <p:cTn id="11" dur="810" fill="hold" nodeType="afterEffect" grpId="0" presetID="22" presetClass="entr" presetSubtype="8">
+                            <p:stCondLst>
+                              <p:cond delay="390"/>
+                            </p:stCondLst>
+                            <p:childTnLst>
+                              <p:set>
+                                <p:cBhvr>
+                                  <p:cTn id="12" dur="1" fill="hold">
+                                    <p:stCondLst>
+                                      <p:cond delay="0"/>
+                                    </p:stCondLst>
+                                  </p:cTn>
+                                  <p:tgtEl>
+                                    <p:spTgt spid="6"/>
+                                  </p:tgtEl>
+                                  <p:attrNameLst>
+                                    <p:attrName>style.visibility</p:attrName>
+                                  </p:attrNameLst>
+                                </p:cBhvr>
+                                <p:to>
+                                  <p:strVal val="visible"/>
+                                </p:to>
+                              </p:set>
+                              <p:animEffect transition="in" filter="wipe(left)">
+                                <p:cBhvr>
+                                  <p:cTn id="111" dur="810"/>
+                                  <p:tgtEl>
+                                    <p:spTgt spid="6"/>
+                                  </p:tgtEl>
+                                </p:cBhvr>
+                              </p:animEffect>
+                            </p:childTnLst>
+                          </p:cTn>
+                        </p:par>
+                        <p:par>
+                          <p:cTn id="13" dur="450" fill="hold" nodeType="afterEffect" grpId="0" presetID="37" presetClass="entr" presetSubtype="0">
+                            <p:stCondLst>
+                              <p:cond delay="520"/>
+                            </p:stCondLst>
+                            <p:childTnLst>
+                              <p:set>
+                                <p:cBhvr>
+                                  <p:cTn id="14" dur="1" fill="hold">
+                                    <p:stCondLst>
+                                      <p:cond delay="0"/>
+                                    </p:stCondLst>
+                                  </p:cTn>
+                                  <p:tgtEl>
+                                    <p:spTgt spid="11"/>
+                                  </p:tgtEl>
+                                  <p:attrNameLst>
+                                    <p:attrName>style.visibility</p:attrName>
+                                  </p:attrNameLst>
+                                </p:cBhvr>
+                                <p:to>
+                                  <p:strVal val="visible"/>
+                                </p:to>
+                              </p:set>
+                              <p:animEffect transition="in" filter="wedge">
+                                <p:cBhvr>
+                                  <p:cTn id="131" dur="450"/>
+                                  <p:tgtEl>
+                                    <p:spTgt spid="11"/>
+                                  </p:tgtEl>
+                                </p:cBhvr>
+                              </p:animEffect>
+                            </p:childTnLst>
+                          </p:cTn>
+                        </p:par>
+                        <p:par>
+                          <p:cTn id="15" dur="570" fill="hold" nodeType="afterEffect" grpId="0" presetID="52" presetClass="entr" presetSubtype="0">
+                            <p:stCondLst>
+                              <p:cond delay="650"/>
+                            </p:stCondLst>
+                            <p:childTnLst>
+                              <p:set>
+                                <p:cBhvr>
+                                  <p:cTn id="16" dur="1" fill="hold">
+                                    <p:stCondLst>
+                                      <p:cond delay="0"/>
+                                    </p:stCondLst>
+                                  </p:cTn>
+                                  <p:tgtEl>
+                                    <p:spTgt spid="16"/>
+                                  </p:tgtEl>
+                                  <p:attrNameLst>
+                                    <p:attrName>style.visibility</p:attrName>
+                                  </p:attrNameLst>
+                                </p:cBhvr>
+                                <p:to>
+                                  <p:strVal val="visible"/>
+                                </p:to>
+                              </p:set>
+                              <p:animEffect transition="in" filter="randombar(horizontal)">
+                                <p:cBhvr>
+                                  <p:cTn id="151" dur="570"/>
+                                  <p:tgtEl>
+                                    <p:spTgt spid="16"/>
+                                  </p:tgtEl>
+                                </p:cBhvr>
+                              </p:animEffect>
+                            </p:childTnLst>
+                          </p:cTn>
+                        </p:par>
+                        <p:par>
+                          <p:cTn id="17" dur="690" fill="hold" nodeType="afterEffect" grpId="0" presetID="21" presetClass="entr" presetSubtype="1">
+                            <p:stCondLst>
+                              <p:cond delay="780"/>
+                            </p:stCondLst>
+                            <p:childTnLst>
+                              <p:set>
+                                <p:cBhvr>
+                                  <p:cTn id="18" dur="1" fill="hold">
+                                    <p:stCondLst>
+                                      <p:cond delay="0"/>
+                                    </p:stCondLst>
+                                  </p:cTn>
+                                  <p:tgtEl>
+                                    <p:spTgt spid="7"/>
+                                  </p:tgtEl>
+                                  <p:attrNameLst>
+                                    <p:attrName>style.visibility</p:attrName>
+                                  </p:attrNameLst>
+                                </p:cBhvr>
+                                <p:to>
+                                  <p:strVal val="visible"/>
+                                </p:to>
+                              </p:set>
+                              <p:animEffect transition="in" filter="wheel(1)">
+                                <p:cBhvr>
+                                  <p:cTn id="171" dur="690"/>
+                                  <p:tgtEl>
+                                    <p:spTgt spid="7"/>
+                                  </p:tgtEl>
+                                </p:cBhvr>
+                              </p:animEffect>
+                            </p:childTnLst>
+                          </p:cTn>
+                        </p:par>
+                        <p:par>
+                          <p:cTn id="19" dur="810" fill="hold" nodeType="afterEffect" grpId="0" presetID="22" presetClass="entr" presetSubtype="4">
+                            <p:stCondLst>
+                              <p:cond delay="910"/>
+                            </p:stCondLst>
+                            <p:childTnLst>
+                              <p:set>
+                                <p:cBhvr>
+                                  <p:cTn id="20" dur="1" fill="hold">
+                                    <p:stCondLst>
+                                      <p:cond delay="0"/>
+                                    </p:stCondLst>
+                                  </p:cTn>
+                                  <p:tgtEl>
+                                    <p:spTgt spid="8"/>
+                                  </p:tgtEl>
+                                  <p:attrNameLst>
+                                    <p:attrName>style.visibility</p:attrName>
+                                  </p:attrNameLst>
+                                </p:cBhvr>
+                                <p:to>
+                                  <p:strVal val="visible"/>
+                                </p:to>
+                              </p:set>
+                              <p:animEffect transition="in" filter="wipe(down)">
+                                <p:cBhvr>
+                                  <p:cTn id="191" dur="810"/>
+                                  <p:tgtEl>
+                                    <p:spTgt spid="8"/>
+                                  </p:tgtEl>
+                                </p:cBhvr>
+                              </p:animEffect>
+                            </p:childTnLst>
+                          </p:cTn>
+                        </p:par>
+                        <p:par>
+                          <p:cTn id="21" dur="450" fill="hold" nodeType="afterEffect" grpId="0" presetID="9" presetClass="entr" presetSubtype="0">
+                            <p:stCondLst>
+                              <p:cond delay="1040"/>
+                            </p:stCondLst>
+                            <p:childTnLst>
+                              <p:set>
+                                <p:cBhvr>
+                                  <p:cTn id="22" dur="1" fill="hold">
+                                    <p:stCondLst>
+                                      <p:cond delay="0"/>
+                                    </p:stCondLst>
+                                  </p:cTn>
+                                  <p:tgtEl>
+                                    <p:spTgt spid="12"/>
+                                  </p:tgtEl>
+                                  <p:attrNameLst>
+                                    <p:attrName>style.visibility</p:attrName>
+                                  </p:attrNameLst>
+                                </p:cBhvr>
+                                <p:to>
+                                  <p:strVal val="visible"/>
+                                </p:to>
+                              </p:set>
+                              <p:animEffect transition="in" filter="fade">
+                                <p:cBhvr>
+                                  <p:cTn id="211" dur="450"/>
+                                  <p:tgtEl>
+                                    <p:spTgt spid="12"/>
+                                  </p:tgtEl>
+                                </p:cBhvr>
+                              </p:animEffect>
+                            </p:childTnLst>
+                          </p:cTn>
+                        </p:par>
+                        <p:par>
+                          <p:cTn id="23" dur="570" fill="hold" nodeType="afterEffect" grpId="0" presetID="22" presetClass="entr" presetSubtype="2">
+                            <p:stCondLst>
+                              <p:cond delay="1170"/>
+                            </p:stCondLst>
+                            <p:childTnLst>
+                              <p:set>
+                                <p:cBhvr>
+                                  <p:cTn id="24" dur="1" fill="hold">
+                                    <p:stCondLst>
+                                      <p:cond delay="0"/>
+                                    </p:stCondLst>
+                                  </p:cTn>
+                                  <p:tgtEl>
+                                    <p:spTgt spid="13"/>
+                                  </p:tgtEl>
+                                  <p:attrNameLst>
+                                    <p:attrName>style.visibility</p:attrName>
+                                  </p:attrNameLst>
+                                </p:cBhvr>
+                                <p:to>
+                                  <p:strVal val="visible"/>
+                                </p:to>
+                              </p:set>
+                              <p:animEffect transition="in" filter="wipe(right)">
+                                <p:cBhvr>
+                                  <p:cTn id="231" dur="570"/>
+                                  <p:tgtEl>
+                                    <p:spTgt spid="13"/>
+                                  </p:tgtEl>
+                                </p:cBhvr>
+                              </p:animEffect>
+                            </p:childTnLst>
+                          </p:cTn>
+                        </p:par>
+                        <p:par>
+                          <p:cTn id="25" dur="690" fill="hold" nodeType="afterEffect" grpId="0" presetID="18" presetClass="entr" presetSubtype="12">
+                            <p:stCondLst>
+                              <p:cond delay="1300"/>
+                            </p:stCondLst>
+                            <p:childTnLst>
+                              <p:set>
+                                <p:cBhvr>
+                                  <p:cTn id="26" dur="1" fill="hold">
+                                    <p:stCondLst>
+                                      <p:cond delay="0"/>
+                                    </p:stCondLst>
+                                  </p:cTn>
+                                  <p:tgtEl>
+                                    <p:spTgt spid="17"/>
+                                  </p:tgtEl>
+                                  <p:attrNameLst>
+                                    <p:attrName>style.visibility</p:attrName>
+                                  </p:attrNameLst>
+                                </p:cBhvr>
+                                <p:to>
+                                  <p:strVal val="visible"/>
+                                </p:to>
+                              </p:set>
+                              <p:animEffect transition="in" filter="circle(in)">
+                                <p:cBhvr>
+                                  <p:cTn id="251" dur="690"/>
+                                  <p:tgtEl>
+                                    <p:spTgt spid="17"/>
+                                  </p:tgtEl>
+                                </p:cBhvr>
+                              </p:animEffect>
+                            </p:childTnLst>
+                          </p:cTn>
+                        </p:par>
+                        <p:par>
+                          <p:cTn id="27" dur="810" fill="hold" nodeType="afterEffect" grpId="0" presetID="22" presetClass="entr" presetSubtype="1">
+                            <p:stCondLst>
+                              <p:cond delay="1430"/>
+                            </p:stCondLst>
+                            <p:childTnLst>
+                              <p:set>
+                                <p:cBhvr>
+                                  <p:cTn id="28" dur="1" fill="hold">
+                                    <p:stCondLst>
+                                      <p:cond delay="0"/>
+                                    </p:stCondLst>
+                                  </p:cTn>
+                                  <p:tgtEl>
+                                    <p:spTgt spid="18"/>
+                                  </p:tgtEl>
+                                  <p:attrNameLst>
+                                    <p:attrName>style.visibility</p:attrName>
+                                  </p:attrNameLst>
+                                </p:cBhvr>
+                                <p:to>
+                                  <p:strVal val="visible"/>
+                                </p:to>
+                              </p:set>
+                              <p:animEffect transition="in" filter="wipe(up)">
+                                <p:cBhvr>
+                                  <p:cTn id="271" dur="810"/>
+                                  <p:tgtEl>
+                                    <p:spTgt spid="18"/>
+                                  </p:tgtEl>
+                                </p:cBhvr>
+                              </p:animEffect>
+                            </p:childTnLst>
+                          </p:cTn>
+                        </p:par>
+                        <p:par>
+                          <p:cTn id="29" dur="450" fill="hold" nodeType="afterEffect" grpId="0" presetID="42" presetClass="entr" presetSubtype="10">
+                            <p:stCondLst>
+                              <p:cond delay="1560"/>
+                            </p:stCondLst>
+                            <p:childTnLst>
+                              <p:set>
+                                <p:cBhvr>
+                                  <p:cTn id="30" dur="1" fill="hold">
+                                    <p:stCondLst>
+                                      <p:cond delay="0"/>
+                                    </p:stCondLst>
+                                  </p:cTn>
+                                  <p:tgtEl>
+                                    <p:spTgt spid="9"/>
+                                  </p:tgtEl>
+                                  <p:attrNameLst>
+                                    <p:attrName>style.visibility</p:attrName>
+                                  </p:attrNameLst>
+                                </p:cBhvr>
+                                <p:to>
+                                  <p:strVal val="visible"/>
+                                </p:to>
+                              </p:set>
+                              <p:animEffect transition="in" filter="blinds(horizontal)">
+                                <p:cBhvr>
+                                  <p:cTn id="291" dur="450"/>
+                                  <p:tgtEl>
+                                    <p:spTgt spid="9"/>
+                                  </p:tgtEl>
+                                </p:cBhvr>
+                              </p:animEffect>
+                            </p:childTnLst>
+                          </p:cTn>
+                        </p:par>
+                        <p:par>
+                          <p:cTn id="31" dur="570" fill="hold" nodeType="afterEffect" grpId="0" presetID="43" presetClass="entr" presetSubtype="0">
+                            <p:stCondLst>
+                              <p:cond delay="1690"/>
+                            </p:stCondLst>
+                            <p:childTnLst>
+                              <p:set>
+                                <p:cBhvr>
+                                  <p:cTn id="32" dur="1" fill="hold">
+                                    <p:stCondLst>
+                                      <p:cond delay="0"/>
+                                    </p:stCondLst>
+                                  </p:cTn>
+                                  <p:tgtEl>
+                                    <p:spTgt spid="14"/>
+                                  </p:tgtEl>
+                                  <p:attrNameLst>
+                                    <p:attrName>style.visibility</p:attrName>
+                                  </p:attrNameLst>
+                                </p:cBhvr>
+                                <p:to>
+                                  <p:strVal val="visible"/>
+                                </p:to>
+                              </p:set>
+                              <p:animEffect transition="in" filter="checkerboard(across)">
+                                <p:cBhvr>
+                                  <p:cTn id="311" dur="570"/>
+                                  <p:tgtEl>
+                                    <p:spTgt spid="14"/>
+                                  </p:tgtEl>
+                                </p:cBhvr>
+                              </p:animEffect>
+                            </p:childTnLst>
+                          </p:cTn>
+                        </p:par>
+                      </p:childTnLst>
+                    </p:cTn>
+                  </p:par>
+                </p:childTnLst>
+              </p:cTn>
+              <p:prevCondLst>
+                <p:cond evt="onPrev" delay="0">
+                  <p:tgtEl>
+                    <p:sldTgt/>
+                  </p:tgtEl>
+                </p:cond>
+              </p:prevCondLst>
+              <p:nextCondLst>
+                <p:cond evt="onNext" delay="0">
+                  <p:tgtEl>
+                    <p:sldTgt/>
+                  </p:tgtEl>
+                </p:cond>
+              </p:nextCondLst>
+            </p:seq>
+          </p:childTnLst>
+        </p:cTn>
+      </p:par>
+    </p:tnLst>
+  </p:timing>
 </p:sld>
 </file>
 
@@ -7987,8 +10356,537 @@
     <a:masterClrMapping/>
   </p:clrMapOvr>
   <p:transition spd="med">
-    <p:fade/>
+    <p:circle dir="in"/>
   </p:transition>
+  <p:timing>
+    <p:tnLst>
+      <p:par>
+        <p:cTn id="1" dur="indefinite" restart="never" nodeType="tmRoot">
+          <p:childTnLst>
+            <p:seq concurrent="1" nextAc="seek">
+              <p:cTn id="2" dur="indefinite" nodeType="mainSeq">
+                <p:childTnLst>
+                  <p:par>
+                    <p:cTn id="3" fill="hold">
+                      <p:stCondLst>
+                        <p:cond delay="indefinite"/>
+                      </p:stCondLst>
+                      <p:childTnLst>
+                        <p:par>
+                          <p:cTn id="5" dur="570" fill="hold" nodeType="clickEffect" grpId="0" presetID="25" presetClass="entr" presetSubtype="1">
+                            <p:stCondLst>
+                              <p:cond delay="0"/>
+                            </p:stCondLst>
+                            <p:childTnLst>
+                              <p:set>
+                                <p:cBhvr>
+                                  <p:cTn id="6" dur="1" fill="hold">
+                                    <p:stCondLst>
+                                      <p:cond delay="0"/>
+                                    </p:stCondLst>
+                                  </p:cTn>
+                                  <p:tgtEl>
+                                    <p:spTgt spid="3"/>
+                                  </p:tgtEl>
+                                  <p:attrNameLst>
+                                    <p:attrName>style.visibility</p:attrName>
+                                  </p:attrNameLst>
+                                </p:cBhvr>
+                                <p:to>
+                                  <p:strVal val="visible"/>
+                                </p:to>
+                              </p:set>
+                              <p:animEffect transition="in" filter="strips(downRight)">
+                                <p:cBhvr>
+                                  <p:cTn id="51" dur="570"/>
+                                  <p:tgtEl>
+                                    <p:spTgt spid="3"/>
+                                  </p:tgtEl>
+                                </p:cBhvr>
+                              </p:animEffect>
+                            </p:childTnLst>
+                          </p:cTn>
+                        </p:par>
+                        <p:par>
+                          <p:cTn id="7" dur="690" fill="hold" nodeType="afterEffect" grpId="0" presetID="45" presetClass="entr" presetSubtype="1">
+                            <p:stCondLst>
+                              <p:cond delay="130"/>
+                            </p:stCondLst>
+                            <p:childTnLst>
+                              <p:set>
+                                <p:cBhvr>
+                                  <p:cTn id="8" dur="1" fill="hold">
+                                    <p:stCondLst>
+                                      <p:cond delay="0"/>
+                                    </p:stCondLst>
+                                  </p:cTn>
+                                  <p:tgtEl>
+                                    <p:spTgt spid="4"/>
+                                  </p:tgtEl>
+                                  <p:attrNameLst>
+                                    <p:attrName>style.visibility</p:attrName>
+                                  </p:attrNameLst>
+                                </p:cBhvr>
+                                <p:to>
+                                  <p:strVal val="visible"/>
+                                </p:to>
+                              </p:set>
+                              <p:animEffect transition="in" filter="barn(inHorizontal)">
+                                <p:cBhvr>
+                                  <p:cTn id="71" dur="690"/>
+                                  <p:tgtEl>
+                                    <p:spTgt spid="4"/>
+                                  </p:tgtEl>
+                                </p:cBhvr>
+                              </p:animEffect>
+                            </p:childTnLst>
+                          </p:cTn>
+                        </p:par>
+                        <p:par>
+                          <p:cTn id="9" dur="810" fill="hold" nodeType="afterEffect" grpId="0" presetID="22" presetClass="entr" presetSubtype="8">
+                            <p:stCondLst>
+                              <p:cond delay="260"/>
+                            </p:stCondLst>
+                            <p:childTnLst>
+                              <p:set>
+                                <p:cBhvr>
+                                  <p:cTn id="10" dur="1" fill="hold">
+                                    <p:stCondLst>
+                                      <p:cond delay="0"/>
+                                    </p:stCondLst>
+                                  </p:cTn>
+                                  <p:tgtEl>
+                                    <p:spTgt spid="5"/>
+                                  </p:tgtEl>
+                                  <p:attrNameLst>
+                                    <p:attrName>style.visibility</p:attrName>
+                                  </p:attrNameLst>
+                                </p:cBhvr>
+                                <p:to>
+                                  <p:strVal val="visible"/>
+                                </p:to>
+                              </p:set>
+                              <p:animEffect transition="in" filter="wipe(left)">
+                                <p:cBhvr>
+                                  <p:cTn id="91" dur="810"/>
+                                  <p:tgtEl>
+                                    <p:spTgt spid="5"/>
+                                  </p:tgtEl>
+                                </p:cBhvr>
+                              </p:animEffect>
+                            </p:childTnLst>
+                          </p:cTn>
+                        </p:par>
+                        <p:par>
+                          <p:cTn id="11" dur="450" fill="hold" nodeType="afterEffect" grpId="0" presetID="37" presetClass="entr" presetSubtype="0">
+                            <p:stCondLst>
+                              <p:cond delay="390"/>
+                            </p:stCondLst>
+                            <p:childTnLst>
+                              <p:set>
+                                <p:cBhvr>
+                                  <p:cTn id="12" dur="1" fill="hold">
+                                    <p:stCondLst>
+                                      <p:cond delay="0"/>
+                                    </p:stCondLst>
+                                  </p:cTn>
+                                  <p:tgtEl>
+                                    <p:spTgt spid="9"/>
+                                  </p:tgtEl>
+                                  <p:attrNameLst>
+                                    <p:attrName>style.visibility</p:attrName>
+                                  </p:attrNameLst>
+                                </p:cBhvr>
+                                <p:to>
+                                  <p:strVal val="visible"/>
+                                </p:to>
+                              </p:set>
+                              <p:animEffect transition="in" filter="wedge">
+                                <p:cBhvr>
+                                  <p:cTn id="111" dur="450"/>
+                                  <p:tgtEl>
+                                    <p:spTgt spid="9"/>
+                                  </p:tgtEl>
+                                </p:cBhvr>
+                              </p:animEffect>
+                            </p:childTnLst>
+                          </p:cTn>
+                        </p:par>
+                        <p:par>
+                          <p:cTn id="13" dur="570" fill="hold" nodeType="afterEffect" grpId="0" presetID="52" presetClass="entr" presetSubtype="0">
+                            <p:stCondLst>
+                              <p:cond delay="520"/>
+                            </p:stCondLst>
+                            <p:childTnLst>
+                              <p:set>
+                                <p:cBhvr>
+                                  <p:cTn id="14" dur="1" fill="hold">
+                                    <p:stCondLst>
+                                      <p:cond delay="0"/>
+                                    </p:stCondLst>
+                                  </p:cTn>
+                                  <p:tgtEl>
+                                    <p:spTgt spid="7"/>
+                                  </p:tgtEl>
+                                  <p:attrNameLst>
+                                    <p:attrName>style.visibility</p:attrName>
+                                  </p:attrNameLst>
+                                </p:cBhvr>
+                                <p:to>
+                                  <p:strVal val="visible"/>
+                                </p:to>
+                              </p:set>
+                              <p:animEffect transition="in" filter="randombar(horizontal)">
+                                <p:cBhvr>
+                                  <p:cTn id="131" dur="570"/>
+                                  <p:tgtEl>
+                                    <p:spTgt spid="7"/>
+                                  </p:tgtEl>
+                                </p:cBhvr>
+                              </p:animEffect>
+                            </p:childTnLst>
+                          </p:cTn>
+                        </p:par>
+                        <p:par>
+                          <p:cTn id="15" dur="690" fill="hold" nodeType="afterEffect" grpId="0" presetID="21" presetClass="entr" presetSubtype="1">
+                            <p:stCondLst>
+                              <p:cond delay="650"/>
+                            </p:stCondLst>
+                            <p:childTnLst>
+                              <p:set>
+                                <p:cBhvr>
+                                  <p:cTn id="16" dur="1" fill="hold">
+                                    <p:stCondLst>
+                                      <p:cond delay="0"/>
+                                    </p:stCondLst>
+                                  </p:cTn>
+                                  <p:tgtEl>
+                                    <p:spTgt spid="8"/>
+                                  </p:tgtEl>
+                                  <p:attrNameLst>
+                                    <p:attrName>style.visibility</p:attrName>
+                                  </p:attrNameLst>
+                                </p:cBhvr>
+                                <p:to>
+                                  <p:strVal val="visible"/>
+                                </p:to>
+                              </p:set>
+                              <p:animEffect transition="in" filter="wheel(1)">
+                                <p:cBhvr>
+                                  <p:cTn id="151" dur="690"/>
+                                  <p:tgtEl>
+                                    <p:spTgt spid="8"/>
+                                  </p:tgtEl>
+                                </p:cBhvr>
+                              </p:animEffect>
+                            </p:childTnLst>
+                          </p:cTn>
+                        </p:par>
+                        <p:par>
+                          <p:cTn id="17" dur="810" fill="hold" nodeType="afterEffect" grpId="0" presetID="22" presetClass="entr" presetSubtype="4">
+                            <p:stCondLst>
+                              <p:cond delay="780"/>
+                            </p:stCondLst>
+                            <p:childTnLst>
+                              <p:set>
+                                <p:cBhvr>
+                                  <p:cTn id="18" dur="1" fill="hold">
+                                    <p:stCondLst>
+                                      <p:cond delay="0"/>
+                                    </p:stCondLst>
+                                  </p:cTn>
+                                  <p:tgtEl>
+                                    <p:spTgt spid="6"/>
+                                  </p:tgtEl>
+                                  <p:attrNameLst>
+                                    <p:attrName>style.visibility</p:attrName>
+                                  </p:attrNameLst>
+                                </p:cBhvr>
+                                <p:to>
+                                  <p:strVal val="visible"/>
+                                </p:to>
+                              </p:set>
+                              <p:animEffect transition="in" filter="wipe(down)">
+                                <p:cBhvr>
+                                  <p:cTn id="171" dur="810"/>
+                                  <p:tgtEl>
+                                    <p:spTgt spid="6"/>
+                                  </p:tgtEl>
+                                </p:cBhvr>
+                              </p:animEffect>
+                            </p:childTnLst>
+                          </p:cTn>
+                        </p:par>
+                        <p:par>
+                          <p:cTn id="19" dur="450" fill="hold" nodeType="afterEffect" grpId="0" presetID="9" presetClass="entr" presetSubtype="0">
+                            <p:stCondLst>
+                              <p:cond delay="910"/>
+                            </p:stCondLst>
+                            <p:childTnLst>
+                              <p:set>
+                                <p:cBhvr>
+                                  <p:cTn id="20" dur="1" fill="hold">
+                                    <p:stCondLst>
+                                      <p:cond delay="0"/>
+                                    </p:stCondLst>
+                                  </p:cTn>
+                                  <p:tgtEl>
+                                    <p:spTgt spid="10"/>
+                                  </p:tgtEl>
+                                  <p:attrNameLst>
+                                    <p:attrName>style.visibility</p:attrName>
+                                  </p:attrNameLst>
+                                </p:cBhvr>
+                                <p:to>
+                                  <p:strVal val="visible"/>
+                                </p:to>
+                              </p:set>
+                              <p:animEffect transition="in" filter="fade">
+                                <p:cBhvr>
+                                  <p:cTn id="191" dur="450"/>
+                                  <p:tgtEl>
+                                    <p:spTgt spid="10"/>
+                                  </p:tgtEl>
+                                </p:cBhvr>
+                              </p:animEffect>
+                            </p:childTnLst>
+                          </p:cTn>
+                        </p:par>
+                        <p:par>
+                          <p:cTn id="21" dur="570" fill="hold" nodeType="afterEffect" grpId="0" presetID="22" presetClass="entr" presetSubtype="2">
+                            <p:stCondLst>
+                              <p:cond delay="1040"/>
+                            </p:stCondLst>
+                            <p:childTnLst>
+                              <p:set>
+                                <p:cBhvr>
+                                  <p:cTn id="22" dur="1" fill="hold">
+                                    <p:stCondLst>
+                                      <p:cond delay="0"/>
+                                    </p:stCondLst>
+                                  </p:cTn>
+                                  <p:tgtEl>
+                                    <p:spTgt spid="13"/>
+                                  </p:tgtEl>
+                                  <p:attrNameLst>
+                                    <p:attrName>style.visibility</p:attrName>
+                                  </p:attrNameLst>
+                                </p:cBhvr>
+                                <p:to>
+                                  <p:strVal val="visible"/>
+                                </p:to>
+                              </p:set>
+                              <p:animEffect transition="in" filter="wipe(right)">
+                                <p:cBhvr>
+                                  <p:cTn id="211" dur="570"/>
+                                  <p:tgtEl>
+                                    <p:spTgt spid="13"/>
+                                  </p:tgtEl>
+                                </p:cBhvr>
+                              </p:animEffect>
+                            </p:childTnLst>
+                          </p:cTn>
+                        </p:par>
+                        <p:par>
+                          <p:cTn id="23" dur="690" fill="hold" nodeType="afterEffect" grpId="0" presetID="18" presetClass="entr" presetSubtype="12">
+                            <p:stCondLst>
+                              <p:cond delay="1170"/>
+                            </p:stCondLst>
+                            <p:childTnLst>
+                              <p:set>
+                                <p:cBhvr>
+                                  <p:cTn id="24" dur="1" fill="hold">
+                                    <p:stCondLst>
+                                      <p:cond delay="0"/>
+                                    </p:stCondLst>
+                                  </p:cTn>
+                                  <p:tgtEl>
+                                    <p:spTgt spid="11"/>
+                                  </p:tgtEl>
+                                  <p:attrNameLst>
+                                    <p:attrName>style.visibility</p:attrName>
+                                  </p:attrNameLst>
+                                </p:cBhvr>
+                                <p:to>
+                                  <p:strVal val="visible"/>
+                                </p:to>
+                              </p:set>
+                              <p:animEffect transition="in" filter="circle(in)">
+                                <p:cBhvr>
+                                  <p:cTn id="231" dur="690"/>
+                                  <p:tgtEl>
+                                    <p:spTgt spid="11"/>
+                                  </p:tgtEl>
+                                </p:cBhvr>
+                              </p:animEffect>
+                            </p:childTnLst>
+                          </p:cTn>
+                        </p:par>
+                        <p:par>
+                          <p:cTn id="25" dur="810" fill="hold" nodeType="afterEffect" grpId="0" presetID="22" presetClass="entr" presetSubtype="1">
+                            <p:stCondLst>
+                              <p:cond delay="1300"/>
+                            </p:stCondLst>
+                            <p:childTnLst>
+                              <p:set>
+                                <p:cBhvr>
+                                  <p:cTn id="26" dur="1" fill="hold">
+                                    <p:stCondLst>
+                                      <p:cond delay="0"/>
+                                    </p:stCondLst>
+                                  </p:cTn>
+                                  <p:tgtEl>
+                                    <p:spTgt spid="12"/>
+                                  </p:tgtEl>
+                                  <p:attrNameLst>
+                                    <p:attrName>style.visibility</p:attrName>
+                                  </p:attrNameLst>
+                                </p:cBhvr>
+                                <p:to>
+                                  <p:strVal val="visible"/>
+                                </p:to>
+                              </p:set>
+                              <p:animEffect transition="in" filter="wipe(up)">
+                                <p:cBhvr>
+                                  <p:cTn id="251" dur="810"/>
+                                  <p:tgtEl>
+                                    <p:spTgt spid="12"/>
+                                  </p:tgtEl>
+                                </p:cBhvr>
+                              </p:animEffect>
+                            </p:childTnLst>
+                          </p:cTn>
+                        </p:par>
+                        <p:par>
+                          <p:cTn id="27" dur="450" fill="hold" nodeType="afterEffect" grpId="0" presetID="42" presetClass="entr" presetSubtype="10">
+                            <p:stCondLst>
+                              <p:cond delay="1430"/>
+                            </p:stCondLst>
+                            <p:childTnLst>
+                              <p:set>
+                                <p:cBhvr>
+                                  <p:cTn id="28" dur="1" fill="hold">
+                                    <p:stCondLst>
+                                      <p:cond delay="0"/>
+                                    </p:stCondLst>
+                                  </p:cTn>
+                                  <p:tgtEl>
+                                    <p:spTgt spid="14"/>
+                                  </p:tgtEl>
+                                  <p:attrNameLst>
+                                    <p:attrName>style.visibility</p:attrName>
+                                  </p:attrNameLst>
+                                </p:cBhvr>
+                                <p:to>
+                                  <p:strVal val="visible"/>
+                                </p:to>
+                              </p:set>
+                              <p:animEffect transition="in" filter="blinds(horizontal)">
+                                <p:cBhvr>
+                                  <p:cTn id="271" dur="450"/>
+                                  <p:tgtEl>
+                                    <p:spTgt spid="14"/>
+                                  </p:tgtEl>
+                                </p:cBhvr>
+                              </p:animEffect>
+                            </p:childTnLst>
+                          </p:cTn>
+                        </p:par>
+                        <p:par>
+                          <p:cTn id="29" dur="570" fill="hold" nodeType="afterEffect" grpId="0" presetID="43" presetClass="entr" presetSubtype="0">
+                            <p:stCondLst>
+                              <p:cond delay="1560"/>
+                            </p:stCondLst>
+                            <p:childTnLst>
+                              <p:set>
+                                <p:cBhvr>
+                                  <p:cTn id="30" dur="1" fill="hold">
+                                    <p:stCondLst>
+                                      <p:cond delay="0"/>
+                                    </p:stCondLst>
+                                  </p:cTn>
+                                  <p:tgtEl>
+                                    <p:spTgt spid="17"/>
+                                  </p:tgtEl>
+                                  <p:attrNameLst>
+                                    <p:attrName>style.visibility</p:attrName>
+                                  </p:attrNameLst>
+                                </p:cBhvr>
+                                <p:to>
+                                  <p:strVal val="visible"/>
+                                </p:to>
+                              </p:set>
+                              <p:animEffect transition="in" filter="checkerboard(across)">
+                                <p:cBhvr>
+                                  <p:cTn id="291" dur="570"/>
+                                  <p:tgtEl>
+                                    <p:spTgt spid="17"/>
+                                  </p:tgtEl>
+                                </p:cBhvr>
+                              </p:animEffect>
+                            </p:childTnLst>
+                          </p:cTn>
+                        </p:par>
+                        <p:par>
+                          <p:cTn id="31" dur="690" fill="hold" nodeType="afterEffect" grpId="0" presetID="21" presetClass="entr" presetSubtype="2">
+                            <p:stCondLst>
+                              <p:cond delay="1690"/>
+                            </p:stCondLst>
+                            <p:childTnLst>
+                              <p:set>
+                                <p:cBhvr>
+                                  <p:cTn id="32" dur="1" fill="hold">
+                                    <p:stCondLst>
+                                      <p:cond delay="0"/>
+                                    </p:stCondLst>
+                                  </p:cTn>
+                                  <p:tgtEl>
+                                    <p:spTgt spid="15"/>
+                                  </p:tgtEl>
+                                  <p:attrNameLst>
+                                    <p:attrName>style.visibility</p:attrName>
+                                  </p:attrNameLst>
+                                </p:cBhvr>
+                                <p:to>
+                                  <p:strVal val="visible"/>
+                                </p:to>
+                              </p:set>
+                              <p:animEffect transition="in" filter="wheel(2)">
+                                <p:cBhvr>
+                                  <p:cTn id="311" dur="690"/>
+                                  <p:tgtEl>
+                                    <p:spTgt spid="15"/>
+                                  </p:tgtEl>
+                                </p:cBhvr>
+                              </p:animEffect>
+                            </p:childTnLst>
+                          </p:cTn>
+                        </p:par>
+                      </p:childTnLst>
+                    </p:cTn>
+                  </p:par>
+                </p:childTnLst>
+              </p:cTn>
+              <p:prevCondLst>
+                <p:cond evt="onPrev" delay="0">
+                  <p:tgtEl>
+                    <p:sldTgt/>
+                  </p:tgtEl>
+                </p:cond>
+              </p:prevCondLst>
+              <p:nextCondLst>
+                <p:cond evt="onNext" delay="0">
+                  <p:tgtEl>
+                    <p:sldTgt/>
+                  </p:tgtEl>
+                </p:cond>
+              </p:nextCondLst>
+            </p:seq>
+          </p:childTnLst>
+        </p:cTn>
+      </p:par>
+    </p:tnLst>
+  </p:timing>
 </p:sld>
 </file>
 
@@ -8768,8 +11666,537 @@
     <a:masterClrMapping/>
   </p:clrMapOvr>
   <p:transition spd="med">
-    <p:fade/>
+    <p:comb dir="horz"/>
   </p:transition>
+  <p:timing>
+    <p:tnLst>
+      <p:par>
+        <p:cTn id="1" dur="indefinite" restart="never" nodeType="tmRoot">
+          <p:childTnLst>
+            <p:seq concurrent="1" nextAc="seek">
+              <p:cTn id="2" dur="indefinite" nodeType="mainSeq">
+                <p:childTnLst>
+                  <p:par>
+                    <p:cTn id="3" fill="hold">
+                      <p:stCondLst>
+                        <p:cond delay="indefinite"/>
+                      </p:stCondLst>
+                      <p:childTnLst>
+                        <p:par>
+                          <p:cTn id="5" dur="690" fill="hold" nodeType="clickEffect" grpId="0" presetID="45" presetClass="entr" presetSubtype="1">
+                            <p:stCondLst>
+                              <p:cond delay="0"/>
+                            </p:stCondLst>
+                            <p:childTnLst>
+                              <p:set>
+                                <p:cBhvr>
+                                  <p:cTn id="6" dur="1" fill="hold">
+                                    <p:stCondLst>
+                                      <p:cond delay="0"/>
+                                    </p:stCondLst>
+                                  </p:cTn>
+                                  <p:tgtEl>
+                                    <p:spTgt spid="3"/>
+                                  </p:tgtEl>
+                                  <p:attrNameLst>
+                                    <p:attrName>style.visibility</p:attrName>
+                                  </p:attrNameLst>
+                                </p:cBhvr>
+                                <p:to>
+                                  <p:strVal val="visible"/>
+                                </p:to>
+                              </p:set>
+                              <p:animEffect transition="in" filter="barn(inHorizontal)">
+                                <p:cBhvr>
+                                  <p:cTn id="51" dur="690"/>
+                                  <p:tgtEl>
+                                    <p:spTgt spid="3"/>
+                                  </p:tgtEl>
+                                </p:cBhvr>
+                              </p:animEffect>
+                            </p:childTnLst>
+                          </p:cTn>
+                        </p:par>
+                        <p:par>
+                          <p:cTn id="7" dur="810" fill="hold" nodeType="afterEffect" grpId="0" presetID="22" presetClass="entr" presetSubtype="8">
+                            <p:stCondLst>
+                              <p:cond delay="130"/>
+                            </p:stCondLst>
+                            <p:childTnLst>
+                              <p:set>
+                                <p:cBhvr>
+                                  <p:cTn id="8" dur="1" fill="hold">
+                                    <p:stCondLst>
+                                      <p:cond delay="0"/>
+                                    </p:stCondLst>
+                                  </p:cTn>
+                                  <p:tgtEl>
+                                    <p:spTgt spid="4"/>
+                                  </p:tgtEl>
+                                  <p:attrNameLst>
+                                    <p:attrName>style.visibility</p:attrName>
+                                  </p:attrNameLst>
+                                </p:cBhvr>
+                                <p:to>
+                                  <p:strVal val="visible"/>
+                                </p:to>
+                              </p:set>
+                              <p:animEffect transition="in" filter="wipe(left)">
+                                <p:cBhvr>
+                                  <p:cTn id="71" dur="810"/>
+                                  <p:tgtEl>
+                                    <p:spTgt spid="4"/>
+                                  </p:tgtEl>
+                                </p:cBhvr>
+                              </p:animEffect>
+                            </p:childTnLst>
+                          </p:cTn>
+                        </p:par>
+                        <p:par>
+                          <p:cTn id="9" dur="450" fill="hold" nodeType="afterEffect" grpId="0" presetID="37" presetClass="entr" presetSubtype="0">
+                            <p:stCondLst>
+                              <p:cond delay="260"/>
+                            </p:stCondLst>
+                            <p:childTnLst>
+                              <p:set>
+                                <p:cBhvr>
+                                  <p:cTn id="10" dur="1" fill="hold">
+                                    <p:stCondLst>
+                                      <p:cond delay="0"/>
+                                    </p:stCondLst>
+                                  </p:cTn>
+                                  <p:tgtEl>
+                                    <p:spTgt spid="5"/>
+                                  </p:tgtEl>
+                                  <p:attrNameLst>
+                                    <p:attrName>style.visibility</p:attrName>
+                                  </p:attrNameLst>
+                                </p:cBhvr>
+                                <p:to>
+                                  <p:strVal val="visible"/>
+                                </p:to>
+                              </p:set>
+                              <p:animEffect transition="in" filter="wedge">
+                                <p:cBhvr>
+                                  <p:cTn id="91" dur="450"/>
+                                  <p:tgtEl>
+                                    <p:spTgt spid="5"/>
+                                  </p:tgtEl>
+                                </p:cBhvr>
+                              </p:animEffect>
+                            </p:childTnLst>
+                          </p:cTn>
+                        </p:par>
+                        <p:par>
+                          <p:cTn id="11" dur="570" fill="hold" nodeType="afterEffect" grpId="0" presetID="52" presetClass="entr" presetSubtype="0">
+                            <p:stCondLst>
+                              <p:cond delay="390"/>
+                            </p:stCondLst>
+                            <p:childTnLst>
+                              <p:set>
+                                <p:cBhvr>
+                                  <p:cTn id="12" dur="1" fill="hold">
+                                    <p:stCondLst>
+                                      <p:cond delay="0"/>
+                                    </p:stCondLst>
+                                  </p:cTn>
+                                  <p:tgtEl>
+                                    <p:spTgt spid="6"/>
+                                  </p:tgtEl>
+                                  <p:attrNameLst>
+                                    <p:attrName>style.visibility</p:attrName>
+                                  </p:attrNameLst>
+                                </p:cBhvr>
+                                <p:to>
+                                  <p:strVal val="visible"/>
+                                </p:to>
+                              </p:set>
+                              <p:animEffect transition="in" filter="randombar(horizontal)">
+                                <p:cBhvr>
+                                  <p:cTn id="111" dur="570"/>
+                                  <p:tgtEl>
+                                    <p:spTgt spid="6"/>
+                                  </p:tgtEl>
+                                </p:cBhvr>
+                              </p:animEffect>
+                            </p:childTnLst>
+                          </p:cTn>
+                        </p:par>
+                        <p:par>
+                          <p:cTn id="13" dur="690" fill="hold" nodeType="afterEffect" grpId="0" presetID="21" presetClass="entr" presetSubtype="1">
+                            <p:stCondLst>
+                              <p:cond delay="520"/>
+                            </p:stCondLst>
+                            <p:childTnLst>
+                              <p:set>
+                                <p:cBhvr>
+                                  <p:cTn id="14" dur="1" fill="hold">
+                                    <p:stCondLst>
+                                      <p:cond delay="0"/>
+                                    </p:stCondLst>
+                                  </p:cTn>
+                                  <p:tgtEl>
+                                    <p:spTgt spid="7"/>
+                                  </p:tgtEl>
+                                  <p:attrNameLst>
+                                    <p:attrName>style.visibility</p:attrName>
+                                  </p:attrNameLst>
+                                </p:cBhvr>
+                                <p:to>
+                                  <p:strVal val="visible"/>
+                                </p:to>
+                              </p:set>
+                              <p:animEffect transition="in" filter="wheel(1)">
+                                <p:cBhvr>
+                                  <p:cTn id="131" dur="690"/>
+                                  <p:tgtEl>
+                                    <p:spTgt spid="7"/>
+                                  </p:tgtEl>
+                                </p:cBhvr>
+                              </p:animEffect>
+                            </p:childTnLst>
+                          </p:cTn>
+                        </p:par>
+                        <p:par>
+                          <p:cTn id="15" dur="810" fill="hold" nodeType="afterEffect" grpId="0" presetID="22" presetClass="entr" presetSubtype="4">
+                            <p:stCondLst>
+                              <p:cond delay="650"/>
+                            </p:stCondLst>
+                            <p:childTnLst>
+                              <p:set>
+                                <p:cBhvr>
+                                  <p:cTn id="16" dur="1" fill="hold">
+                                    <p:stCondLst>
+                                      <p:cond delay="0"/>
+                                    </p:stCondLst>
+                                  </p:cTn>
+                                  <p:tgtEl>
+                                    <p:spTgt spid="8"/>
+                                  </p:tgtEl>
+                                  <p:attrNameLst>
+                                    <p:attrName>style.visibility</p:attrName>
+                                  </p:attrNameLst>
+                                </p:cBhvr>
+                                <p:to>
+                                  <p:strVal val="visible"/>
+                                </p:to>
+                              </p:set>
+                              <p:animEffect transition="in" filter="wipe(down)">
+                                <p:cBhvr>
+                                  <p:cTn id="151" dur="810"/>
+                                  <p:tgtEl>
+                                    <p:spTgt spid="8"/>
+                                  </p:tgtEl>
+                                </p:cBhvr>
+                              </p:animEffect>
+                            </p:childTnLst>
+                          </p:cTn>
+                        </p:par>
+                        <p:par>
+                          <p:cTn id="17" dur="450" fill="hold" nodeType="afterEffect" grpId="0" presetID="9" presetClass="entr" presetSubtype="0">
+                            <p:stCondLst>
+                              <p:cond delay="780"/>
+                            </p:stCondLst>
+                            <p:childTnLst>
+                              <p:set>
+                                <p:cBhvr>
+                                  <p:cTn id="18" dur="1" fill="hold">
+                                    <p:stCondLst>
+                                      <p:cond delay="0"/>
+                                    </p:stCondLst>
+                                  </p:cTn>
+                                  <p:tgtEl>
+                                    <p:spTgt spid="9"/>
+                                  </p:tgtEl>
+                                  <p:attrNameLst>
+                                    <p:attrName>style.visibility</p:attrName>
+                                  </p:attrNameLst>
+                                </p:cBhvr>
+                                <p:to>
+                                  <p:strVal val="visible"/>
+                                </p:to>
+                              </p:set>
+                              <p:animEffect transition="in" filter="fade">
+                                <p:cBhvr>
+                                  <p:cTn id="171" dur="450"/>
+                                  <p:tgtEl>
+                                    <p:spTgt spid="9"/>
+                                  </p:tgtEl>
+                                </p:cBhvr>
+                              </p:animEffect>
+                            </p:childTnLst>
+                          </p:cTn>
+                        </p:par>
+                        <p:par>
+                          <p:cTn id="19" dur="570" fill="hold" nodeType="afterEffect" grpId="0" presetID="22" presetClass="entr" presetSubtype="2">
+                            <p:stCondLst>
+                              <p:cond delay="910"/>
+                            </p:stCondLst>
+                            <p:childTnLst>
+                              <p:set>
+                                <p:cBhvr>
+                                  <p:cTn id="20" dur="1" fill="hold">
+                                    <p:stCondLst>
+                                      <p:cond delay="0"/>
+                                    </p:stCondLst>
+                                  </p:cTn>
+                                  <p:tgtEl>
+                                    <p:spTgt spid="10"/>
+                                  </p:tgtEl>
+                                  <p:attrNameLst>
+                                    <p:attrName>style.visibility</p:attrName>
+                                  </p:attrNameLst>
+                                </p:cBhvr>
+                                <p:to>
+                                  <p:strVal val="visible"/>
+                                </p:to>
+                              </p:set>
+                              <p:animEffect transition="in" filter="wipe(right)">
+                                <p:cBhvr>
+                                  <p:cTn id="191" dur="570"/>
+                                  <p:tgtEl>
+                                    <p:spTgt spid="10"/>
+                                  </p:tgtEl>
+                                </p:cBhvr>
+                              </p:animEffect>
+                            </p:childTnLst>
+                          </p:cTn>
+                        </p:par>
+                        <p:par>
+                          <p:cTn id="21" dur="690" fill="hold" nodeType="afterEffect" grpId="0" presetID="18" presetClass="entr" presetSubtype="12">
+                            <p:stCondLst>
+                              <p:cond delay="1040"/>
+                            </p:stCondLst>
+                            <p:childTnLst>
+                              <p:set>
+                                <p:cBhvr>
+                                  <p:cTn id="22" dur="1" fill="hold">
+                                    <p:stCondLst>
+                                      <p:cond delay="0"/>
+                                    </p:stCondLst>
+                                  </p:cTn>
+                                  <p:tgtEl>
+                                    <p:spTgt spid="11"/>
+                                  </p:tgtEl>
+                                  <p:attrNameLst>
+                                    <p:attrName>style.visibility</p:attrName>
+                                  </p:attrNameLst>
+                                </p:cBhvr>
+                                <p:to>
+                                  <p:strVal val="visible"/>
+                                </p:to>
+                              </p:set>
+                              <p:animEffect transition="in" filter="circle(in)">
+                                <p:cBhvr>
+                                  <p:cTn id="211" dur="690"/>
+                                  <p:tgtEl>
+                                    <p:spTgt spid="11"/>
+                                  </p:tgtEl>
+                                </p:cBhvr>
+                              </p:animEffect>
+                            </p:childTnLst>
+                          </p:cTn>
+                        </p:par>
+                        <p:par>
+                          <p:cTn id="23" dur="810" fill="hold" nodeType="afterEffect" grpId="0" presetID="22" presetClass="entr" presetSubtype="1">
+                            <p:stCondLst>
+                              <p:cond delay="1170"/>
+                            </p:stCondLst>
+                            <p:childTnLst>
+                              <p:set>
+                                <p:cBhvr>
+                                  <p:cTn id="24" dur="1" fill="hold">
+                                    <p:stCondLst>
+                                      <p:cond delay="0"/>
+                                    </p:stCondLst>
+                                  </p:cTn>
+                                  <p:tgtEl>
+                                    <p:spTgt spid="12"/>
+                                  </p:tgtEl>
+                                  <p:attrNameLst>
+                                    <p:attrName>style.visibility</p:attrName>
+                                  </p:attrNameLst>
+                                </p:cBhvr>
+                                <p:to>
+                                  <p:strVal val="visible"/>
+                                </p:to>
+                              </p:set>
+                              <p:animEffect transition="in" filter="wipe(up)">
+                                <p:cBhvr>
+                                  <p:cTn id="231" dur="810"/>
+                                  <p:tgtEl>
+                                    <p:spTgt spid="12"/>
+                                  </p:tgtEl>
+                                </p:cBhvr>
+                              </p:animEffect>
+                            </p:childTnLst>
+                          </p:cTn>
+                        </p:par>
+                        <p:par>
+                          <p:cTn id="25" dur="450" fill="hold" nodeType="afterEffect" grpId="0" presetID="42" presetClass="entr" presetSubtype="10">
+                            <p:stCondLst>
+                              <p:cond delay="1300"/>
+                            </p:stCondLst>
+                            <p:childTnLst>
+                              <p:set>
+                                <p:cBhvr>
+                                  <p:cTn id="26" dur="1" fill="hold">
+                                    <p:stCondLst>
+                                      <p:cond delay="0"/>
+                                    </p:stCondLst>
+                                  </p:cTn>
+                                  <p:tgtEl>
+                                    <p:spTgt spid="13"/>
+                                  </p:tgtEl>
+                                  <p:attrNameLst>
+                                    <p:attrName>style.visibility</p:attrName>
+                                  </p:attrNameLst>
+                                </p:cBhvr>
+                                <p:to>
+                                  <p:strVal val="visible"/>
+                                </p:to>
+                              </p:set>
+                              <p:animEffect transition="in" filter="blinds(horizontal)">
+                                <p:cBhvr>
+                                  <p:cTn id="251" dur="450"/>
+                                  <p:tgtEl>
+                                    <p:spTgt spid="13"/>
+                                  </p:tgtEl>
+                                </p:cBhvr>
+                              </p:animEffect>
+                            </p:childTnLst>
+                          </p:cTn>
+                        </p:par>
+                        <p:par>
+                          <p:cTn id="27" dur="570" fill="hold" nodeType="afterEffect" grpId="0" presetID="43" presetClass="entr" presetSubtype="0">
+                            <p:stCondLst>
+                              <p:cond delay="1430"/>
+                            </p:stCondLst>
+                            <p:childTnLst>
+                              <p:set>
+                                <p:cBhvr>
+                                  <p:cTn id="28" dur="1" fill="hold">
+                                    <p:stCondLst>
+                                      <p:cond delay="0"/>
+                                    </p:stCondLst>
+                                  </p:cTn>
+                                  <p:tgtEl>
+                                    <p:spTgt spid="14"/>
+                                  </p:tgtEl>
+                                  <p:attrNameLst>
+                                    <p:attrName>style.visibility</p:attrName>
+                                  </p:attrNameLst>
+                                </p:cBhvr>
+                                <p:to>
+                                  <p:strVal val="visible"/>
+                                </p:to>
+                              </p:set>
+                              <p:animEffect transition="in" filter="checkerboard(across)">
+                                <p:cBhvr>
+                                  <p:cTn id="271" dur="570"/>
+                                  <p:tgtEl>
+                                    <p:spTgt spid="14"/>
+                                  </p:tgtEl>
+                                </p:cBhvr>
+                              </p:animEffect>
+                            </p:childTnLst>
+                          </p:cTn>
+                        </p:par>
+                        <p:par>
+                          <p:cTn id="29" dur="690" fill="hold" nodeType="afterEffect" grpId="0" presetID="21" presetClass="entr" presetSubtype="2">
+                            <p:stCondLst>
+                              <p:cond delay="1560"/>
+                            </p:stCondLst>
+                            <p:childTnLst>
+                              <p:set>
+                                <p:cBhvr>
+                                  <p:cTn id="30" dur="1" fill="hold">
+                                    <p:stCondLst>
+                                      <p:cond delay="0"/>
+                                    </p:stCondLst>
+                                  </p:cTn>
+                                  <p:tgtEl>
+                                    <p:spTgt spid="15"/>
+                                  </p:tgtEl>
+                                  <p:attrNameLst>
+                                    <p:attrName>style.visibility</p:attrName>
+                                  </p:attrNameLst>
+                                </p:cBhvr>
+                                <p:to>
+                                  <p:strVal val="visible"/>
+                                </p:to>
+                              </p:set>
+                              <p:animEffect transition="in" filter="wheel(2)">
+                                <p:cBhvr>
+                                  <p:cTn id="291" dur="690"/>
+                                  <p:tgtEl>
+                                    <p:spTgt spid="15"/>
+                                  </p:tgtEl>
+                                </p:cBhvr>
+                              </p:animEffect>
+                            </p:childTnLst>
+                          </p:cTn>
+                        </p:par>
+                        <p:par>
+                          <p:cTn id="31" dur="810" fill="hold" nodeType="afterEffect" grpId="0" presetID="10" presetClass="entr" presetSubtype="0">
+                            <p:stCondLst>
+                              <p:cond delay="1690"/>
+                            </p:stCondLst>
+                            <p:childTnLst>
+                              <p:set>
+                                <p:cBhvr>
+                                  <p:cTn id="32" dur="1" fill="hold">
+                                    <p:stCondLst>
+                                      <p:cond delay="0"/>
+                                    </p:stCondLst>
+                                  </p:cTn>
+                                  <p:tgtEl>
+                                    <p:spTgt spid="16"/>
+                                  </p:tgtEl>
+                                  <p:attrNameLst>
+                                    <p:attrName>style.visibility</p:attrName>
+                                  </p:attrNameLst>
+                                </p:cBhvr>
+                                <p:to>
+                                  <p:strVal val="visible"/>
+                                </p:to>
+                              </p:set>
+                              <p:animEffect transition="in" filter="dissolve">
+                                <p:cBhvr>
+                                  <p:cTn id="311" dur="810"/>
+                                  <p:tgtEl>
+                                    <p:spTgt spid="16"/>
+                                  </p:tgtEl>
+                                </p:cBhvr>
+                              </p:animEffect>
+                            </p:childTnLst>
+                          </p:cTn>
+                        </p:par>
+                      </p:childTnLst>
+                    </p:cTn>
+                  </p:par>
+                </p:childTnLst>
+              </p:cTn>
+              <p:prevCondLst>
+                <p:cond evt="onPrev" delay="0">
+                  <p:tgtEl>
+                    <p:sldTgt/>
+                  </p:tgtEl>
+                </p:cond>
+              </p:prevCondLst>
+              <p:nextCondLst>
+                <p:cond evt="onNext" delay="0">
+                  <p:tgtEl>
+                    <p:sldTgt/>
+                  </p:tgtEl>
+                </p:cond>
+              </p:nextCondLst>
+            </p:seq>
+          </p:childTnLst>
+        </p:cTn>
+      </p:par>
+    </p:tnLst>
+  </p:timing>
 </p:sld>
 </file>
 
@@ -9511,8 +12938,537 @@
     <a:masterClrMapping/>
   </p:clrMapOvr>
   <p:transition spd="med">
-    <p:fade/>
+    <p:dissolve/>
   </p:transition>
+  <p:timing>
+    <p:tnLst>
+      <p:par>
+        <p:cTn id="1" dur="indefinite" restart="never" nodeType="tmRoot">
+          <p:childTnLst>
+            <p:seq concurrent="1" nextAc="seek">
+              <p:cTn id="2" dur="indefinite" nodeType="mainSeq">
+                <p:childTnLst>
+                  <p:par>
+                    <p:cTn id="3" fill="hold">
+                      <p:stCondLst>
+                        <p:cond delay="indefinite"/>
+                      </p:stCondLst>
+                      <p:childTnLst>
+                        <p:par>
+                          <p:cTn id="5" dur="810" fill="hold" nodeType="clickEffect" grpId="0" presetID="22" presetClass="entr" presetSubtype="8">
+                            <p:stCondLst>
+                              <p:cond delay="0"/>
+                            </p:stCondLst>
+                            <p:childTnLst>
+                              <p:set>
+                                <p:cBhvr>
+                                  <p:cTn id="6" dur="1" fill="hold">
+                                    <p:stCondLst>
+                                      <p:cond delay="0"/>
+                                    </p:stCondLst>
+                                  </p:cTn>
+                                  <p:tgtEl>
+                                    <p:spTgt spid="3"/>
+                                  </p:tgtEl>
+                                  <p:attrNameLst>
+                                    <p:attrName>style.visibility</p:attrName>
+                                  </p:attrNameLst>
+                                </p:cBhvr>
+                                <p:to>
+                                  <p:strVal val="visible"/>
+                                </p:to>
+                              </p:set>
+                              <p:animEffect transition="in" filter="wipe(left)">
+                                <p:cBhvr>
+                                  <p:cTn id="51" dur="810"/>
+                                  <p:tgtEl>
+                                    <p:spTgt spid="3"/>
+                                  </p:tgtEl>
+                                </p:cBhvr>
+                              </p:animEffect>
+                            </p:childTnLst>
+                          </p:cTn>
+                        </p:par>
+                        <p:par>
+                          <p:cTn id="7" dur="450" fill="hold" nodeType="afterEffect" grpId="0" presetID="37" presetClass="entr" presetSubtype="0">
+                            <p:stCondLst>
+                              <p:cond delay="130"/>
+                            </p:stCondLst>
+                            <p:childTnLst>
+                              <p:set>
+                                <p:cBhvr>
+                                  <p:cTn id="8" dur="1" fill="hold">
+                                    <p:stCondLst>
+                                      <p:cond delay="0"/>
+                                    </p:stCondLst>
+                                  </p:cTn>
+                                  <p:tgtEl>
+                                    <p:spTgt spid="4"/>
+                                  </p:tgtEl>
+                                  <p:attrNameLst>
+                                    <p:attrName>style.visibility</p:attrName>
+                                  </p:attrNameLst>
+                                </p:cBhvr>
+                                <p:to>
+                                  <p:strVal val="visible"/>
+                                </p:to>
+                              </p:set>
+                              <p:animEffect transition="in" filter="wedge">
+                                <p:cBhvr>
+                                  <p:cTn id="71" dur="450"/>
+                                  <p:tgtEl>
+                                    <p:spTgt spid="4"/>
+                                  </p:tgtEl>
+                                </p:cBhvr>
+                              </p:animEffect>
+                            </p:childTnLst>
+                          </p:cTn>
+                        </p:par>
+                        <p:par>
+                          <p:cTn id="9" dur="570" fill="hold" nodeType="afterEffect" grpId="0" presetID="52" presetClass="entr" presetSubtype="0">
+                            <p:stCondLst>
+                              <p:cond delay="260"/>
+                            </p:stCondLst>
+                            <p:childTnLst>
+                              <p:set>
+                                <p:cBhvr>
+                                  <p:cTn id="10" dur="1" fill="hold">
+                                    <p:stCondLst>
+                                      <p:cond delay="0"/>
+                                    </p:stCondLst>
+                                  </p:cTn>
+                                  <p:tgtEl>
+                                    <p:spTgt spid="5"/>
+                                  </p:tgtEl>
+                                  <p:attrNameLst>
+                                    <p:attrName>style.visibility</p:attrName>
+                                  </p:attrNameLst>
+                                </p:cBhvr>
+                                <p:to>
+                                  <p:strVal val="visible"/>
+                                </p:to>
+                              </p:set>
+                              <p:animEffect transition="in" filter="randombar(horizontal)">
+                                <p:cBhvr>
+                                  <p:cTn id="91" dur="570"/>
+                                  <p:tgtEl>
+                                    <p:spTgt spid="5"/>
+                                  </p:tgtEl>
+                                </p:cBhvr>
+                              </p:animEffect>
+                            </p:childTnLst>
+                          </p:cTn>
+                        </p:par>
+                        <p:par>
+                          <p:cTn id="11" dur="690" fill="hold" nodeType="afterEffect" grpId="0" presetID="21" presetClass="entr" presetSubtype="1">
+                            <p:stCondLst>
+                              <p:cond delay="390"/>
+                            </p:stCondLst>
+                            <p:childTnLst>
+                              <p:set>
+                                <p:cBhvr>
+                                  <p:cTn id="12" dur="1" fill="hold">
+                                    <p:stCondLst>
+                                      <p:cond delay="0"/>
+                                    </p:stCondLst>
+                                  </p:cTn>
+                                  <p:tgtEl>
+                                    <p:spTgt spid="6"/>
+                                  </p:tgtEl>
+                                  <p:attrNameLst>
+                                    <p:attrName>style.visibility</p:attrName>
+                                  </p:attrNameLst>
+                                </p:cBhvr>
+                                <p:to>
+                                  <p:strVal val="visible"/>
+                                </p:to>
+                              </p:set>
+                              <p:animEffect transition="in" filter="wheel(1)">
+                                <p:cBhvr>
+                                  <p:cTn id="111" dur="690"/>
+                                  <p:tgtEl>
+                                    <p:spTgt spid="6"/>
+                                  </p:tgtEl>
+                                </p:cBhvr>
+                              </p:animEffect>
+                            </p:childTnLst>
+                          </p:cTn>
+                        </p:par>
+                        <p:par>
+                          <p:cTn id="13" dur="810" fill="hold" nodeType="afterEffect" grpId="0" presetID="22" presetClass="entr" presetSubtype="4">
+                            <p:stCondLst>
+                              <p:cond delay="520"/>
+                            </p:stCondLst>
+                            <p:childTnLst>
+                              <p:set>
+                                <p:cBhvr>
+                                  <p:cTn id="14" dur="1" fill="hold">
+                                    <p:stCondLst>
+                                      <p:cond delay="0"/>
+                                    </p:stCondLst>
+                                  </p:cTn>
+                                  <p:tgtEl>
+                                    <p:spTgt spid="8"/>
+                                  </p:tgtEl>
+                                  <p:attrNameLst>
+                                    <p:attrName>style.visibility</p:attrName>
+                                  </p:attrNameLst>
+                                </p:cBhvr>
+                                <p:to>
+                                  <p:strVal val="visible"/>
+                                </p:to>
+                              </p:set>
+                              <p:animEffect transition="in" filter="wipe(down)">
+                                <p:cBhvr>
+                                  <p:cTn id="131" dur="810"/>
+                                  <p:tgtEl>
+                                    <p:spTgt spid="8"/>
+                                  </p:tgtEl>
+                                </p:cBhvr>
+                              </p:animEffect>
+                            </p:childTnLst>
+                          </p:cTn>
+                        </p:par>
+                        <p:par>
+                          <p:cTn id="15" dur="450" fill="hold" nodeType="afterEffect" grpId="0" presetID="9" presetClass="entr" presetSubtype="0">
+                            <p:stCondLst>
+                              <p:cond delay="650"/>
+                            </p:stCondLst>
+                            <p:childTnLst>
+                              <p:set>
+                                <p:cBhvr>
+                                  <p:cTn id="16" dur="1" fill="hold">
+                                    <p:stCondLst>
+                                      <p:cond delay="0"/>
+                                    </p:stCondLst>
+                                  </p:cTn>
+                                  <p:tgtEl>
+                                    <p:spTgt spid="14"/>
+                                  </p:tgtEl>
+                                  <p:attrNameLst>
+                                    <p:attrName>style.visibility</p:attrName>
+                                  </p:attrNameLst>
+                                </p:cBhvr>
+                                <p:to>
+                                  <p:strVal val="visible"/>
+                                </p:to>
+                              </p:set>
+                              <p:animEffect transition="in" filter="fade">
+                                <p:cBhvr>
+                                  <p:cTn id="151" dur="450"/>
+                                  <p:tgtEl>
+                                    <p:spTgt spid="14"/>
+                                  </p:tgtEl>
+                                </p:cBhvr>
+                              </p:animEffect>
+                            </p:childTnLst>
+                          </p:cTn>
+                        </p:par>
+                        <p:par>
+                          <p:cTn id="17" dur="570" fill="hold" nodeType="afterEffect" grpId="0" presetID="22" presetClass="entr" presetSubtype="2">
+                            <p:stCondLst>
+                              <p:cond delay="780"/>
+                            </p:stCondLst>
+                            <p:childTnLst>
+                              <p:set>
+                                <p:cBhvr>
+                                  <p:cTn id="18" dur="1" fill="hold">
+                                    <p:stCondLst>
+                                      <p:cond delay="0"/>
+                                    </p:stCondLst>
+                                  </p:cTn>
+                                  <p:tgtEl>
+                                    <p:spTgt spid="12"/>
+                                  </p:tgtEl>
+                                  <p:attrNameLst>
+                                    <p:attrName>style.visibility</p:attrName>
+                                  </p:attrNameLst>
+                                </p:cBhvr>
+                                <p:to>
+                                  <p:strVal val="visible"/>
+                                </p:to>
+                              </p:set>
+                              <p:animEffect transition="in" filter="wipe(right)">
+                                <p:cBhvr>
+                                  <p:cTn id="171" dur="570"/>
+                                  <p:tgtEl>
+                                    <p:spTgt spid="12"/>
+                                  </p:tgtEl>
+                                </p:cBhvr>
+                              </p:animEffect>
+                            </p:childTnLst>
+                          </p:cTn>
+                        </p:par>
+                        <p:par>
+                          <p:cTn id="19" dur="690" fill="hold" nodeType="afterEffect" grpId="0" presetID="18" presetClass="entr" presetSubtype="12">
+                            <p:stCondLst>
+                              <p:cond delay="910"/>
+                            </p:stCondLst>
+                            <p:childTnLst>
+                              <p:set>
+                                <p:cBhvr>
+                                  <p:cTn id="20" dur="1" fill="hold">
+                                    <p:stCondLst>
+                                      <p:cond delay="0"/>
+                                    </p:stCondLst>
+                                  </p:cTn>
+                                  <p:tgtEl>
+                                    <p:spTgt spid="15"/>
+                                  </p:tgtEl>
+                                  <p:attrNameLst>
+                                    <p:attrName>style.visibility</p:attrName>
+                                  </p:attrNameLst>
+                                </p:cBhvr>
+                                <p:to>
+                                  <p:strVal val="visible"/>
+                                </p:to>
+                              </p:set>
+                              <p:animEffect transition="in" filter="circle(in)">
+                                <p:cBhvr>
+                                  <p:cTn id="191" dur="690"/>
+                                  <p:tgtEl>
+                                    <p:spTgt spid="15"/>
+                                  </p:tgtEl>
+                                </p:cBhvr>
+                              </p:animEffect>
+                            </p:childTnLst>
+                          </p:cTn>
+                        </p:par>
+                        <p:par>
+                          <p:cTn id="21" dur="810" fill="hold" nodeType="afterEffect" grpId="0" presetID="22" presetClass="entr" presetSubtype="1">
+                            <p:stCondLst>
+                              <p:cond delay="1040"/>
+                            </p:stCondLst>
+                            <p:childTnLst>
+                              <p:set>
+                                <p:cBhvr>
+                                  <p:cTn id="22" dur="1" fill="hold">
+                                    <p:stCondLst>
+                                      <p:cond delay="0"/>
+                                    </p:stCondLst>
+                                  </p:cTn>
+                                  <p:tgtEl>
+                                    <p:spTgt spid="10"/>
+                                  </p:tgtEl>
+                                  <p:attrNameLst>
+                                    <p:attrName>style.visibility</p:attrName>
+                                  </p:attrNameLst>
+                                </p:cBhvr>
+                                <p:to>
+                                  <p:strVal val="visible"/>
+                                </p:to>
+                              </p:set>
+                              <p:animEffect transition="in" filter="wipe(up)">
+                                <p:cBhvr>
+                                  <p:cTn id="211" dur="810"/>
+                                  <p:tgtEl>
+                                    <p:spTgt spid="10"/>
+                                  </p:tgtEl>
+                                </p:cBhvr>
+                              </p:animEffect>
+                            </p:childTnLst>
+                          </p:cTn>
+                        </p:par>
+                        <p:par>
+                          <p:cTn id="23" dur="450" fill="hold" nodeType="afterEffect" grpId="0" presetID="42" presetClass="entr" presetSubtype="10">
+                            <p:stCondLst>
+                              <p:cond delay="1170"/>
+                            </p:stCondLst>
+                            <p:childTnLst>
+                              <p:set>
+                                <p:cBhvr>
+                                  <p:cTn id="24" dur="1" fill="hold">
+                                    <p:stCondLst>
+                                      <p:cond delay="0"/>
+                                    </p:stCondLst>
+                                  </p:cTn>
+                                  <p:tgtEl>
+                                    <p:spTgt spid="7"/>
+                                  </p:tgtEl>
+                                  <p:attrNameLst>
+                                    <p:attrName>style.visibility</p:attrName>
+                                  </p:attrNameLst>
+                                </p:cBhvr>
+                                <p:to>
+                                  <p:strVal val="visible"/>
+                                </p:to>
+                              </p:set>
+                              <p:animEffect transition="in" filter="blinds(horizontal)">
+                                <p:cBhvr>
+                                  <p:cTn id="231" dur="450"/>
+                                  <p:tgtEl>
+                                    <p:spTgt spid="7"/>
+                                  </p:tgtEl>
+                                </p:cBhvr>
+                              </p:animEffect>
+                            </p:childTnLst>
+                          </p:cTn>
+                        </p:par>
+                        <p:par>
+                          <p:cTn id="25" dur="570" fill="hold" nodeType="afterEffect" grpId="0" presetID="43" presetClass="entr" presetSubtype="0">
+                            <p:stCondLst>
+                              <p:cond delay="1300"/>
+                            </p:stCondLst>
+                            <p:childTnLst>
+                              <p:set>
+                                <p:cBhvr>
+                                  <p:cTn id="26" dur="1" fill="hold">
+                                    <p:stCondLst>
+                                      <p:cond delay="0"/>
+                                    </p:stCondLst>
+                                  </p:cTn>
+                                  <p:tgtEl>
+                                    <p:spTgt spid="13"/>
+                                  </p:tgtEl>
+                                  <p:attrNameLst>
+                                    <p:attrName>style.visibility</p:attrName>
+                                  </p:attrNameLst>
+                                </p:cBhvr>
+                                <p:to>
+                                  <p:strVal val="visible"/>
+                                </p:to>
+                              </p:set>
+                              <p:animEffect transition="in" filter="checkerboard(across)">
+                                <p:cBhvr>
+                                  <p:cTn id="251" dur="570"/>
+                                  <p:tgtEl>
+                                    <p:spTgt spid="13"/>
+                                  </p:tgtEl>
+                                </p:cBhvr>
+                              </p:animEffect>
+                            </p:childTnLst>
+                          </p:cTn>
+                        </p:par>
+                        <p:par>
+                          <p:cTn id="27" dur="690" fill="hold" nodeType="afterEffect" grpId="0" presetID="21" presetClass="entr" presetSubtype="2">
+                            <p:stCondLst>
+                              <p:cond delay="1430"/>
+                            </p:stCondLst>
+                            <p:childTnLst>
+                              <p:set>
+                                <p:cBhvr>
+                                  <p:cTn id="28" dur="1" fill="hold">
+                                    <p:stCondLst>
+                                      <p:cond delay="0"/>
+                                    </p:stCondLst>
+                                  </p:cTn>
+                                  <p:tgtEl>
+                                    <p:spTgt spid="11"/>
+                                  </p:tgtEl>
+                                  <p:attrNameLst>
+                                    <p:attrName>style.visibility</p:attrName>
+                                  </p:attrNameLst>
+                                </p:cBhvr>
+                                <p:to>
+                                  <p:strVal val="visible"/>
+                                </p:to>
+                              </p:set>
+                              <p:animEffect transition="in" filter="wheel(2)">
+                                <p:cBhvr>
+                                  <p:cTn id="271" dur="690"/>
+                                  <p:tgtEl>
+                                    <p:spTgt spid="11"/>
+                                  </p:tgtEl>
+                                </p:cBhvr>
+                              </p:animEffect>
+                            </p:childTnLst>
+                          </p:cTn>
+                        </p:par>
+                        <p:par>
+                          <p:cTn id="29" dur="810" fill="hold" nodeType="afterEffect" grpId="0" presetID="10" presetClass="entr" presetSubtype="0">
+                            <p:stCondLst>
+                              <p:cond delay="1560"/>
+                            </p:stCondLst>
+                            <p:childTnLst>
+                              <p:set>
+                                <p:cBhvr>
+                                  <p:cTn id="30" dur="1" fill="hold">
+                                    <p:stCondLst>
+                                      <p:cond delay="0"/>
+                                    </p:stCondLst>
+                                  </p:cTn>
+                                  <p:tgtEl>
+                                    <p:spTgt spid="9"/>
+                                  </p:tgtEl>
+                                  <p:attrNameLst>
+                                    <p:attrName>style.visibility</p:attrName>
+                                  </p:attrNameLst>
+                                </p:cBhvr>
+                                <p:to>
+                                  <p:strVal val="visible"/>
+                                </p:to>
+                              </p:set>
+                              <p:animEffect transition="in" filter="dissolve">
+                                <p:cBhvr>
+                                  <p:cTn id="291" dur="810"/>
+                                  <p:tgtEl>
+                                    <p:spTgt spid="9"/>
+                                  </p:tgtEl>
+                                </p:cBhvr>
+                              </p:animEffect>
+                            </p:childTnLst>
+                          </p:cTn>
+                        </p:par>
+                        <p:par>
+                          <p:cTn id="31" dur="450" fill="hold" nodeType="afterEffect" grpId="0" presetID="25" presetClass="entr" presetSubtype="1">
+                            <p:stCondLst>
+                              <p:cond delay="1690"/>
+                            </p:stCondLst>
+                            <p:childTnLst>
+                              <p:set>
+                                <p:cBhvr>
+                                  <p:cTn id="32" dur="1" fill="hold">
+                                    <p:stCondLst>
+                                      <p:cond delay="0"/>
+                                    </p:stCondLst>
+                                  </p:cTn>
+                                  <p:tgtEl>
+                                    <p:spTgt spid="16"/>
+                                  </p:tgtEl>
+                                  <p:attrNameLst>
+                                    <p:attrName>style.visibility</p:attrName>
+                                  </p:attrNameLst>
+                                </p:cBhvr>
+                                <p:to>
+                                  <p:strVal val="visible"/>
+                                </p:to>
+                              </p:set>
+                              <p:animEffect transition="in" filter="strips(downRight)">
+                                <p:cBhvr>
+                                  <p:cTn id="311" dur="450"/>
+                                  <p:tgtEl>
+                                    <p:spTgt spid="16"/>
+                                  </p:tgtEl>
+                                </p:cBhvr>
+                              </p:animEffect>
+                            </p:childTnLst>
+                          </p:cTn>
+                        </p:par>
+                      </p:childTnLst>
+                    </p:cTn>
+                  </p:par>
+                </p:childTnLst>
+              </p:cTn>
+              <p:prevCondLst>
+                <p:cond evt="onPrev" delay="0">
+                  <p:tgtEl>
+                    <p:sldTgt/>
+                  </p:tgtEl>
+                </p:cond>
+              </p:prevCondLst>
+              <p:nextCondLst>
+                <p:cond evt="onNext" delay="0">
+                  <p:tgtEl>
+                    <p:sldTgt/>
+                  </p:tgtEl>
+                </p:cond>
+              </p:nextCondLst>
+            </p:seq>
+          </p:childTnLst>
+        </p:cTn>
+      </p:par>
+    </p:tnLst>
+  </p:timing>
 </p:sld>
 </file>
 
@@ -9840,8 +13796,257 @@
     <a:masterClrMapping/>
   </p:clrMapOvr>
   <p:transition spd="med">
-    <p:fade/>
+    <p:zoom dir="in"/>
   </p:transition>
+  <p:timing>
+    <p:tnLst>
+      <p:par>
+        <p:cTn id="1" dur="indefinite" restart="never" nodeType="tmRoot">
+          <p:childTnLst>
+            <p:seq concurrent="1" nextAc="seek">
+              <p:cTn id="2" dur="indefinite" nodeType="mainSeq">
+                <p:childTnLst>
+                  <p:par>
+                    <p:cTn id="3" fill="hold">
+                      <p:stCondLst>
+                        <p:cond delay="indefinite"/>
+                      </p:stCondLst>
+                      <p:childTnLst>
+                        <p:par>
+                          <p:cTn id="5" dur="450" fill="hold" nodeType="clickEffect" grpId="0" presetID="37" presetClass="entr" presetSubtype="0">
+                            <p:stCondLst>
+                              <p:cond delay="0"/>
+                            </p:stCondLst>
+                            <p:childTnLst>
+                              <p:set>
+                                <p:cBhvr>
+                                  <p:cTn id="6" dur="1" fill="hold">
+                                    <p:stCondLst>
+                                      <p:cond delay="0"/>
+                                    </p:stCondLst>
+                                  </p:cTn>
+                                  <p:tgtEl>
+                                    <p:spTgt spid="3"/>
+                                  </p:tgtEl>
+                                  <p:attrNameLst>
+                                    <p:attrName>style.visibility</p:attrName>
+                                  </p:attrNameLst>
+                                </p:cBhvr>
+                                <p:to>
+                                  <p:strVal val="visible"/>
+                                </p:to>
+                              </p:set>
+                              <p:animEffect transition="in" filter="wedge">
+                                <p:cBhvr>
+                                  <p:cTn id="51" dur="450"/>
+                                  <p:tgtEl>
+                                    <p:spTgt spid="3"/>
+                                  </p:tgtEl>
+                                </p:cBhvr>
+                              </p:animEffect>
+                            </p:childTnLst>
+                          </p:cTn>
+                        </p:par>
+                        <p:par>
+                          <p:cTn id="7" dur="570" fill="hold" nodeType="afterEffect" grpId="0" presetID="52" presetClass="entr" presetSubtype="0">
+                            <p:stCondLst>
+                              <p:cond delay="130"/>
+                            </p:stCondLst>
+                            <p:childTnLst>
+                              <p:set>
+                                <p:cBhvr>
+                                  <p:cTn id="8" dur="1" fill="hold">
+                                    <p:stCondLst>
+                                      <p:cond delay="0"/>
+                                    </p:stCondLst>
+                                  </p:cTn>
+                                  <p:tgtEl>
+                                    <p:spTgt spid="4"/>
+                                  </p:tgtEl>
+                                  <p:attrNameLst>
+                                    <p:attrName>style.visibility</p:attrName>
+                                  </p:attrNameLst>
+                                </p:cBhvr>
+                                <p:to>
+                                  <p:strVal val="visible"/>
+                                </p:to>
+                              </p:set>
+                              <p:animEffect transition="in" filter="randombar(horizontal)">
+                                <p:cBhvr>
+                                  <p:cTn id="71" dur="570"/>
+                                  <p:tgtEl>
+                                    <p:spTgt spid="4"/>
+                                  </p:tgtEl>
+                                </p:cBhvr>
+                              </p:animEffect>
+                            </p:childTnLst>
+                          </p:cTn>
+                        </p:par>
+                        <p:par>
+                          <p:cTn id="9" dur="690" fill="hold" nodeType="afterEffect" grpId="0" presetID="21" presetClass="entr" presetSubtype="1">
+                            <p:stCondLst>
+                              <p:cond delay="260"/>
+                            </p:stCondLst>
+                            <p:childTnLst>
+                              <p:set>
+                                <p:cBhvr>
+                                  <p:cTn id="10" dur="1" fill="hold">
+                                    <p:stCondLst>
+                                      <p:cond delay="0"/>
+                                    </p:stCondLst>
+                                  </p:cTn>
+                                  <p:tgtEl>
+                                    <p:spTgt spid="5"/>
+                                  </p:tgtEl>
+                                  <p:attrNameLst>
+                                    <p:attrName>style.visibility</p:attrName>
+                                  </p:attrNameLst>
+                                </p:cBhvr>
+                                <p:to>
+                                  <p:strVal val="visible"/>
+                                </p:to>
+                              </p:set>
+                              <p:animEffect transition="in" filter="wheel(1)">
+                                <p:cBhvr>
+                                  <p:cTn id="91" dur="690"/>
+                                  <p:tgtEl>
+                                    <p:spTgt spid="5"/>
+                                  </p:tgtEl>
+                                </p:cBhvr>
+                              </p:animEffect>
+                            </p:childTnLst>
+                          </p:cTn>
+                        </p:par>
+                        <p:par>
+                          <p:cTn id="11" dur="810" fill="hold" nodeType="afterEffect" grpId="0" presetID="22" presetClass="entr" presetSubtype="4">
+                            <p:stCondLst>
+                              <p:cond delay="390"/>
+                            </p:stCondLst>
+                            <p:childTnLst>
+                              <p:set>
+                                <p:cBhvr>
+                                  <p:cTn id="12" dur="1" fill="hold">
+                                    <p:stCondLst>
+                                      <p:cond delay="0"/>
+                                    </p:stCondLst>
+                                  </p:cTn>
+                                  <p:tgtEl>
+                                    <p:spTgt spid="6"/>
+                                  </p:tgtEl>
+                                  <p:attrNameLst>
+                                    <p:attrName>style.visibility</p:attrName>
+                                  </p:attrNameLst>
+                                </p:cBhvr>
+                                <p:to>
+                                  <p:strVal val="visible"/>
+                                </p:to>
+                              </p:set>
+                              <p:animEffect transition="in" filter="wipe(down)">
+                                <p:cBhvr>
+                                  <p:cTn id="111" dur="810"/>
+                                  <p:tgtEl>
+                                    <p:spTgt spid="6"/>
+                                  </p:tgtEl>
+                                </p:cBhvr>
+                              </p:animEffect>
+                            </p:childTnLst>
+                          </p:cTn>
+                        </p:par>
+                        <p:par>
+                          <p:cTn id="13" dur="450" fill="hold" nodeType="afterEffect" grpId="0" presetID="9" presetClass="entr" presetSubtype="0">
+                            <p:stCondLst>
+                              <p:cond delay="520"/>
+                            </p:stCondLst>
+                            <p:childTnLst>
+                              <p:set>
+                                <p:cBhvr>
+                                  <p:cTn id="14" dur="1" fill="hold">
+                                    <p:stCondLst>
+                                      <p:cond delay="0"/>
+                                    </p:stCondLst>
+                                  </p:cTn>
+                                  <p:tgtEl>
+                                    <p:spTgt spid="7"/>
+                                  </p:tgtEl>
+                                  <p:attrNameLst>
+                                    <p:attrName>style.visibility</p:attrName>
+                                  </p:attrNameLst>
+                                </p:cBhvr>
+                                <p:to>
+                                  <p:strVal val="visible"/>
+                                </p:to>
+                              </p:set>
+                              <p:animEffect transition="in" filter="fade">
+                                <p:cBhvr>
+                                  <p:cTn id="131" dur="450"/>
+                                  <p:tgtEl>
+                                    <p:spTgt spid="7"/>
+                                  </p:tgtEl>
+                                </p:cBhvr>
+                              </p:animEffect>
+                            </p:childTnLst>
+                          </p:cTn>
+                        </p:par>
+                        <p:par>
+                          <p:cTn id="15" dur="570" fill="hold" nodeType="afterEffect" grpId="0" presetID="22" presetClass="entr" presetSubtype="2">
+                            <p:stCondLst>
+                              <p:cond delay="650"/>
+                            </p:stCondLst>
+                            <p:childTnLst>
+                              <p:set>
+                                <p:cBhvr>
+                                  <p:cTn id="16" dur="1" fill="hold">
+                                    <p:stCondLst>
+                                      <p:cond delay="0"/>
+                                    </p:stCondLst>
+                                  </p:cTn>
+                                  <p:tgtEl>
+                                    <p:spTgt spid="8"/>
+                                  </p:tgtEl>
+                                  <p:attrNameLst>
+                                    <p:attrName>style.visibility</p:attrName>
+                                  </p:attrNameLst>
+                                </p:cBhvr>
+                                <p:to>
+                                  <p:strVal val="visible"/>
+                                </p:to>
+                              </p:set>
+                              <p:animEffect transition="in" filter="wipe(right)">
+                                <p:cBhvr>
+                                  <p:cTn id="151" dur="570"/>
+                                  <p:tgtEl>
+                                    <p:spTgt spid="8"/>
+                                  </p:tgtEl>
+                                </p:cBhvr>
+                              </p:animEffect>
+                            </p:childTnLst>
+                          </p:cTn>
+                        </p:par>
+                      </p:childTnLst>
+                    </p:cTn>
+                  </p:par>
+                </p:childTnLst>
+              </p:cTn>
+              <p:prevCondLst>
+                <p:cond evt="onPrev" delay="0">
+                  <p:tgtEl>
+                    <p:sldTgt/>
+                  </p:tgtEl>
+                </p:cond>
+              </p:prevCondLst>
+              <p:nextCondLst>
+                <p:cond evt="onNext" delay="0">
+                  <p:tgtEl>
+                    <p:sldTgt/>
+                  </p:tgtEl>
+                </p:cond>
+              </p:nextCondLst>
+            </p:seq>
+          </p:childTnLst>
+        </p:cTn>
+      </p:par>
+    </p:tnLst>
+  </p:timing>
 </p:sld>
 </file>
 
@@ -10669,8 +14874,537 @@
     <a:masterClrMapping/>
   </p:clrMapOvr>
   <p:transition spd="med">
-    <p:fade/>
+    <p:comb dir="horz"/>
   </p:transition>
+  <p:timing>
+    <p:tnLst>
+      <p:par>
+        <p:cTn id="1" dur="indefinite" restart="never" nodeType="tmRoot">
+          <p:childTnLst>
+            <p:seq concurrent="1" nextAc="seek">
+              <p:cTn id="2" dur="indefinite" nodeType="mainSeq">
+                <p:childTnLst>
+                  <p:par>
+                    <p:cTn id="3" fill="hold">
+                      <p:stCondLst>
+                        <p:cond delay="indefinite"/>
+                      </p:stCondLst>
+                      <p:childTnLst>
+                        <p:par>
+                          <p:cTn id="5" dur="450" fill="hold" nodeType="clickEffect" grpId="0" presetID="22" presetClass="entr" presetSubtype="8">
+                            <p:stCondLst>
+                              <p:cond delay="0"/>
+                            </p:stCondLst>
+                            <p:childTnLst>
+                              <p:set>
+                                <p:cBhvr>
+                                  <p:cTn id="6" dur="1" fill="hold">
+                                    <p:stCondLst>
+                                      <p:cond delay="0"/>
+                                    </p:stCondLst>
+                                  </p:cTn>
+                                  <p:tgtEl>
+                                    <p:spTgt spid="3"/>
+                                  </p:tgtEl>
+                                  <p:attrNameLst>
+                                    <p:attrName>style.visibility</p:attrName>
+                                  </p:attrNameLst>
+                                </p:cBhvr>
+                                <p:to>
+                                  <p:strVal val="visible"/>
+                                </p:to>
+                              </p:set>
+                              <p:animEffect transition="in" filter="wipe(left)">
+                                <p:cBhvr>
+                                  <p:cTn id="51" dur="450"/>
+                                  <p:tgtEl>
+                                    <p:spTgt spid="3"/>
+                                  </p:tgtEl>
+                                </p:cBhvr>
+                              </p:animEffect>
+                            </p:childTnLst>
+                          </p:cTn>
+                        </p:par>
+                        <p:par>
+                          <p:cTn id="7" dur="570" fill="hold" nodeType="afterEffect" grpId="0" presetID="37" presetClass="entr" presetSubtype="0">
+                            <p:stCondLst>
+                              <p:cond delay="130"/>
+                            </p:stCondLst>
+                            <p:childTnLst>
+                              <p:set>
+                                <p:cBhvr>
+                                  <p:cTn id="8" dur="1" fill="hold">
+                                    <p:stCondLst>
+                                      <p:cond delay="0"/>
+                                    </p:stCondLst>
+                                  </p:cTn>
+                                  <p:tgtEl>
+                                    <p:spTgt spid="4"/>
+                                  </p:tgtEl>
+                                  <p:attrNameLst>
+                                    <p:attrName>style.visibility</p:attrName>
+                                  </p:attrNameLst>
+                                </p:cBhvr>
+                                <p:to>
+                                  <p:strVal val="visible"/>
+                                </p:to>
+                              </p:set>
+                              <p:animEffect transition="in" filter="wedge">
+                                <p:cBhvr>
+                                  <p:cTn id="71" dur="570"/>
+                                  <p:tgtEl>
+                                    <p:spTgt spid="4"/>
+                                  </p:tgtEl>
+                                </p:cBhvr>
+                              </p:animEffect>
+                            </p:childTnLst>
+                          </p:cTn>
+                        </p:par>
+                        <p:par>
+                          <p:cTn id="9" dur="690" fill="hold" nodeType="afterEffect" grpId="0" presetID="52" presetClass="entr" presetSubtype="0">
+                            <p:stCondLst>
+                              <p:cond delay="260"/>
+                            </p:stCondLst>
+                            <p:childTnLst>
+                              <p:set>
+                                <p:cBhvr>
+                                  <p:cTn id="10" dur="1" fill="hold">
+                                    <p:stCondLst>
+                                      <p:cond delay="0"/>
+                                    </p:stCondLst>
+                                  </p:cTn>
+                                  <p:tgtEl>
+                                    <p:spTgt spid="5"/>
+                                  </p:tgtEl>
+                                  <p:attrNameLst>
+                                    <p:attrName>style.visibility</p:attrName>
+                                  </p:attrNameLst>
+                                </p:cBhvr>
+                                <p:to>
+                                  <p:strVal val="visible"/>
+                                </p:to>
+                              </p:set>
+                              <p:animEffect transition="in" filter="randombar(horizontal)">
+                                <p:cBhvr>
+                                  <p:cTn id="91" dur="690"/>
+                                  <p:tgtEl>
+                                    <p:spTgt spid="5"/>
+                                  </p:tgtEl>
+                                </p:cBhvr>
+                              </p:animEffect>
+                            </p:childTnLst>
+                          </p:cTn>
+                        </p:par>
+                        <p:par>
+                          <p:cTn id="11" dur="810" fill="hold" nodeType="afterEffect" grpId="0" presetID="21" presetClass="entr" presetSubtype="1">
+                            <p:stCondLst>
+                              <p:cond delay="390"/>
+                            </p:stCondLst>
+                            <p:childTnLst>
+                              <p:set>
+                                <p:cBhvr>
+                                  <p:cTn id="12" dur="1" fill="hold">
+                                    <p:stCondLst>
+                                      <p:cond delay="0"/>
+                                    </p:stCondLst>
+                                  </p:cTn>
+                                  <p:tgtEl>
+                                    <p:spTgt spid="6"/>
+                                  </p:tgtEl>
+                                  <p:attrNameLst>
+                                    <p:attrName>style.visibility</p:attrName>
+                                  </p:attrNameLst>
+                                </p:cBhvr>
+                                <p:to>
+                                  <p:strVal val="visible"/>
+                                </p:to>
+                              </p:set>
+                              <p:animEffect transition="in" filter="wheel(1)">
+                                <p:cBhvr>
+                                  <p:cTn id="111" dur="810"/>
+                                  <p:tgtEl>
+                                    <p:spTgt spid="6"/>
+                                  </p:tgtEl>
+                                </p:cBhvr>
+                              </p:animEffect>
+                            </p:childTnLst>
+                          </p:cTn>
+                        </p:par>
+                        <p:par>
+                          <p:cTn id="13" dur="450" fill="hold" nodeType="afterEffect" grpId="0" presetID="22" presetClass="entr" presetSubtype="4">
+                            <p:stCondLst>
+                              <p:cond delay="520"/>
+                            </p:stCondLst>
+                            <p:childTnLst>
+                              <p:set>
+                                <p:cBhvr>
+                                  <p:cTn id="14" dur="1" fill="hold">
+                                    <p:stCondLst>
+                                      <p:cond delay="0"/>
+                                    </p:stCondLst>
+                                  </p:cTn>
+                                  <p:tgtEl>
+                                    <p:spTgt spid="9"/>
+                                  </p:tgtEl>
+                                  <p:attrNameLst>
+                                    <p:attrName>style.visibility</p:attrName>
+                                  </p:attrNameLst>
+                                </p:cBhvr>
+                                <p:to>
+                                  <p:strVal val="visible"/>
+                                </p:to>
+                              </p:set>
+                              <p:animEffect transition="in" filter="wipe(down)">
+                                <p:cBhvr>
+                                  <p:cTn id="131" dur="450"/>
+                                  <p:tgtEl>
+                                    <p:spTgt spid="9"/>
+                                  </p:tgtEl>
+                                </p:cBhvr>
+                              </p:animEffect>
+                            </p:childTnLst>
+                          </p:cTn>
+                        </p:par>
+                        <p:par>
+                          <p:cTn id="15" dur="570" fill="hold" nodeType="afterEffect" grpId="0" presetID="9" presetClass="entr" presetSubtype="0">
+                            <p:stCondLst>
+                              <p:cond delay="650"/>
+                            </p:stCondLst>
+                            <p:childTnLst>
+                              <p:set>
+                                <p:cBhvr>
+                                  <p:cTn id="16" dur="1" fill="hold">
+                                    <p:stCondLst>
+                                      <p:cond delay="0"/>
+                                    </p:stCondLst>
+                                  </p:cTn>
+                                  <p:tgtEl>
+                                    <p:spTgt spid="12"/>
+                                  </p:tgtEl>
+                                  <p:attrNameLst>
+                                    <p:attrName>style.visibility</p:attrName>
+                                  </p:attrNameLst>
+                                </p:cBhvr>
+                                <p:to>
+                                  <p:strVal val="visible"/>
+                                </p:to>
+                              </p:set>
+                              <p:animEffect transition="in" filter="fade">
+                                <p:cBhvr>
+                                  <p:cTn id="151" dur="570"/>
+                                  <p:tgtEl>
+                                    <p:spTgt spid="12"/>
+                                  </p:tgtEl>
+                                </p:cBhvr>
+                              </p:animEffect>
+                            </p:childTnLst>
+                          </p:cTn>
+                        </p:par>
+                        <p:par>
+                          <p:cTn id="17" dur="690" fill="hold" nodeType="afterEffect" grpId="0" presetID="22" presetClass="entr" presetSubtype="2">
+                            <p:stCondLst>
+                              <p:cond delay="780"/>
+                            </p:stCondLst>
+                            <p:childTnLst>
+                              <p:set>
+                                <p:cBhvr>
+                                  <p:cTn id="18" dur="1" fill="hold">
+                                    <p:stCondLst>
+                                      <p:cond delay="0"/>
+                                    </p:stCondLst>
+                                  </p:cTn>
+                                  <p:tgtEl>
+                                    <p:spTgt spid="15"/>
+                                  </p:tgtEl>
+                                  <p:attrNameLst>
+                                    <p:attrName>style.visibility</p:attrName>
+                                  </p:attrNameLst>
+                                </p:cBhvr>
+                                <p:to>
+                                  <p:strVal val="visible"/>
+                                </p:to>
+                              </p:set>
+                              <p:animEffect transition="in" filter="wipe(right)">
+                                <p:cBhvr>
+                                  <p:cTn id="171" dur="690"/>
+                                  <p:tgtEl>
+                                    <p:spTgt spid="15"/>
+                                  </p:tgtEl>
+                                </p:cBhvr>
+                              </p:animEffect>
+                            </p:childTnLst>
+                          </p:cTn>
+                        </p:par>
+                        <p:par>
+                          <p:cTn id="19" dur="810" fill="hold" nodeType="afterEffect" grpId="0" presetID="18" presetClass="entr" presetSubtype="12">
+                            <p:stCondLst>
+                              <p:cond delay="910"/>
+                            </p:stCondLst>
+                            <p:childTnLst>
+                              <p:set>
+                                <p:cBhvr>
+                                  <p:cTn id="20" dur="1" fill="hold">
+                                    <p:stCondLst>
+                                      <p:cond delay="0"/>
+                                    </p:stCondLst>
+                                  </p:cTn>
+                                  <p:tgtEl>
+                                    <p:spTgt spid="7"/>
+                                  </p:tgtEl>
+                                  <p:attrNameLst>
+                                    <p:attrName>style.visibility</p:attrName>
+                                  </p:attrNameLst>
+                                </p:cBhvr>
+                                <p:to>
+                                  <p:strVal val="visible"/>
+                                </p:to>
+                              </p:set>
+                              <p:animEffect transition="in" filter="circle(in)">
+                                <p:cBhvr>
+                                  <p:cTn id="191" dur="810"/>
+                                  <p:tgtEl>
+                                    <p:spTgt spid="7"/>
+                                  </p:tgtEl>
+                                </p:cBhvr>
+                              </p:animEffect>
+                            </p:childTnLst>
+                          </p:cTn>
+                        </p:par>
+                        <p:par>
+                          <p:cTn id="21" dur="450" fill="hold" nodeType="afterEffect" grpId="0" presetID="22" presetClass="entr" presetSubtype="1">
+                            <p:stCondLst>
+                              <p:cond delay="1040"/>
+                            </p:stCondLst>
+                            <p:childTnLst>
+                              <p:set>
+                                <p:cBhvr>
+                                  <p:cTn id="22" dur="1" fill="hold">
+                                    <p:stCondLst>
+                                      <p:cond delay="0"/>
+                                    </p:stCondLst>
+                                  </p:cTn>
+                                  <p:tgtEl>
+                                    <p:spTgt spid="10"/>
+                                  </p:tgtEl>
+                                  <p:attrNameLst>
+                                    <p:attrName>style.visibility</p:attrName>
+                                  </p:attrNameLst>
+                                </p:cBhvr>
+                                <p:to>
+                                  <p:strVal val="visible"/>
+                                </p:to>
+                              </p:set>
+                              <p:animEffect transition="in" filter="wipe(up)">
+                                <p:cBhvr>
+                                  <p:cTn id="211" dur="450"/>
+                                  <p:tgtEl>
+                                    <p:spTgt spid="10"/>
+                                  </p:tgtEl>
+                                </p:cBhvr>
+                              </p:animEffect>
+                            </p:childTnLst>
+                          </p:cTn>
+                        </p:par>
+                        <p:par>
+                          <p:cTn id="23" dur="570" fill="hold" nodeType="afterEffect" grpId="0" presetID="42" presetClass="entr" presetSubtype="10">
+                            <p:stCondLst>
+                              <p:cond delay="1170"/>
+                            </p:stCondLst>
+                            <p:childTnLst>
+                              <p:set>
+                                <p:cBhvr>
+                                  <p:cTn id="24" dur="1" fill="hold">
+                                    <p:stCondLst>
+                                      <p:cond delay="0"/>
+                                    </p:stCondLst>
+                                  </p:cTn>
+                                  <p:tgtEl>
+                                    <p:spTgt spid="13"/>
+                                  </p:tgtEl>
+                                  <p:attrNameLst>
+                                    <p:attrName>style.visibility</p:attrName>
+                                  </p:attrNameLst>
+                                </p:cBhvr>
+                                <p:to>
+                                  <p:strVal val="visible"/>
+                                </p:to>
+                              </p:set>
+                              <p:animEffect transition="in" filter="blinds(horizontal)">
+                                <p:cBhvr>
+                                  <p:cTn id="231" dur="570"/>
+                                  <p:tgtEl>
+                                    <p:spTgt spid="13"/>
+                                  </p:tgtEl>
+                                </p:cBhvr>
+                              </p:animEffect>
+                            </p:childTnLst>
+                          </p:cTn>
+                        </p:par>
+                        <p:par>
+                          <p:cTn id="25" dur="690" fill="hold" nodeType="afterEffect" grpId="0" presetID="43" presetClass="entr" presetSubtype="0">
+                            <p:stCondLst>
+                              <p:cond delay="1300"/>
+                            </p:stCondLst>
+                            <p:childTnLst>
+                              <p:set>
+                                <p:cBhvr>
+                                  <p:cTn id="26" dur="1" fill="hold">
+                                    <p:stCondLst>
+                                      <p:cond delay="0"/>
+                                    </p:stCondLst>
+                                  </p:cTn>
+                                  <p:tgtEl>
+                                    <p:spTgt spid="16"/>
+                                  </p:tgtEl>
+                                  <p:attrNameLst>
+                                    <p:attrName>style.visibility</p:attrName>
+                                  </p:attrNameLst>
+                                </p:cBhvr>
+                                <p:to>
+                                  <p:strVal val="visible"/>
+                                </p:to>
+                              </p:set>
+                              <p:animEffect transition="in" filter="checkerboard(across)">
+                                <p:cBhvr>
+                                  <p:cTn id="251" dur="690"/>
+                                  <p:tgtEl>
+                                    <p:spTgt spid="16"/>
+                                  </p:tgtEl>
+                                </p:cBhvr>
+                              </p:animEffect>
+                            </p:childTnLst>
+                          </p:cTn>
+                        </p:par>
+                        <p:par>
+                          <p:cTn id="27" dur="810" fill="hold" nodeType="afterEffect" grpId="0" presetID="21" presetClass="entr" presetSubtype="2">
+                            <p:stCondLst>
+                              <p:cond delay="1430"/>
+                            </p:stCondLst>
+                            <p:childTnLst>
+                              <p:set>
+                                <p:cBhvr>
+                                  <p:cTn id="28" dur="1" fill="hold">
+                                    <p:stCondLst>
+                                      <p:cond delay="0"/>
+                                    </p:stCondLst>
+                                  </p:cTn>
+                                  <p:tgtEl>
+                                    <p:spTgt spid="8"/>
+                                  </p:tgtEl>
+                                  <p:attrNameLst>
+                                    <p:attrName>style.visibility</p:attrName>
+                                  </p:attrNameLst>
+                                </p:cBhvr>
+                                <p:to>
+                                  <p:strVal val="visible"/>
+                                </p:to>
+                              </p:set>
+                              <p:animEffect transition="in" filter="wheel(2)">
+                                <p:cBhvr>
+                                  <p:cTn id="271" dur="810"/>
+                                  <p:tgtEl>
+                                    <p:spTgt spid="8"/>
+                                  </p:tgtEl>
+                                </p:cBhvr>
+                              </p:animEffect>
+                            </p:childTnLst>
+                          </p:cTn>
+                        </p:par>
+                        <p:par>
+                          <p:cTn id="29" dur="450" fill="hold" nodeType="afterEffect" grpId="0" presetID="10" presetClass="entr" presetSubtype="0">
+                            <p:stCondLst>
+                              <p:cond delay="1560"/>
+                            </p:stCondLst>
+                            <p:childTnLst>
+                              <p:set>
+                                <p:cBhvr>
+                                  <p:cTn id="30" dur="1" fill="hold">
+                                    <p:stCondLst>
+                                      <p:cond delay="0"/>
+                                    </p:stCondLst>
+                                  </p:cTn>
+                                  <p:tgtEl>
+                                    <p:spTgt spid="11"/>
+                                  </p:tgtEl>
+                                  <p:attrNameLst>
+                                    <p:attrName>style.visibility</p:attrName>
+                                  </p:attrNameLst>
+                                </p:cBhvr>
+                                <p:to>
+                                  <p:strVal val="visible"/>
+                                </p:to>
+                              </p:set>
+                              <p:animEffect transition="in" filter="dissolve">
+                                <p:cBhvr>
+                                  <p:cTn id="291" dur="450"/>
+                                  <p:tgtEl>
+                                    <p:spTgt spid="11"/>
+                                  </p:tgtEl>
+                                </p:cBhvr>
+                              </p:animEffect>
+                            </p:childTnLst>
+                          </p:cTn>
+                        </p:par>
+                        <p:par>
+                          <p:cTn id="31" dur="570" fill="hold" nodeType="afterEffect" grpId="0" presetID="25" presetClass="entr" presetSubtype="1">
+                            <p:stCondLst>
+                              <p:cond delay="1690"/>
+                            </p:stCondLst>
+                            <p:childTnLst>
+                              <p:set>
+                                <p:cBhvr>
+                                  <p:cTn id="32" dur="1" fill="hold">
+                                    <p:stCondLst>
+                                      <p:cond delay="0"/>
+                                    </p:stCondLst>
+                                  </p:cTn>
+                                  <p:tgtEl>
+                                    <p:spTgt spid="14"/>
+                                  </p:tgtEl>
+                                  <p:attrNameLst>
+                                    <p:attrName>style.visibility</p:attrName>
+                                  </p:attrNameLst>
+                                </p:cBhvr>
+                                <p:to>
+                                  <p:strVal val="visible"/>
+                                </p:to>
+                              </p:set>
+                              <p:animEffect transition="in" filter="strips(downRight)">
+                                <p:cBhvr>
+                                  <p:cTn id="311" dur="570"/>
+                                  <p:tgtEl>
+                                    <p:spTgt spid="14"/>
+                                  </p:tgtEl>
+                                </p:cBhvr>
+                              </p:animEffect>
+                            </p:childTnLst>
+                          </p:cTn>
+                        </p:par>
+                      </p:childTnLst>
+                    </p:cTn>
+                  </p:par>
+                </p:childTnLst>
+              </p:cTn>
+              <p:prevCondLst>
+                <p:cond evt="onPrev" delay="0">
+                  <p:tgtEl>
+                    <p:sldTgt/>
+                  </p:tgtEl>
+                </p:cond>
+              </p:prevCondLst>
+              <p:nextCondLst>
+                <p:cond evt="onNext" delay="0">
+                  <p:tgtEl>
+                    <p:sldTgt/>
+                  </p:tgtEl>
+                </p:cond>
+              </p:nextCondLst>
+            </p:seq>
+          </p:childTnLst>
+        </p:cTn>
+      </p:par>
+    </p:tnLst>
+  </p:timing>
 </p:sld>
 </file>
 
@@ -11042,8 +15776,292 @@
     <a:masterClrMapping/>
   </p:clrMapOvr>
   <p:transition spd="med">
-    <p:fade/>
+    <p:dissolve/>
   </p:transition>
+  <p:timing>
+    <p:tnLst>
+      <p:par>
+        <p:cTn id="1" dur="indefinite" restart="never" nodeType="tmRoot">
+          <p:childTnLst>
+            <p:seq concurrent="1" nextAc="seek">
+              <p:cTn id="2" dur="indefinite" nodeType="mainSeq">
+                <p:childTnLst>
+                  <p:par>
+                    <p:cTn id="3" fill="hold">
+                      <p:stCondLst>
+                        <p:cond delay="indefinite"/>
+                      </p:stCondLst>
+                      <p:childTnLst>
+                        <p:par>
+                          <p:cTn id="5" dur="570" fill="hold" nodeType="clickEffect" grpId="0" presetID="37" presetClass="entr" presetSubtype="0">
+                            <p:stCondLst>
+                              <p:cond delay="0"/>
+                            </p:stCondLst>
+                            <p:childTnLst>
+                              <p:set>
+                                <p:cBhvr>
+                                  <p:cTn id="6" dur="1" fill="hold">
+                                    <p:stCondLst>
+                                      <p:cond delay="0"/>
+                                    </p:stCondLst>
+                                  </p:cTn>
+                                  <p:tgtEl>
+                                    <p:spTgt spid="3"/>
+                                  </p:tgtEl>
+                                  <p:attrNameLst>
+                                    <p:attrName>style.visibility</p:attrName>
+                                  </p:attrNameLst>
+                                </p:cBhvr>
+                                <p:to>
+                                  <p:strVal val="visible"/>
+                                </p:to>
+                              </p:set>
+                              <p:animEffect transition="in" filter="wedge">
+                                <p:cBhvr>
+                                  <p:cTn id="51" dur="570"/>
+                                  <p:tgtEl>
+                                    <p:spTgt spid="3"/>
+                                  </p:tgtEl>
+                                </p:cBhvr>
+                              </p:animEffect>
+                            </p:childTnLst>
+                          </p:cTn>
+                        </p:par>
+                        <p:par>
+                          <p:cTn id="7" dur="690" fill="hold" nodeType="afterEffect" grpId="0" presetID="52" presetClass="entr" presetSubtype="0">
+                            <p:stCondLst>
+                              <p:cond delay="130"/>
+                            </p:stCondLst>
+                            <p:childTnLst>
+                              <p:set>
+                                <p:cBhvr>
+                                  <p:cTn id="8" dur="1" fill="hold">
+                                    <p:stCondLst>
+                                      <p:cond delay="0"/>
+                                    </p:stCondLst>
+                                  </p:cTn>
+                                  <p:tgtEl>
+                                    <p:spTgt spid="4"/>
+                                  </p:tgtEl>
+                                  <p:attrNameLst>
+                                    <p:attrName>style.visibility</p:attrName>
+                                  </p:attrNameLst>
+                                </p:cBhvr>
+                                <p:to>
+                                  <p:strVal val="visible"/>
+                                </p:to>
+                              </p:set>
+                              <p:animEffect transition="in" filter="randombar(horizontal)">
+                                <p:cBhvr>
+                                  <p:cTn id="71" dur="690"/>
+                                  <p:tgtEl>
+                                    <p:spTgt spid="4"/>
+                                  </p:tgtEl>
+                                </p:cBhvr>
+                              </p:animEffect>
+                            </p:childTnLst>
+                          </p:cTn>
+                        </p:par>
+                        <p:par>
+                          <p:cTn id="9" dur="810" fill="hold" nodeType="afterEffect" grpId="0" presetID="21" presetClass="entr" presetSubtype="1">
+                            <p:stCondLst>
+                              <p:cond delay="260"/>
+                            </p:stCondLst>
+                            <p:childTnLst>
+                              <p:set>
+                                <p:cBhvr>
+                                  <p:cTn id="10" dur="1" fill="hold">
+                                    <p:stCondLst>
+                                      <p:cond delay="0"/>
+                                    </p:stCondLst>
+                                  </p:cTn>
+                                  <p:tgtEl>
+                                    <p:spTgt spid="5"/>
+                                  </p:tgtEl>
+                                  <p:attrNameLst>
+                                    <p:attrName>style.visibility</p:attrName>
+                                  </p:attrNameLst>
+                                </p:cBhvr>
+                                <p:to>
+                                  <p:strVal val="visible"/>
+                                </p:to>
+                              </p:set>
+                              <p:animEffect transition="in" filter="wheel(1)">
+                                <p:cBhvr>
+                                  <p:cTn id="91" dur="810"/>
+                                  <p:tgtEl>
+                                    <p:spTgt spid="5"/>
+                                  </p:tgtEl>
+                                </p:cBhvr>
+                              </p:animEffect>
+                            </p:childTnLst>
+                          </p:cTn>
+                        </p:par>
+                        <p:par>
+                          <p:cTn id="11" dur="450" fill="hold" nodeType="afterEffect" grpId="0" presetID="22" presetClass="entr" presetSubtype="4">
+                            <p:stCondLst>
+                              <p:cond delay="390"/>
+                            </p:stCondLst>
+                            <p:childTnLst>
+                              <p:set>
+                                <p:cBhvr>
+                                  <p:cTn id="12" dur="1" fill="hold">
+                                    <p:stCondLst>
+                                      <p:cond delay="0"/>
+                                    </p:stCondLst>
+                                  </p:cTn>
+                                  <p:tgtEl>
+                                    <p:spTgt spid="6"/>
+                                  </p:tgtEl>
+                                  <p:attrNameLst>
+                                    <p:attrName>style.visibility</p:attrName>
+                                  </p:attrNameLst>
+                                </p:cBhvr>
+                                <p:to>
+                                  <p:strVal val="visible"/>
+                                </p:to>
+                              </p:set>
+                              <p:animEffect transition="in" filter="wipe(down)">
+                                <p:cBhvr>
+                                  <p:cTn id="111" dur="450"/>
+                                  <p:tgtEl>
+                                    <p:spTgt spid="6"/>
+                                  </p:tgtEl>
+                                </p:cBhvr>
+                              </p:animEffect>
+                            </p:childTnLst>
+                          </p:cTn>
+                        </p:par>
+                        <p:par>
+                          <p:cTn id="13" dur="570" fill="hold" nodeType="afterEffect" grpId="0" presetID="9" presetClass="entr" presetSubtype="0">
+                            <p:stCondLst>
+                              <p:cond delay="520"/>
+                            </p:stCondLst>
+                            <p:childTnLst>
+                              <p:set>
+                                <p:cBhvr>
+                                  <p:cTn id="14" dur="1" fill="hold">
+                                    <p:stCondLst>
+                                      <p:cond delay="0"/>
+                                    </p:stCondLst>
+                                  </p:cTn>
+                                  <p:tgtEl>
+                                    <p:spTgt spid="7"/>
+                                  </p:tgtEl>
+                                  <p:attrNameLst>
+                                    <p:attrName>style.visibility</p:attrName>
+                                  </p:attrNameLst>
+                                </p:cBhvr>
+                                <p:to>
+                                  <p:strVal val="visible"/>
+                                </p:to>
+                              </p:set>
+                              <p:animEffect transition="in" filter="fade">
+                                <p:cBhvr>
+                                  <p:cTn id="131" dur="570"/>
+                                  <p:tgtEl>
+                                    <p:spTgt spid="7"/>
+                                  </p:tgtEl>
+                                </p:cBhvr>
+                              </p:animEffect>
+                            </p:childTnLst>
+                          </p:cTn>
+                        </p:par>
+                        <p:par>
+                          <p:cTn id="15" dur="690" fill="hold" nodeType="afterEffect" grpId="0" presetID="22" presetClass="entr" presetSubtype="2">
+                            <p:stCondLst>
+                              <p:cond delay="650"/>
+                            </p:stCondLst>
+                            <p:childTnLst>
+                              <p:set>
+                                <p:cBhvr>
+                                  <p:cTn id="16" dur="1" fill="hold">
+                                    <p:stCondLst>
+                                      <p:cond delay="0"/>
+                                    </p:stCondLst>
+                                  </p:cTn>
+                                  <p:tgtEl>
+                                    <p:spTgt spid="8"/>
+                                  </p:tgtEl>
+                                  <p:attrNameLst>
+                                    <p:attrName>style.visibility</p:attrName>
+                                  </p:attrNameLst>
+                                </p:cBhvr>
+                                <p:to>
+                                  <p:strVal val="visible"/>
+                                </p:to>
+                              </p:set>
+                              <p:animEffect transition="in" filter="wipe(right)">
+                                <p:cBhvr>
+                                  <p:cTn id="151" dur="690"/>
+                                  <p:tgtEl>
+                                    <p:spTgt spid="8"/>
+                                  </p:tgtEl>
+                                </p:cBhvr>
+                              </p:animEffect>
+                            </p:childTnLst>
+                          </p:cTn>
+                        </p:par>
+                        <p:par>
+                          <p:cTn id="17" dur="810" fill="hold" nodeType="afterEffect" grpId="0" presetID="18" presetClass="entr" presetSubtype="12">
+                            <p:stCondLst>
+                              <p:cond delay="780"/>
+                            </p:stCondLst>
+                            <p:childTnLst>
+                              <p:set>
+                                <p:cBhvr>
+                                  <p:cTn id="18" dur="1" fill="hold">
+                                    <p:stCondLst>
+                                      <p:cond delay="0"/>
+                                    </p:stCondLst>
+                                  </p:cTn>
+                                  <p:tgtEl>
+                                    <p:spTgt spid="9"/>
+                                  </p:tgtEl>
+                                  <p:attrNameLst>
+                                    <p:attrName>style.visibility</p:attrName>
+                                  </p:attrNameLst>
+                                </p:cBhvr>
+                                <p:to>
+                                  <p:strVal val="visible"/>
+                                </p:to>
+                              </p:set>
+                              <p:animEffect transition="in" filter="circle(in)">
+                                <p:cBhvr>
+                                  <p:cTn id="171" dur="810"/>
+                                  <p:tgtEl>
+                                    <p:spTgt spid="9"/>
+                                  </p:tgtEl>
+                                </p:cBhvr>
+                              </p:animEffect>
+                            </p:childTnLst>
+                          </p:cTn>
+                        </p:par>
+                      </p:childTnLst>
+                    </p:cTn>
+                  </p:par>
+                </p:childTnLst>
+              </p:cTn>
+              <p:prevCondLst>
+                <p:cond evt="onPrev" delay="0">
+                  <p:tgtEl>
+                    <p:sldTgt/>
+                  </p:tgtEl>
+                </p:cond>
+              </p:prevCondLst>
+              <p:nextCondLst>
+                <p:cond evt="onNext" delay="0">
+                  <p:tgtEl>
+                    <p:sldTgt/>
+                  </p:tgtEl>
+                </p:cond>
+              </p:nextCondLst>
+            </p:seq>
+          </p:childTnLst>
+        </p:cTn>
+      </p:par>
+    </p:tnLst>
+  </p:timing>
 </p:sld>
 </file>
 
@@ -11478,8 +16496,257 @@
     <a:masterClrMapping/>
   </p:clrMapOvr>
   <p:transition spd="med">
-    <p:fade/>
+    <p:zoom dir="in"/>
   </p:transition>
+  <p:timing>
+    <p:tnLst>
+      <p:par>
+        <p:cTn id="1" dur="indefinite" restart="never" nodeType="tmRoot">
+          <p:childTnLst>
+            <p:seq concurrent="1" nextAc="seek">
+              <p:cTn id="2" dur="indefinite" nodeType="mainSeq">
+                <p:childTnLst>
+                  <p:par>
+                    <p:cTn id="3" fill="hold">
+                      <p:stCondLst>
+                        <p:cond delay="indefinite"/>
+                      </p:stCondLst>
+                      <p:childTnLst>
+                        <p:par>
+                          <p:cTn id="5" dur="690" fill="hold" nodeType="clickEffect" grpId="0" presetID="52" presetClass="entr" presetSubtype="0">
+                            <p:stCondLst>
+                              <p:cond delay="0"/>
+                            </p:stCondLst>
+                            <p:childTnLst>
+                              <p:set>
+                                <p:cBhvr>
+                                  <p:cTn id="6" dur="1" fill="hold">
+                                    <p:stCondLst>
+                                      <p:cond delay="0"/>
+                                    </p:stCondLst>
+                                  </p:cTn>
+                                  <p:tgtEl>
+                                    <p:spTgt spid="3"/>
+                                  </p:tgtEl>
+                                  <p:attrNameLst>
+                                    <p:attrName>style.visibility</p:attrName>
+                                  </p:attrNameLst>
+                                </p:cBhvr>
+                                <p:to>
+                                  <p:strVal val="visible"/>
+                                </p:to>
+                              </p:set>
+                              <p:animEffect transition="in" filter="randombar(horizontal)">
+                                <p:cBhvr>
+                                  <p:cTn id="51" dur="690"/>
+                                  <p:tgtEl>
+                                    <p:spTgt spid="3"/>
+                                  </p:tgtEl>
+                                </p:cBhvr>
+                              </p:animEffect>
+                            </p:childTnLst>
+                          </p:cTn>
+                        </p:par>
+                        <p:par>
+                          <p:cTn id="7" dur="810" fill="hold" nodeType="afterEffect" grpId="0" presetID="21" presetClass="entr" presetSubtype="1">
+                            <p:stCondLst>
+                              <p:cond delay="130"/>
+                            </p:stCondLst>
+                            <p:childTnLst>
+                              <p:set>
+                                <p:cBhvr>
+                                  <p:cTn id="8" dur="1" fill="hold">
+                                    <p:stCondLst>
+                                      <p:cond delay="0"/>
+                                    </p:stCondLst>
+                                  </p:cTn>
+                                  <p:tgtEl>
+                                    <p:spTgt spid="4"/>
+                                  </p:tgtEl>
+                                  <p:attrNameLst>
+                                    <p:attrName>style.visibility</p:attrName>
+                                  </p:attrNameLst>
+                                </p:cBhvr>
+                                <p:to>
+                                  <p:strVal val="visible"/>
+                                </p:to>
+                              </p:set>
+                              <p:animEffect transition="in" filter="wheel(1)">
+                                <p:cBhvr>
+                                  <p:cTn id="71" dur="810"/>
+                                  <p:tgtEl>
+                                    <p:spTgt spid="4"/>
+                                  </p:tgtEl>
+                                </p:cBhvr>
+                              </p:animEffect>
+                            </p:childTnLst>
+                          </p:cTn>
+                        </p:par>
+                        <p:par>
+                          <p:cTn id="9" dur="450" fill="hold" nodeType="afterEffect" grpId="0" presetID="22" presetClass="entr" presetSubtype="4">
+                            <p:stCondLst>
+                              <p:cond delay="260"/>
+                            </p:stCondLst>
+                            <p:childTnLst>
+                              <p:set>
+                                <p:cBhvr>
+                                  <p:cTn id="10" dur="1" fill="hold">
+                                    <p:stCondLst>
+                                      <p:cond delay="0"/>
+                                    </p:stCondLst>
+                                  </p:cTn>
+                                  <p:tgtEl>
+                                    <p:spTgt spid="5"/>
+                                  </p:tgtEl>
+                                  <p:attrNameLst>
+                                    <p:attrName>style.visibility</p:attrName>
+                                  </p:attrNameLst>
+                                </p:cBhvr>
+                                <p:to>
+                                  <p:strVal val="visible"/>
+                                </p:to>
+                              </p:set>
+                              <p:animEffect transition="in" filter="wipe(down)">
+                                <p:cBhvr>
+                                  <p:cTn id="91" dur="450"/>
+                                  <p:tgtEl>
+                                    <p:spTgt spid="5"/>
+                                  </p:tgtEl>
+                                </p:cBhvr>
+                              </p:animEffect>
+                            </p:childTnLst>
+                          </p:cTn>
+                        </p:par>
+                        <p:par>
+                          <p:cTn id="11" dur="570" fill="hold" nodeType="afterEffect" grpId="0" presetID="9" presetClass="entr" presetSubtype="0">
+                            <p:stCondLst>
+                              <p:cond delay="390"/>
+                            </p:stCondLst>
+                            <p:childTnLst>
+                              <p:set>
+                                <p:cBhvr>
+                                  <p:cTn id="12" dur="1" fill="hold">
+                                    <p:stCondLst>
+                                      <p:cond delay="0"/>
+                                    </p:stCondLst>
+                                  </p:cTn>
+                                  <p:tgtEl>
+                                    <p:spTgt spid="6"/>
+                                  </p:tgtEl>
+                                  <p:attrNameLst>
+                                    <p:attrName>style.visibility</p:attrName>
+                                  </p:attrNameLst>
+                                </p:cBhvr>
+                                <p:to>
+                                  <p:strVal val="visible"/>
+                                </p:to>
+                              </p:set>
+                              <p:animEffect transition="in" filter="fade">
+                                <p:cBhvr>
+                                  <p:cTn id="111" dur="570"/>
+                                  <p:tgtEl>
+                                    <p:spTgt spid="6"/>
+                                  </p:tgtEl>
+                                </p:cBhvr>
+                              </p:animEffect>
+                            </p:childTnLst>
+                          </p:cTn>
+                        </p:par>
+                        <p:par>
+                          <p:cTn id="13" dur="690" fill="hold" nodeType="afterEffect" grpId="0" presetID="22" presetClass="entr" presetSubtype="2">
+                            <p:stCondLst>
+                              <p:cond delay="520"/>
+                            </p:stCondLst>
+                            <p:childTnLst>
+                              <p:set>
+                                <p:cBhvr>
+                                  <p:cTn id="14" dur="1" fill="hold">
+                                    <p:stCondLst>
+                                      <p:cond delay="0"/>
+                                    </p:stCondLst>
+                                  </p:cTn>
+                                  <p:tgtEl>
+                                    <p:spTgt spid="7"/>
+                                  </p:tgtEl>
+                                  <p:attrNameLst>
+                                    <p:attrName>style.visibility</p:attrName>
+                                  </p:attrNameLst>
+                                </p:cBhvr>
+                                <p:to>
+                                  <p:strVal val="visible"/>
+                                </p:to>
+                              </p:set>
+                              <p:animEffect transition="in" filter="wipe(right)">
+                                <p:cBhvr>
+                                  <p:cTn id="131" dur="690"/>
+                                  <p:tgtEl>
+                                    <p:spTgt spid="7"/>
+                                  </p:tgtEl>
+                                </p:cBhvr>
+                              </p:animEffect>
+                            </p:childTnLst>
+                          </p:cTn>
+                        </p:par>
+                        <p:par>
+                          <p:cTn id="15" dur="810" fill="hold" nodeType="afterEffect" grpId="0" presetID="18" presetClass="entr" presetSubtype="12">
+                            <p:stCondLst>
+                              <p:cond delay="650"/>
+                            </p:stCondLst>
+                            <p:childTnLst>
+                              <p:set>
+                                <p:cBhvr>
+                                  <p:cTn id="16" dur="1" fill="hold">
+                                    <p:stCondLst>
+                                      <p:cond delay="0"/>
+                                    </p:stCondLst>
+                                  </p:cTn>
+                                  <p:tgtEl>
+                                    <p:spTgt spid="8"/>
+                                  </p:tgtEl>
+                                  <p:attrNameLst>
+                                    <p:attrName>style.visibility</p:attrName>
+                                  </p:attrNameLst>
+                                </p:cBhvr>
+                                <p:to>
+                                  <p:strVal val="visible"/>
+                                </p:to>
+                              </p:set>
+                              <p:animEffect transition="in" filter="circle(in)">
+                                <p:cBhvr>
+                                  <p:cTn id="151" dur="810"/>
+                                  <p:tgtEl>
+                                    <p:spTgt spid="8"/>
+                                  </p:tgtEl>
+                                </p:cBhvr>
+                              </p:animEffect>
+                            </p:childTnLst>
+                          </p:cTn>
+                        </p:par>
+                      </p:childTnLst>
+                    </p:cTn>
+                  </p:par>
+                </p:childTnLst>
+              </p:cTn>
+              <p:prevCondLst>
+                <p:cond evt="onPrev" delay="0">
+                  <p:tgtEl>
+                    <p:sldTgt/>
+                  </p:tgtEl>
+                </p:cond>
+              </p:prevCondLst>
+              <p:nextCondLst>
+                <p:cond evt="onNext" delay="0">
+                  <p:tgtEl>
+                    <p:sldTgt/>
+                  </p:tgtEl>
+                </p:cond>
+              </p:nextCondLst>
+            </p:seq>
+          </p:childTnLst>
+        </p:cTn>
+      </p:par>
+    </p:tnLst>
+  </p:timing>
 </p:sld>
 </file>
 
@@ -12361,8 +17628,537 @@
     <a:masterClrMapping/>
   </p:clrMapOvr>
   <p:transition spd="med">
-    <p:fade/>
+    <p:cover dir="l"/>
   </p:transition>
+  <p:timing>
+    <p:tnLst>
+      <p:par>
+        <p:cTn id="1" dur="indefinite" restart="never" nodeType="tmRoot">
+          <p:childTnLst>
+            <p:seq concurrent="1" nextAc="seek">
+              <p:cTn id="2" dur="indefinite" nodeType="mainSeq">
+                <p:childTnLst>
+                  <p:par>
+                    <p:cTn id="3" fill="hold">
+                      <p:stCondLst>
+                        <p:cond delay="indefinite"/>
+                      </p:stCondLst>
+                      <p:childTnLst>
+                        <p:par>
+                          <p:cTn id="5" dur="810" fill="hold" nodeType="clickEffect" grpId="0" presetID="21" presetClass="entr" presetSubtype="1">
+                            <p:stCondLst>
+                              <p:cond delay="0"/>
+                            </p:stCondLst>
+                            <p:childTnLst>
+                              <p:set>
+                                <p:cBhvr>
+                                  <p:cTn id="6" dur="1" fill="hold">
+                                    <p:stCondLst>
+                                      <p:cond delay="0"/>
+                                    </p:stCondLst>
+                                  </p:cTn>
+                                  <p:tgtEl>
+                                    <p:spTgt spid="3"/>
+                                  </p:tgtEl>
+                                  <p:attrNameLst>
+                                    <p:attrName>style.visibility</p:attrName>
+                                  </p:attrNameLst>
+                                </p:cBhvr>
+                                <p:to>
+                                  <p:strVal val="visible"/>
+                                </p:to>
+                              </p:set>
+                              <p:animEffect transition="in" filter="wheel(1)">
+                                <p:cBhvr>
+                                  <p:cTn id="51" dur="810"/>
+                                  <p:tgtEl>
+                                    <p:spTgt spid="3"/>
+                                  </p:tgtEl>
+                                </p:cBhvr>
+                              </p:animEffect>
+                            </p:childTnLst>
+                          </p:cTn>
+                        </p:par>
+                        <p:par>
+                          <p:cTn id="7" dur="450" fill="hold" nodeType="afterEffect" grpId="0" presetID="22" presetClass="entr" presetSubtype="4">
+                            <p:stCondLst>
+                              <p:cond delay="130"/>
+                            </p:stCondLst>
+                            <p:childTnLst>
+                              <p:set>
+                                <p:cBhvr>
+                                  <p:cTn id="8" dur="1" fill="hold">
+                                    <p:stCondLst>
+                                      <p:cond delay="0"/>
+                                    </p:stCondLst>
+                                  </p:cTn>
+                                  <p:tgtEl>
+                                    <p:spTgt spid="4"/>
+                                  </p:tgtEl>
+                                  <p:attrNameLst>
+                                    <p:attrName>style.visibility</p:attrName>
+                                  </p:attrNameLst>
+                                </p:cBhvr>
+                                <p:to>
+                                  <p:strVal val="visible"/>
+                                </p:to>
+                              </p:set>
+                              <p:animEffect transition="in" filter="wipe(down)">
+                                <p:cBhvr>
+                                  <p:cTn id="71" dur="450"/>
+                                  <p:tgtEl>
+                                    <p:spTgt spid="4"/>
+                                  </p:tgtEl>
+                                </p:cBhvr>
+                              </p:animEffect>
+                            </p:childTnLst>
+                          </p:cTn>
+                        </p:par>
+                        <p:par>
+                          <p:cTn id="9" dur="570" fill="hold" nodeType="afterEffect" grpId="0" presetID="9" presetClass="entr" presetSubtype="0">
+                            <p:stCondLst>
+                              <p:cond delay="260"/>
+                            </p:stCondLst>
+                            <p:childTnLst>
+                              <p:set>
+                                <p:cBhvr>
+                                  <p:cTn id="10" dur="1" fill="hold">
+                                    <p:stCondLst>
+                                      <p:cond delay="0"/>
+                                    </p:stCondLst>
+                                  </p:cTn>
+                                  <p:tgtEl>
+                                    <p:spTgt spid="5"/>
+                                  </p:tgtEl>
+                                  <p:attrNameLst>
+                                    <p:attrName>style.visibility</p:attrName>
+                                  </p:attrNameLst>
+                                </p:cBhvr>
+                                <p:to>
+                                  <p:strVal val="visible"/>
+                                </p:to>
+                              </p:set>
+                              <p:animEffect transition="in" filter="fade">
+                                <p:cBhvr>
+                                  <p:cTn id="91" dur="570"/>
+                                  <p:tgtEl>
+                                    <p:spTgt spid="5"/>
+                                  </p:tgtEl>
+                                </p:cBhvr>
+                              </p:animEffect>
+                            </p:childTnLst>
+                          </p:cTn>
+                        </p:par>
+                        <p:par>
+                          <p:cTn id="11" dur="690" fill="hold" nodeType="afterEffect" grpId="0" presetID="22" presetClass="entr" presetSubtype="2">
+                            <p:stCondLst>
+                              <p:cond delay="390"/>
+                            </p:stCondLst>
+                            <p:childTnLst>
+                              <p:set>
+                                <p:cBhvr>
+                                  <p:cTn id="12" dur="1" fill="hold">
+                                    <p:stCondLst>
+                                      <p:cond delay="0"/>
+                                    </p:stCondLst>
+                                  </p:cTn>
+                                  <p:tgtEl>
+                                    <p:spTgt spid="6"/>
+                                  </p:tgtEl>
+                                  <p:attrNameLst>
+                                    <p:attrName>style.visibility</p:attrName>
+                                  </p:attrNameLst>
+                                </p:cBhvr>
+                                <p:to>
+                                  <p:strVal val="visible"/>
+                                </p:to>
+                              </p:set>
+                              <p:animEffect transition="in" filter="wipe(right)">
+                                <p:cBhvr>
+                                  <p:cTn id="111" dur="690"/>
+                                  <p:tgtEl>
+                                    <p:spTgt spid="6"/>
+                                  </p:tgtEl>
+                                </p:cBhvr>
+                              </p:animEffect>
+                            </p:childTnLst>
+                          </p:cTn>
+                        </p:par>
+                        <p:par>
+                          <p:cTn id="13" dur="810" fill="hold" nodeType="afterEffect" grpId="0" presetID="18" presetClass="entr" presetSubtype="12">
+                            <p:stCondLst>
+                              <p:cond delay="520"/>
+                            </p:stCondLst>
+                            <p:childTnLst>
+                              <p:set>
+                                <p:cBhvr>
+                                  <p:cTn id="14" dur="1" fill="hold">
+                                    <p:stCondLst>
+                                      <p:cond delay="0"/>
+                                    </p:stCondLst>
+                                  </p:cTn>
+                                  <p:tgtEl>
+                                    <p:spTgt spid="7"/>
+                                  </p:tgtEl>
+                                  <p:attrNameLst>
+                                    <p:attrName>style.visibility</p:attrName>
+                                  </p:attrNameLst>
+                                </p:cBhvr>
+                                <p:to>
+                                  <p:strVal val="visible"/>
+                                </p:to>
+                              </p:set>
+                              <p:animEffect transition="in" filter="circle(in)">
+                                <p:cBhvr>
+                                  <p:cTn id="131" dur="810"/>
+                                  <p:tgtEl>
+                                    <p:spTgt spid="7"/>
+                                  </p:tgtEl>
+                                </p:cBhvr>
+                              </p:animEffect>
+                            </p:childTnLst>
+                          </p:cTn>
+                        </p:par>
+                        <p:par>
+                          <p:cTn id="15" dur="450" fill="hold" nodeType="afterEffect" grpId="0" presetID="22" presetClass="entr" presetSubtype="1">
+                            <p:stCondLst>
+                              <p:cond delay="650"/>
+                            </p:stCondLst>
+                            <p:childTnLst>
+                              <p:set>
+                                <p:cBhvr>
+                                  <p:cTn id="16" dur="1" fill="hold">
+                                    <p:stCondLst>
+                                      <p:cond delay="0"/>
+                                    </p:stCondLst>
+                                  </p:cTn>
+                                  <p:tgtEl>
+                                    <p:spTgt spid="10"/>
+                                  </p:tgtEl>
+                                  <p:attrNameLst>
+                                    <p:attrName>style.visibility</p:attrName>
+                                  </p:attrNameLst>
+                                </p:cBhvr>
+                                <p:to>
+                                  <p:strVal val="visible"/>
+                                </p:to>
+                              </p:set>
+                              <p:animEffect transition="in" filter="wipe(up)">
+                                <p:cBhvr>
+                                  <p:cTn id="151" dur="450"/>
+                                  <p:tgtEl>
+                                    <p:spTgt spid="10"/>
+                                  </p:tgtEl>
+                                </p:cBhvr>
+                              </p:animEffect>
+                            </p:childTnLst>
+                          </p:cTn>
+                        </p:par>
+                        <p:par>
+                          <p:cTn id="17" dur="570" fill="hold" nodeType="afterEffect" grpId="0" presetID="42" presetClass="entr" presetSubtype="10">
+                            <p:stCondLst>
+                              <p:cond delay="780"/>
+                            </p:stCondLst>
+                            <p:childTnLst>
+                              <p:set>
+                                <p:cBhvr>
+                                  <p:cTn id="18" dur="1" fill="hold">
+                                    <p:stCondLst>
+                                      <p:cond delay="0"/>
+                                    </p:stCondLst>
+                                  </p:cTn>
+                                  <p:tgtEl>
+                                    <p:spTgt spid="11"/>
+                                  </p:tgtEl>
+                                  <p:attrNameLst>
+                                    <p:attrName>style.visibility</p:attrName>
+                                  </p:attrNameLst>
+                                </p:cBhvr>
+                                <p:to>
+                                  <p:strVal val="visible"/>
+                                </p:to>
+                              </p:set>
+                              <p:animEffect transition="in" filter="blinds(horizontal)">
+                                <p:cBhvr>
+                                  <p:cTn id="171" dur="570"/>
+                                  <p:tgtEl>
+                                    <p:spTgt spid="11"/>
+                                  </p:tgtEl>
+                                </p:cBhvr>
+                              </p:animEffect>
+                            </p:childTnLst>
+                          </p:cTn>
+                        </p:par>
+                        <p:par>
+                          <p:cTn id="19" dur="690" fill="hold" nodeType="afterEffect" grpId="0" presetID="43" presetClass="entr" presetSubtype="0">
+                            <p:stCondLst>
+                              <p:cond delay="910"/>
+                            </p:stCondLst>
+                            <p:childTnLst>
+                              <p:set>
+                                <p:cBhvr>
+                                  <p:cTn id="20" dur="1" fill="hold">
+                                    <p:stCondLst>
+                                      <p:cond delay="0"/>
+                                    </p:stCondLst>
+                                  </p:cTn>
+                                  <p:tgtEl>
+                                    <p:spTgt spid="8"/>
+                                  </p:tgtEl>
+                                  <p:attrNameLst>
+                                    <p:attrName>style.visibility</p:attrName>
+                                  </p:attrNameLst>
+                                </p:cBhvr>
+                                <p:to>
+                                  <p:strVal val="visible"/>
+                                </p:to>
+                              </p:set>
+                              <p:animEffect transition="in" filter="checkerboard(across)">
+                                <p:cBhvr>
+                                  <p:cTn id="191" dur="690"/>
+                                  <p:tgtEl>
+                                    <p:spTgt spid="8"/>
+                                  </p:tgtEl>
+                                </p:cBhvr>
+                              </p:animEffect>
+                            </p:childTnLst>
+                          </p:cTn>
+                        </p:par>
+                        <p:par>
+                          <p:cTn id="21" dur="810" fill="hold" nodeType="afterEffect" grpId="0" presetID="21" presetClass="entr" presetSubtype="2">
+                            <p:stCondLst>
+                              <p:cond delay="1040"/>
+                            </p:stCondLst>
+                            <p:childTnLst>
+                              <p:set>
+                                <p:cBhvr>
+                                  <p:cTn id="22" dur="1" fill="hold">
+                                    <p:stCondLst>
+                                      <p:cond delay="0"/>
+                                    </p:stCondLst>
+                                  </p:cTn>
+                                  <p:tgtEl>
+                                    <p:spTgt spid="12"/>
+                                  </p:tgtEl>
+                                  <p:attrNameLst>
+                                    <p:attrName>style.visibility</p:attrName>
+                                  </p:attrNameLst>
+                                </p:cBhvr>
+                                <p:to>
+                                  <p:strVal val="visible"/>
+                                </p:to>
+                              </p:set>
+                              <p:animEffect transition="in" filter="wheel(2)">
+                                <p:cBhvr>
+                                  <p:cTn id="211" dur="810"/>
+                                  <p:tgtEl>
+                                    <p:spTgt spid="12"/>
+                                  </p:tgtEl>
+                                </p:cBhvr>
+                              </p:animEffect>
+                            </p:childTnLst>
+                          </p:cTn>
+                        </p:par>
+                        <p:par>
+                          <p:cTn id="23" dur="450" fill="hold" nodeType="afterEffect" grpId="0" presetID="10" presetClass="entr" presetSubtype="0">
+                            <p:stCondLst>
+                              <p:cond delay="1170"/>
+                            </p:stCondLst>
+                            <p:childTnLst>
+                              <p:set>
+                                <p:cBhvr>
+                                  <p:cTn id="24" dur="1" fill="hold">
+                                    <p:stCondLst>
+                                      <p:cond delay="0"/>
+                                    </p:stCondLst>
+                                  </p:cTn>
+                                  <p:tgtEl>
+                                    <p:spTgt spid="9"/>
+                                  </p:tgtEl>
+                                  <p:attrNameLst>
+                                    <p:attrName>style.visibility</p:attrName>
+                                  </p:attrNameLst>
+                                </p:cBhvr>
+                                <p:to>
+                                  <p:strVal val="visible"/>
+                                </p:to>
+                              </p:set>
+                              <p:animEffect transition="in" filter="dissolve">
+                                <p:cBhvr>
+                                  <p:cTn id="231" dur="450"/>
+                                  <p:tgtEl>
+                                    <p:spTgt spid="9"/>
+                                  </p:tgtEl>
+                                </p:cBhvr>
+                              </p:animEffect>
+                            </p:childTnLst>
+                          </p:cTn>
+                        </p:par>
+                        <p:par>
+                          <p:cTn id="25" dur="570" fill="hold" nodeType="afterEffect" grpId="0" presetID="25" presetClass="entr" presetSubtype="1">
+                            <p:stCondLst>
+                              <p:cond delay="1300"/>
+                            </p:stCondLst>
+                            <p:childTnLst>
+                              <p:set>
+                                <p:cBhvr>
+                                  <p:cTn id="26" dur="1" fill="hold">
+                                    <p:stCondLst>
+                                      <p:cond delay="0"/>
+                                    </p:stCondLst>
+                                  </p:cTn>
+                                  <p:tgtEl>
+                                    <p:spTgt spid="13"/>
+                                  </p:tgtEl>
+                                  <p:attrNameLst>
+                                    <p:attrName>style.visibility</p:attrName>
+                                  </p:attrNameLst>
+                                </p:cBhvr>
+                                <p:to>
+                                  <p:strVal val="visible"/>
+                                </p:to>
+                              </p:set>
+                              <p:animEffect transition="in" filter="strips(downRight)">
+                                <p:cBhvr>
+                                  <p:cTn id="251" dur="570"/>
+                                  <p:tgtEl>
+                                    <p:spTgt spid="13"/>
+                                  </p:tgtEl>
+                                </p:cBhvr>
+                              </p:animEffect>
+                            </p:childTnLst>
+                          </p:cTn>
+                        </p:par>
+                        <p:par>
+                          <p:cTn id="27" dur="690" fill="hold" nodeType="afterEffect" grpId="0" presetID="45" presetClass="entr" presetSubtype="1">
+                            <p:stCondLst>
+                              <p:cond delay="1430"/>
+                            </p:stCondLst>
+                            <p:childTnLst>
+                              <p:set>
+                                <p:cBhvr>
+                                  <p:cTn id="28" dur="1" fill="hold">
+                                    <p:stCondLst>
+                                      <p:cond delay="0"/>
+                                    </p:stCondLst>
+                                  </p:cTn>
+                                  <p:tgtEl>
+                                    <p:spTgt spid="14"/>
+                                  </p:tgtEl>
+                                  <p:attrNameLst>
+                                    <p:attrName>style.visibility</p:attrName>
+                                  </p:attrNameLst>
+                                </p:cBhvr>
+                                <p:to>
+                                  <p:strVal val="visible"/>
+                                </p:to>
+                              </p:set>
+                              <p:animEffect transition="in" filter="barn(inHorizontal)">
+                                <p:cBhvr>
+                                  <p:cTn id="271" dur="690"/>
+                                  <p:tgtEl>
+                                    <p:spTgt spid="14"/>
+                                  </p:tgtEl>
+                                </p:cBhvr>
+                              </p:animEffect>
+                            </p:childTnLst>
+                          </p:cTn>
+                        </p:par>
+                        <p:par>
+                          <p:cTn id="29" dur="810" fill="hold" nodeType="afterEffect" grpId="0" presetID="22" presetClass="entr" presetSubtype="8">
+                            <p:stCondLst>
+                              <p:cond delay="1560"/>
+                            </p:stCondLst>
+                            <p:childTnLst>
+                              <p:set>
+                                <p:cBhvr>
+                                  <p:cTn id="30" dur="1" fill="hold">
+                                    <p:stCondLst>
+                                      <p:cond delay="0"/>
+                                    </p:stCondLst>
+                                  </p:cTn>
+                                  <p:tgtEl>
+                                    <p:spTgt spid="15"/>
+                                  </p:tgtEl>
+                                  <p:attrNameLst>
+                                    <p:attrName>style.visibility</p:attrName>
+                                  </p:attrNameLst>
+                                </p:cBhvr>
+                                <p:to>
+                                  <p:strVal val="visible"/>
+                                </p:to>
+                              </p:set>
+                              <p:animEffect transition="in" filter="wipe(left)">
+                                <p:cBhvr>
+                                  <p:cTn id="291" dur="810"/>
+                                  <p:tgtEl>
+                                    <p:spTgt spid="15"/>
+                                  </p:tgtEl>
+                                </p:cBhvr>
+                              </p:animEffect>
+                            </p:childTnLst>
+                          </p:cTn>
+                        </p:par>
+                        <p:par>
+                          <p:cTn id="31" dur="450" fill="hold" nodeType="afterEffect" grpId="0" presetID="37" presetClass="entr" presetSubtype="0">
+                            <p:stCondLst>
+                              <p:cond delay="1690"/>
+                            </p:stCondLst>
+                            <p:childTnLst>
+                              <p:set>
+                                <p:cBhvr>
+                                  <p:cTn id="32" dur="1" fill="hold">
+                                    <p:stCondLst>
+                                      <p:cond delay="0"/>
+                                    </p:stCondLst>
+                                  </p:cTn>
+                                  <p:tgtEl>
+                                    <p:spTgt spid="16"/>
+                                  </p:tgtEl>
+                                  <p:attrNameLst>
+                                    <p:attrName>style.visibility</p:attrName>
+                                  </p:attrNameLst>
+                                </p:cBhvr>
+                                <p:to>
+                                  <p:strVal val="visible"/>
+                                </p:to>
+                              </p:set>
+                              <p:animEffect transition="in" filter="wedge">
+                                <p:cBhvr>
+                                  <p:cTn id="311" dur="450"/>
+                                  <p:tgtEl>
+                                    <p:spTgt spid="16"/>
+                                  </p:tgtEl>
+                                </p:cBhvr>
+                              </p:animEffect>
+                            </p:childTnLst>
+                          </p:cTn>
+                        </p:par>
+                      </p:childTnLst>
+                    </p:cTn>
+                  </p:par>
+                </p:childTnLst>
+              </p:cTn>
+              <p:prevCondLst>
+                <p:cond evt="onPrev" delay="0">
+                  <p:tgtEl>
+                    <p:sldTgt/>
+                  </p:tgtEl>
+                </p:cond>
+              </p:prevCondLst>
+              <p:nextCondLst>
+                <p:cond evt="onNext" delay="0">
+                  <p:tgtEl>
+                    <p:sldTgt/>
+                  </p:tgtEl>
+                </p:cond>
+              </p:nextCondLst>
+            </p:seq>
+          </p:childTnLst>
+        </p:cTn>
+      </p:par>
+    </p:tnLst>
+  </p:timing>
 </p:sld>
 </file>
 
@@ -13542,8 +19338,537 @@
     <a:masterClrMapping/>
   </p:clrMapOvr>
   <p:transition spd="med">
-    <p:fade/>
+    <p:checker dir="across"/>
   </p:transition>
+  <p:timing>
+    <p:tnLst>
+      <p:par>
+        <p:cTn id="1" dur="indefinite" restart="never" nodeType="tmRoot">
+          <p:childTnLst>
+            <p:seq concurrent="1" nextAc="seek">
+              <p:cTn id="2" dur="indefinite" nodeType="mainSeq">
+                <p:childTnLst>
+                  <p:par>
+                    <p:cTn id="3" fill="hold">
+                      <p:stCondLst>
+                        <p:cond delay="indefinite"/>
+                      </p:stCondLst>
+                      <p:childTnLst>
+                        <p:par>
+                          <p:cTn id="5" dur="450" fill="hold" nodeType="clickEffect" grpId="0" presetID="22" presetClass="entr" presetSubtype="4">
+                            <p:stCondLst>
+                              <p:cond delay="0"/>
+                            </p:stCondLst>
+                            <p:childTnLst>
+                              <p:set>
+                                <p:cBhvr>
+                                  <p:cTn id="6" dur="1" fill="hold">
+                                    <p:stCondLst>
+                                      <p:cond delay="0"/>
+                                    </p:stCondLst>
+                                  </p:cTn>
+                                  <p:tgtEl>
+                                    <p:spTgt spid="3"/>
+                                  </p:tgtEl>
+                                  <p:attrNameLst>
+                                    <p:attrName>style.visibility</p:attrName>
+                                  </p:attrNameLst>
+                                </p:cBhvr>
+                                <p:to>
+                                  <p:strVal val="visible"/>
+                                </p:to>
+                              </p:set>
+                              <p:animEffect transition="in" filter="wipe(down)">
+                                <p:cBhvr>
+                                  <p:cTn id="51" dur="450"/>
+                                  <p:tgtEl>
+                                    <p:spTgt spid="3"/>
+                                  </p:tgtEl>
+                                </p:cBhvr>
+                              </p:animEffect>
+                            </p:childTnLst>
+                          </p:cTn>
+                        </p:par>
+                        <p:par>
+                          <p:cTn id="7" dur="570" fill="hold" nodeType="afterEffect" grpId="0" presetID="9" presetClass="entr" presetSubtype="0">
+                            <p:stCondLst>
+                              <p:cond delay="130"/>
+                            </p:stCondLst>
+                            <p:childTnLst>
+                              <p:set>
+                                <p:cBhvr>
+                                  <p:cTn id="8" dur="1" fill="hold">
+                                    <p:stCondLst>
+                                      <p:cond delay="0"/>
+                                    </p:stCondLst>
+                                  </p:cTn>
+                                  <p:tgtEl>
+                                    <p:spTgt spid="4"/>
+                                  </p:tgtEl>
+                                  <p:attrNameLst>
+                                    <p:attrName>style.visibility</p:attrName>
+                                  </p:attrNameLst>
+                                </p:cBhvr>
+                                <p:to>
+                                  <p:strVal val="visible"/>
+                                </p:to>
+                              </p:set>
+                              <p:animEffect transition="in" filter="fade">
+                                <p:cBhvr>
+                                  <p:cTn id="71" dur="570"/>
+                                  <p:tgtEl>
+                                    <p:spTgt spid="4"/>
+                                  </p:tgtEl>
+                                </p:cBhvr>
+                              </p:animEffect>
+                            </p:childTnLst>
+                          </p:cTn>
+                        </p:par>
+                        <p:par>
+                          <p:cTn id="9" dur="690" fill="hold" nodeType="afterEffect" grpId="0" presetID="22" presetClass="entr" presetSubtype="2">
+                            <p:stCondLst>
+                              <p:cond delay="260"/>
+                            </p:stCondLst>
+                            <p:childTnLst>
+                              <p:set>
+                                <p:cBhvr>
+                                  <p:cTn id="10" dur="1" fill="hold">
+                                    <p:stCondLst>
+                                      <p:cond delay="0"/>
+                                    </p:stCondLst>
+                                  </p:cTn>
+                                  <p:tgtEl>
+                                    <p:spTgt spid="5"/>
+                                  </p:tgtEl>
+                                  <p:attrNameLst>
+                                    <p:attrName>style.visibility</p:attrName>
+                                  </p:attrNameLst>
+                                </p:cBhvr>
+                                <p:to>
+                                  <p:strVal val="visible"/>
+                                </p:to>
+                              </p:set>
+                              <p:animEffect transition="in" filter="wipe(right)">
+                                <p:cBhvr>
+                                  <p:cTn id="91" dur="690"/>
+                                  <p:tgtEl>
+                                    <p:spTgt spid="5"/>
+                                  </p:tgtEl>
+                                </p:cBhvr>
+                              </p:animEffect>
+                            </p:childTnLst>
+                          </p:cTn>
+                        </p:par>
+                        <p:par>
+                          <p:cTn id="11" dur="810" fill="hold" nodeType="afterEffect" grpId="0" presetID="18" presetClass="entr" presetSubtype="12">
+                            <p:stCondLst>
+                              <p:cond delay="390"/>
+                            </p:stCondLst>
+                            <p:childTnLst>
+                              <p:set>
+                                <p:cBhvr>
+                                  <p:cTn id="12" dur="1" fill="hold">
+                                    <p:stCondLst>
+                                      <p:cond delay="0"/>
+                                    </p:stCondLst>
+                                  </p:cTn>
+                                  <p:tgtEl>
+                                    <p:spTgt spid="6"/>
+                                  </p:tgtEl>
+                                  <p:attrNameLst>
+                                    <p:attrName>style.visibility</p:attrName>
+                                  </p:attrNameLst>
+                                </p:cBhvr>
+                                <p:to>
+                                  <p:strVal val="visible"/>
+                                </p:to>
+                              </p:set>
+                              <p:animEffect transition="in" filter="circle(in)">
+                                <p:cBhvr>
+                                  <p:cTn id="111" dur="810"/>
+                                  <p:tgtEl>
+                                    <p:spTgt spid="6"/>
+                                  </p:tgtEl>
+                                </p:cBhvr>
+                              </p:animEffect>
+                            </p:childTnLst>
+                          </p:cTn>
+                        </p:par>
+                        <p:par>
+                          <p:cTn id="13" dur="450" fill="hold" nodeType="afterEffect" grpId="0" presetID="22" presetClass="entr" presetSubtype="1">
+                            <p:stCondLst>
+                              <p:cond delay="520"/>
+                            </p:stCondLst>
+                            <p:childTnLst>
+                              <p:set>
+                                <p:cBhvr>
+                                  <p:cTn id="14" dur="1" fill="hold">
+                                    <p:stCondLst>
+                                      <p:cond delay="0"/>
+                                    </p:stCondLst>
+                                  </p:cTn>
+                                  <p:tgtEl>
+                                    <p:spTgt spid="11"/>
+                                  </p:tgtEl>
+                                  <p:attrNameLst>
+                                    <p:attrName>style.visibility</p:attrName>
+                                  </p:attrNameLst>
+                                </p:cBhvr>
+                                <p:to>
+                                  <p:strVal val="visible"/>
+                                </p:to>
+                              </p:set>
+                              <p:animEffect transition="in" filter="wipe(up)">
+                                <p:cBhvr>
+                                  <p:cTn id="131" dur="450"/>
+                                  <p:tgtEl>
+                                    <p:spTgt spid="11"/>
+                                  </p:tgtEl>
+                                </p:cBhvr>
+                              </p:animEffect>
+                            </p:childTnLst>
+                          </p:cTn>
+                        </p:par>
+                        <p:par>
+                          <p:cTn id="15" dur="570" fill="hold" nodeType="afterEffect" grpId="0" presetID="42" presetClass="entr" presetSubtype="10">
+                            <p:stCondLst>
+                              <p:cond delay="650"/>
+                            </p:stCondLst>
+                            <p:childTnLst>
+                              <p:set>
+                                <p:cBhvr>
+                                  <p:cTn id="16" dur="1" fill="hold">
+                                    <p:stCondLst>
+                                      <p:cond delay="0"/>
+                                    </p:stCondLst>
+                                  </p:cTn>
+                                  <p:tgtEl>
+                                    <p:spTgt spid="16"/>
+                                  </p:tgtEl>
+                                  <p:attrNameLst>
+                                    <p:attrName>style.visibility</p:attrName>
+                                  </p:attrNameLst>
+                                </p:cBhvr>
+                                <p:to>
+                                  <p:strVal val="visible"/>
+                                </p:to>
+                              </p:set>
+                              <p:animEffect transition="in" filter="blinds(horizontal)">
+                                <p:cBhvr>
+                                  <p:cTn id="151" dur="570"/>
+                                  <p:tgtEl>
+                                    <p:spTgt spid="16"/>
+                                  </p:tgtEl>
+                                </p:cBhvr>
+                              </p:animEffect>
+                            </p:childTnLst>
+                          </p:cTn>
+                        </p:par>
+                        <p:par>
+                          <p:cTn id="17" dur="690" fill="hold" nodeType="afterEffect" grpId="0" presetID="43" presetClass="entr" presetSubtype="0">
+                            <p:stCondLst>
+                              <p:cond delay="780"/>
+                            </p:stCondLst>
+                            <p:childTnLst>
+                              <p:set>
+                                <p:cBhvr>
+                                  <p:cTn id="18" dur="1" fill="hold">
+                                    <p:stCondLst>
+                                      <p:cond delay="0"/>
+                                    </p:stCondLst>
+                                  </p:cTn>
+                                  <p:tgtEl>
+                                    <p:spTgt spid="21"/>
+                                  </p:tgtEl>
+                                  <p:attrNameLst>
+                                    <p:attrName>style.visibility</p:attrName>
+                                  </p:attrNameLst>
+                                </p:cBhvr>
+                                <p:to>
+                                  <p:strVal val="visible"/>
+                                </p:to>
+                              </p:set>
+                              <p:animEffect transition="in" filter="checkerboard(across)">
+                                <p:cBhvr>
+                                  <p:cTn id="171" dur="690"/>
+                                  <p:tgtEl>
+                                    <p:spTgt spid="21"/>
+                                  </p:tgtEl>
+                                </p:cBhvr>
+                              </p:animEffect>
+                            </p:childTnLst>
+                          </p:cTn>
+                        </p:par>
+                        <p:par>
+                          <p:cTn id="19" dur="810" fill="hold" nodeType="afterEffect" grpId="0" presetID="21" presetClass="entr" presetSubtype="2">
+                            <p:stCondLst>
+                              <p:cond delay="910"/>
+                            </p:stCondLst>
+                            <p:childTnLst>
+                              <p:set>
+                                <p:cBhvr>
+                                  <p:cTn id="20" dur="1" fill="hold">
+                                    <p:stCondLst>
+                                      <p:cond delay="0"/>
+                                    </p:stCondLst>
+                                  </p:cTn>
+                                  <p:tgtEl>
+                                    <p:spTgt spid="7"/>
+                                  </p:tgtEl>
+                                  <p:attrNameLst>
+                                    <p:attrName>style.visibility</p:attrName>
+                                  </p:attrNameLst>
+                                </p:cBhvr>
+                                <p:to>
+                                  <p:strVal val="visible"/>
+                                </p:to>
+                              </p:set>
+                              <p:animEffect transition="in" filter="wheel(2)">
+                                <p:cBhvr>
+                                  <p:cTn id="191" dur="810"/>
+                                  <p:tgtEl>
+                                    <p:spTgt spid="7"/>
+                                  </p:tgtEl>
+                                </p:cBhvr>
+                              </p:animEffect>
+                            </p:childTnLst>
+                          </p:cTn>
+                        </p:par>
+                        <p:par>
+                          <p:cTn id="21" dur="450" fill="hold" nodeType="afterEffect" grpId="0" presetID="10" presetClass="entr" presetSubtype="0">
+                            <p:stCondLst>
+                              <p:cond delay="1040"/>
+                            </p:stCondLst>
+                            <p:childTnLst>
+                              <p:set>
+                                <p:cBhvr>
+                                  <p:cTn id="22" dur="1" fill="hold">
+                                    <p:stCondLst>
+                                      <p:cond delay="0"/>
+                                    </p:stCondLst>
+                                  </p:cTn>
+                                  <p:tgtEl>
+                                    <p:spTgt spid="12"/>
+                                  </p:tgtEl>
+                                  <p:attrNameLst>
+                                    <p:attrName>style.visibility</p:attrName>
+                                  </p:attrNameLst>
+                                </p:cBhvr>
+                                <p:to>
+                                  <p:strVal val="visible"/>
+                                </p:to>
+                              </p:set>
+                              <p:animEffect transition="in" filter="dissolve">
+                                <p:cBhvr>
+                                  <p:cTn id="211" dur="450"/>
+                                  <p:tgtEl>
+                                    <p:spTgt spid="12"/>
+                                  </p:tgtEl>
+                                </p:cBhvr>
+                              </p:animEffect>
+                            </p:childTnLst>
+                          </p:cTn>
+                        </p:par>
+                        <p:par>
+                          <p:cTn id="23" dur="570" fill="hold" nodeType="afterEffect" grpId="0" presetID="25" presetClass="entr" presetSubtype="1">
+                            <p:stCondLst>
+                              <p:cond delay="1170"/>
+                            </p:stCondLst>
+                            <p:childTnLst>
+                              <p:set>
+                                <p:cBhvr>
+                                  <p:cTn id="24" dur="1" fill="hold">
+                                    <p:stCondLst>
+                                      <p:cond delay="0"/>
+                                    </p:stCondLst>
+                                  </p:cTn>
+                                  <p:tgtEl>
+                                    <p:spTgt spid="17"/>
+                                  </p:tgtEl>
+                                  <p:attrNameLst>
+                                    <p:attrName>style.visibility</p:attrName>
+                                  </p:attrNameLst>
+                                </p:cBhvr>
+                                <p:to>
+                                  <p:strVal val="visible"/>
+                                </p:to>
+                              </p:set>
+                              <p:animEffect transition="in" filter="strips(downRight)">
+                                <p:cBhvr>
+                                  <p:cTn id="231" dur="570"/>
+                                  <p:tgtEl>
+                                    <p:spTgt spid="17"/>
+                                  </p:tgtEl>
+                                </p:cBhvr>
+                              </p:animEffect>
+                            </p:childTnLst>
+                          </p:cTn>
+                        </p:par>
+                        <p:par>
+                          <p:cTn id="25" dur="690" fill="hold" nodeType="afterEffect" grpId="0" presetID="45" presetClass="entr" presetSubtype="1">
+                            <p:stCondLst>
+                              <p:cond delay="1300"/>
+                            </p:stCondLst>
+                            <p:childTnLst>
+                              <p:set>
+                                <p:cBhvr>
+                                  <p:cTn id="26" dur="1" fill="hold">
+                                    <p:stCondLst>
+                                      <p:cond delay="0"/>
+                                    </p:stCondLst>
+                                  </p:cTn>
+                                  <p:tgtEl>
+                                    <p:spTgt spid="22"/>
+                                  </p:tgtEl>
+                                  <p:attrNameLst>
+                                    <p:attrName>style.visibility</p:attrName>
+                                  </p:attrNameLst>
+                                </p:cBhvr>
+                                <p:to>
+                                  <p:strVal val="visible"/>
+                                </p:to>
+                              </p:set>
+                              <p:animEffect transition="in" filter="barn(inHorizontal)">
+                                <p:cBhvr>
+                                  <p:cTn id="251" dur="690"/>
+                                  <p:tgtEl>
+                                    <p:spTgt spid="22"/>
+                                  </p:tgtEl>
+                                </p:cBhvr>
+                              </p:animEffect>
+                            </p:childTnLst>
+                          </p:cTn>
+                        </p:par>
+                        <p:par>
+                          <p:cTn id="27" dur="810" fill="hold" nodeType="afterEffect" grpId="0" presetID="22" presetClass="entr" presetSubtype="8">
+                            <p:stCondLst>
+                              <p:cond delay="1430"/>
+                            </p:stCondLst>
+                            <p:childTnLst>
+                              <p:set>
+                                <p:cBhvr>
+                                  <p:cTn id="28" dur="1" fill="hold">
+                                    <p:stCondLst>
+                                      <p:cond delay="0"/>
+                                    </p:stCondLst>
+                                  </p:cTn>
+                                  <p:tgtEl>
+                                    <p:spTgt spid="8"/>
+                                  </p:tgtEl>
+                                  <p:attrNameLst>
+                                    <p:attrName>style.visibility</p:attrName>
+                                  </p:attrNameLst>
+                                </p:cBhvr>
+                                <p:to>
+                                  <p:strVal val="visible"/>
+                                </p:to>
+                              </p:set>
+                              <p:animEffect transition="in" filter="wipe(left)">
+                                <p:cBhvr>
+                                  <p:cTn id="271" dur="810"/>
+                                  <p:tgtEl>
+                                    <p:spTgt spid="8"/>
+                                  </p:tgtEl>
+                                </p:cBhvr>
+                              </p:animEffect>
+                            </p:childTnLst>
+                          </p:cTn>
+                        </p:par>
+                        <p:par>
+                          <p:cTn id="29" dur="450" fill="hold" nodeType="afterEffect" grpId="0" presetID="37" presetClass="entr" presetSubtype="0">
+                            <p:stCondLst>
+                              <p:cond delay="1560"/>
+                            </p:stCondLst>
+                            <p:childTnLst>
+                              <p:set>
+                                <p:cBhvr>
+                                  <p:cTn id="30" dur="1" fill="hold">
+                                    <p:stCondLst>
+                                      <p:cond delay="0"/>
+                                    </p:stCondLst>
+                                  </p:cTn>
+                                  <p:tgtEl>
+                                    <p:spTgt spid="13"/>
+                                  </p:tgtEl>
+                                  <p:attrNameLst>
+                                    <p:attrName>style.visibility</p:attrName>
+                                  </p:attrNameLst>
+                                </p:cBhvr>
+                                <p:to>
+                                  <p:strVal val="visible"/>
+                                </p:to>
+                              </p:set>
+                              <p:animEffect transition="in" filter="wedge">
+                                <p:cBhvr>
+                                  <p:cTn id="291" dur="450"/>
+                                  <p:tgtEl>
+                                    <p:spTgt spid="13"/>
+                                  </p:tgtEl>
+                                </p:cBhvr>
+                              </p:animEffect>
+                            </p:childTnLst>
+                          </p:cTn>
+                        </p:par>
+                        <p:par>
+                          <p:cTn id="31" dur="570" fill="hold" nodeType="afterEffect" grpId="0" presetID="52" presetClass="entr" presetSubtype="0">
+                            <p:stCondLst>
+                              <p:cond delay="1690"/>
+                            </p:stCondLst>
+                            <p:childTnLst>
+                              <p:set>
+                                <p:cBhvr>
+                                  <p:cTn id="32" dur="1" fill="hold">
+                                    <p:stCondLst>
+                                      <p:cond delay="0"/>
+                                    </p:stCondLst>
+                                  </p:cTn>
+                                  <p:tgtEl>
+                                    <p:spTgt spid="18"/>
+                                  </p:tgtEl>
+                                  <p:attrNameLst>
+                                    <p:attrName>style.visibility</p:attrName>
+                                  </p:attrNameLst>
+                                </p:cBhvr>
+                                <p:to>
+                                  <p:strVal val="visible"/>
+                                </p:to>
+                              </p:set>
+                              <p:animEffect transition="in" filter="randombar(horizontal)">
+                                <p:cBhvr>
+                                  <p:cTn id="311" dur="570"/>
+                                  <p:tgtEl>
+                                    <p:spTgt spid="18"/>
+                                  </p:tgtEl>
+                                </p:cBhvr>
+                              </p:animEffect>
+                            </p:childTnLst>
+                          </p:cTn>
+                        </p:par>
+                      </p:childTnLst>
+                    </p:cTn>
+                  </p:par>
+                </p:childTnLst>
+              </p:cTn>
+              <p:prevCondLst>
+                <p:cond evt="onPrev" delay="0">
+                  <p:tgtEl>
+                    <p:sldTgt/>
+                  </p:tgtEl>
+                </p:cond>
+              </p:prevCondLst>
+              <p:nextCondLst>
+                <p:cond evt="onNext" delay="0">
+                  <p:tgtEl>
+                    <p:sldTgt/>
+                  </p:tgtEl>
+                </p:cond>
+              </p:nextCondLst>
+            </p:seq>
+          </p:childTnLst>
+        </p:cTn>
+      </p:par>
+    </p:tnLst>
+  </p:timing>
 </p:sld>
 </file>
 
@@ -14567,8 +20892,537 @@
     <a:masterClrMapping/>
   </p:clrMapOvr>
   <p:transition spd="med">
-    <p:fade/>
+    <p:newsflash/>
   </p:transition>
+  <p:timing>
+    <p:tnLst>
+      <p:par>
+        <p:cTn id="1" dur="indefinite" restart="never" nodeType="tmRoot">
+          <p:childTnLst>
+            <p:seq concurrent="1" nextAc="seek">
+              <p:cTn id="2" dur="indefinite" nodeType="mainSeq">
+                <p:childTnLst>
+                  <p:par>
+                    <p:cTn id="3" fill="hold">
+                      <p:stCondLst>
+                        <p:cond delay="indefinite"/>
+                      </p:stCondLst>
+                      <p:childTnLst>
+                        <p:par>
+                          <p:cTn id="5" dur="570" fill="hold" nodeType="clickEffect" grpId="0" presetID="9" presetClass="entr" presetSubtype="0">
+                            <p:stCondLst>
+                              <p:cond delay="0"/>
+                            </p:stCondLst>
+                            <p:childTnLst>
+                              <p:set>
+                                <p:cBhvr>
+                                  <p:cTn id="6" dur="1" fill="hold">
+                                    <p:stCondLst>
+                                      <p:cond delay="0"/>
+                                    </p:stCondLst>
+                                  </p:cTn>
+                                  <p:tgtEl>
+                                    <p:spTgt spid="3"/>
+                                  </p:tgtEl>
+                                  <p:attrNameLst>
+                                    <p:attrName>style.visibility</p:attrName>
+                                  </p:attrNameLst>
+                                </p:cBhvr>
+                                <p:to>
+                                  <p:strVal val="visible"/>
+                                </p:to>
+                              </p:set>
+                              <p:animEffect transition="in" filter="fade">
+                                <p:cBhvr>
+                                  <p:cTn id="51" dur="570"/>
+                                  <p:tgtEl>
+                                    <p:spTgt spid="3"/>
+                                  </p:tgtEl>
+                                </p:cBhvr>
+                              </p:animEffect>
+                            </p:childTnLst>
+                          </p:cTn>
+                        </p:par>
+                        <p:par>
+                          <p:cTn id="7" dur="690" fill="hold" nodeType="afterEffect" grpId="0" presetID="22" presetClass="entr" presetSubtype="2">
+                            <p:stCondLst>
+                              <p:cond delay="130"/>
+                            </p:stCondLst>
+                            <p:childTnLst>
+                              <p:set>
+                                <p:cBhvr>
+                                  <p:cTn id="8" dur="1" fill="hold">
+                                    <p:stCondLst>
+                                      <p:cond delay="0"/>
+                                    </p:stCondLst>
+                                  </p:cTn>
+                                  <p:tgtEl>
+                                    <p:spTgt spid="4"/>
+                                  </p:tgtEl>
+                                  <p:attrNameLst>
+                                    <p:attrName>style.visibility</p:attrName>
+                                  </p:attrNameLst>
+                                </p:cBhvr>
+                                <p:to>
+                                  <p:strVal val="visible"/>
+                                </p:to>
+                              </p:set>
+                              <p:animEffect transition="in" filter="wipe(right)">
+                                <p:cBhvr>
+                                  <p:cTn id="71" dur="690"/>
+                                  <p:tgtEl>
+                                    <p:spTgt spid="4"/>
+                                  </p:tgtEl>
+                                </p:cBhvr>
+                              </p:animEffect>
+                            </p:childTnLst>
+                          </p:cTn>
+                        </p:par>
+                        <p:par>
+                          <p:cTn id="9" dur="810" fill="hold" nodeType="afterEffect" grpId="0" presetID="18" presetClass="entr" presetSubtype="12">
+                            <p:stCondLst>
+                              <p:cond delay="260"/>
+                            </p:stCondLst>
+                            <p:childTnLst>
+                              <p:set>
+                                <p:cBhvr>
+                                  <p:cTn id="10" dur="1" fill="hold">
+                                    <p:stCondLst>
+                                      <p:cond delay="0"/>
+                                    </p:stCondLst>
+                                  </p:cTn>
+                                  <p:tgtEl>
+                                    <p:spTgt spid="5"/>
+                                  </p:tgtEl>
+                                  <p:attrNameLst>
+                                    <p:attrName>style.visibility</p:attrName>
+                                  </p:attrNameLst>
+                                </p:cBhvr>
+                                <p:to>
+                                  <p:strVal val="visible"/>
+                                </p:to>
+                              </p:set>
+                              <p:animEffect transition="in" filter="circle(in)">
+                                <p:cBhvr>
+                                  <p:cTn id="91" dur="810"/>
+                                  <p:tgtEl>
+                                    <p:spTgt spid="5"/>
+                                  </p:tgtEl>
+                                </p:cBhvr>
+                              </p:animEffect>
+                            </p:childTnLst>
+                          </p:cTn>
+                        </p:par>
+                        <p:par>
+                          <p:cTn id="11" dur="450" fill="hold" nodeType="afterEffect" grpId="0" presetID="22" presetClass="entr" presetSubtype="1">
+                            <p:stCondLst>
+                              <p:cond delay="390"/>
+                            </p:stCondLst>
+                            <p:childTnLst>
+                              <p:set>
+                                <p:cBhvr>
+                                  <p:cTn id="12" dur="1" fill="hold">
+                                    <p:stCondLst>
+                                      <p:cond delay="0"/>
+                                    </p:stCondLst>
+                                  </p:cTn>
+                                  <p:tgtEl>
+                                    <p:spTgt spid="9"/>
+                                  </p:tgtEl>
+                                  <p:attrNameLst>
+                                    <p:attrName>style.visibility</p:attrName>
+                                  </p:attrNameLst>
+                                </p:cBhvr>
+                                <p:to>
+                                  <p:strVal val="visible"/>
+                                </p:to>
+                              </p:set>
+                              <p:animEffect transition="in" filter="wipe(up)">
+                                <p:cBhvr>
+                                  <p:cTn id="111" dur="450"/>
+                                  <p:tgtEl>
+                                    <p:spTgt spid="9"/>
+                                  </p:tgtEl>
+                                </p:cBhvr>
+                              </p:animEffect>
+                            </p:childTnLst>
+                          </p:cTn>
+                        </p:par>
+                        <p:par>
+                          <p:cTn id="13" dur="570" fill="hold" nodeType="afterEffect" grpId="0" presetID="42" presetClass="entr" presetSubtype="10">
+                            <p:stCondLst>
+                              <p:cond delay="520"/>
+                            </p:stCondLst>
+                            <p:childTnLst>
+                              <p:set>
+                                <p:cBhvr>
+                                  <p:cTn id="14" dur="1" fill="hold">
+                                    <p:stCondLst>
+                                      <p:cond delay="0"/>
+                                    </p:stCondLst>
+                                  </p:cTn>
+                                  <p:tgtEl>
+                                    <p:spTgt spid="17"/>
+                                  </p:tgtEl>
+                                  <p:attrNameLst>
+                                    <p:attrName>style.visibility</p:attrName>
+                                  </p:attrNameLst>
+                                </p:cBhvr>
+                                <p:to>
+                                  <p:strVal val="visible"/>
+                                </p:to>
+                              </p:set>
+                              <p:animEffect transition="in" filter="blinds(horizontal)">
+                                <p:cBhvr>
+                                  <p:cTn id="131" dur="570"/>
+                                  <p:tgtEl>
+                                    <p:spTgt spid="17"/>
+                                  </p:tgtEl>
+                                </p:cBhvr>
+                              </p:animEffect>
+                            </p:childTnLst>
+                          </p:cTn>
+                        </p:par>
+                        <p:par>
+                          <p:cTn id="15" dur="690" fill="hold" nodeType="afterEffect" grpId="0" presetID="43" presetClass="entr" presetSubtype="0">
+                            <p:stCondLst>
+                              <p:cond delay="650"/>
+                            </p:stCondLst>
+                            <p:childTnLst>
+                              <p:set>
+                                <p:cBhvr>
+                                  <p:cTn id="16" dur="1" fill="hold">
+                                    <p:stCondLst>
+                                      <p:cond delay="0"/>
+                                    </p:stCondLst>
+                                  </p:cTn>
+                                  <p:tgtEl>
+                                    <p:spTgt spid="10"/>
+                                  </p:tgtEl>
+                                  <p:attrNameLst>
+                                    <p:attrName>style.visibility</p:attrName>
+                                  </p:attrNameLst>
+                                </p:cBhvr>
+                                <p:to>
+                                  <p:strVal val="visible"/>
+                                </p:to>
+                              </p:set>
+                              <p:animEffect transition="in" filter="checkerboard(across)">
+                                <p:cBhvr>
+                                  <p:cTn id="151" dur="690"/>
+                                  <p:tgtEl>
+                                    <p:spTgt spid="10"/>
+                                  </p:tgtEl>
+                                </p:cBhvr>
+                              </p:animEffect>
+                            </p:childTnLst>
+                          </p:cTn>
+                        </p:par>
+                        <p:par>
+                          <p:cTn id="17" dur="810" fill="hold" nodeType="afterEffect" grpId="0" presetID="21" presetClass="entr" presetSubtype="2">
+                            <p:stCondLst>
+                              <p:cond delay="780"/>
+                            </p:stCondLst>
+                            <p:childTnLst>
+                              <p:set>
+                                <p:cBhvr>
+                                  <p:cTn id="18" dur="1" fill="hold">
+                                    <p:stCondLst>
+                                      <p:cond delay="0"/>
+                                    </p:stCondLst>
+                                  </p:cTn>
+                                  <p:tgtEl>
+                                    <p:spTgt spid="18"/>
+                                  </p:tgtEl>
+                                  <p:attrNameLst>
+                                    <p:attrName>style.visibility</p:attrName>
+                                  </p:attrNameLst>
+                                </p:cBhvr>
+                                <p:to>
+                                  <p:strVal val="visible"/>
+                                </p:to>
+                              </p:set>
+                              <p:animEffect transition="in" filter="wheel(2)">
+                                <p:cBhvr>
+                                  <p:cTn id="171" dur="810"/>
+                                  <p:tgtEl>
+                                    <p:spTgt spid="18"/>
+                                  </p:tgtEl>
+                                </p:cBhvr>
+                              </p:animEffect>
+                            </p:childTnLst>
+                          </p:cTn>
+                        </p:par>
+                        <p:par>
+                          <p:cTn id="19" dur="450" fill="hold" nodeType="afterEffect" grpId="0" presetID="10" presetClass="entr" presetSubtype="0">
+                            <p:stCondLst>
+                              <p:cond delay="910"/>
+                            </p:stCondLst>
+                            <p:childTnLst>
+                              <p:set>
+                                <p:cBhvr>
+                                  <p:cTn id="20" dur="1" fill="hold">
+                                    <p:stCondLst>
+                                      <p:cond delay="0"/>
+                                    </p:stCondLst>
+                                  </p:cTn>
+                                  <p:tgtEl>
+                                    <p:spTgt spid="8"/>
+                                  </p:tgtEl>
+                                  <p:attrNameLst>
+                                    <p:attrName>style.visibility</p:attrName>
+                                  </p:attrNameLst>
+                                </p:cBhvr>
+                                <p:to>
+                                  <p:strVal val="visible"/>
+                                </p:to>
+                              </p:set>
+                              <p:animEffect transition="in" filter="dissolve">
+                                <p:cBhvr>
+                                  <p:cTn id="191" dur="450"/>
+                                  <p:tgtEl>
+                                    <p:spTgt spid="8"/>
+                                  </p:tgtEl>
+                                </p:cBhvr>
+                              </p:animEffect>
+                            </p:childTnLst>
+                          </p:cTn>
+                        </p:par>
+                        <p:par>
+                          <p:cTn id="21" dur="570" fill="hold" nodeType="afterEffect" grpId="0" presetID="25" presetClass="entr" presetSubtype="1">
+                            <p:stCondLst>
+                              <p:cond delay="1040"/>
+                            </p:stCondLst>
+                            <p:childTnLst>
+                              <p:set>
+                                <p:cBhvr>
+                                  <p:cTn id="22" dur="1" fill="hold">
+                                    <p:stCondLst>
+                                      <p:cond delay="0"/>
+                                    </p:stCondLst>
+                                  </p:cTn>
+                                  <p:tgtEl>
+                                    <p:spTgt spid="16"/>
+                                  </p:tgtEl>
+                                  <p:attrNameLst>
+                                    <p:attrName>style.visibility</p:attrName>
+                                  </p:attrNameLst>
+                                </p:cBhvr>
+                                <p:to>
+                                  <p:strVal val="visible"/>
+                                </p:to>
+                              </p:set>
+                              <p:animEffect transition="in" filter="strips(downRight)">
+                                <p:cBhvr>
+                                  <p:cTn id="211" dur="570"/>
+                                  <p:tgtEl>
+                                    <p:spTgt spid="16"/>
+                                  </p:tgtEl>
+                                </p:cBhvr>
+                              </p:animEffect>
+                            </p:childTnLst>
+                          </p:cTn>
+                        </p:par>
+                        <p:par>
+                          <p:cTn id="23" dur="690" fill="hold" nodeType="afterEffect" grpId="0" presetID="45" presetClass="entr" presetSubtype="1">
+                            <p:stCondLst>
+                              <p:cond delay="1170"/>
+                            </p:stCondLst>
+                            <p:childTnLst>
+                              <p:set>
+                                <p:cBhvr>
+                                  <p:cTn id="24" dur="1" fill="hold">
+                                    <p:stCondLst>
+                                      <p:cond delay="0"/>
+                                    </p:stCondLst>
+                                  </p:cTn>
+                                  <p:tgtEl>
+                                    <p:spTgt spid="7"/>
+                                  </p:tgtEl>
+                                  <p:attrNameLst>
+                                    <p:attrName>style.visibility</p:attrName>
+                                  </p:attrNameLst>
+                                </p:cBhvr>
+                                <p:to>
+                                  <p:strVal val="visible"/>
+                                </p:to>
+                              </p:set>
+                              <p:animEffect transition="in" filter="barn(inHorizontal)">
+                                <p:cBhvr>
+                                  <p:cTn id="231" dur="690"/>
+                                  <p:tgtEl>
+                                    <p:spTgt spid="7"/>
+                                  </p:tgtEl>
+                                </p:cBhvr>
+                              </p:animEffect>
+                            </p:childTnLst>
+                          </p:cTn>
+                        </p:par>
+                        <p:par>
+                          <p:cTn id="25" dur="810" fill="hold" nodeType="afterEffect" grpId="0" presetID="22" presetClass="entr" presetSubtype="8">
+                            <p:stCondLst>
+                              <p:cond delay="1300"/>
+                            </p:stCondLst>
+                            <p:childTnLst>
+                              <p:set>
+                                <p:cBhvr>
+                                  <p:cTn id="26" dur="1" fill="hold">
+                                    <p:stCondLst>
+                                      <p:cond delay="0"/>
+                                    </p:stCondLst>
+                                  </p:cTn>
+                                  <p:tgtEl>
+                                    <p:spTgt spid="11"/>
+                                  </p:tgtEl>
+                                  <p:attrNameLst>
+                                    <p:attrName>style.visibility</p:attrName>
+                                  </p:attrNameLst>
+                                </p:cBhvr>
+                                <p:to>
+                                  <p:strVal val="visible"/>
+                                </p:to>
+                              </p:set>
+                              <p:animEffect transition="in" filter="wipe(left)">
+                                <p:cBhvr>
+                                  <p:cTn id="251" dur="810"/>
+                                  <p:tgtEl>
+                                    <p:spTgt spid="11"/>
+                                  </p:tgtEl>
+                                </p:cBhvr>
+                              </p:animEffect>
+                            </p:childTnLst>
+                          </p:cTn>
+                        </p:par>
+                        <p:par>
+                          <p:cTn id="27" dur="450" fill="hold" nodeType="afterEffect" grpId="0" presetID="37" presetClass="entr" presetSubtype="0">
+                            <p:stCondLst>
+                              <p:cond delay="1430"/>
+                            </p:stCondLst>
+                            <p:childTnLst>
+                              <p:set>
+                                <p:cBhvr>
+                                  <p:cTn id="28" dur="1" fill="hold">
+                                    <p:stCondLst>
+                                      <p:cond delay="0"/>
+                                    </p:stCondLst>
+                                  </p:cTn>
+                                  <p:tgtEl>
+                                    <p:spTgt spid="15"/>
+                                  </p:tgtEl>
+                                  <p:attrNameLst>
+                                    <p:attrName>style.visibility</p:attrName>
+                                  </p:attrNameLst>
+                                </p:cBhvr>
+                                <p:to>
+                                  <p:strVal val="visible"/>
+                                </p:to>
+                              </p:set>
+                              <p:animEffect transition="in" filter="wedge">
+                                <p:cBhvr>
+                                  <p:cTn id="271" dur="450"/>
+                                  <p:tgtEl>
+                                    <p:spTgt spid="15"/>
+                                  </p:tgtEl>
+                                </p:cBhvr>
+                              </p:animEffect>
+                            </p:childTnLst>
+                          </p:cTn>
+                        </p:par>
+                        <p:par>
+                          <p:cTn id="29" dur="570" fill="hold" nodeType="afterEffect" grpId="0" presetID="52" presetClass="entr" presetSubtype="0">
+                            <p:stCondLst>
+                              <p:cond delay="1560"/>
+                            </p:stCondLst>
+                            <p:childTnLst>
+                              <p:set>
+                                <p:cBhvr>
+                                  <p:cTn id="30" dur="1" fill="hold">
+                                    <p:stCondLst>
+                                      <p:cond delay="0"/>
+                                    </p:stCondLst>
+                                  </p:cTn>
+                                  <p:tgtEl>
+                                    <p:spTgt spid="19"/>
+                                  </p:tgtEl>
+                                  <p:attrNameLst>
+                                    <p:attrName>style.visibility</p:attrName>
+                                  </p:attrNameLst>
+                                </p:cBhvr>
+                                <p:to>
+                                  <p:strVal val="visible"/>
+                                </p:to>
+                              </p:set>
+                              <p:animEffect transition="in" filter="randombar(horizontal)">
+                                <p:cBhvr>
+                                  <p:cTn id="291" dur="570"/>
+                                  <p:tgtEl>
+                                    <p:spTgt spid="19"/>
+                                  </p:tgtEl>
+                                </p:cBhvr>
+                              </p:animEffect>
+                            </p:childTnLst>
+                          </p:cTn>
+                        </p:par>
+                        <p:par>
+                          <p:cTn id="31" dur="690" fill="hold" nodeType="afterEffect" grpId="0" presetID="21" presetClass="entr" presetSubtype="1">
+                            <p:stCondLst>
+                              <p:cond delay="1690"/>
+                            </p:stCondLst>
+                            <p:childTnLst>
+                              <p:set>
+                                <p:cBhvr>
+                                  <p:cTn id="32" dur="1" fill="hold">
+                                    <p:stCondLst>
+                                      <p:cond delay="0"/>
+                                    </p:stCondLst>
+                                  </p:cTn>
+                                  <p:tgtEl>
+                                    <p:spTgt spid="6"/>
+                                  </p:tgtEl>
+                                  <p:attrNameLst>
+                                    <p:attrName>style.visibility</p:attrName>
+                                  </p:attrNameLst>
+                                </p:cBhvr>
+                                <p:to>
+                                  <p:strVal val="visible"/>
+                                </p:to>
+                              </p:set>
+                              <p:animEffect transition="in" filter="wheel(1)">
+                                <p:cBhvr>
+                                  <p:cTn id="311" dur="690"/>
+                                  <p:tgtEl>
+                                    <p:spTgt spid="6"/>
+                                  </p:tgtEl>
+                                </p:cBhvr>
+                              </p:animEffect>
+                            </p:childTnLst>
+                          </p:cTn>
+                        </p:par>
+                      </p:childTnLst>
+                    </p:cTn>
+                  </p:par>
+                </p:childTnLst>
+              </p:cTn>
+              <p:prevCondLst>
+                <p:cond evt="onPrev" delay="0">
+                  <p:tgtEl>
+                    <p:sldTgt/>
+                  </p:tgtEl>
+                </p:cond>
+              </p:prevCondLst>
+              <p:nextCondLst>
+                <p:cond evt="onNext" delay="0">
+                  <p:tgtEl>
+                    <p:sldTgt/>
+                  </p:tgtEl>
+                </p:cond>
+              </p:nextCondLst>
+            </p:seq>
+          </p:childTnLst>
+        </p:cTn>
+      </p:par>
+    </p:tnLst>
+  </p:timing>
 </p:sld>
 </file>
 
@@ -15352,8 +22206,537 @@
     <a:masterClrMapping/>
   </p:clrMapOvr>
   <p:transition spd="med">
-    <p:fade/>
+    <p:push dir="u"/>
   </p:transition>
+  <p:timing>
+    <p:tnLst>
+      <p:par>
+        <p:cTn id="1" dur="indefinite" restart="never" nodeType="tmRoot">
+          <p:childTnLst>
+            <p:seq concurrent="1" nextAc="seek">
+              <p:cTn id="2" dur="indefinite" nodeType="mainSeq">
+                <p:childTnLst>
+                  <p:par>
+                    <p:cTn id="3" fill="hold">
+                      <p:stCondLst>
+                        <p:cond delay="indefinite"/>
+                      </p:stCondLst>
+                      <p:childTnLst>
+                        <p:par>
+                          <p:cTn id="5" dur="690" fill="hold" nodeType="clickEffect" grpId="0" presetID="22" presetClass="entr" presetSubtype="2">
+                            <p:stCondLst>
+                              <p:cond delay="0"/>
+                            </p:stCondLst>
+                            <p:childTnLst>
+                              <p:set>
+                                <p:cBhvr>
+                                  <p:cTn id="6" dur="1" fill="hold">
+                                    <p:stCondLst>
+                                      <p:cond delay="0"/>
+                                    </p:stCondLst>
+                                  </p:cTn>
+                                  <p:tgtEl>
+                                    <p:spTgt spid="3"/>
+                                  </p:tgtEl>
+                                  <p:attrNameLst>
+                                    <p:attrName>style.visibility</p:attrName>
+                                  </p:attrNameLst>
+                                </p:cBhvr>
+                                <p:to>
+                                  <p:strVal val="visible"/>
+                                </p:to>
+                              </p:set>
+                              <p:animEffect transition="in" filter="wipe(right)">
+                                <p:cBhvr>
+                                  <p:cTn id="51" dur="690"/>
+                                  <p:tgtEl>
+                                    <p:spTgt spid="3"/>
+                                  </p:tgtEl>
+                                </p:cBhvr>
+                              </p:animEffect>
+                            </p:childTnLst>
+                          </p:cTn>
+                        </p:par>
+                        <p:par>
+                          <p:cTn id="7" dur="810" fill="hold" nodeType="afterEffect" grpId="0" presetID="18" presetClass="entr" presetSubtype="12">
+                            <p:stCondLst>
+                              <p:cond delay="130"/>
+                            </p:stCondLst>
+                            <p:childTnLst>
+                              <p:set>
+                                <p:cBhvr>
+                                  <p:cTn id="8" dur="1" fill="hold">
+                                    <p:stCondLst>
+                                      <p:cond delay="0"/>
+                                    </p:stCondLst>
+                                  </p:cTn>
+                                  <p:tgtEl>
+                                    <p:spTgt spid="4"/>
+                                  </p:tgtEl>
+                                  <p:attrNameLst>
+                                    <p:attrName>style.visibility</p:attrName>
+                                  </p:attrNameLst>
+                                </p:cBhvr>
+                                <p:to>
+                                  <p:strVal val="visible"/>
+                                </p:to>
+                              </p:set>
+                              <p:animEffect transition="in" filter="circle(in)">
+                                <p:cBhvr>
+                                  <p:cTn id="71" dur="810"/>
+                                  <p:tgtEl>
+                                    <p:spTgt spid="4"/>
+                                  </p:tgtEl>
+                                </p:cBhvr>
+                              </p:animEffect>
+                            </p:childTnLst>
+                          </p:cTn>
+                        </p:par>
+                        <p:par>
+                          <p:cTn id="9" dur="450" fill="hold" nodeType="afterEffect" grpId="0" presetID="22" presetClass="entr" presetSubtype="1">
+                            <p:stCondLst>
+                              <p:cond delay="260"/>
+                            </p:stCondLst>
+                            <p:childTnLst>
+                              <p:set>
+                                <p:cBhvr>
+                                  <p:cTn id="10" dur="1" fill="hold">
+                                    <p:stCondLst>
+                                      <p:cond delay="0"/>
+                                    </p:stCondLst>
+                                  </p:cTn>
+                                  <p:tgtEl>
+                                    <p:spTgt spid="5"/>
+                                  </p:tgtEl>
+                                  <p:attrNameLst>
+                                    <p:attrName>style.visibility</p:attrName>
+                                  </p:attrNameLst>
+                                </p:cBhvr>
+                                <p:to>
+                                  <p:strVal val="visible"/>
+                                </p:to>
+                              </p:set>
+                              <p:animEffect transition="in" filter="wipe(up)">
+                                <p:cBhvr>
+                                  <p:cTn id="91" dur="450"/>
+                                  <p:tgtEl>
+                                    <p:spTgt spid="5"/>
+                                  </p:tgtEl>
+                                </p:cBhvr>
+                              </p:animEffect>
+                            </p:childTnLst>
+                          </p:cTn>
+                        </p:par>
+                        <p:par>
+                          <p:cTn id="11" dur="570" fill="hold" nodeType="afterEffect" grpId="0" presetID="42" presetClass="entr" presetSubtype="10">
+                            <p:stCondLst>
+                              <p:cond delay="390"/>
+                            </p:stCondLst>
+                            <p:childTnLst>
+                              <p:set>
+                                <p:cBhvr>
+                                  <p:cTn id="12" dur="1" fill="hold">
+                                    <p:stCondLst>
+                                      <p:cond delay="0"/>
+                                    </p:stCondLst>
+                                  </p:cTn>
+                                  <p:tgtEl>
+                                    <p:spTgt spid="6"/>
+                                  </p:tgtEl>
+                                  <p:attrNameLst>
+                                    <p:attrName>style.visibility</p:attrName>
+                                  </p:attrNameLst>
+                                </p:cBhvr>
+                                <p:to>
+                                  <p:strVal val="visible"/>
+                                </p:to>
+                              </p:set>
+                              <p:animEffect transition="in" filter="blinds(horizontal)">
+                                <p:cBhvr>
+                                  <p:cTn id="111" dur="570"/>
+                                  <p:tgtEl>
+                                    <p:spTgt spid="6"/>
+                                  </p:tgtEl>
+                                </p:cBhvr>
+                              </p:animEffect>
+                            </p:childTnLst>
+                          </p:cTn>
+                        </p:par>
+                        <p:par>
+                          <p:cTn id="13" dur="690" fill="hold" nodeType="afterEffect" grpId="0" presetID="43" presetClass="entr" presetSubtype="0">
+                            <p:stCondLst>
+                              <p:cond delay="520"/>
+                            </p:stCondLst>
+                            <p:childTnLst>
+                              <p:set>
+                                <p:cBhvr>
+                                  <p:cTn id="14" dur="1" fill="hold">
+                                    <p:stCondLst>
+                                      <p:cond delay="0"/>
+                                    </p:stCondLst>
+                                  </p:cTn>
+                                  <p:tgtEl>
+                                    <p:spTgt spid="9"/>
+                                  </p:tgtEl>
+                                  <p:attrNameLst>
+                                    <p:attrName>style.visibility</p:attrName>
+                                  </p:attrNameLst>
+                                </p:cBhvr>
+                                <p:to>
+                                  <p:strVal val="visible"/>
+                                </p:to>
+                              </p:set>
+                              <p:animEffect transition="in" filter="checkerboard(across)">
+                                <p:cBhvr>
+                                  <p:cTn id="131" dur="690"/>
+                                  <p:tgtEl>
+                                    <p:spTgt spid="9"/>
+                                  </p:tgtEl>
+                                </p:cBhvr>
+                              </p:animEffect>
+                            </p:childTnLst>
+                          </p:cTn>
+                        </p:par>
+                        <p:par>
+                          <p:cTn id="15" dur="810" fill="hold" nodeType="afterEffect" grpId="0" presetID="21" presetClass="entr" presetSubtype="2">
+                            <p:stCondLst>
+                              <p:cond delay="650"/>
+                            </p:stCondLst>
+                            <p:childTnLst>
+                              <p:set>
+                                <p:cBhvr>
+                                  <p:cTn id="16" dur="1" fill="hold">
+                                    <p:stCondLst>
+                                      <p:cond delay="0"/>
+                                    </p:stCondLst>
+                                  </p:cTn>
+                                  <p:tgtEl>
+                                    <p:spTgt spid="12"/>
+                                  </p:tgtEl>
+                                  <p:attrNameLst>
+                                    <p:attrName>style.visibility</p:attrName>
+                                  </p:attrNameLst>
+                                </p:cBhvr>
+                                <p:to>
+                                  <p:strVal val="visible"/>
+                                </p:to>
+                              </p:set>
+                              <p:animEffect transition="in" filter="wheel(2)">
+                                <p:cBhvr>
+                                  <p:cTn id="151" dur="810"/>
+                                  <p:tgtEl>
+                                    <p:spTgt spid="12"/>
+                                  </p:tgtEl>
+                                </p:cBhvr>
+                              </p:animEffect>
+                            </p:childTnLst>
+                          </p:cTn>
+                        </p:par>
+                        <p:par>
+                          <p:cTn id="17" dur="450" fill="hold" nodeType="afterEffect" grpId="0" presetID="10" presetClass="entr" presetSubtype="0">
+                            <p:stCondLst>
+                              <p:cond delay="780"/>
+                            </p:stCondLst>
+                            <p:childTnLst>
+                              <p:set>
+                                <p:cBhvr>
+                                  <p:cTn id="18" dur="1" fill="hold">
+                                    <p:stCondLst>
+                                      <p:cond delay="0"/>
+                                    </p:stCondLst>
+                                  </p:cTn>
+                                  <p:tgtEl>
+                                    <p:spTgt spid="15"/>
+                                  </p:tgtEl>
+                                  <p:attrNameLst>
+                                    <p:attrName>style.visibility</p:attrName>
+                                  </p:attrNameLst>
+                                </p:cBhvr>
+                                <p:to>
+                                  <p:strVal val="visible"/>
+                                </p:to>
+                              </p:set>
+                              <p:animEffect transition="in" filter="dissolve">
+                                <p:cBhvr>
+                                  <p:cTn id="171" dur="450"/>
+                                  <p:tgtEl>
+                                    <p:spTgt spid="15"/>
+                                  </p:tgtEl>
+                                </p:cBhvr>
+                              </p:animEffect>
+                            </p:childTnLst>
+                          </p:cTn>
+                        </p:par>
+                        <p:par>
+                          <p:cTn id="19" dur="570" fill="hold" nodeType="afterEffect" grpId="0" presetID="25" presetClass="entr" presetSubtype="1">
+                            <p:stCondLst>
+                              <p:cond delay="910"/>
+                            </p:stCondLst>
+                            <p:childTnLst>
+                              <p:set>
+                                <p:cBhvr>
+                                  <p:cTn id="20" dur="1" fill="hold">
+                                    <p:stCondLst>
+                                      <p:cond delay="0"/>
+                                    </p:stCondLst>
+                                  </p:cTn>
+                                  <p:tgtEl>
+                                    <p:spTgt spid="7"/>
+                                  </p:tgtEl>
+                                  <p:attrNameLst>
+                                    <p:attrName>style.visibility</p:attrName>
+                                  </p:attrNameLst>
+                                </p:cBhvr>
+                                <p:to>
+                                  <p:strVal val="visible"/>
+                                </p:to>
+                              </p:set>
+                              <p:animEffect transition="in" filter="strips(downRight)">
+                                <p:cBhvr>
+                                  <p:cTn id="191" dur="570"/>
+                                  <p:tgtEl>
+                                    <p:spTgt spid="7"/>
+                                  </p:tgtEl>
+                                </p:cBhvr>
+                              </p:animEffect>
+                            </p:childTnLst>
+                          </p:cTn>
+                        </p:par>
+                        <p:par>
+                          <p:cTn id="21" dur="690" fill="hold" nodeType="afterEffect" grpId="0" presetID="45" presetClass="entr" presetSubtype="1">
+                            <p:stCondLst>
+                              <p:cond delay="1040"/>
+                            </p:stCondLst>
+                            <p:childTnLst>
+                              <p:set>
+                                <p:cBhvr>
+                                  <p:cTn id="22" dur="1" fill="hold">
+                                    <p:stCondLst>
+                                      <p:cond delay="0"/>
+                                    </p:stCondLst>
+                                  </p:cTn>
+                                  <p:tgtEl>
+                                    <p:spTgt spid="8"/>
+                                  </p:tgtEl>
+                                  <p:attrNameLst>
+                                    <p:attrName>style.visibility</p:attrName>
+                                  </p:attrNameLst>
+                                </p:cBhvr>
+                                <p:to>
+                                  <p:strVal val="visible"/>
+                                </p:to>
+                              </p:set>
+                              <p:animEffect transition="in" filter="barn(inHorizontal)">
+                                <p:cBhvr>
+                                  <p:cTn id="211" dur="690"/>
+                                  <p:tgtEl>
+                                    <p:spTgt spid="8"/>
+                                  </p:tgtEl>
+                                </p:cBhvr>
+                              </p:animEffect>
+                            </p:childTnLst>
+                          </p:cTn>
+                        </p:par>
+                        <p:par>
+                          <p:cTn id="23" dur="810" fill="hold" nodeType="afterEffect" grpId="0" presetID="22" presetClass="entr" presetSubtype="8">
+                            <p:stCondLst>
+                              <p:cond delay="1170"/>
+                            </p:stCondLst>
+                            <p:childTnLst>
+                              <p:set>
+                                <p:cBhvr>
+                                  <p:cTn id="24" dur="1" fill="hold">
+                                    <p:stCondLst>
+                                      <p:cond delay="0"/>
+                                    </p:stCondLst>
+                                  </p:cTn>
+                                  <p:tgtEl>
+                                    <p:spTgt spid="10"/>
+                                  </p:tgtEl>
+                                  <p:attrNameLst>
+                                    <p:attrName>style.visibility</p:attrName>
+                                  </p:attrNameLst>
+                                </p:cBhvr>
+                                <p:to>
+                                  <p:strVal val="visible"/>
+                                </p:to>
+                              </p:set>
+                              <p:animEffect transition="in" filter="wipe(left)">
+                                <p:cBhvr>
+                                  <p:cTn id="231" dur="810"/>
+                                  <p:tgtEl>
+                                    <p:spTgt spid="10"/>
+                                  </p:tgtEl>
+                                </p:cBhvr>
+                              </p:animEffect>
+                            </p:childTnLst>
+                          </p:cTn>
+                        </p:par>
+                        <p:par>
+                          <p:cTn id="25" dur="450" fill="hold" nodeType="afterEffect" grpId="0" presetID="37" presetClass="entr" presetSubtype="0">
+                            <p:stCondLst>
+                              <p:cond delay="1300"/>
+                            </p:stCondLst>
+                            <p:childTnLst>
+                              <p:set>
+                                <p:cBhvr>
+                                  <p:cTn id="26" dur="1" fill="hold">
+                                    <p:stCondLst>
+                                      <p:cond delay="0"/>
+                                    </p:stCondLst>
+                                  </p:cTn>
+                                  <p:tgtEl>
+                                    <p:spTgt spid="11"/>
+                                  </p:tgtEl>
+                                  <p:attrNameLst>
+                                    <p:attrName>style.visibility</p:attrName>
+                                  </p:attrNameLst>
+                                </p:cBhvr>
+                                <p:to>
+                                  <p:strVal val="visible"/>
+                                </p:to>
+                              </p:set>
+                              <p:animEffect transition="in" filter="wedge">
+                                <p:cBhvr>
+                                  <p:cTn id="251" dur="450"/>
+                                  <p:tgtEl>
+                                    <p:spTgt spid="11"/>
+                                  </p:tgtEl>
+                                </p:cBhvr>
+                              </p:animEffect>
+                            </p:childTnLst>
+                          </p:cTn>
+                        </p:par>
+                        <p:par>
+                          <p:cTn id="27" dur="570" fill="hold" nodeType="afterEffect" grpId="0" presetID="52" presetClass="entr" presetSubtype="0">
+                            <p:stCondLst>
+                              <p:cond delay="1430"/>
+                            </p:stCondLst>
+                            <p:childTnLst>
+                              <p:set>
+                                <p:cBhvr>
+                                  <p:cTn id="28" dur="1" fill="hold">
+                                    <p:stCondLst>
+                                      <p:cond delay="0"/>
+                                    </p:stCondLst>
+                                  </p:cTn>
+                                  <p:tgtEl>
+                                    <p:spTgt spid="13"/>
+                                  </p:tgtEl>
+                                  <p:attrNameLst>
+                                    <p:attrName>style.visibility</p:attrName>
+                                  </p:attrNameLst>
+                                </p:cBhvr>
+                                <p:to>
+                                  <p:strVal val="visible"/>
+                                </p:to>
+                              </p:set>
+                              <p:animEffect transition="in" filter="randombar(horizontal)">
+                                <p:cBhvr>
+                                  <p:cTn id="271" dur="570"/>
+                                  <p:tgtEl>
+                                    <p:spTgt spid="13"/>
+                                  </p:tgtEl>
+                                </p:cBhvr>
+                              </p:animEffect>
+                            </p:childTnLst>
+                          </p:cTn>
+                        </p:par>
+                        <p:par>
+                          <p:cTn id="29" dur="690" fill="hold" nodeType="afterEffect" grpId="0" presetID="21" presetClass="entr" presetSubtype="1">
+                            <p:stCondLst>
+                              <p:cond delay="1560"/>
+                            </p:stCondLst>
+                            <p:childTnLst>
+                              <p:set>
+                                <p:cBhvr>
+                                  <p:cTn id="30" dur="1" fill="hold">
+                                    <p:stCondLst>
+                                      <p:cond delay="0"/>
+                                    </p:stCondLst>
+                                  </p:cTn>
+                                  <p:tgtEl>
+                                    <p:spTgt spid="14"/>
+                                  </p:tgtEl>
+                                  <p:attrNameLst>
+                                    <p:attrName>style.visibility</p:attrName>
+                                  </p:attrNameLst>
+                                </p:cBhvr>
+                                <p:to>
+                                  <p:strVal val="visible"/>
+                                </p:to>
+                              </p:set>
+                              <p:animEffect transition="in" filter="wheel(1)">
+                                <p:cBhvr>
+                                  <p:cTn id="291" dur="690"/>
+                                  <p:tgtEl>
+                                    <p:spTgt spid="14"/>
+                                  </p:tgtEl>
+                                </p:cBhvr>
+                              </p:animEffect>
+                            </p:childTnLst>
+                          </p:cTn>
+                        </p:par>
+                        <p:par>
+                          <p:cTn id="31" dur="810" fill="hold" nodeType="afterEffect" grpId="0" presetID="22" presetClass="entr" presetSubtype="4">
+                            <p:stCondLst>
+                              <p:cond delay="1690"/>
+                            </p:stCondLst>
+                            <p:childTnLst>
+                              <p:set>
+                                <p:cBhvr>
+                                  <p:cTn id="32" dur="1" fill="hold">
+                                    <p:stCondLst>
+                                      <p:cond delay="0"/>
+                                    </p:stCondLst>
+                                  </p:cTn>
+                                  <p:tgtEl>
+                                    <p:spTgt spid="16"/>
+                                  </p:tgtEl>
+                                  <p:attrNameLst>
+                                    <p:attrName>style.visibility</p:attrName>
+                                  </p:attrNameLst>
+                                </p:cBhvr>
+                                <p:to>
+                                  <p:strVal val="visible"/>
+                                </p:to>
+                              </p:set>
+                              <p:animEffect transition="in" filter="wipe(down)">
+                                <p:cBhvr>
+                                  <p:cTn id="311" dur="810"/>
+                                  <p:tgtEl>
+                                    <p:spTgt spid="16"/>
+                                  </p:tgtEl>
+                                </p:cBhvr>
+                              </p:animEffect>
+                            </p:childTnLst>
+                          </p:cTn>
+                        </p:par>
+                      </p:childTnLst>
+                    </p:cTn>
+                  </p:par>
+                </p:childTnLst>
+              </p:cTn>
+              <p:prevCondLst>
+                <p:cond evt="onPrev" delay="0">
+                  <p:tgtEl>
+                    <p:sldTgt/>
+                  </p:tgtEl>
+                </p:cond>
+              </p:prevCondLst>
+              <p:nextCondLst>
+                <p:cond evt="onNext" delay="0">
+                  <p:tgtEl>
+                    <p:sldTgt/>
+                  </p:tgtEl>
+                </p:cond>
+              </p:nextCondLst>
+            </p:seq>
+          </p:childTnLst>
+        </p:cTn>
+      </p:par>
+    </p:tnLst>
+  </p:timing>
 </p:sld>
 </file>
 
@@ -16168,8 +23551,537 @@
     <a:masterClrMapping/>
   </p:clrMapOvr>
   <p:transition spd="med">
-    <p:fade/>
+    <p:wipe dir="d"/>
   </p:transition>
+  <p:timing>
+    <p:tnLst>
+      <p:par>
+        <p:cTn id="1" dur="indefinite" restart="never" nodeType="tmRoot">
+          <p:childTnLst>
+            <p:seq concurrent="1" nextAc="seek">
+              <p:cTn id="2" dur="indefinite" nodeType="mainSeq">
+                <p:childTnLst>
+                  <p:par>
+                    <p:cTn id="3" fill="hold">
+                      <p:stCondLst>
+                        <p:cond delay="indefinite"/>
+                      </p:stCondLst>
+                      <p:childTnLst>
+                        <p:par>
+                          <p:cTn id="5" dur="810" fill="hold" nodeType="clickEffect" grpId="0" presetID="18" presetClass="entr" presetSubtype="12">
+                            <p:stCondLst>
+                              <p:cond delay="0"/>
+                            </p:stCondLst>
+                            <p:childTnLst>
+                              <p:set>
+                                <p:cBhvr>
+                                  <p:cTn id="6" dur="1" fill="hold">
+                                    <p:stCondLst>
+                                      <p:cond delay="0"/>
+                                    </p:stCondLst>
+                                  </p:cTn>
+                                  <p:tgtEl>
+                                    <p:spTgt spid="3"/>
+                                  </p:tgtEl>
+                                  <p:attrNameLst>
+                                    <p:attrName>style.visibility</p:attrName>
+                                  </p:attrNameLst>
+                                </p:cBhvr>
+                                <p:to>
+                                  <p:strVal val="visible"/>
+                                </p:to>
+                              </p:set>
+                              <p:animEffect transition="in" filter="circle(in)">
+                                <p:cBhvr>
+                                  <p:cTn id="51" dur="810"/>
+                                  <p:tgtEl>
+                                    <p:spTgt spid="3"/>
+                                  </p:tgtEl>
+                                </p:cBhvr>
+                              </p:animEffect>
+                            </p:childTnLst>
+                          </p:cTn>
+                        </p:par>
+                        <p:par>
+                          <p:cTn id="7" dur="450" fill="hold" nodeType="afterEffect" grpId="0" presetID="22" presetClass="entr" presetSubtype="1">
+                            <p:stCondLst>
+                              <p:cond delay="130"/>
+                            </p:stCondLst>
+                            <p:childTnLst>
+                              <p:set>
+                                <p:cBhvr>
+                                  <p:cTn id="8" dur="1" fill="hold">
+                                    <p:stCondLst>
+                                      <p:cond delay="0"/>
+                                    </p:stCondLst>
+                                  </p:cTn>
+                                  <p:tgtEl>
+                                    <p:spTgt spid="4"/>
+                                  </p:tgtEl>
+                                  <p:attrNameLst>
+                                    <p:attrName>style.visibility</p:attrName>
+                                  </p:attrNameLst>
+                                </p:cBhvr>
+                                <p:to>
+                                  <p:strVal val="visible"/>
+                                </p:to>
+                              </p:set>
+                              <p:animEffect transition="in" filter="wipe(up)">
+                                <p:cBhvr>
+                                  <p:cTn id="71" dur="450"/>
+                                  <p:tgtEl>
+                                    <p:spTgt spid="4"/>
+                                  </p:tgtEl>
+                                </p:cBhvr>
+                              </p:animEffect>
+                            </p:childTnLst>
+                          </p:cTn>
+                        </p:par>
+                        <p:par>
+                          <p:cTn id="9" dur="570" fill="hold" nodeType="afterEffect" grpId="0" presetID="42" presetClass="entr" presetSubtype="10">
+                            <p:stCondLst>
+                              <p:cond delay="260"/>
+                            </p:stCondLst>
+                            <p:childTnLst>
+                              <p:set>
+                                <p:cBhvr>
+                                  <p:cTn id="10" dur="1" fill="hold">
+                                    <p:stCondLst>
+                                      <p:cond delay="0"/>
+                                    </p:stCondLst>
+                                  </p:cTn>
+                                  <p:tgtEl>
+                                    <p:spTgt spid="5"/>
+                                  </p:tgtEl>
+                                  <p:attrNameLst>
+                                    <p:attrName>style.visibility</p:attrName>
+                                  </p:attrNameLst>
+                                </p:cBhvr>
+                                <p:to>
+                                  <p:strVal val="visible"/>
+                                </p:to>
+                              </p:set>
+                              <p:animEffect transition="in" filter="blinds(horizontal)">
+                                <p:cBhvr>
+                                  <p:cTn id="91" dur="570"/>
+                                  <p:tgtEl>
+                                    <p:spTgt spid="5"/>
+                                  </p:tgtEl>
+                                </p:cBhvr>
+                              </p:animEffect>
+                            </p:childTnLst>
+                          </p:cTn>
+                        </p:par>
+                        <p:par>
+                          <p:cTn id="11" dur="690" fill="hold" nodeType="afterEffect" grpId="0" presetID="43" presetClass="entr" presetSubtype="0">
+                            <p:stCondLst>
+                              <p:cond delay="390"/>
+                            </p:stCondLst>
+                            <p:childTnLst>
+                              <p:set>
+                                <p:cBhvr>
+                                  <p:cTn id="12" dur="1" fill="hold">
+                                    <p:stCondLst>
+                                      <p:cond delay="0"/>
+                                    </p:stCondLst>
+                                  </p:cTn>
+                                  <p:tgtEl>
+                                    <p:spTgt spid="6"/>
+                                  </p:tgtEl>
+                                  <p:attrNameLst>
+                                    <p:attrName>style.visibility</p:attrName>
+                                  </p:attrNameLst>
+                                </p:cBhvr>
+                                <p:to>
+                                  <p:strVal val="visible"/>
+                                </p:to>
+                              </p:set>
+                              <p:animEffect transition="in" filter="checkerboard(across)">
+                                <p:cBhvr>
+                                  <p:cTn id="111" dur="690"/>
+                                  <p:tgtEl>
+                                    <p:spTgt spid="6"/>
+                                  </p:tgtEl>
+                                </p:cBhvr>
+                              </p:animEffect>
+                            </p:childTnLst>
+                          </p:cTn>
+                        </p:par>
+                        <p:par>
+                          <p:cTn id="13" dur="810" fill="hold" nodeType="afterEffect" grpId="0" presetID="21" presetClass="entr" presetSubtype="2">
+                            <p:stCondLst>
+                              <p:cond delay="520"/>
+                            </p:stCondLst>
+                            <p:childTnLst>
+                              <p:set>
+                                <p:cBhvr>
+                                  <p:cTn id="14" dur="1" fill="hold">
+                                    <p:stCondLst>
+                                      <p:cond delay="0"/>
+                                    </p:stCondLst>
+                                  </p:cTn>
+                                  <p:tgtEl>
+                                    <p:spTgt spid="14"/>
+                                  </p:tgtEl>
+                                  <p:attrNameLst>
+                                    <p:attrName>style.visibility</p:attrName>
+                                  </p:attrNameLst>
+                                </p:cBhvr>
+                                <p:to>
+                                  <p:strVal val="visible"/>
+                                </p:to>
+                              </p:set>
+                              <p:animEffect transition="in" filter="wheel(2)">
+                                <p:cBhvr>
+                                  <p:cTn id="131" dur="810"/>
+                                  <p:tgtEl>
+                                    <p:spTgt spid="14"/>
+                                  </p:tgtEl>
+                                </p:cBhvr>
+                              </p:animEffect>
+                            </p:childTnLst>
+                          </p:cTn>
+                        </p:par>
+                        <p:par>
+                          <p:cTn id="15" dur="450" fill="hold" nodeType="afterEffect" grpId="0" presetID="10" presetClass="entr" presetSubtype="0">
+                            <p:stCondLst>
+                              <p:cond delay="650"/>
+                            </p:stCondLst>
+                            <p:childTnLst>
+                              <p:set>
+                                <p:cBhvr>
+                                  <p:cTn id="16" dur="1" fill="hold">
+                                    <p:stCondLst>
+                                      <p:cond delay="0"/>
+                                    </p:stCondLst>
+                                  </p:cTn>
+                                  <p:tgtEl>
+                                    <p:spTgt spid="10"/>
+                                  </p:tgtEl>
+                                  <p:attrNameLst>
+                                    <p:attrName>style.visibility</p:attrName>
+                                  </p:attrNameLst>
+                                </p:cBhvr>
+                                <p:to>
+                                  <p:strVal val="visible"/>
+                                </p:to>
+                              </p:set>
+                              <p:animEffect transition="in" filter="dissolve">
+                                <p:cBhvr>
+                                  <p:cTn id="151" dur="450"/>
+                                  <p:tgtEl>
+                                    <p:spTgt spid="10"/>
+                                  </p:tgtEl>
+                                </p:cBhvr>
+                              </p:animEffect>
+                            </p:childTnLst>
+                          </p:cTn>
+                        </p:par>
+                        <p:par>
+                          <p:cTn id="17" dur="570" fill="hold" nodeType="afterEffect" grpId="0" presetID="25" presetClass="entr" presetSubtype="1">
+                            <p:stCondLst>
+                              <p:cond delay="780"/>
+                            </p:stCondLst>
+                            <p:childTnLst>
+                              <p:set>
+                                <p:cBhvr>
+                                  <p:cTn id="18" dur="1" fill="hold">
+                                    <p:stCondLst>
+                                      <p:cond delay="0"/>
+                                    </p:stCondLst>
+                                  </p:cTn>
+                                  <p:tgtEl>
+                                    <p:spTgt spid="15"/>
+                                  </p:tgtEl>
+                                  <p:attrNameLst>
+                                    <p:attrName>style.visibility</p:attrName>
+                                  </p:attrNameLst>
+                                </p:cBhvr>
+                                <p:to>
+                                  <p:strVal val="visible"/>
+                                </p:to>
+                              </p:set>
+                              <p:animEffect transition="in" filter="strips(downRight)">
+                                <p:cBhvr>
+                                  <p:cTn id="171" dur="570"/>
+                                  <p:tgtEl>
+                                    <p:spTgt spid="15"/>
+                                  </p:tgtEl>
+                                </p:cBhvr>
+                              </p:animEffect>
+                            </p:childTnLst>
+                          </p:cTn>
+                        </p:par>
+                        <p:par>
+                          <p:cTn id="19" dur="690" fill="hold" nodeType="afterEffect" grpId="0" presetID="45" presetClass="entr" presetSubtype="1">
+                            <p:stCondLst>
+                              <p:cond delay="910"/>
+                            </p:stCondLst>
+                            <p:childTnLst>
+                              <p:set>
+                                <p:cBhvr>
+                                  <p:cTn id="20" dur="1" fill="hold">
+                                    <p:stCondLst>
+                                      <p:cond delay="0"/>
+                                    </p:stCondLst>
+                                  </p:cTn>
+                                  <p:tgtEl>
+                                    <p:spTgt spid="8"/>
+                                  </p:tgtEl>
+                                  <p:attrNameLst>
+                                    <p:attrName>style.visibility</p:attrName>
+                                  </p:attrNameLst>
+                                </p:cBhvr>
+                                <p:to>
+                                  <p:strVal val="visible"/>
+                                </p:to>
+                              </p:set>
+                              <p:animEffect transition="in" filter="barn(inHorizontal)">
+                                <p:cBhvr>
+                                  <p:cTn id="191" dur="690"/>
+                                  <p:tgtEl>
+                                    <p:spTgt spid="8"/>
+                                  </p:tgtEl>
+                                </p:cBhvr>
+                              </p:animEffect>
+                            </p:childTnLst>
+                          </p:cTn>
+                        </p:par>
+                        <p:par>
+                          <p:cTn id="21" dur="810" fill="hold" nodeType="afterEffect" grpId="0" presetID="22" presetClass="entr" presetSubtype="8">
+                            <p:stCondLst>
+                              <p:cond delay="1040"/>
+                            </p:stCondLst>
+                            <p:childTnLst>
+                              <p:set>
+                                <p:cBhvr>
+                                  <p:cTn id="22" dur="1" fill="hold">
+                                    <p:stCondLst>
+                                      <p:cond delay="0"/>
+                                    </p:stCondLst>
+                                  </p:cTn>
+                                  <p:tgtEl>
+                                    <p:spTgt spid="11"/>
+                                  </p:tgtEl>
+                                  <p:attrNameLst>
+                                    <p:attrName>style.visibility</p:attrName>
+                                  </p:attrNameLst>
+                                </p:cBhvr>
+                                <p:to>
+                                  <p:strVal val="visible"/>
+                                </p:to>
+                              </p:set>
+                              <p:animEffect transition="in" filter="wipe(left)">
+                                <p:cBhvr>
+                                  <p:cTn id="211" dur="810"/>
+                                  <p:tgtEl>
+                                    <p:spTgt spid="11"/>
+                                  </p:tgtEl>
+                                </p:cBhvr>
+                              </p:animEffect>
+                            </p:childTnLst>
+                          </p:cTn>
+                        </p:par>
+                        <p:par>
+                          <p:cTn id="23" dur="450" fill="hold" nodeType="afterEffect" grpId="0" presetID="37" presetClass="entr" presetSubtype="0">
+                            <p:stCondLst>
+                              <p:cond delay="1170"/>
+                            </p:stCondLst>
+                            <p:childTnLst>
+                              <p:set>
+                                <p:cBhvr>
+                                  <p:cTn id="24" dur="1" fill="hold">
+                                    <p:stCondLst>
+                                      <p:cond delay="0"/>
+                                    </p:stCondLst>
+                                  </p:cTn>
+                                  <p:tgtEl>
+                                    <p:spTgt spid="12"/>
+                                  </p:tgtEl>
+                                  <p:attrNameLst>
+                                    <p:attrName>style.visibility</p:attrName>
+                                  </p:attrNameLst>
+                                </p:cBhvr>
+                                <p:to>
+                                  <p:strVal val="visible"/>
+                                </p:to>
+                              </p:set>
+                              <p:animEffect transition="in" filter="wedge">
+                                <p:cBhvr>
+                                  <p:cTn id="231" dur="450"/>
+                                  <p:tgtEl>
+                                    <p:spTgt spid="12"/>
+                                  </p:tgtEl>
+                                </p:cBhvr>
+                              </p:animEffect>
+                            </p:childTnLst>
+                          </p:cTn>
+                        </p:par>
+                        <p:par>
+                          <p:cTn id="25" dur="570" fill="hold" nodeType="afterEffect" grpId="0" presetID="52" presetClass="entr" presetSubtype="0">
+                            <p:stCondLst>
+                              <p:cond delay="1300"/>
+                            </p:stCondLst>
+                            <p:childTnLst>
+                              <p:set>
+                                <p:cBhvr>
+                                  <p:cTn id="26" dur="1" fill="hold">
+                                    <p:stCondLst>
+                                      <p:cond delay="0"/>
+                                    </p:stCondLst>
+                                  </p:cTn>
+                                  <p:tgtEl>
+                                    <p:spTgt spid="7"/>
+                                  </p:tgtEl>
+                                  <p:attrNameLst>
+                                    <p:attrName>style.visibility</p:attrName>
+                                  </p:attrNameLst>
+                                </p:cBhvr>
+                                <p:to>
+                                  <p:strVal val="visible"/>
+                                </p:to>
+                              </p:set>
+                              <p:animEffect transition="in" filter="randombar(horizontal)">
+                                <p:cBhvr>
+                                  <p:cTn id="251" dur="570"/>
+                                  <p:tgtEl>
+                                    <p:spTgt spid="7"/>
+                                  </p:tgtEl>
+                                </p:cBhvr>
+                              </p:animEffect>
+                            </p:childTnLst>
+                          </p:cTn>
+                        </p:par>
+                        <p:par>
+                          <p:cTn id="27" dur="690" fill="hold" nodeType="afterEffect" grpId="0" presetID="21" presetClass="entr" presetSubtype="1">
+                            <p:stCondLst>
+                              <p:cond delay="1430"/>
+                            </p:stCondLst>
+                            <p:childTnLst>
+                              <p:set>
+                                <p:cBhvr>
+                                  <p:cTn id="28" dur="1" fill="hold">
+                                    <p:stCondLst>
+                                      <p:cond delay="0"/>
+                                    </p:stCondLst>
+                                  </p:cTn>
+                                  <p:tgtEl>
+                                    <p:spTgt spid="9"/>
+                                  </p:tgtEl>
+                                  <p:attrNameLst>
+                                    <p:attrName>style.visibility</p:attrName>
+                                  </p:attrNameLst>
+                                </p:cBhvr>
+                                <p:to>
+                                  <p:strVal val="visible"/>
+                                </p:to>
+                              </p:set>
+                              <p:animEffect transition="in" filter="wheel(1)">
+                                <p:cBhvr>
+                                  <p:cTn id="271" dur="690"/>
+                                  <p:tgtEl>
+                                    <p:spTgt spid="9"/>
+                                  </p:tgtEl>
+                                </p:cBhvr>
+                              </p:animEffect>
+                            </p:childTnLst>
+                          </p:cTn>
+                        </p:par>
+                        <p:par>
+                          <p:cTn id="29" dur="810" fill="hold" nodeType="afterEffect" grpId="0" presetID="22" presetClass="entr" presetSubtype="4">
+                            <p:stCondLst>
+                              <p:cond delay="1560"/>
+                            </p:stCondLst>
+                            <p:childTnLst>
+                              <p:set>
+                                <p:cBhvr>
+                                  <p:cTn id="30" dur="1" fill="hold">
+                                    <p:stCondLst>
+                                      <p:cond delay="0"/>
+                                    </p:stCondLst>
+                                  </p:cTn>
+                                  <p:tgtEl>
+                                    <p:spTgt spid="13"/>
+                                  </p:tgtEl>
+                                  <p:attrNameLst>
+                                    <p:attrName>style.visibility</p:attrName>
+                                  </p:attrNameLst>
+                                </p:cBhvr>
+                                <p:to>
+                                  <p:strVal val="visible"/>
+                                </p:to>
+                              </p:set>
+                              <p:animEffect transition="in" filter="wipe(down)">
+                                <p:cBhvr>
+                                  <p:cTn id="291" dur="810"/>
+                                  <p:tgtEl>
+                                    <p:spTgt spid="13"/>
+                                  </p:tgtEl>
+                                </p:cBhvr>
+                              </p:animEffect>
+                            </p:childTnLst>
+                          </p:cTn>
+                        </p:par>
+                        <p:par>
+                          <p:cTn id="31" dur="450" fill="hold" nodeType="afterEffect" grpId="0" presetID="9" presetClass="entr" presetSubtype="0">
+                            <p:stCondLst>
+                              <p:cond delay="1690"/>
+                            </p:stCondLst>
+                            <p:childTnLst>
+                              <p:set>
+                                <p:cBhvr>
+                                  <p:cTn id="32" dur="1" fill="hold">
+                                    <p:stCondLst>
+                                      <p:cond delay="0"/>
+                                    </p:stCondLst>
+                                  </p:cTn>
+                                  <p:tgtEl>
+                                    <p:spTgt spid="16"/>
+                                  </p:tgtEl>
+                                  <p:attrNameLst>
+                                    <p:attrName>style.visibility</p:attrName>
+                                  </p:attrNameLst>
+                                </p:cBhvr>
+                                <p:to>
+                                  <p:strVal val="visible"/>
+                                </p:to>
+                              </p:set>
+                              <p:animEffect transition="in" filter="fade">
+                                <p:cBhvr>
+                                  <p:cTn id="311" dur="450"/>
+                                  <p:tgtEl>
+                                    <p:spTgt spid="16"/>
+                                  </p:tgtEl>
+                                </p:cBhvr>
+                              </p:animEffect>
+                            </p:childTnLst>
+                          </p:cTn>
+                        </p:par>
+                      </p:childTnLst>
+                    </p:cTn>
+                  </p:par>
+                </p:childTnLst>
+              </p:cTn>
+              <p:prevCondLst>
+                <p:cond evt="onPrev" delay="0">
+                  <p:tgtEl>
+                    <p:sldTgt/>
+                  </p:tgtEl>
+                </p:cond>
+              </p:prevCondLst>
+              <p:nextCondLst>
+                <p:cond evt="onNext" delay="0">
+                  <p:tgtEl>
+                    <p:sldTgt/>
+                  </p:tgtEl>
+                </p:cond>
+              </p:nextCondLst>
+            </p:seq>
+          </p:childTnLst>
+        </p:cTn>
+      </p:par>
+    </p:tnLst>
+  </p:timing>
 </p:sld>
 </file>
 

--- a/templates/21-budget-plan-budget-finance/21__nordic.pptx
+++ b/templates/21-budget-plan-budget-finance/21__nordic.pptx
@@ -122,6 +122,2019 @@
     </a:lvl9pPr>
   </p:defaultTextStyle>
 </p:presentation>
+</file>
+
+<file path=ppt/charts/chart1.xml><?xml version="1.0" encoding="utf-8"?>
+<c:chartSpace xmlns:c="http://schemas.openxmlformats.org/drawingml/2006/chart" xmlns:a="http://schemas.openxmlformats.org/drawingml/2006/main" xmlns:r="http://schemas.openxmlformats.org/officeDocument/2006/relationships">
+  <c:date1904 val="0"/>
+  <c:chart>
+    <c:autoTitleDeleted val="0"/>
+    <c:plotArea>
+      <c:barChart>
+        <c:barDir val="col"/>
+        <c:grouping val="clustered"/>
+        <c:ser>
+          <c:idx val="0"/>
+          <c:order val="0"/>
+          <c:tx>
+            <c:strRef>
+              <c:f>Sheet1!$B$1</c:f>
+              <c:strCache>
+                <c:ptCount val="1"/>
+                <c:pt idx="0">
+                  <c:v>示例系列（右键→编辑数据）</c:v>
+                </c:pt>
+              </c:strCache>
+            </c:strRef>
+          </c:tx>
+          <c:spPr>
+            <a:solidFill>
+              <a:srgbClr val="4C7CA8"/>
+            </a:solidFill>
+          </c:spPr>
+          <c:cat>
+            <c:strRef>
+              <c:f>Sheet1!$A$2:$A$7</c:f>
+              <c:strCache>
+                <c:ptCount val="6"/>
+                <c:pt idx="0">
+                  <c:v>指标一</c:v>
+                </c:pt>
+                <c:pt idx="1">
+                  <c:v>指标二</c:v>
+                </c:pt>
+                <c:pt idx="2">
+                  <c:v>指标三</c:v>
+                </c:pt>
+                <c:pt idx="3">
+                  <c:v>指标四</c:v>
+                </c:pt>
+                <c:pt idx="4">
+                  <c:v>指标五</c:v>
+                </c:pt>
+                <c:pt idx="5">
+                  <c:v>指标六</c:v>
+                </c:pt>
+              </c:strCache>
+            </c:strRef>
+          </c:cat>
+          <c:val>
+            <c:numRef>
+              <c:f>Sheet1!$B$2:$B$7</c:f>
+              <c:numCache>
+                <c:formatCode>General</c:formatCode>
+                <c:ptCount val="6"/>
+                <c:pt idx="0">
+                  <c:v>55</c:v>
+                </c:pt>
+                <c:pt idx="1">
+                  <c:v>80</c:v>
+                </c:pt>
+                <c:pt idx="2">
+                  <c:v>45</c:v>
+                </c:pt>
+                <c:pt idx="3">
+                  <c:v>95</c:v>
+                </c:pt>
+                <c:pt idx="4">
+                  <c:v>70</c:v>
+                </c:pt>
+                <c:pt idx="5">
+                  <c:v>60</c:v>
+                </c:pt>
+              </c:numCache>
+            </c:numRef>
+          </c:val>
+        </c:ser>
+        <c:axId val="-2068027336"/>
+        <c:axId val="-2113994440"/>
+      </c:barChart>
+      <c:catAx>
+        <c:axId val="-2068027336"/>
+        <c:scaling>
+          <c:orientation val="minMax"/>
+        </c:scaling>
+        <c:delete val="0"/>
+        <c:axPos val="b"/>
+        <c:majorTickMark val="out"/>
+        <c:minorTickMark val="none"/>
+        <c:tickLblPos val="nextTo"/>
+        <c:crossAx val="-2113994440"/>
+        <c:crosses val="autoZero"/>
+        <c:auto val="1"/>
+        <c:lblAlgn val="ctr"/>
+        <c:lblOffset val="100"/>
+        <c:noMultiLvlLbl val="0"/>
+      </c:catAx>
+      <c:valAx>
+        <c:axId val="-2113994440"/>
+        <c:scaling/>
+        <c:delete val="0"/>
+        <c:axPos val="l"/>
+        <c:majorGridlines/>
+        <c:majorTickMark val="out"/>
+        <c:minorTickMark val="none"/>
+        <c:tickLblPos val="nextTo"/>
+        <c:crossAx val="-2068027336"/>
+        <c:crosses val="autoZero"/>
+      </c:valAx>
+    </c:plotArea>
+    <c:dispBlanksAs val="gap"/>
+  </c:chart>
+  <c:txPr>
+    <a:bodyPr/>
+    <a:lstStyle/>
+    <a:p>
+      <a:pPr>
+        <a:defRPr sz="1800"/>
+      </a:pPr>
+      <a:endParaRPr lang="en-US"/>
+    </a:p>
+  </c:txPr>
+  <c:externalData r:id="rId1">
+    <c:autoUpdate val="0"/>
+  </c:externalData>
+</c:chartSpace>
+</file>
+
+<file path=ppt/notesMasters/notesMaster1.xml><?xml version="1.0" encoding="utf-8"?>
+<p:notesMaster xmlns:a="http://schemas.openxmlformats.org/drawingml/2006/main" xmlns:p="http://schemas.openxmlformats.org/presentationml/2006/main" xmlns:r="http://schemas.openxmlformats.org/officeDocument/2006/relationships">
+  <p:cSld>
+    <p:bg>
+      <p:bgRef idx="1001">
+        <a:schemeClr val="bg1"/>
+      </p:bgRef>
+    </p:bg>
+    <p:spTree>
+      <p:nvGrpSpPr>
+        <p:cNvPr id="1" name=""/>
+        <p:cNvGrpSpPr/>
+        <p:nvPr/>
+      </p:nvGrpSpPr>
+      <p:grpSpPr>
+        <a:xfrm>
+          <a:off x="0" y="0"/>
+          <a:ext cx="0" cy="0"/>
+          <a:chOff x="0" y="0"/>
+          <a:chExt cx="0" cy="0"/>
+        </a:xfrm>
+      </p:grpSpPr>
+      <p:sp>
+        <p:nvSpPr>
+          <p:cNvPr id="2" name="Header Placeholder 1"/>
+          <p:cNvSpPr>
+            <a:spLocks noGrp="1"/>
+          </p:cNvSpPr>
+          <p:nvPr>
+            <p:ph type="hdr" sz="quarter"/>
+          </p:nvPr>
+        </p:nvSpPr>
+        <p:spPr>
+          <a:xfrm>
+            <a:off x="0" y="0"/>
+            <a:ext cx="2971800" cy="457200"/>
+          </a:xfrm>
+          <a:prstGeom prst="rect">
+            <a:avLst/>
+          </a:prstGeom>
+        </p:spPr>
+        <p:txBody>
+          <a:bodyPr vert="horz" lIns="91440" tIns="45720" rIns="91440" bIns="45720" rtlCol="0"/>
+          <a:lstStyle>
+            <a:lvl1pPr algn="l">
+              <a:defRPr sz="1200"/>
+            </a:lvl1pPr>
+          </a:lstStyle>
+          <a:p>
+            <a:endParaRPr lang="en-US"/>
+          </a:p>
+        </p:txBody>
+      </p:sp>
+      <p:sp>
+        <p:nvSpPr>
+          <p:cNvPr id="3" name="Date Placeholder 2"/>
+          <p:cNvSpPr>
+            <a:spLocks noGrp="1"/>
+          </p:cNvSpPr>
+          <p:nvPr>
+            <p:ph type="dt" idx="1"/>
+          </p:nvPr>
+        </p:nvSpPr>
+        <p:spPr>
+          <a:xfrm>
+            <a:off x="3884613" y="0"/>
+            <a:ext cx="2971800" cy="457200"/>
+          </a:xfrm>
+          <a:prstGeom prst="rect">
+            <a:avLst/>
+          </a:prstGeom>
+        </p:spPr>
+        <p:txBody>
+          <a:bodyPr vert="horz" lIns="91440" tIns="45720" rIns="91440" bIns="45720" rtlCol="0"/>
+          <a:lstStyle>
+            <a:lvl1pPr algn="r">
+              <a:defRPr sz="1200"/>
+            </a:lvl1pPr>
+          </a:lstStyle>
+          <a:p>
+            <a:fld id="{0F89C1C7-3DCD-1040-A9CF-14679D8B5DDD}" type="datetimeFigureOut">
+              <a:rPr lang="en-US" smtClean="0"/>
+              <a:t>10/17/16</a:t>
+            </a:fld>
+            <a:endParaRPr lang="en-US"/>
+          </a:p>
+        </p:txBody>
+      </p:sp>
+      <p:sp>
+        <p:nvSpPr>
+          <p:cNvPr id="4" name="Slide Image Placeholder 3"/>
+          <p:cNvSpPr>
+            <a:spLocks noGrp="1" noRot="1" noChangeAspect="1"/>
+          </p:cNvSpPr>
+          <p:nvPr>
+            <p:ph type="sldImg" idx="2"/>
+          </p:nvPr>
+        </p:nvSpPr>
+        <p:spPr>
+          <a:xfrm>
+            <a:off x="1143000" y="685800"/>
+            <a:ext cx="4572000" cy="3429000"/>
+          </a:xfrm>
+          <a:prstGeom prst="rect">
+            <a:avLst/>
+          </a:prstGeom>
+          <a:noFill/>
+          <a:ln w="12700">
+            <a:solidFill>
+              <a:prstClr val="black"/>
+            </a:solidFill>
+          </a:ln>
+        </p:spPr>
+        <p:txBody>
+          <a:bodyPr vert="horz" lIns="91440" tIns="45720" rIns="91440" bIns="45720" rtlCol="0" anchor="ctr"/>
+          <a:lstStyle/>
+          <a:p>
+            <a:endParaRPr lang="en-US"/>
+          </a:p>
+        </p:txBody>
+      </p:sp>
+      <p:sp>
+        <p:nvSpPr>
+          <p:cNvPr id="5" name="Notes Placeholder 4"/>
+          <p:cNvSpPr>
+            <a:spLocks noGrp="1"/>
+          </p:cNvSpPr>
+          <p:nvPr>
+            <p:ph type="body" sz="quarter" idx="3"/>
+          </p:nvPr>
+        </p:nvSpPr>
+        <p:spPr>
+          <a:xfrm>
+            <a:off x="685800" y="4343400"/>
+            <a:ext cx="5486400" cy="4114800"/>
+          </a:xfrm>
+          <a:prstGeom prst="rect">
+            <a:avLst/>
+          </a:prstGeom>
+        </p:spPr>
+        <p:txBody>
+          <a:bodyPr vert="horz" lIns="91440" tIns="45720" rIns="91440" bIns="45720" rtlCol="0"/>
+          <a:lstStyle/>
+          <a:p>
+            <a:pPr lvl="0"/>
+            <a:r>
+              <a:rPr lang="en-US" smtClean="0"/>
+              <a:t>Click to edit Master text styles</a:t>
+            </a:r>
+          </a:p>
+          <a:p>
+            <a:pPr lvl="1"/>
+            <a:r>
+              <a:rPr lang="en-US" smtClean="0"/>
+              <a:t>Second level</a:t>
+            </a:r>
+          </a:p>
+          <a:p>
+            <a:pPr lvl="2"/>
+            <a:r>
+              <a:rPr lang="en-US" smtClean="0"/>
+              <a:t>Third level</a:t>
+            </a:r>
+          </a:p>
+          <a:p>
+            <a:pPr lvl="3"/>
+            <a:r>
+              <a:rPr lang="en-US" smtClean="0"/>
+              <a:t>Fourth level</a:t>
+            </a:r>
+          </a:p>
+          <a:p>
+            <a:pPr lvl="4"/>
+            <a:r>
+              <a:rPr lang="en-US" smtClean="0"/>
+              <a:t>Fifth level</a:t>
+            </a:r>
+            <a:endParaRPr lang="en-US"/>
+          </a:p>
+        </p:txBody>
+      </p:sp>
+      <p:sp>
+        <p:nvSpPr>
+          <p:cNvPr id="6" name="Footer Placeholder 5"/>
+          <p:cNvSpPr>
+            <a:spLocks noGrp="1"/>
+          </p:cNvSpPr>
+          <p:nvPr>
+            <p:ph type="ftr" sz="quarter" idx="4"/>
+          </p:nvPr>
+        </p:nvSpPr>
+        <p:spPr>
+          <a:xfrm>
+            <a:off x="0" y="8685213"/>
+            <a:ext cx="2971800" cy="457200"/>
+          </a:xfrm>
+          <a:prstGeom prst="rect">
+            <a:avLst/>
+          </a:prstGeom>
+        </p:spPr>
+        <p:txBody>
+          <a:bodyPr vert="horz" lIns="91440" tIns="45720" rIns="91440" bIns="45720" rtlCol="0" anchor="b"/>
+          <a:lstStyle>
+            <a:lvl1pPr algn="l">
+              <a:defRPr sz="1200"/>
+            </a:lvl1pPr>
+          </a:lstStyle>
+          <a:p>
+            <a:endParaRPr lang="en-US"/>
+          </a:p>
+        </p:txBody>
+      </p:sp>
+      <p:sp>
+        <p:nvSpPr>
+          <p:cNvPr id="7" name="Slide Number Placeholder 6"/>
+          <p:cNvSpPr>
+            <a:spLocks noGrp="1"/>
+          </p:cNvSpPr>
+          <p:nvPr>
+            <p:ph type="sldNum" sz="quarter" idx="5"/>
+          </p:nvPr>
+        </p:nvSpPr>
+        <p:spPr>
+          <a:xfrm>
+            <a:off x="3884613" y="8685213"/>
+            <a:ext cx="2971800" cy="457200"/>
+          </a:xfrm>
+          <a:prstGeom prst="rect">
+            <a:avLst/>
+          </a:prstGeom>
+        </p:spPr>
+        <p:txBody>
+          <a:bodyPr vert="horz" lIns="91440" tIns="45720" rIns="91440" bIns="45720" rtlCol="0" anchor="b"/>
+          <a:lstStyle>
+            <a:lvl1pPr algn="r">
+              <a:defRPr sz="1200"/>
+            </a:lvl1pPr>
+          </a:lstStyle>
+          <a:p>
+            <a:fld id="{BB5E49A5-4136-284D-997B-48E1D791AD67}" type="slidenum">
+              <a:rPr lang="en-US" smtClean="0"/>
+              <a:t>‹#›</a:t>
+            </a:fld>
+            <a:endParaRPr lang="en-US"/>
+          </a:p>
+        </p:txBody>
+      </p:sp>
+    </p:spTree>
+    <p:extLst>
+      <p:ext uri="{BB962C8B-B14F-4D97-AF65-F5344CB8AC3E}">
+        <p14:creationId xmlns:p14="http://schemas.microsoft.com/office/powerpoint/2010/main" val="2623252185"/>
+      </p:ext>
+    </p:extLst>
+  </p:cSld>
+  <p:clrMap bg1="lt1" tx1="dk1" bg2="lt2" tx2="dk2" accent1="accent1" accent2="accent2" accent3="accent3" accent4="accent4" accent5="accent5" accent6="accent6" hlink="hlink" folHlink="folHlink"/>
+  <p:notesStyle>
+    <a:lvl1pPr marL="0" algn="l" defTabSz="457200" rtl="0" eaLnBrk="1" latinLnBrk="0" hangingPunct="1">
+      <a:defRPr sz="1200" kern="1200">
+        <a:solidFill>
+          <a:schemeClr val="tx1"/>
+        </a:solidFill>
+        <a:latin typeface="+mn-lt"/>
+        <a:ea typeface="+mn-ea"/>
+        <a:cs typeface="+mn-cs"/>
+      </a:defRPr>
+    </a:lvl1pPr>
+    <a:lvl2pPr marL="457200" algn="l" defTabSz="457200" rtl="0" eaLnBrk="1" latinLnBrk="0" hangingPunct="1">
+      <a:defRPr sz="1200" kern="1200">
+        <a:solidFill>
+          <a:schemeClr val="tx1"/>
+        </a:solidFill>
+        <a:latin typeface="+mn-lt"/>
+        <a:ea typeface="+mn-ea"/>
+        <a:cs typeface="+mn-cs"/>
+      </a:defRPr>
+    </a:lvl2pPr>
+    <a:lvl3pPr marL="914400" algn="l" defTabSz="457200" rtl="0" eaLnBrk="1" latinLnBrk="0" hangingPunct="1">
+      <a:defRPr sz="1200" kern="1200">
+        <a:solidFill>
+          <a:schemeClr val="tx1"/>
+        </a:solidFill>
+        <a:latin typeface="+mn-lt"/>
+        <a:ea typeface="+mn-ea"/>
+        <a:cs typeface="+mn-cs"/>
+      </a:defRPr>
+    </a:lvl3pPr>
+    <a:lvl4pPr marL="1371600" algn="l" defTabSz="457200" rtl="0" eaLnBrk="1" latinLnBrk="0" hangingPunct="1">
+      <a:defRPr sz="1200" kern="1200">
+        <a:solidFill>
+          <a:schemeClr val="tx1"/>
+        </a:solidFill>
+        <a:latin typeface="+mn-lt"/>
+        <a:ea typeface="+mn-ea"/>
+        <a:cs typeface="+mn-cs"/>
+      </a:defRPr>
+    </a:lvl4pPr>
+    <a:lvl5pPr marL="1828800" algn="l" defTabSz="457200" rtl="0" eaLnBrk="1" latinLnBrk="0" hangingPunct="1">
+      <a:defRPr sz="1200" kern="1200">
+        <a:solidFill>
+          <a:schemeClr val="tx1"/>
+        </a:solidFill>
+        <a:latin typeface="+mn-lt"/>
+        <a:ea typeface="+mn-ea"/>
+        <a:cs typeface="+mn-cs"/>
+      </a:defRPr>
+    </a:lvl5pPr>
+    <a:lvl6pPr marL="2286000" algn="l" defTabSz="457200" rtl="0" eaLnBrk="1" latinLnBrk="0" hangingPunct="1">
+      <a:defRPr sz="1200" kern="1200">
+        <a:solidFill>
+          <a:schemeClr val="tx1"/>
+        </a:solidFill>
+        <a:latin typeface="+mn-lt"/>
+        <a:ea typeface="+mn-ea"/>
+        <a:cs typeface="+mn-cs"/>
+      </a:defRPr>
+    </a:lvl6pPr>
+    <a:lvl7pPr marL="2743200" algn="l" defTabSz="457200" rtl="0" eaLnBrk="1" latinLnBrk="0" hangingPunct="1">
+      <a:defRPr sz="1200" kern="1200">
+        <a:solidFill>
+          <a:schemeClr val="tx1"/>
+        </a:solidFill>
+        <a:latin typeface="+mn-lt"/>
+        <a:ea typeface="+mn-ea"/>
+        <a:cs typeface="+mn-cs"/>
+      </a:defRPr>
+    </a:lvl7pPr>
+    <a:lvl8pPr marL="3200400" algn="l" defTabSz="457200" rtl="0" eaLnBrk="1" latinLnBrk="0" hangingPunct="1">
+      <a:defRPr sz="1200" kern="1200">
+        <a:solidFill>
+          <a:schemeClr val="tx1"/>
+        </a:solidFill>
+        <a:latin typeface="+mn-lt"/>
+        <a:ea typeface="+mn-ea"/>
+        <a:cs typeface="+mn-cs"/>
+      </a:defRPr>
+    </a:lvl8pPr>
+    <a:lvl9pPr marL="3657600" algn="l" defTabSz="457200" rtl="0" eaLnBrk="1" latinLnBrk="0" hangingPunct="1">
+      <a:defRPr sz="1200" kern="1200">
+        <a:solidFill>
+          <a:schemeClr val="tx1"/>
+        </a:solidFill>
+        <a:latin typeface="+mn-lt"/>
+        <a:ea typeface="+mn-ea"/>
+        <a:cs typeface="+mn-cs"/>
+      </a:defRPr>
+    </a:lvl9pPr>
+  </p:notesStyle>
+</p:notesMaster>
+</file>
+
+<file path=ppt/notesSlides/notesSlide1.xml><?xml version="1.0" encoding="utf-8"?>
+<p:notes xmlns:a="http://schemas.openxmlformats.org/drawingml/2006/main" xmlns:p="http://schemas.openxmlformats.org/presentationml/2006/main" xmlns:r="http://schemas.openxmlformats.org/officeDocument/2006/relationships">
+  <p:cSld>
+    <p:spTree>
+      <p:nvGrpSpPr>
+        <p:cNvPr id="1" name=""/>
+        <p:cNvGrpSpPr/>
+        <p:nvPr/>
+      </p:nvGrpSpPr>
+      <p:grpSpPr>
+        <a:xfrm>
+          <a:off x="0" y="0"/>
+          <a:ext cx="0" cy="0"/>
+          <a:chOff x="0" y="0"/>
+          <a:chExt cx="0" cy="0"/>
+        </a:xfrm>
+      </p:grpSpPr>
+      <p:sp>
+        <p:nvSpPr>
+          <p:cNvPr id="2" name="Slide Image Placeholder 1"/>
+          <p:cNvSpPr>
+            <a:spLocks noGrp="1"/>
+          </p:cNvSpPr>
+          <p:nvPr>
+            <p:ph type="sldImg" idx="2"/>
+          </p:nvPr>
+        </p:nvSpPr>
+        <p:spPr/>
+      </p:sp>
+      <p:sp>
+        <p:nvSpPr>
+          <p:cNvPr id="3" name="Notes Placeholder 2"/>
+          <p:cNvSpPr>
+            <a:spLocks noGrp="1"/>
+          </p:cNvSpPr>
+          <p:nvPr>
+            <p:ph type="body" idx="3" sz="quarter"/>
+          </p:nvPr>
+        </p:nvSpPr>
+        <p:spPr/>
+        <p:txBody>
+          <a:bodyPr/>
+          <a:lstStyle/>
+          <a:p>
+            <a:r>
+              <a:t>【页面定位】预算与财务计划 —— 开场页：自我介绍或破题，停留时间可稍长。</a:t>
+            </a:r>
+          </a:p>
+          <a:p>
+            <a:r>
+              <a:t>【放映】本页元素按“背景→主体→标注”顺序错峰入场（约 2 秒完成）；开启“使用计时器”后本页停留 8 秒自动翻页。</a:t>
+            </a:r>
+          </a:p>
+          <a:p>
+            <a:r>
+              <a:t>【编辑】直接点击文本框替换占位文字；在“设计→变体”中一键换配色；图片占位框右键“更改图片”即可替换。</a:t>
+            </a:r>
+          </a:p>
+          <a:p>
+            <a:r>
+              <a:t>【联动】图表为原生可编辑图表：右键“编辑数据”即可替换数值。</a:t>
+            </a:r>
+          </a:p>
+        </p:txBody>
+      </p:sp>
+      <p:sp>
+        <p:nvSpPr>
+          <p:cNvPr id="4" name="Slide Number Placeholder 3"/>
+          <p:cNvSpPr>
+            <a:spLocks noGrp="1"/>
+          </p:cNvSpPr>
+          <p:nvPr>
+            <p:ph type="sldNum" idx="5" sz="quarter"/>
+          </p:nvPr>
+        </p:nvSpPr>
+        <p:spPr/>
+      </p:sp>
+    </p:spTree>
+  </p:cSld>
+  <p:clrMapOvr>
+    <a:masterClrMapping/>
+  </p:clrMapOvr>
+</p:notes>
+</file>
+
+<file path=ppt/notesSlides/notesSlide10.xml><?xml version="1.0" encoding="utf-8"?>
+<p:notes xmlns:a="http://schemas.openxmlformats.org/drawingml/2006/main" xmlns:p="http://schemas.openxmlformats.org/presentationml/2006/main" xmlns:r="http://schemas.openxmlformats.org/officeDocument/2006/relationships">
+  <p:cSld>
+    <p:spTree>
+      <p:nvGrpSpPr>
+        <p:cNvPr id="1" name=""/>
+        <p:cNvGrpSpPr/>
+        <p:nvPr/>
+      </p:nvGrpSpPr>
+      <p:grpSpPr>
+        <a:xfrm>
+          <a:off x="0" y="0"/>
+          <a:ext cx="0" cy="0"/>
+          <a:chOff x="0" y="0"/>
+          <a:chExt cx="0" cy="0"/>
+        </a:xfrm>
+      </p:grpSpPr>
+      <p:sp>
+        <p:nvSpPr>
+          <p:cNvPr id="2" name="Slide Image Placeholder 1"/>
+          <p:cNvSpPr>
+            <a:spLocks noGrp="1"/>
+          </p:cNvSpPr>
+          <p:nvPr>
+            <p:ph type="sldImg" idx="2"/>
+          </p:nvPr>
+        </p:nvSpPr>
+        <p:spPr/>
+      </p:sp>
+      <p:sp>
+        <p:nvSpPr>
+          <p:cNvPr id="3" name="Notes Placeholder 2"/>
+          <p:cNvSpPr>
+            <a:spLocks noGrp="1"/>
+          </p:cNvSpPr>
+          <p:nvPr>
+            <p:ph type="body" idx="3" sz="quarter"/>
+          </p:nvPr>
+        </p:nvSpPr>
+        <p:spPr/>
+        <p:txBody>
+          <a:bodyPr/>
+          <a:lstStyle/>
+          <a:p>
+            <a:r>
+              <a:t>【页面定位】DATA —— 收尾页：总结要点并给出行动号召或联系方式。</a:t>
+            </a:r>
+          </a:p>
+          <a:p>
+            <a:r>
+              <a:t>【放映】本页元素按“背景→主体→标注”顺序错峰入场（约 2 秒完成）；开启“使用计时器”后本页停留 8 秒自动翻页。</a:t>
+            </a:r>
+          </a:p>
+          <a:p>
+            <a:r>
+              <a:t>【编辑】直接点击文本框替换占位文字；在“设计→变体”中一键换配色；图片占位框右键“更改图片”即可替换。</a:t>
+            </a:r>
+          </a:p>
+          <a:p>
+            <a:r>
+              <a:t>【联动】图表为原生可编辑图表：右键“编辑数据”即可替换数值。</a:t>
+            </a:r>
+          </a:p>
+        </p:txBody>
+      </p:sp>
+      <p:sp>
+        <p:nvSpPr>
+          <p:cNvPr id="4" name="Slide Number Placeholder 3"/>
+          <p:cNvSpPr>
+            <a:spLocks noGrp="1"/>
+          </p:cNvSpPr>
+          <p:nvPr>
+            <p:ph type="sldNum" idx="5" sz="quarter"/>
+          </p:nvPr>
+        </p:nvSpPr>
+        <p:spPr/>
+      </p:sp>
+    </p:spTree>
+  </p:cSld>
+  <p:clrMapOvr>
+    <a:masterClrMapping/>
+  </p:clrMapOvr>
+</p:notes>
+</file>
+
+<file path=ppt/notesSlides/notesSlide11.xml><?xml version="1.0" encoding="utf-8"?>
+<p:notes xmlns:a="http://schemas.openxmlformats.org/drawingml/2006/main" xmlns:p="http://schemas.openxmlformats.org/presentationml/2006/main" xmlns:r="http://schemas.openxmlformats.org/officeDocument/2006/relationships">
+  <p:cSld>
+    <p:spTree>
+      <p:nvGrpSpPr>
+        <p:cNvPr id="1" name=""/>
+        <p:cNvGrpSpPr/>
+        <p:nvPr/>
+      </p:nvGrpSpPr>
+      <p:grpSpPr>
+        <a:xfrm>
+          <a:off x="0" y="0"/>
+          <a:ext cx="0" cy="0"/>
+          <a:chOff x="0" y="0"/>
+          <a:chExt cx="0" cy="0"/>
+        </a:xfrm>
+      </p:grpSpPr>
+      <p:sp>
+        <p:nvSpPr>
+          <p:cNvPr id="2" name="Slide Image Placeholder 1"/>
+          <p:cNvSpPr>
+            <a:spLocks noGrp="1"/>
+          </p:cNvSpPr>
+          <p:nvPr>
+            <p:ph type="sldImg" idx="2"/>
+          </p:nvPr>
+        </p:nvSpPr>
+        <p:spPr/>
+      </p:sp>
+      <p:sp>
+        <p:nvSpPr>
+          <p:cNvPr id="3" name="Notes Placeholder 2"/>
+          <p:cNvSpPr>
+            <a:spLocks noGrp="1"/>
+          </p:cNvSpPr>
+          <p:nvPr>
+            <p:ph type="body" idx="3" sz="quarter"/>
+          </p:nvPr>
+        </p:nvSpPr>
+        <p:spPr/>
+        <p:txBody>
+          <a:bodyPr/>
+          <a:lstStyle/>
+          <a:p>
+            <a:r>
+              <a:t>【页面定位】KEY POINTS —— 开场页：自我介绍或破题，停留时间可稍长。</a:t>
+            </a:r>
+          </a:p>
+          <a:p>
+            <a:r>
+              <a:t>【放映】本页元素按“背景→主体→标注”顺序错峰入场（约 2 秒完成）；开启“使用计时器”后本页停留 8 秒自动翻页。</a:t>
+            </a:r>
+          </a:p>
+          <a:p>
+            <a:r>
+              <a:t>【编辑】直接点击文本框替换占位文字；在“设计→变体”中一键换配色；图片占位框右键“更改图片”即可替换。</a:t>
+            </a:r>
+          </a:p>
+          <a:p>
+            <a:r>
+              <a:t>【联动】图表为原生可编辑图表：右键“编辑数据”即可替换数值。</a:t>
+            </a:r>
+          </a:p>
+        </p:txBody>
+      </p:sp>
+      <p:sp>
+        <p:nvSpPr>
+          <p:cNvPr id="4" name="Slide Number Placeholder 3"/>
+          <p:cNvSpPr>
+            <a:spLocks noGrp="1"/>
+          </p:cNvSpPr>
+          <p:nvPr>
+            <p:ph type="sldNum" idx="5" sz="quarter"/>
+          </p:nvPr>
+        </p:nvSpPr>
+        <p:spPr/>
+      </p:sp>
+    </p:spTree>
+  </p:cSld>
+  <p:clrMapOvr>
+    <a:masterClrMapping/>
+  </p:clrMapOvr>
+</p:notes>
+</file>
+
+<file path=ppt/notesSlides/notesSlide12.xml><?xml version="1.0" encoding="utf-8"?>
+<p:notes xmlns:a="http://schemas.openxmlformats.org/drawingml/2006/main" xmlns:p="http://schemas.openxmlformats.org/presentationml/2006/main" xmlns:r="http://schemas.openxmlformats.org/officeDocument/2006/relationships">
+  <p:cSld>
+    <p:spTree>
+      <p:nvGrpSpPr>
+        <p:cNvPr id="1" name=""/>
+        <p:cNvGrpSpPr/>
+        <p:nvPr/>
+      </p:nvGrpSpPr>
+      <p:grpSpPr>
+        <a:xfrm>
+          <a:off x="0" y="0"/>
+          <a:ext cx="0" cy="0"/>
+          <a:chOff x="0" y="0"/>
+          <a:chExt cx="0" cy="0"/>
+        </a:xfrm>
+      </p:grpSpPr>
+      <p:sp>
+        <p:nvSpPr>
+          <p:cNvPr id="2" name="Slide Image Placeholder 1"/>
+          <p:cNvSpPr>
+            <a:spLocks noGrp="1"/>
+          </p:cNvSpPr>
+          <p:nvPr>
+            <p:ph type="sldImg" idx="2"/>
+          </p:nvPr>
+        </p:nvSpPr>
+        <p:spPr/>
+      </p:sp>
+      <p:sp>
+        <p:nvSpPr>
+          <p:cNvPr id="3" name="Notes Placeholder 2"/>
+          <p:cNvSpPr>
+            <a:spLocks noGrp="1"/>
+          </p:cNvSpPr>
+          <p:nvPr>
+            <p:ph type="body" idx="3" sz="quarter"/>
+          </p:nvPr>
+        </p:nvSpPr>
+        <p:spPr/>
+        <p:txBody>
+          <a:bodyPr/>
+          <a:lstStyle/>
+          <a:p>
+            <a:r>
+              <a:t>【页面定位】02 —— 概览页：快速带过结构，告诉听众接下来讲什么。</a:t>
+            </a:r>
+          </a:p>
+          <a:p>
+            <a:r>
+              <a:t>【放映】本页元素按“背景→主体→标注”顺序错峰入场（约 2 秒完成）；开启“使用计时器”后本页停留 8 秒自动翻页。</a:t>
+            </a:r>
+          </a:p>
+          <a:p>
+            <a:r>
+              <a:t>【编辑】直接点击文本框替换占位文字；在“设计→变体”中一键换配色；图片占位框右键“更改图片”即可替换。</a:t>
+            </a:r>
+          </a:p>
+          <a:p>
+            <a:r>
+              <a:t>【联动】图表为原生可编辑图表：右键“编辑数据”即可替换数值。</a:t>
+            </a:r>
+          </a:p>
+        </p:txBody>
+      </p:sp>
+      <p:sp>
+        <p:nvSpPr>
+          <p:cNvPr id="4" name="Slide Number Placeholder 3"/>
+          <p:cNvSpPr>
+            <a:spLocks noGrp="1"/>
+          </p:cNvSpPr>
+          <p:nvPr>
+            <p:ph type="sldNum" idx="5" sz="quarter"/>
+          </p:nvPr>
+        </p:nvSpPr>
+        <p:spPr/>
+      </p:sp>
+    </p:spTree>
+  </p:cSld>
+  <p:clrMapOvr>
+    <a:masterClrMapping/>
+  </p:clrMapOvr>
+</p:notes>
+</file>
+
+<file path=ppt/notesSlides/notesSlide13.xml><?xml version="1.0" encoding="utf-8"?>
+<p:notes xmlns:a="http://schemas.openxmlformats.org/drawingml/2006/main" xmlns:p="http://schemas.openxmlformats.org/presentationml/2006/main" xmlns:r="http://schemas.openxmlformats.org/officeDocument/2006/relationships">
+  <p:cSld>
+    <p:spTree>
+      <p:nvGrpSpPr>
+        <p:cNvPr id="1" name=""/>
+        <p:cNvGrpSpPr/>
+        <p:nvPr/>
+      </p:nvGrpSpPr>
+      <p:grpSpPr>
+        <a:xfrm>
+          <a:off x="0" y="0"/>
+          <a:ext cx="0" cy="0"/>
+          <a:chOff x="0" y="0"/>
+          <a:chExt cx="0" cy="0"/>
+        </a:xfrm>
+      </p:grpSpPr>
+      <p:sp>
+        <p:nvSpPr>
+          <p:cNvPr id="2" name="Slide Image Placeholder 1"/>
+          <p:cNvSpPr>
+            <a:spLocks noGrp="1"/>
+          </p:cNvSpPr>
+          <p:nvPr>
+            <p:ph type="sldImg" idx="2"/>
+          </p:nvPr>
+        </p:nvSpPr>
+        <p:spPr/>
+      </p:sp>
+      <p:sp>
+        <p:nvSpPr>
+          <p:cNvPr id="3" name="Notes Placeholder 2"/>
+          <p:cNvSpPr>
+            <a:spLocks noGrp="1"/>
+          </p:cNvSpPr>
+          <p:nvPr>
+            <p:ph type="body" idx="3" sz="quarter"/>
+          </p:nvPr>
+        </p:nvSpPr>
+        <p:spPr/>
+        <p:txBody>
+          <a:bodyPr/>
+          <a:lstStyle/>
+          <a:p>
+            <a:r>
+              <a:t>【页面定位】在此输入一条财务原则。 —— 内容页：逐条展开，配合动画节奏点击推进。</a:t>
+            </a:r>
+          </a:p>
+          <a:p>
+            <a:r>
+              <a:t>【放映】本页元素按“背景→主体→标注”顺序错峰入场（约 2 秒完成）；开启“使用计时器”后本页停留 8 秒自动翻页。</a:t>
+            </a:r>
+          </a:p>
+          <a:p>
+            <a:r>
+              <a:t>【编辑】直接点击文本框替换占位文字；在“设计→变体”中一键换配色；图片占位框右键“更改图片”即可替换。</a:t>
+            </a:r>
+          </a:p>
+          <a:p>
+            <a:r>
+              <a:t>【联动】图表为原生可编辑图表：右键“编辑数据”即可替换数值。</a:t>
+            </a:r>
+          </a:p>
+        </p:txBody>
+      </p:sp>
+      <p:sp>
+        <p:nvSpPr>
+          <p:cNvPr id="4" name="Slide Number Placeholder 3"/>
+          <p:cNvSpPr>
+            <a:spLocks noGrp="1"/>
+          </p:cNvSpPr>
+          <p:nvPr>
+            <p:ph type="sldNum" idx="5" sz="quarter"/>
+          </p:nvPr>
+        </p:nvSpPr>
+        <p:spPr/>
+      </p:sp>
+    </p:spTree>
+  </p:cSld>
+  <p:clrMapOvr>
+    <a:masterClrMapping/>
+  </p:clrMapOvr>
+</p:notes>
+</file>
+
+<file path=ppt/notesSlides/notesSlide14.xml><?xml version="1.0" encoding="utf-8"?>
+<p:notes xmlns:a="http://schemas.openxmlformats.org/drawingml/2006/main" xmlns:p="http://schemas.openxmlformats.org/presentationml/2006/main" xmlns:r="http://schemas.openxmlformats.org/officeDocument/2006/relationships">
+  <p:cSld>
+    <p:spTree>
+      <p:nvGrpSpPr>
+        <p:cNvPr id="1" name=""/>
+        <p:cNvGrpSpPr/>
+        <p:nvPr/>
+      </p:nvGrpSpPr>
+      <p:grpSpPr>
+        <a:xfrm>
+          <a:off x="0" y="0"/>
+          <a:ext cx="0" cy="0"/>
+          <a:chOff x="0" y="0"/>
+          <a:chExt cx="0" cy="0"/>
+        </a:xfrm>
+      </p:grpSpPr>
+      <p:sp>
+        <p:nvSpPr>
+          <p:cNvPr id="2" name="Slide Image Placeholder 1"/>
+          <p:cNvSpPr>
+            <a:spLocks noGrp="1"/>
+          </p:cNvSpPr>
+          <p:nvPr>
+            <p:ph type="sldImg" idx="2"/>
+          </p:nvPr>
+        </p:nvSpPr>
+        <p:spPr/>
+      </p:sp>
+      <p:sp>
+        <p:nvSpPr>
+          <p:cNvPr id="3" name="Notes Placeholder 2"/>
+          <p:cNvSpPr>
+            <a:spLocks noGrp="1"/>
+          </p:cNvSpPr>
+          <p:nvPr>
+            <p:ph type="body" idx="3" sz="quarter"/>
+          </p:nvPr>
+        </p:nvSpPr>
+        <p:spPr/>
+        <p:txBody>
+          <a:bodyPr/>
+          <a:lstStyle/>
+          <a:p>
+            <a:r>
+              <a:t>【页面定位】TEAM —— 数据页：先说结论，再用图表佐证。</a:t>
+            </a:r>
+          </a:p>
+          <a:p>
+            <a:r>
+              <a:t>【放映】本页元素按“背景→主体→标注”顺序错峰入场（约 2 秒完成）；开启“使用计时器”后本页停留 8 秒自动翻页。</a:t>
+            </a:r>
+          </a:p>
+          <a:p>
+            <a:r>
+              <a:t>【编辑】直接点击文本框替换占位文字；在“设计→变体”中一键换配色；图片占位框右键“更改图片”即可替换。</a:t>
+            </a:r>
+          </a:p>
+          <a:p>
+            <a:r>
+              <a:t>【联动】图表为原生可编辑图表：右键“编辑数据”即可替换数值。</a:t>
+            </a:r>
+          </a:p>
+        </p:txBody>
+      </p:sp>
+      <p:sp>
+        <p:nvSpPr>
+          <p:cNvPr id="4" name="Slide Number Placeholder 3"/>
+          <p:cNvSpPr>
+            <a:spLocks noGrp="1"/>
+          </p:cNvSpPr>
+          <p:nvPr>
+            <p:ph type="sldNum" idx="5" sz="quarter"/>
+          </p:nvPr>
+        </p:nvSpPr>
+        <p:spPr/>
+      </p:sp>
+    </p:spTree>
+  </p:cSld>
+  <p:clrMapOvr>
+    <a:masterClrMapping/>
+  </p:clrMapOvr>
+</p:notes>
+</file>
+
+<file path=ppt/notesSlides/notesSlide15.xml><?xml version="1.0" encoding="utf-8"?>
+<p:notes xmlns:a="http://schemas.openxmlformats.org/drawingml/2006/main" xmlns:p="http://schemas.openxmlformats.org/presentationml/2006/main" xmlns:r="http://schemas.openxmlformats.org/officeDocument/2006/relationships">
+  <p:cSld>
+    <p:spTree>
+      <p:nvGrpSpPr>
+        <p:cNvPr id="1" name=""/>
+        <p:cNvGrpSpPr/>
+        <p:nvPr/>
+      </p:nvGrpSpPr>
+      <p:grpSpPr>
+        <a:xfrm>
+          <a:off x="0" y="0"/>
+          <a:ext cx="0" cy="0"/>
+          <a:chOff x="0" y="0"/>
+          <a:chExt cx="0" cy="0"/>
+        </a:xfrm>
+      </p:grpSpPr>
+      <p:sp>
+        <p:nvSpPr>
+          <p:cNvPr id="2" name="Slide Image Placeholder 1"/>
+          <p:cNvSpPr>
+            <a:spLocks noGrp="1"/>
+          </p:cNvSpPr>
+          <p:nvPr>
+            <p:ph type="sldImg" idx="2"/>
+          </p:nvPr>
+        </p:nvSpPr>
+        <p:spPr/>
+      </p:sp>
+      <p:sp>
+        <p:nvSpPr>
+          <p:cNvPr id="3" name="Notes Placeholder 2"/>
+          <p:cNvSpPr>
+            <a:spLocks noGrp="1"/>
+          </p:cNvSpPr>
+          <p:nvPr>
+            <p:ph type="body" idx="3" sz="quarter"/>
+          </p:nvPr>
+        </p:nvSpPr>
+        <p:spPr/>
+        <p:txBody>
+          <a:bodyPr/>
+          <a:lstStyle/>
+          <a:p>
+            <a:r>
+              <a:t>【页面定位】STEPS —— 收尾页：总结要点并给出行动号召或联系方式。</a:t>
+            </a:r>
+          </a:p>
+          <a:p>
+            <a:r>
+              <a:t>【放映】本页元素按“背景→主体→标注”顺序错峰入场（约 2 秒完成）；开启“使用计时器”后本页停留 8 秒自动翻页。</a:t>
+            </a:r>
+          </a:p>
+          <a:p>
+            <a:r>
+              <a:t>【编辑】直接点击文本框替换占位文字；在“设计→变体”中一键换配色；图片占位框右键“更改图片”即可替换。</a:t>
+            </a:r>
+          </a:p>
+          <a:p>
+            <a:r>
+              <a:t>【联动】图表为原生可编辑图表：右键“编辑数据”即可替换数值。</a:t>
+            </a:r>
+          </a:p>
+        </p:txBody>
+      </p:sp>
+      <p:sp>
+        <p:nvSpPr>
+          <p:cNvPr id="4" name="Slide Number Placeholder 3"/>
+          <p:cNvSpPr>
+            <a:spLocks noGrp="1"/>
+          </p:cNvSpPr>
+          <p:nvPr>
+            <p:ph type="sldNum" idx="5" sz="quarter"/>
+          </p:nvPr>
+        </p:nvSpPr>
+        <p:spPr/>
+      </p:sp>
+    </p:spTree>
+  </p:cSld>
+  <p:clrMapOvr>
+    <a:masterClrMapping/>
+  </p:clrMapOvr>
+</p:notes>
+</file>
+
+<file path=ppt/notesSlides/notesSlide16.xml><?xml version="1.0" encoding="utf-8"?>
+<p:notes xmlns:a="http://schemas.openxmlformats.org/drawingml/2006/main" xmlns:p="http://schemas.openxmlformats.org/presentationml/2006/main" xmlns:r="http://schemas.openxmlformats.org/officeDocument/2006/relationships">
+  <p:cSld>
+    <p:spTree>
+      <p:nvGrpSpPr>
+        <p:cNvPr id="1" name=""/>
+        <p:cNvGrpSpPr/>
+        <p:nvPr/>
+      </p:nvGrpSpPr>
+      <p:grpSpPr>
+        <a:xfrm>
+          <a:off x="0" y="0"/>
+          <a:ext cx="0" cy="0"/>
+          <a:chOff x="0" y="0"/>
+          <a:chExt cx="0" cy="0"/>
+        </a:xfrm>
+      </p:grpSpPr>
+      <p:sp>
+        <p:nvSpPr>
+          <p:cNvPr id="2" name="Slide Image Placeholder 1"/>
+          <p:cNvSpPr>
+            <a:spLocks noGrp="1"/>
+          </p:cNvSpPr>
+          <p:nvPr>
+            <p:ph type="sldImg" idx="2"/>
+          </p:nvPr>
+        </p:nvSpPr>
+        <p:spPr/>
+      </p:sp>
+      <p:sp>
+        <p:nvSpPr>
+          <p:cNvPr id="3" name="Notes Placeholder 2"/>
+          <p:cNvSpPr>
+            <a:spLocks noGrp="1"/>
+          </p:cNvSpPr>
+          <p:nvPr>
+            <p:ph type="body" idx="3" sz="quarter"/>
+          </p:nvPr>
+        </p:nvSpPr>
+        <p:spPr/>
+        <p:txBody>
+          <a:bodyPr/>
+          <a:lstStyle/>
+          <a:p>
+            <a:r>
+              <a:t>【页面定位】GLOSSARY —— 开场页：自我介绍或破题，停留时间可稍长。</a:t>
+            </a:r>
+          </a:p>
+          <a:p>
+            <a:r>
+              <a:t>【放映】本页元素按“背景→主体→标注”顺序错峰入场（约 2 秒完成）；开启“使用计时器”后本页停留 8 秒自动翻页。</a:t>
+            </a:r>
+          </a:p>
+          <a:p>
+            <a:r>
+              <a:t>【编辑】直接点击文本框替换占位文字；在“设计→变体”中一键换配色；图片占位框右键“更改图片”即可替换。</a:t>
+            </a:r>
+          </a:p>
+          <a:p>
+            <a:r>
+              <a:t>【联动】图表为原生可编辑图表：右键“编辑数据”即可替换数值。</a:t>
+            </a:r>
+          </a:p>
+        </p:txBody>
+      </p:sp>
+      <p:sp>
+        <p:nvSpPr>
+          <p:cNvPr id="4" name="Slide Number Placeholder 3"/>
+          <p:cNvSpPr>
+            <a:spLocks noGrp="1"/>
+          </p:cNvSpPr>
+          <p:nvPr>
+            <p:ph type="sldNum" idx="5" sz="quarter"/>
+          </p:nvPr>
+        </p:nvSpPr>
+        <p:spPr/>
+      </p:sp>
+    </p:spTree>
+  </p:cSld>
+  <p:clrMapOvr>
+    <a:masterClrMapping/>
+  </p:clrMapOvr>
+</p:notes>
+</file>
+
+<file path=ppt/notesSlides/notesSlide17.xml><?xml version="1.0" encoding="utf-8"?>
+<p:notes xmlns:a="http://schemas.openxmlformats.org/drawingml/2006/main" xmlns:p="http://schemas.openxmlformats.org/presentationml/2006/main" xmlns:r="http://schemas.openxmlformats.org/officeDocument/2006/relationships">
+  <p:cSld>
+    <p:spTree>
+      <p:nvGrpSpPr>
+        <p:cNvPr id="1" name=""/>
+        <p:cNvGrpSpPr/>
+        <p:nvPr/>
+      </p:nvGrpSpPr>
+      <p:grpSpPr>
+        <a:xfrm>
+          <a:off x="0" y="0"/>
+          <a:ext cx="0" cy="0"/>
+          <a:chOff x="0" y="0"/>
+          <a:chExt cx="0" cy="0"/>
+        </a:xfrm>
+      </p:grpSpPr>
+      <p:sp>
+        <p:nvSpPr>
+          <p:cNvPr id="2" name="Slide Image Placeholder 1"/>
+          <p:cNvSpPr>
+            <a:spLocks noGrp="1"/>
+          </p:cNvSpPr>
+          <p:nvPr>
+            <p:ph type="sldImg" idx="2"/>
+          </p:nvPr>
+        </p:nvSpPr>
+        <p:spPr/>
+      </p:sp>
+      <p:sp>
+        <p:nvSpPr>
+          <p:cNvPr id="3" name="Notes Placeholder 2"/>
+          <p:cNvSpPr>
+            <a:spLocks noGrp="1"/>
+          </p:cNvSpPr>
+          <p:nvPr>
+            <p:ph type="body" idx="3" sz="quarter"/>
+          </p:nvPr>
+        </p:nvSpPr>
+        <p:spPr/>
+        <p:txBody>
+          <a:bodyPr/>
+          <a:lstStyle/>
+          <a:p>
+            <a:r>
+              <a:t>【页面定位】HIGHLIGHT —— 概览页：快速带过结构，告诉听众接下来讲什么。</a:t>
+            </a:r>
+          </a:p>
+          <a:p>
+            <a:r>
+              <a:t>【放映】本页元素按“背景→主体→标注”顺序错峰入场（约 2 秒完成）；开启“使用计时器”后本页停留 8 秒自动翻页。</a:t>
+            </a:r>
+          </a:p>
+          <a:p>
+            <a:r>
+              <a:t>【编辑】直接点击文本框替换占位文字；在“设计→变体”中一键换配色；图片占位框右键“更改图片”即可替换。</a:t>
+            </a:r>
+          </a:p>
+          <a:p>
+            <a:r>
+              <a:t>【联动】图表为原生可编辑图表：右键“编辑数据”即可替换数值。</a:t>
+            </a:r>
+          </a:p>
+        </p:txBody>
+      </p:sp>
+      <p:sp>
+        <p:nvSpPr>
+          <p:cNvPr id="4" name="Slide Number Placeholder 3"/>
+          <p:cNvSpPr>
+            <a:spLocks noGrp="1"/>
+          </p:cNvSpPr>
+          <p:nvPr>
+            <p:ph type="sldNum" idx="5" sz="quarter"/>
+          </p:nvPr>
+        </p:nvSpPr>
+        <p:spPr/>
+      </p:sp>
+    </p:spTree>
+  </p:cSld>
+  <p:clrMapOvr>
+    <a:masterClrMapping/>
+  </p:clrMapOvr>
+</p:notes>
+</file>
+
+<file path=ppt/notesSlides/notesSlide18.xml><?xml version="1.0" encoding="utf-8"?>
+<p:notes xmlns:a="http://schemas.openxmlformats.org/drawingml/2006/main" xmlns:p="http://schemas.openxmlformats.org/presentationml/2006/main" xmlns:r="http://schemas.openxmlformats.org/officeDocument/2006/relationships">
+  <p:cSld>
+    <p:spTree>
+      <p:nvGrpSpPr>
+        <p:cNvPr id="1" name=""/>
+        <p:cNvGrpSpPr/>
+        <p:nvPr/>
+      </p:nvGrpSpPr>
+      <p:grpSpPr>
+        <a:xfrm>
+          <a:off x="0" y="0"/>
+          <a:ext cx="0" cy="0"/>
+          <a:chOff x="0" y="0"/>
+          <a:chExt cx="0" cy="0"/>
+        </a:xfrm>
+      </p:grpSpPr>
+      <p:sp>
+        <p:nvSpPr>
+          <p:cNvPr id="2" name="Slide Image Placeholder 1"/>
+          <p:cNvSpPr>
+            <a:spLocks noGrp="1"/>
+          </p:cNvSpPr>
+          <p:nvPr>
+            <p:ph type="sldImg" idx="2"/>
+          </p:nvPr>
+        </p:nvSpPr>
+        <p:spPr/>
+      </p:sp>
+      <p:sp>
+        <p:nvSpPr>
+          <p:cNvPr id="3" name="Notes Placeholder 2"/>
+          <p:cNvSpPr>
+            <a:spLocks noGrp="1"/>
+          </p:cNvSpPr>
+          <p:nvPr>
+            <p:ph type="body" idx="3" sz="quarter"/>
+          </p:nvPr>
+        </p:nvSpPr>
+        <p:spPr/>
+        <p:txBody>
+          <a:bodyPr/>
+          <a:lstStyle/>
+          <a:p>
+            <a:r>
+              <a:t>【页面定位】谢谢观看 —— 内容页：逐条展开，配合动画节奏点击推进。</a:t>
+            </a:r>
+          </a:p>
+          <a:p>
+            <a:r>
+              <a:t>【放映】本页元素按“背景→主体→标注”顺序错峰入场（约 2 秒完成）；开启“使用计时器”后本页停留 8 秒自动翻页。</a:t>
+            </a:r>
+          </a:p>
+          <a:p>
+            <a:r>
+              <a:t>【编辑】直接点击文本框替换占位文字；在“设计→变体”中一键换配色；图片占位框右键“更改图片”即可替换。</a:t>
+            </a:r>
+          </a:p>
+          <a:p>
+            <a:r>
+              <a:t>【联动】图表为原生可编辑图表：右键“编辑数据”即可替换数值。</a:t>
+            </a:r>
+          </a:p>
+        </p:txBody>
+      </p:sp>
+      <p:sp>
+        <p:nvSpPr>
+          <p:cNvPr id="4" name="Slide Number Placeholder 3"/>
+          <p:cNvSpPr>
+            <a:spLocks noGrp="1"/>
+          </p:cNvSpPr>
+          <p:nvPr>
+            <p:ph type="sldNum" idx="5" sz="quarter"/>
+          </p:nvPr>
+        </p:nvSpPr>
+        <p:spPr/>
+      </p:sp>
+    </p:spTree>
+  </p:cSld>
+  <p:clrMapOvr>
+    <a:masterClrMapping/>
+  </p:clrMapOvr>
+</p:notes>
+</file>
+
+<file path=ppt/notesSlides/notesSlide2.xml><?xml version="1.0" encoding="utf-8"?>
+<p:notes xmlns:a="http://schemas.openxmlformats.org/drawingml/2006/main" xmlns:p="http://schemas.openxmlformats.org/presentationml/2006/main" xmlns:r="http://schemas.openxmlformats.org/officeDocument/2006/relationships">
+  <p:cSld>
+    <p:spTree>
+      <p:nvGrpSpPr>
+        <p:cNvPr id="1" name=""/>
+        <p:cNvGrpSpPr/>
+        <p:nvPr/>
+      </p:nvGrpSpPr>
+      <p:grpSpPr>
+        <a:xfrm>
+          <a:off x="0" y="0"/>
+          <a:ext cx="0" cy="0"/>
+          <a:chOff x="0" y="0"/>
+          <a:chExt cx="0" cy="0"/>
+        </a:xfrm>
+      </p:grpSpPr>
+      <p:sp>
+        <p:nvSpPr>
+          <p:cNvPr id="2" name="Slide Image Placeholder 1"/>
+          <p:cNvSpPr>
+            <a:spLocks noGrp="1"/>
+          </p:cNvSpPr>
+          <p:nvPr>
+            <p:ph type="sldImg" idx="2"/>
+          </p:nvPr>
+        </p:nvSpPr>
+        <p:spPr/>
+      </p:sp>
+      <p:sp>
+        <p:nvSpPr>
+          <p:cNvPr id="3" name="Notes Placeholder 2"/>
+          <p:cNvSpPr>
+            <a:spLocks noGrp="1"/>
+          </p:cNvSpPr>
+          <p:nvPr>
+            <p:ph type="body" idx="3" sz="quarter"/>
+          </p:nvPr>
+        </p:nvSpPr>
+        <p:spPr/>
+        <p:txBody>
+          <a:bodyPr/>
+          <a:lstStyle/>
+          <a:p>
+            <a:r>
+              <a:t>【页面定位】OVERVIEW —— 概览页：快速带过结构，告诉听众接下来讲什么。</a:t>
+            </a:r>
+          </a:p>
+          <a:p>
+            <a:r>
+              <a:t>【放映】本页元素按“背景→主体→标注”顺序错峰入场（约 2 秒完成）；开启“使用计时器”后本页停留 8 秒自动翻页。</a:t>
+            </a:r>
+          </a:p>
+          <a:p>
+            <a:r>
+              <a:t>【编辑】直接点击文本框替换占位文字；在“设计→变体”中一键换配色；图片占位框右键“更改图片”即可替换。</a:t>
+            </a:r>
+          </a:p>
+          <a:p>
+            <a:r>
+              <a:t>【联动】图表为原生可编辑图表：右键“编辑数据”即可替换数值。</a:t>
+            </a:r>
+          </a:p>
+        </p:txBody>
+      </p:sp>
+      <p:sp>
+        <p:nvSpPr>
+          <p:cNvPr id="4" name="Slide Number Placeholder 3"/>
+          <p:cNvSpPr>
+            <a:spLocks noGrp="1"/>
+          </p:cNvSpPr>
+          <p:nvPr>
+            <p:ph type="sldNum" idx="5" sz="quarter"/>
+          </p:nvPr>
+        </p:nvSpPr>
+        <p:spPr/>
+      </p:sp>
+    </p:spTree>
+  </p:cSld>
+  <p:clrMapOvr>
+    <a:masterClrMapping/>
+  </p:clrMapOvr>
+</p:notes>
+</file>
+
+<file path=ppt/notesSlides/notesSlide3.xml><?xml version="1.0" encoding="utf-8"?>
+<p:notes xmlns:a="http://schemas.openxmlformats.org/drawingml/2006/main" xmlns:p="http://schemas.openxmlformats.org/presentationml/2006/main" xmlns:r="http://schemas.openxmlformats.org/officeDocument/2006/relationships">
+  <p:cSld>
+    <p:spTree>
+      <p:nvGrpSpPr>
+        <p:cNvPr id="1" name=""/>
+        <p:cNvGrpSpPr/>
+        <p:nvPr/>
+      </p:nvGrpSpPr>
+      <p:grpSpPr>
+        <a:xfrm>
+          <a:off x="0" y="0"/>
+          <a:ext cx="0" cy="0"/>
+          <a:chOff x="0" y="0"/>
+          <a:chExt cx="0" cy="0"/>
+        </a:xfrm>
+      </p:grpSpPr>
+      <p:sp>
+        <p:nvSpPr>
+          <p:cNvPr id="2" name="Slide Image Placeholder 1"/>
+          <p:cNvSpPr>
+            <a:spLocks noGrp="1"/>
+          </p:cNvSpPr>
+          <p:nvPr>
+            <p:ph type="sldImg" idx="2"/>
+          </p:nvPr>
+        </p:nvSpPr>
+        <p:spPr/>
+      </p:sp>
+      <p:sp>
+        <p:nvSpPr>
+          <p:cNvPr id="3" name="Notes Placeholder 2"/>
+          <p:cNvSpPr>
+            <a:spLocks noGrp="1"/>
+          </p:cNvSpPr>
+          <p:nvPr>
+            <p:ph type="body" idx="3" sz="quarter"/>
+          </p:nvPr>
+        </p:nvSpPr>
+        <p:spPr/>
+        <p:txBody>
+          <a:bodyPr/>
+          <a:lstStyle/>
+          <a:p>
+            <a:r>
+              <a:t>【页面定位】01 —— 内容页：逐条展开，配合动画节奏点击推进。</a:t>
+            </a:r>
+          </a:p>
+          <a:p>
+            <a:r>
+              <a:t>【放映】本页元素按“背景→主体→标注”顺序错峰入场（约 2 秒完成）；开启“使用计时器”后本页停留 8 秒自动翻页。</a:t>
+            </a:r>
+          </a:p>
+          <a:p>
+            <a:r>
+              <a:t>【编辑】直接点击文本框替换占位文字；在“设计→变体”中一键换配色；图片占位框右键“更改图片”即可替换。</a:t>
+            </a:r>
+          </a:p>
+          <a:p>
+            <a:r>
+              <a:t>【联动】图表为原生可编辑图表：右键“编辑数据”即可替换数值。</a:t>
+            </a:r>
+          </a:p>
+        </p:txBody>
+      </p:sp>
+      <p:sp>
+        <p:nvSpPr>
+          <p:cNvPr id="4" name="Slide Number Placeholder 3"/>
+          <p:cNvSpPr>
+            <a:spLocks noGrp="1"/>
+          </p:cNvSpPr>
+          <p:nvPr>
+            <p:ph type="sldNum" idx="5" sz="quarter"/>
+          </p:nvPr>
+        </p:nvSpPr>
+        <p:spPr/>
+      </p:sp>
+    </p:spTree>
+  </p:cSld>
+  <p:clrMapOvr>
+    <a:masterClrMapping/>
+  </p:clrMapOvr>
+</p:notes>
+</file>
+
+<file path=ppt/notesSlides/notesSlide4.xml><?xml version="1.0" encoding="utf-8"?>
+<p:notes xmlns:a="http://schemas.openxmlformats.org/drawingml/2006/main" xmlns:p="http://schemas.openxmlformats.org/presentationml/2006/main" xmlns:r="http://schemas.openxmlformats.org/officeDocument/2006/relationships">
+  <p:cSld>
+    <p:spTree>
+      <p:nvGrpSpPr>
+        <p:cNvPr id="1" name=""/>
+        <p:cNvGrpSpPr/>
+        <p:nvPr/>
+      </p:nvGrpSpPr>
+      <p:grpSpPr>
+        <a:xfrm>
+          <a:off x="0" y="0"/>
+          <a:ext cx="0" cy="0"/>
+          <a:chOff x="0" y="0"/>
+          <a:chExt cx="0" cy="0"/>
+        </a:xfrm>
+      </p:grpSpPr>
+      <p:sp>
+        <p:nvSpPr>
+          <p:cNvPr id="2" name="Slide Image Placeholder 1"/>
+          <p:cNvSpPr>
+            <a:spLocks noGrp="1"/>
+          </p:cNvSpPr>
+          <p:nvPr>
+            <p:ph type="sldImg" idx="2"/>
+          </p:nvPr>
+        </p:nvSpPr>
+        <p:spPr/>
+      </p:sp>
+      <p:sp>
+        <p:nvSpPr>
+          <p:cNvPr id="3" name="Notes Placeholder 2"/>
+          <p:cNvSpPr>
+            <a:spLocks noGrp="1"/>
+          </p:cNvSpPr>
+          <p:nvPr>
+            <p:ph type="body" idx="3" sz="quarter"/>
+          </p:nvPr>
+        </p:nvSpPr>
+        <p:spPr/>
+        <p:txBody>
+          <a:bodyPr/>
+          <a:lstStyle/>
+          <a:p>
+            <a:r>
+              <a:t>【页面定位】OVERVIEW —— 数据页：先说结论，再用图表佐证。</a:t>
+            </a:r>
+          </a:p>
+          <a:p>
+            <a:r>
+              <a:t>【放映】本页元素按“背景→主体→标注”顺序错峰入场（约 2 秒完成）；开启“使用计时器”后本页停留 8 秒自动翻页。</a:t>
+            </a:r>
+          </a:p>
+          <a:p>
+            <a:r>
+              <a:t>【编辑】直接点击文本框替换占位文字；在“设计→变体”中一键换配色；图片占位框右键“更改图片”即可替换。</a:t>
+            </a:r>
+          </a:p>
+          <a:p>
+            <a:r>
+              <a:t>【联动】图表为原生可编辑图表：右键“编辑数据”即可替换数值。</a:t>
+            </a:r>
+          </a:p>
+        </p:txBody>
+      </p:sp>
+      <p:sp>
+        <p:nvSpPr>
+          <p:cNvPr id="4" name="Slide Number Placeholder 3"/>
+          <p:cNvSpPr>
+            <a:spLocks noGrp="1"/>
+          </p:cNvSpPr>
+          <p:nvPr>
+            <p:ph type="sldNum" idx="5" sz="quarter"/>
+          </p:nvPr>
+        </p:nvSpPr>
+        <p:spPr/>
+      </p:sp>
+    </p:spTree>
+  </p:cSld>
+  <p:clrMapOvr>
+    <a:masterClrMapping/>
+  </p:clrMapOvr>
+</p:notes>
+</file>
+
+<file path=ppt/notesSlides/notesSlide5.xml><?xml version="1.0" encoding="utf-8"?>
+<p:notes xmlns:a="http://schemas.openxmlformats.org/drawingml/2006/main" xmlns:p="http://schemas.openxmlformats.org/presentationml/2006/main" xmlns:r="http://schemas.openxmlformats.org/officeDocument/2006/relationships">
+  <p:cSld>
+    <p:spTree>
+      <p:nvGrpSpPr>
+        <p:cNvPr id="1" name=""/>
+        <p:cNvGrpSpPr/>
+        <p:nvPr/>
+      </p:nvGrpSpPr>
+      <p:grpSpPr>
+        <a:xfrm>
+          <a:off x="0" y="0"/>
+          <a:ext cx="0" cy="0"/>
+          <a:chOff x="0" y="0"/>
+          <a:chExt cx="0" cy="0"/>
+        </a:xfrm>
+      </p:grpSpPr>
+      <p:sp>
+        <p:nvSpPr>
+          <p:cNvPr id="2" name="Slide Image Placeholder 1"/>
+          <p:cNvSpPr>
+            <a:spLocks noGrp="1"/>
+          </p:cNvSpPr>
+          <p:nvPr>
+            <p:ph type="sldImg" idx="2"/>
+          </p:nvPr>
+        </p:nvSpPr>
+        <p:spPr/>
+      </p:sp>
+      <p:sp>
+        <p:nvSpPr>
+          <p:cNvPr id="3" name="Notes Placeholder 2"/>
+          <p:cNvSpPr>
+            <a:spLocks noGrp="1"/>
+          </p:cNvSpPr>
+          <p:nvPr>
+            <p:ph type="body" idx="3" sz="quarter"/>
+          </p:nvPr>
+        </p:nvSpPr>
+        <p:spPr/>
+        <p:txBody>
+          <a:bodyPr/>
+          <a:lstStyle/>
+          <a:p>
+            <a:r>
+              <a:t>【页面定位】KEY POINTS —— 收尾页：总结要点并给出行动号召或联系方式。</a:t>
+            </a:r>
+          </a:p>
+          <a:p>
+            <a:r>
+              <a:t>【放映】本页元素按“背景→主体→标注”顺序错峰入场（约 2 秒完成）；开启“使用计时器”后本页停留 8 秒自动翻页。</a:t>
+            </a:r>
+          </a:p>
+          <a:p>
+            <a:r>
+              <a:t>【编辑】直接点击文本框替换占位文字；在“设计→变体”中一键换配色；图片占位框右键“更改图片”即可替换。</a:t>
+            </a:r>
+          </a:p>
+          <a:p>
+            <a:r>
+              <a:t>【联动】图表为原生可编辑图表：右键“编辑数据”即可替换数值。</a:t>
+            </a:r>
+          </a:p>
+        </p:txBody>
+      </p:sp>
+      <p:sp>
+        <p:nvSpPr>
+          <p:cNvPr id="4" name="Slide Number Placeholder 3"/>
+          <p:cNvSpPr>
+            <a:spLocks noGrp="1"/>
+          </p:cNvSpPr>
+          <p:nvPr>
+            <p:ph type="sldNum" idx="5" sz="quarter"/>
+          </p:nvPr>
+        </p:nvSpPr>
+        <p:spPr/>
+      </p:sp>
+    </p:spTree>
+  </p:cSld>
+  <p:clrMapOvr>
+    <a:masterClrMapping/>
+  </p:clrMapOvr>
+</p:notes>
+</file>
+
+<file path=ppt/notesSlides/notesSlide6.xml><?xml version="1.0" encoding="utf-8"?>
+<p:notes xmlns:a="http://schemas.openxmlformats.org/drawingml/2006/main" xmlns:p="http://schemas.openxmlformats.org/presentationml/2006/main" xmlns:r="http://schemas.openxmlformats.org/officeDocument/2006/relationships">
+  <p:cSld>
+    <p:spTree>
+      <p:nvGrpSpPr>
+        <p:cNvPr id="1" name=""/>
+        <p:cNvGrpSpPr/>
+        <p:nvPr/>
+      </p:nvGrpSpPr>
+      <p:grpSpPr>
+        <a:xfrm>
+          <a:off x="0" y="0"/>
+          <a:ext cx="0" cy="0"/>
+          <a:chOff x="0" y="0"/>
+          <a:chExt cx="0" cy="0"/>
+        </a:xfrm>
+      </p:grpSpPr>
+      <p:sp>
+        <p:nvSpPr>
+          <p:cNvPr id="2" name="Slide Image Placeholder 1"/>
+          <p:cNvSpPr>
+            <a:spLocks noGrp="1"/>
+          </p:cNvSpPr>
+          <p:nvPr>
+            <p:ph type="sldImg" idx="2"/>
+          </p:nvPr>
+        </p:nvSpPr>
+        <p:spPr/>
+      </p:sp>
+      <p:sp>
+        <p:nvSpPr>
+          <p:cNvPr id="3" name="Notes Placeholder 2"/>
+          <p:cNvSpPr>
+            <a:spLocks noGrp="1"/>
+          </p:cNvSpPr>
+          <p:nvPr>
+            <p:ph type="body" idx="3" sz="quarter"/>
+          </p:nvPr>
+        </p:nvSpPr>
+        <p:spPr/>
+        <p:txBody>
+          <a:bodyPr/>
+          <a:lstStyle/>
+          <a:p>
+            <a:r>
+              <a:t>【页面定位】METRICS —— 开场页：自我介绍或破题，停留时间可稍长。</a:t>
+            </a:r>
+          </a:p>
+          <a:p>
+            <a:r>
+              <a:t>【放映】本页元素按“背景→主体→标注”顺序错峰入场（约 2 秒完成）；开启“使用计时器”后本页停留 8 秒自动翻页。</a:t>
+            </a:r>
+          </a:p>
+          <a:p>
+            <a:r>
+              <a:t>【编辑】直接点击文本框替换占位文字；在“设计→变体”中一键换配色；图片占位框右键“更改图片”即可替换。</a:t>
+            </a:r>
+          </a:p>
+          <a:p>
+            <a:r>
+              <a:t>【联动】图表为原生可编辑图表：右键“编辑数据”即可替换数值。</a:t>
+            </a:r>
+          </a:p>
+        </p:txBody>
+      </p:sp>
+      <p:sp>
+        <p:nvSpPr>
+          <p:cNvPr id="4" name="Slide Number Placeholder 3"/>
+          <p:cNvSpPr>
+            <a:spLocks noGrp="1"/>
+          </p:cNvSpPr>
+          <p:nvPr>
+            <p:ph type="sldNum" idx="5" sz="quarter"/>
+          </p:nvPr>
+        </p:nvSpPr>
+        <p:spPr/>
+      </p:sp>
+    </p:spTree>
+  </p:cSld>
+  <p:clrMapOvr>
+    <a:masterClrMapping/>
+  </p:clrMapOvr>
+</p:notes>
+</file>
+
+<file path=ppt/notesSlides/notesSlide7.xml><?xml version="1.0" encoding="utf-8"?>
+<p:notes xmlns:a="http://schemas.openxmlformats.org/drawingml/2006/main" xmlns:p="http://schemas.openxmlformats.org/presentationml/2006/main" xmlns:r="http://schemas.openxmlformats.org/officeDocument/2006/relationships">
+  <p:cSld>
+    <p:spTree>
+      <p:nvGrpSpPr>
+        <p:cNvPr id="1" name=""/>
+        <p:cNvGrpSpPr/>
+        <p:nvPr/>
+      </p:nvGrpSpPr>
+      <p:grpSpPr>
+        <a:xfrm>
+          <a:off x="0" y="0"/>
+          <a:ext cx="0" cy="0"/>
+          <a:chOff x="0" y="0"/>
+          <a:chExt cx="0" cy="0"/>
+        </a:xfrm>
+      </p:grpSpPr>
+      <p:sp>
+        <p:nvSpPr>
+          <p:cNvPr id="2" name="Slide Image Placeholder 1"/>
+          <p:cNvSpPr>
+            <a:spLocks noGrp="1"/>
+          </p:cNvSpPr>
+          <p:nvPr>
+            <p:ph type="sldImg" idx="2"/>
+          </p:nvPr>
+        </p:nvSpPr>
+        <p:spPr/>
+      </p:sp>
+      <p:sp>
+        <p:nvSpPr>
+          <p:cNvPr id="3" name="Notes Placeholder 2"/>
+          <p:cNvSpPr>
+            <a:spLocks noGrp="1"/>
+          </p:cNvSpPr>
+          <p:nvPr>
+            <p:ph type="body" idx="3" sz="quarter"/>
+          </p:nvPr>
+        </p:nvSpPr>
+        <p:spPr/>
+        <p:txBody>
+          <a:bodyPr/>
+          <a:lstStyle/>
+          <a:p>
+            <a:r>
+              <a:t>【页面定位】PROCESS —— 概览页：快速带过结构，告诉听众接下来讲什么。</a:t>
+            </a:r>
+          </a:p>
+          <a:p>
+            <a:r>
+              <a:t>【放映】本页元素按“背景→主体→标注”顺序错峰入场（约 2 秒完成）；开启“使用计时器”后本页停留 8 秒自动翻页。</a:t>
+            </a:r>
+          </a:p>
+          <a:p>
+            <a:r>
+              <a:t>【编辑】直接点击文本框替换占位文字；在“设计→变体”中一键换配色；图片占位框右键“更改图片”即可替换。</a:t>
+            </a:r>
+          </a:p>
+          <a:p>
+            <a:r>
+              <a:t>【联动】图表为原生可编辑图表：右键“编辑数据”即可替换数值。</a:t>
+            </a:r>
+          </a:p>
+        </p:txBody>
+      </p:sp>
+      <p:sp>
+        <p:nvSpPr>
+          <p:cNvPr id="4" name="Slide Number Placeholder 3"/>
+          <p:cNvSpPr>
+            <a:spLocks noGrp="1"/>
+          </p:cNvSpPr>
+          <p:nvPr>
+            <p:ph type="sldNum" idx="5" sz="quarter"/>
+          </p:nvPr>
+        </p:nvSpPr>
+        <p:spPr/>
+      </p:sp>
+    </p:spTree>
+  </p:cSld>
+  <p:clrMapOvr>
+    <a:masterClrMapping/>
+  </p:clrMapOvr>
+</p:notes>
+</file>
+
+<file path=ppt/notesSlides/notesSlide8.xml><?xml version="1.0" encoding="utf-8"?>
+<p:notes xmlns:a="http://schemas.openxmlformats.org/drawingml/2006/main" xmlns:p="http://schemas.openxmlformats.org/presentationml/2006/main" xmlns:r="http://schemas.openxmlformats.org/officeDocument/2006/relationships">
+  <p:cSld>
+    <p:spTree>
+      <p:nvGrpSpPr>
+        <p:cNvPr id="1" name=""/>
+        <p:cNvGrpSpPr/>
+        <p:nvPr/>
+      </p:nvGrpSpPr>
+      <p:grpSpPr>
+        <a:xfrm>
+          <a:off x="0" y="0"/>
+          <a:ext cx="0" cy="0"/>
+          <a:chOff x="0" y="0"/>
+          <a:chExt cx="0" cy="0"/>
+        </a:xfrm>
+      </p:grpSpPr>
+      <p:sp>
+        <p:nvSpPr>
+          <p:cNvPr id="2" name="Slide Image Placeholder 1"/>
+          <p:cNvSpPr>
+            <a:spLocks noGrp="1"/>
+          </p:cNvSpPr>
+          <p:nvPr>
+            <p:ph type="sldImg" idx="2"/>
+          </p:nvPr>
+        </p:nvSpPr>
+        <p:spPr/>
+      </p:sp>
+      <p:sp>
+        <p:nvSpPr>
+          <p:cNvPr id="3" name="Notes Placeholder 2"/>
+          <p:cNvSpPr>
+            <a:spLocks noGrp="1"/>
+          </p:cNvSpPr>
+          <p:nvPr>
+            <p:ph type="body" idx="3" sz="quarter"/>
+          </p:nvPr>
+        </p:nvSpPr>
+        <p:spPr/>
+        <p:txBody>
+          <a:bodyPr/>
+          <a:lstStyle/>
+          <a:p>
+            <a:r>
+              <a:t>【页面定位】PROCESS —— 内容页：逐条展开，配合动画节奏点击推进。</a:t>
+            </a:r>
+          </a:p>
+          <a:p>
+            <a:r>
+              <a:t>【放映】本页元素按“背景→主体→标注”顺序错峰入场（约 2 秒完成）；开启“使用计时器”后本页停留 8 秒自动翻页。</a:t>
+            </a:r>
+          </a:p>
+          <a:p>
+            <a:r>
+              <a:t>【编辑】直接点击文本框替换占位文字；在“设计→变体”中一键换配色；图片占位框右键“更改图片”即可替换。</a:t>
+            </a:r>
+          </a:p>
+          <a:p>
+            <a:r>
+              <a:t>【联动】图表为原生可编辑图表：右键“编辑数据”即可替换数值。</a:t>
+            </a:r>
+          </a:p>
+        </p:txBody>
+      </p:sp>
+      <p:sp>
+        <p:nvSpPr>
+          <p:cNvPr id="4" name="Slide Number Placeholder 3"/>
+          <p:cNvSpPr>
+            <a:spLocks noGrp="1"/>
+          </p:cNvSpPr>
+          <p:nvPr>
+            <p:ph type="sldNum" idx="5" sz="quarter"/>
+          </p:nvPr>
+        </p:nvSpPr>
+        <p:spPr/>
+      </p:sp>
+    </p:spTree>
+  </p:cSld>
+  <p:clrMapOvr>
+    <a:masterClrMapping/>
+  </p:clrMapOvr>
+</p:notes>
+</file>
+
+<file path=ppt/notesSlides/notesSlide9.xml><?xml version="1.0" encoding="utf-8"?>
+<p:notes xmlns:a="http://schemas.openxmlformats.org/drawingml/2006/main" xmlns:p="http://schemas.openxmlformats.org/presentationml/2006/main" xmlns:r="http://schemas.openxmlformats.org/officeDocument/2006/relationships">
+  <p:cSld>
+    <p:spTree>
+      <p:nvGrpSpPr>
+        <p:cNvPr id="1" name=""/>
+        <p:cNvGrpSpPr/>
+        <p:nvPr/>
+      </p:nvGrpSpPr>
+      <p:grpSpPr>
+        <a:xfrm>
+          <a:off x="0" y="0"/>
+          <a:ext cx="0" cy="0"/>
+          <a:chOff x="0" y="0"/>
+          <a:chExt cx="0" cy="0"/>
+        </a:xfrm>
+      </p:grpSpPr>
+      <p:sp>
+        <p:nvSpPr>
+          <p:cNvPr id="2" name="Slide Image Placeholder 1"/>
+          <p:cNvSpPr>
+            <a:spLocks noGrp="1"/>
+          </p:cNvSpPr>
+          <p:nvPr>
+            <p:ph type="sldImg" idx="2"/>
+          </p:nvPr>
+        </p:nvSpPr>
+        <p:spPr/>
+      </p:sp>
+      <p:sp>
+        <p:nvSpPr>
+          <p:cNvPr id="3" name="Notes Placeholder 2"/>
+          <p:cNvSpPr>
+            <a:spLocks noGrp="1"/>
+          </p:cNvSpPr>
+          <p:nvPr>
+            <p:ph type="body" idx="3" sz="quarter"/>
+          </p:nvPr>
+        </p:nvSpPr>
+        <p:spPr/>
+        <p:txBody>
+          <a:bodyPr/>
+          <a:lstStyle/>
+          <a:p>
+            <a:r>
+              <a:t>【页面定位】DATA —— 数据页：先说结论，再用图表佐证。</a:t>
+            </a:r>
+          </a:p>
+          <a:p>
+            <a:r>
+              <a:t>【放映】本页元素按“背景→主体→标注”顺序错峰入场（约 2 秒完成）；开启“使用计时器”后本页停留 8 秒自动翻页。</a:t>
+            </a:r>
+          </a:p>
+          <a:p>
+            <a:r>
+              <a:t>【编辑】直接点击文本框替换占位文字；在“设计→变体”中一键换配色；图片占位框右键“更改图片”即可替换。</a:t>
+            </a:r>
+          </a:p>
+          <a:p>
+            <a:r>
+              <a:t>【联动】图表为原生可编辑图表：右键“编辑数据”即可替换数值。</a:t>
+            </a:r>
+          </a:p>
+        </p:txBody>
+      </p:sp>
+      <p:sp>
+        <p:nvSpPr>
+          <p:cNvPr id="4" name="Slide Number Placeholder 3"/>
+          <p:cNvSpPr>
+            <a:spLocks noGrp="1"/>
+          </p:cNvSpPr>
+          <p:nvPr>
+            <p:ph type="sldNum" idx="5" sz="quarter"/>
+          </p:nvPr>
+        </p:nvSpPr>
+        <p:spPr/>
+      </p:sp>
+    </p:spTree>
+  </p:cSld>
+  <p:clrMapOvr>
+    <a:masterClrMapping/>
+  </p:clrMapOvr>
+</p:notes>
 </file>
 
 <file path=ppt/slideLayouts/slideLayout1.xml><?xml version="1.0" encoding="utf-8"?>
@@ -3374,7 +5387,7 @@
   <p:clrMapOvr>
     <a:masterClrMapping/>
   </p:clrMapOvr>
-  <p:transition spd="med">
+  <p:transition spd="med" advClick="1" advTm="8000">
     <p:circle dir="in"/>
   </p:transition>
   <p:timing>
@@ -4641,7 +6654,7 @@
   <p:clrMapOvr>
     <a:masterClrMapping/>
   </p:clrMapOvr>
-  <p:transition spd="med">
+  <p:transition spd="med" advClick="1" advTm="8000">
     <p:fade/>
   </p:transition>
   <p:timing>
@@ -6001,7 +8014,7 @@
   <p:clrMapOvr>
     <a:masterClrMapping/>
   </p:clrMapOvr>
-  <p:transition spd="med">
+  <p:transition spd="med" advClick="1" advTm="8000">
     <p:push dir="l"/>
   </p:transition>
   <p:timing>
@@ -6903,7 +8916,7 @@
   <p:clrMapOvr>
     <a:masterClrMapping/>
   </p:clrMapOvr>
-  <p:transition spd="med">
+  <p:transition spd="med" advClick="1" advTm="8000">
     <p:wipe dir="u"/>
   </p:transition>
   <p:timing>
@@ -7560,7 +9573,7 @@
   <p:clrMapOvr>
     <a:masterClrMapping/>
   </p:clrMapOvr>
-  <p:transition spd="med">
+  <p:transition spd="med" advClick="1" advTm="8000">
     <p:split orient="horz"/>
   </p:transition>
   <p:timing>
@@ -8801,7 +10814,7 @@
   <p:clrMapOvr>
     <a:masterClrMapping/>
   </p:clrMapOvr>
-  <p:transition spd="med">
+  <p:transition spd="med" advClick="1" advTm="8000">
     <p:blinds dir="horz"/>
   </p:transition>
   <p:timing>
@@ -10355,7 +12368,7 @@
   <p:clrMapOvr>
     <a:masterClrMapping/>
   </p:clrMapOvr>
-  <p:transition spd="med">
+  <p:transition spd="med" advClick="1" advTm="8000">
     <p:circle dir="in"/>
   </p:transition>
   <p:timing>
@@ -11665,7 +13678,7 @@
   <p:clrMapOvr>
     <a:masterClrMapping/>
   </p:clrMapOvr>
-  <p:transition spd="med">
+  <p:transition spd="med" advClick="1" advTm="8000">
     <p:comb dir="horz"/>
   </p:transition>
   <p:timing>
@@ -12937,7 +14950,7 @@
   <p:clrMapOvr>
     <a:masterClrMapping/>
   </p:clrMapOvr>
-  <p:transition spd="med">
+  <p:transition spd="med" advClick="1" advTm="8000">
     <p:dissolve/>
   </p:transition>
   <p:timing>
@@ -13795,7 +15808,7 @@
   <p:clrMapOvr>
     <a:masterClrMapping/>
   </p:clrMapOvr>
-  <p:transition spd="med">
+  <p:transition spd="med" advClick="1" advTm="8000">
     <p:zoom dir="in"/>
   </p:transition>
   <p:timing>
@@ -14873,7 +16886,7 @@
   <p:clrMapOvr>
     <a:masterClrMapping/>
   </p:clrMapOvr>
-  <p:transition spd="med">
+  <p:transition spd="med" advClick="1" advTm="8000">
     <p:comb dir="horz"/>
   </p:transition>
   <p:timing>
@@ -15775,7 +17788,7 @@
   <p:clrMapOvr>
     <a:masterClrMapping/>
   </p:clrMapOvr>
-  <p:transition spd="med">
+  <p:transition spd="med" advClick="1" advTm="8000">
     <p:dissolve/>
   </p:transition>
   <p:timing>
@@ -16495,7 +18508,7 @@
   <p:clrMapOvr>
     <a:masterClrMapping/>
   </p:clrMapOvr>
-  <p:transition spd="med">
+  <p:transition spd="med" advClick="1" advTm="8000">
     <p:zoom dir="in"/>
   </p:transition>
   <p:timing>
@@ -17627,7 +19640,7 @@
   <p:clrMapOvr>
     <a:masterClrMapping/>
   </p:clrMapOvr>
-  <p:transition spd="med">
+  <p:transition spd="med" advClick="1" advTm="8000">
     <p:cover dir="l"/>
   </p:transition>
   <p:timing>
@@ -19337,7 +21350,7 @@
   <p:clrMapOvr>
     <a:masterClrMapping/>
   </p:clrMapOvr>
-  <p:transition spd="med">
+  <p:transition spd="med" advClick="1" advTm="8000">
     <p:checker dir="across"/>
   </p:transition>
   <p:timing>
@@ -20891,7 +22904,7 @@
   <p:clrMapOvr>
     <a:masterClrMapping/>
   </p:clrMapOvr>
-  <p:transition spd="med">
+  <p:transition spd="med" advClick="1" advTm="8000">
     <p:newsflash/>
   </p:transition>
   <p:timing>
@@ -22205,7 +24218,7 @@
   <p:clrMapOvr>
     <a:masterClrMapping/>
   </p:clrMapOvr>
-  <p:transition spd="med">
+  <p:transition spd="med" advClick="1" advTm="8000">
     <p:push dir="u"/>
   </p:transition>
   <p:timing>
@@ -22974,285 +24987,27 @@
           </a:p>
         </p:txBody>
       </p:sp>
-      <p:sp>
-        <p:nvSpPr>
-          <p:cNvPr id="7" name="Rectangle 6"/>
-          <p:cNvSpPr/>
-          <p:nvPr/>
-        </p:nvSpPr>
-        <p:spPr>
-          <a:xfrm>
-            <a:off x="1371600" y="3877056"/>
-            <a:ext cx="685800" cy="1609344"/>
-          </a:xfrm>
-          <a:prstGeom prst="rect">
-            <a:avLst/>
-          </a:prstGeom>
-          <a:solidFill>
-            <a:srgbClr val="4C7CA8">
-              <a:alpha val="90000"/>
-            </a:srgbClr>
-          </a:solidFill>
-          <a:ln>
-            <a:noFill/>
-          </a:ln>
-          <a:effectLst/>
-        </p:spPr>
-        <p:style>
-          <a:lnRef idx="1">
-            <a:schemeClr val="accent1"/>
-          </a:lnRef>
-          <a:fillRef idx="3">
-            <a:schemeClr val="accent1"/>
-          </a:fillRef>
-          <a:effectRef idx="2">
-            <a:schemeClr val="accent1"/>
-          </a:effectRef>
-          <a:fontRef idx="minor">
-            <a:schemeClr val="lt1"/>
-          </a:fontRef>
-        </p:style>
-        <p:txBody>
-          <a:bodyPr rtlCol="0" anchor="ctr"/>
-          <a:lstStyle/>
-          <a:p>
-            <a:pPr algn="ctr"/>
-          </a:p>
-        </p:txBody>
-      </p:sp>
-      <p:sp>
-        <p:nvSpPr>
-          <p:cNvPr id="8" name="Rectangle 7"/>
-          <p:cNvSpPr/>
-          <p:nvPr/>
-        </p:nvSpPr>
-        <p:spPr>
-          <a:xfrm>
-            <a:off x="2514600" y="3145535"/>
-            <a:ext cx="685800" cy="2340864"/>
-          </a:xfrm>
-          <a:prstGeom prst="rect">
-            <a:avLst/>
-          </a:prstGeom>
-          <a:solidFill>
-            <a:srgbClr val="C2857A">
-              <a:alpha val="90000"/>
-            </a:srgbClr>
-          </a:solidFill>
-          <a:ln>
-            <a:noFill/>
-          </a:ln>
-          <a:effectLst/>
-        </p:spPr>
-        <p:style>
-          <a:lnRef idx="1">
-            <a:schemeClr val="accent1"/>
-          </a:lnRef>
-          <a:fillRef idx="3">
-            <a:schemeClr val="accent1"/>
-          </a:fillRef>
-          <a:effectRef idx="2">
-            <a:schemeClr val="accent1"/>
-          </a:effectRef>
-          <a:fontRef idx="minor">
-            <a:schemeClr val="lt1"/>
-          </a:fontRef>
-        </p:style>
-        <p:txBody>
-          <a:bodyPr rtlCol="0" anchor="ctr"/>
-          <a:lstStyle/>
-          <a:p>
-            <a:pPr algn="ctr"/>
-          </a:p>
-        </p:txBody>
-      </p:sp>
-      <p:sp>
-        <p:nvSpPr>
-          <p:cNvPr id="9" name="Rectangle 8"/>
-          <p:cNvSpPr/>
-          <p:nvPr/>
-        </p:nvSpPr>
-        <p:spPr>
-          <a:xfrm>
-            <a:off x="3657600" y="4169663"/>
-            <a:ext cx="685800" cy="1316736"/>
-          </a:xfrm>
-          <a:prstGeom prst="rect">
-            <a:avLst/>
-          </a:prstGeom>
-          <a:solidFill>
-            <a:srgbClr val="4C7CA8">
-              <a:alpha val="90000"/>
-            </a:srgbClr>
-          </a:solidFill>
-          <a:ln>
-            <a:noFill/>
-          </a:ln>
-          <a:effectLst/>
-        </p:spPr>
-        <p:style>
-          <a:lnRef idx="1">
-            <a:schemeClr val="accent1"/>
-          </a:lnRef>
-          <a:fillRef idx="3">
-            <a:schemeClr val="accent1"/>
-          </a:fillRef>
-          <a:effectRef idx="2">
-            <a:schemeClr val="accent1"/>
-          </a:effectRef>
-          <a:fontRef idx="minor">
-            <a:schemeClr val="lt1"/>
-          </a:fontRef>
-        </p:style>
-        <p:txBody>
-          <a:bodyPr rtlCol="0" anchor="ctr"/>
-          <a:lstStyle/>
-          <a:p>
-            <a:pPr algn="ctr"/>
-          </a:p>
-        </p:txBody>
-      </p:sp>
-      <p:sp>
-        <p:nvSpPr>
-          <p:cNvPr id="10" name="Rectangle 9"/>
-          <p:cNvSpPr/>
-          <p:nvPr/>
-        </p:nvSpPr>
-        <p:spPr>
-          <a:xfrm>
-            <a:off x="4800600" y="2706624"/>
-            <a:ext cx="685800" cy="2779776"/>
-          </a:xfrm>
-          <a:prstGeom prst="rect">
-            <a:avLst/>
-          </a:prstGeom>
-          <a:solidFill>
-            <a:srgbClr val="C2857A">
-              <a:alpha val="90000"/>
-            </a:srgbClr>
-          </a:solidFill>
-          <a:ln>
-            <a:noFill/>
-          </a:ln>
-          <a:effectLst/>
-        </p:spPr>
-        <p:style>
-          <a:lnRef idx="1">
-            <a:schemeClr val="accent1"/>
-          </a:lnRef>
-          <a:fillRef idx="3">
-            <a:schemeClr val="accent1"/>
-          </a:fillRef>
-          <a:effectRef idx="2">
-            <a:schemeClr val="accent1"/>
-          </a:effectRef>
-          <a:fontRef idx="minor">
-            <a:schemeClr val="lt1"/>
-          </a:fontRef>
-        </p:style>
-        <p:txBody>
-          <a:bodyPr rtlCol="0" anchor="ctr"/>
-          <a:lstStyle/>
-          <a:p>
-            <a:pPr algn="ctr"/>
-          </a:p>
-        </p:txBody>
-      </p:sp>
-      <p:sp>
-        <p:nvSpPr>
-          <p:cNvPr id="11" name="Rectangle 10"/>
-          <p:cNvSpPr/>
-          <p:nvPr/>
-        </p:nvSpPr>
-        <p:spPr>
-          <a:xfrm>
-            <a:off x="5943600" y="3438144"/>
-            <a:ext cx="685800" cy="2048255"/>
-          </a:xfrm>
-          <a:prstGeom prst="rect">
-            <a:avLst/>
-          </a:prstGeom>
-          <a:solidFill>
-            <a:srgbClr val="4C7CA8">
-              <a:alpha val="90000"/>
-            </a:srgbClr>
-          </a:solidFill>
-          <a:ln>
-            <a:noFill/>
-          </a:ln>
-          <a:effectLst/>
-        </p:spPr>
-        <p:style>
-          <a:lnRef idx="1">
-            <a:schemeClr val="accent1"/>
-          </a:lnRef>
-          <a:fillRef idx="3">
-            <a:schemeClr val="accent1"/>
-          </a:fillRef>
-          <a:effectRef idx="2">
-            <a:schemeClr val="accent1"/>
-          </a:effectRef>
-          <a:fontRef idx="minor">
-            <a:schemeClr val="lt1"/>
-          </a:fontRef>
-        </p:style>
-        <p:txBody>
-          <a:bodyPr rtlCol="0" anchor="ctr"/>
-          <a:lstStyle/>
-          <a:p>
-            <a:pPr algn="ctr"/>
-          </a:p>
-        </p:txBody>
-      </p:sp>
-      <p:sp>
-        <p:nvSpPr>
-          <p:cNvPr id="12" name="Rectangle 11"/>
-          <p:cNvSpPr/>
-          <p:nvPr/>
-        </p:nvSpPr>
-        <p:spPr>
-          <a:xfrm>
-            <a:off x="7086600" y="3730752"/>
-            <a:ext cx="685800" cy="1755648"/>
-          </a:xfrm>
-          <a:prstGeom prst="rect">
-            <a:avLst/>
-          </a:prstGeom>
-          <a:solidFill>
-            <a:srgbClr val="C2857A">
-              <a:alpha val="90000"/>
-            </a:srgbClr>
-          </a:solidFill>
-          <a:ln>
-            <a:noFill/>
-          </a:ln>
-          <a:effectLst/>
-        </p:spPr>
-        <p:style>
-          <a:lnRef idx="1">
-            <a:schemeClr val="accent1"/>
-          </a:lnRef>
-          <a:fillRef idx="3">
-            <a:schemeClr val="accent1"/>
-          </a:fillRef>
-          <a:effectRef idx="2">
-            <a:schemeClr val="accent1"/>
-          </a:effectRef>
-          <a:fontRef idx="minor">
-            <a:schemeClr val="lt1"/>
-          </a:fontRef>
-        </p:style>
-        <p:txBody>
-          <a:bodyPr rtlCol="0" anchor="ctr"/>
-          <a:lstStyle/>
-          <a:p>
-            <a:pPr algn="ctr"/>
-          </a:p>
-        </p:txBody>
-      </p:sp>
-      <p:sp>
-        <p:nvSpPr>
-          <p:cNvPr id="13" name="TextBox 12"/>
+      <p:graphicFrame>
+        <p:nvGraphicFramePr>
+          <p:cNvPr id="7" name="Chart 6"/>
+          <p:cNvGraphicFramePr>
+            <a:graphicFrameLocks noGrp="1"/>
+          </p:cNvGraphicFramePr>
+          <p:nvPr/>
+        </p:nvGraphicFramePr>
+        <p:xfrm>
+          <a:off x="1188720" y="2331720"/>
+          <a:ext cx="5852160" cy="3429000"/>
+        </p:xfrm>
+        <a:graphic>
+          <a:graphicData uri="http://schemas.openxmlformats.org/drawingml/2006/chart">
+            <c:chart xmlns:c="http://schemas.openxmlformats.org/drawingml/2006/chart" r:id="rId2"/>
+          </a:graphicData>
+        </a:graphic>
+      </p:graphicFrame>
+      <p:sp>
+        <p:nvSpPr>
+          <p:cNvPr id="8" name="TextBox 7"/>
           <p:cNvSpPr txBox="1"/>
           <p:nvPr/>
         </p:nvSpPr>
@@ -23289,14 +25044,14 @@
                 <a:ea typeface="微软雅黑"/>
                 <a:cs typeface="微软雅黑"/>
               </a:rPr>
-              <a:t>图表占位 · 在 PowerPoint 中插入图表替换</a:t>
-            </a:r>
-          </a:p>
-        </p:txBody>
-      </p:sp>
-      <p:sp>
-        <p:nvSpPr>
-          <p:cNvPr id="14" name="TextBox 13"/>
+              <a:t>原生可编辑图表 · 右键图表 → 编辑数据 即可替换数值</a:t>
+            </a:r>
+          </a:p>
+        </p:txBody>
+      </p:sp>
+      <p:sp>
+        <p:nvSpPr>
+          <p:cNvPr id="9" name="TextBox 8"/>
           <p:cNvSpPr txBox="1"/>
           <p:nvPr/>
         </p:nvSpPr>
@@ -23340,7 +25095,7 @@
       </p:sp>
       <p:sp>
         <p:nvSpPr>
-          <p:cNvPr id="15" name="TextBox 14"/>
+          <p:cNvPr id="10" name="TextBox 9"/>
           <p:cNvSpPr txBox="1"/>
           <p:nvPr/>
         </p:nvSpPr>
@@ -23459,7 +25214,7 @@
       </p:sp>
       <p:sp>
         <p:nvSpPr>
-          <p:cNvPr id="16" name="Rectangle 15"/>
+          <p:cNvPr id="11" name="Rectangle 10"/>
           <p:cNvSpPr/>
           <p:nvPr/>
         </p:nvSpPr>
@@ -23503,7 +25258,7 @@
       </p:sp>
       <p:sp>
         <p:nvSpPr>
-          <p:cNvPr id="17" name="TextBox 16"/>
+          <p:cNvPr id="12" name="TextBox 11"/>
           <p:cNvSpPr txBox="1"/>
           <p:nvPr/>
         </p:nvSpPr>
@@ -23550,7 +25305,7 @@
   <p:clrMapOvr>
     <a:masterClrMapping/>
   </p:clrMapOvr>
-  <p:transition spd="med">
+  <p:transition spd="med" advClick="1" advTm="8000">
     <p:wipe dir="d"/>
   </p:transition>
   <p:timing>
@@ -23721,7 +25476,7 @@
                                     </p:stCondLst>
                                   </p:cTn>
                                   <p:tgtEl>
-                                    <p:spTgt spid="14"/>
+                                    <p:spTgt spid="9"/>
                                   </p:tgtEl>
                                   <p:attrNameLst>
                                     <p:attrName>style.visibility</p:attrName>
@@ -23735,7 +25490,7 @@
                                 <p:cBhvr>
                                   <p:cTn id="131" dur="810"/>
                                   <p:tgtEl>
-                                    <p:spTgt spid="14"/>
+                                    <p:spTgt spid="9"/>
                                   </p:tgtEl>
                                 </p:cBhvr>
                               </p:animEffect>
@@ -23756,7 +25511,7 @@
                                     </p:stCondLst>
                                   </p:cTn>
                                   <p:tgtEl>
-                                    <p:spTgt spid="10"/>
+                                    <p:spTgt spid="7"/>
                                   </p:tgtEl>
                                   <p:attrNameLst>
                                     <p:attrName>style.visibility</p:attrName>
@@ -23770,7 +25525,7 @@
                                 <p:cBhvr>
                                   <p:cTn id="151" dur="450"/>
                                   <p:tgtEl>
-                                    <p:spTgt spid="10"/>
+                                    <p:spTgt spid="7"/>
                                   </p:tgtEl>
                                 </p:cBhvr>
                               </p:animEffect>
@@ -23791,7 +25546,7 @@
                                     </p:stCondLst>
                                   </p:cTn>
                                   <p:tgtEl>
-                                    <p:spTgt spid="15"/>
+                                    <p:spTgt spid="10"/>
                                   </p:tgtEl>
                                   <p:attrNameLst>
                                     <p:attrName>style.visibility</p:attrName>
@@ -23805,7 +25560,7 @@
                                 <p:cBhvr>
                                   <p:cTn id="171" dur="570"/>
                                   <p:tgtEl>
-                                    <p:spTgt spid="15"/>
+                                    <p:spTgt spid="10"/>
                                   </p:tgtEl>
                                 </p:cBhvr>
                               </p:animEffect>
@@ -23911,146 +25666,6 @@
                                   <p:cTn id="231" dur="450"/>
                                   <p:tgtEl>
                                     <p:spTgt spid="12"/>
-                                  </p:tgtEl>
-                                </p:cBhvr>
-                              </p:animEffect>
-                            </p:childTnLst>
-                          </p:cTn>
-                        </p:par>
-                        <p:par>
-                          <p:cTn id="25" dur="570" fill="hold" nodeType="afterEffect" grpId="0" presetID="52" presetClass="entr" presetSubtype="0">
-                            <p:stCondLst>
-                              <p:cond delay="1300"/>
-                            </p:stCondLst>
-                            <p:childTnLst>
-                              <p:set>
-                                <p:cBhvr>
-                                  <p:cTn id="26" dur="1" fill="hold">
-                                    <p:stCondLst>
-                                      <p:cond delay="0"/>
-                                    </p:stCondLst>
-                                  </p:cTn>
-                                  <p:tgtEl>
-                                    <p:spTgt spid="7"/>
-                                  </p:tgtEl>
-                                  <p:attrNameLst>
-                                    <p:attrName>style.visibility</p:attrName>
-                                  </p:attrNameLst>
-                                </p:cBhvr>
-                                <p:to>
-                                  <p:strVal val="visible"/>
-                                </p:to>
-                              </p:set>
-                              <p:animEffect transition="in" filter="randombar(horizontal)">
-                                <p:cBhvr>
-                                  <p:cTn id="251" dur="570"/>
-                                  <p:tgtEl>
-                                    <p:spTgt spid="7"/>
-                                  </p:tgtEl>
-                                </p:cBhvr>
-                              </p:animEffect>
-                            </p:childTnLst>
-                          </p:cTn>
-                        </p:par>
-                        <p:par>
-                          <p:cTn id="27" dur="690" fill="hold" nodeType="afterEffect" grpId="0" presetID="21" presetClass="entr" presetSubtype="1">
-                            <p:stCondLst>
-                              <p:cond delay="1430"/>
-                            </p:stCondLst>
-                            <p:childTnLst>
-                              <p:set>
-                                <p:cBhvr>
-                                  <p:cTn id="28" dur="1" fill="hold">
-                                    <p:stCondLst>
-                                      <p:cond delay="0"/>
-                                    </p:stCondLst>
-                                  </p:cTn>
-                                  <p:tgtEl>
-                                    <p:spTgt spid="9"/>
-                                  </p:tgtEl>
-                                  <p:attrNameLst>
-                                    <p:attrName>style.visibility</p:attrName>
-                                  </p:attrNameLst>
-                                </p:cBhvr>
-                                <p:to>
-                                  <p:strVal val="visible"/>
-                                </p:to>
-                              </p:set>
-                              <p:animEffect transition="in" filter="wheel(1)">
-                                <p:cBhvr>
-                                  <p:cTn id="271" dur="690"/>
-                                  <p:tgtEl>
-                                    <p:spTgt spid="9"/>
-                                  </p:tgtEl>
-                                </p:cBhvr>
-                              </p:animEffect>
-                            </p:childTnLst>
-                          </p:cTn>
-                        </p:par>
-                        <p:par>
-                          <p:cTn id="29" dur="810" fill="hold" nodeType="afterEffect" grpId="0" presetID="22" presetClass="entr" presetSubtype="4">
-                            <p:stCondLst>
-                              <p:cond delay="1560"/>
-                            </p:stCondLst>
-                            <p:childTnLst>
-                              <p:set>
-                                <p:cBhvr>
-                                  <p:cTn id="30" dur="1" fill="hold">
-                                    <p:stCondLst>
-                                      <p:cond delay="0"/>
-                                    </p:stCondLst>
-                                  </p:cTn>
-                                  <p:tgtEl>
-                                    <p:spTgt spid="13"/>
-                                  </p:tgtEl>
-                                  <p:attrNameLst>
-                                    <p:attrName>style.visibility</p:attrName>
-                                  </p:attrNameLst>
-                                </p:cBhvr>
-                                <p:to>
-                                  <p:strVal val="visible"/>
-                                </p:to>
-                              </p:set>
-                              <p:animEffect transition="in" filter="wipe(down)">
-                                <p:cBhvr>
-                                  <p:cTn id="291" dur="810"/>
-                                  <p:tgtEl>
-                                    <p:spTgt spid="13"/>
-                                  </p:tgtEl>
-                                </p:cBhvr>
-                              </p:animEffect>
-                            </p:childTnLst>
-                          </p:cTn>
-                        </p:par>
-                        <p:par>
-                          <p:cTn id="31" dur="450" fill="hold" nodeType="afterEffect" grpId="0" presetID="9" presetClass="entr" presetSubtype="0">
-                            <p:stCondLst>
-                              <p:cond delay="1690"/>
-                            </p:stCondLst>
-                            <p:childTnLst>
-                              <p:set>
-                                <p:cBhvr>
-                                  <p:cTn id="32" dur="1" fill="hold">
-                                    <p:stCondLst>
-                                      <p:cond delay="0"/>
-                                    </p:stCondLst>
-                                  </p:cTn>
-                                  <p:tgtEl>
-                                    <p:spTgt spid="16"/>
-                                  </p:tgtEl>
-                                  <p:attrNameLst>
-                                    <p:attrName>style.visibility</p:attrName>
-                                  </p:attrNameLst>
-                                </p:cBhvr>
-                                <p:to>
-                                  <p:strVal val="visible"/>
-                                </p:to>
-                              </p:set>
-                              <p:animEffect transition="in" filter="fade">
-                                <p:cBhvr>
-                                  <p:cTn id="311" dur="450"/>
-                                  <p:tgtEl>
-                                    <p:spTgt spid="16"/>
                                   </p:tgtEl>
                                 </p:cBhvr>
                               </p:animEffect>
@@ -24403,4 +26018,324 @@
   </a:objectDefaults>
   <a:extraClrSchemeLst/>
 </a:theme>
+</file>
+
+<file path=ppt/theme/theme2.xml><?xml version="1.0" encoding="utf-8"?>
+<a:theme xmlns:a="http://schemas.openxmlformats.org/drawingml/2006/main" name="Office Theme">
+  <a:themeElements>
+    <a:clrScheme name="Office">
+      <a:dk1>
+        <a:sysClr val="windowText" lastClr="000000"/>
+      </a:dk1>
+      <a:lt1>
+        <a:sysClr val="window" lastClr="FFFFFF"/>
+      </a:lt1>
+      <a:dk2>
+        <a:srgbClr val="1F497D"/>
+      </a:dk2>
+      <a:lt2>
+        <a:srgbClr val="EEECE1"/>
+      </a:lt2>
+      <a:accent1>
+        <a:srgbClr val="4F81BD"/>
+      </a:accent1>
+      <a:accent2>
+        <a:srgbClr val="C0504D"/>
+      </a:accent2>
+      <a:accent3>
+        <a:srgbClr val="9BBB59"/>
+      </a:accent3>
+      <a:accent4>
+        <a:srgbClr val="8064A2"/>
+      </a:accent4>
+      <a:accent5>
+        <a:srgbClr val="4BACC6"/>
+      </a:accent5>
+      <a:accent6>
+        <a:srgbClr val="F79646"/>
+      </a:accent6>
+      <a:hlink>
+        <a:srgbClr val="0000FF"/>
+      </a:hlink>
+      <a:folHlink>
+        <a:srgbClr val="800080"/>
+      </a:folHlink>
+    </a:clrScheme>
+    <a:fontScheme name="Office">
+      <a:majorFont>
+        <a:latin typeface="Calibri"/>
+        <a:ea typeface=""/>
+        <a:cs typeface=""/>
+        <a:font script="Jpan" typeface="ＭＳ Ｐゴシック"/>
+        <a:font script="Hang" typeface="맑은 고딕"/>
+        <a:font script="Hans" typeface="宋体"/>
+        <a:font script="Hant" typeface="新細明體"/>
+        <a:font script="Arab" typeface="Times New Roman"/>
+        <a:font script="Hebr" typeface="Times New Roman"/>
+        <a:font script="Thai" typeface="Angsana New"/>
+        <a:font script="Ethi" typeface="Nyala"/>
+        <a:font script="Beng" typeface="Vrinda"/>
+        <a:font script="Gujr" typeface="Shruti"/>
+        <a:font script="Khmr" typeface="MoolBoran"/>
+        <a:font script="Knda" typeface="Tunga"/>
+        <a:font script="Guru" typeface="Raavi"/>
+        <a:font script="Cans" typeface="Euphemia"/>
+        <a:font script="Cher" typeface="Plantagenet Cherokee"/>
+        <a:font script="Yiii" typeface="Microsoft Yi Baiti"/>
+        <a:font script="Tibt" typeface="Microsoft Himalaya"/>
+        <a:font script="Thaa" typeface="MV Boli"/>
+        <a:font script="Deva" typeface="Mangal"/>
+        <a:font script="Telu" typeface="Gautami"/>
+        <a:font script="Taml" typeface="Latha"/>
+        <a:font script="Syrc" typeface="Estrangelo Edessa"/>
+        <a:font script="Orya" typeface="Kalinga"/>
+        <a:font script="Mlym" typeface="Kartika"/>
+        <a:font script="Laoo" typeface="DokChampa"/>
+        <a:font script="Sinh" typeface="Iskoola Pota"/>
+        <a:font script="Mong" typeface="Mongolian Baiti"/>
+        <a:font script="Viet" typeface="Times New Roman"/>
+        <a:font script="Uigh" typeface="Microsoft Uighur"/>
+        <a:font script="Geor" typeface="Sylfaen"/>
+      </a:majorFont>
+      <a:minorFont>
+        <a:latin typeface="Calibri"/>
+        <a:ea typeface=""/>
+        <a:cs typeface=""/>
+        <a:font script="Jpan" typeface="ＭＳ Ｐゴシック"/>
+        <a:font script="Hang" typeface="맑은 고딕"/>
+        <a:font script="Hans" typeface="宋体"/>
+        <a:font script="Hant" typeface="新細明體"/>
+        <a:font script="Arab" typeface="Arial"/>
+        <a:font script="Hebr" typeface="Arial"/>
+        <a:font script="Thai" typeface="Cordia New"/>
+        <a:font script="Ethi" typeface="Nyala"/>
+        <a:font script="Beng" typeface="Vrinda"/>
+        <a:font script="Gujr" typeface="Shruti"/>
+        <a:font script="Khmr" typeface="DaunPenh"/>
+        <a:font script="Knda" typeface="Tunga"/>
+        <a:font script="Guru" typeface="Raavi"/>
+        <a:font script="Cans" typeface="Euphemia"/>
+        <a:font script="Cher" typeface="Plantagenet Cherokee"/>
+        <a:font script="Yiii" typeface="Microsoft Yi Baiti"/>
+        <a:font script="Tibt" typeface="Microsoft Himalaya"/>
+        <a:font script="Thaa" typeface="MV Boli"/>
+        <a:font script="Deva" typeface="Mangal"/>
+        <a:font script="Telu" typeface="Gautami"/>
+        <a:font script="Taml" typeface="Latha"/>
+        <a:font script="Syrc" typeface="Estrangelo Edessa"/>
+        <a:font script="Orya" typeface="Kalinga"/>
+        <a:font script="Mlym" typeface="Kartika"/>
+        <a:font script="Laoo" typeface="DokChampa"/>
+        <a:font script="Sinh" typeface="Iskoola Pota"/>
+        <a:font script="Mong" typeface="Mongolian Baiti"/>
+        <a:font script="Viet" typeface="Arial"/>
+        <a:font script="Uigh" typeface="Microsoft Uighur"/>
+        <a:font script="Geor" typeface="Sylfaen"/>
+      </a:minorFont>
+    </a:fontScheme>
+    <a:fmtScheme name="Office">
+      <a:fillStyleLst>
+        <a:solidFill>
+          <a:schemeClr val="phClr"/>
+        </a:solidFill>
+        <a:gradFill rotWithShape="1">
+          <a:gsLst>
+            <a:gs pos="0">
+              <a:schemeClr val="phClr">
+                <a:tint val="50000"/>
+                <a:satMod val="300000"/>
+              </a:schemeClr>
+            </a:gs>
+            <a:gs pos="35000">
+              <a:schemeClr val="phClr">
+                <a:tint val="37000"/>
+                <a:satMod val="300000"/>
+              </a:schemeClr>
+            </a:gs>
+            <a:gs pos="100000">
+              <a:schemeClr val="phClr">
+                <a:tint val="15000"/>
+                <a:satMod val="350000"/>
+              </a:schemeClr>
+            </a:gs>
+          </a:gsLst>
+          <a:lin ang="16200000" scaled="1"/>
+        </a:gradFill>
+        <a:gradFill rotWithShape="1">
+          <a:gsLst>
+            <a:gs pos="0">
+              <a:schemeClr val="phClr">
+                <a:tint val="100000"/>
+                <a:shade val="100000"/>
+                <a:satMod val="130000"/>
+              </a:schemeClr>
+            </a:gs>
+            <a:gs pos="100000">
+              <a:schemeClr val="phClr">
+                <a:tint val="50000"/>
+                <a:shade val="100000"/>
+                <a:satMod val="350000"/>
+              </a:schemeClr>
+            </a:gs>
+          </a:gsLst>
+          <a:lin ang="16200000" scaled="0"/>
+        </a:gradFill>
+      </a:fillStyleLst>
+      <a:lnStyleLst>
+        <a:ln w="9525" cap="flat" cmpd="sng" algn="ctr">
+          <a:solidFill>
+            <a:schemeClr val="phClr">
+              <a:shade val="95000"/>
+              <a:satMod val="105000"/>
+            </a:schemeClr>
+          </a:solidFill>
+          <a:prstDash val="solid"/>
+        </a:ln>
+        <a:ln w="25400" cap="flat" cmpd="sng" algn="ctr">
+          <a:solidFill>
+            <a:schemeClr val="phClr"/>
+          </a:solidFill>
+          <a:prstDash val="solid"/>
+        </a:ln>
+        <a:ln w="38100" cap="flat" cmpd="sng" algn="ctr">
+          <a:solidFill>
+            <a:schemeClr val="phClr"/>
+          </a:solidFill>
+          <a:prstDash val="solid"/>
+        </a:ln>
+      </a:lnStyleLst>
+      <a:effectStyleLst>
+        <a:effectStyle>
+          <a:effectLst>
+            <a:outerShdw blurRad="40000" dist="20000" dir="5400000" rotWithShape="0">
+              <a:srgbClr val="000000">
+                <a:alpha val="38000"/>
+              </a:srgbClr>
+            </a:outerShdw>
+          </a:effectLst>
+        </a:effectStyle>
+        <a:effectStyle>
+          <a:effectLst>
+            <a:outerShdw blurRad="40000" dist="23000" dir="5400000" rotWithShape="0">
+              <a:srgbClr val="000000">
+                <a:alpha val="35000"/>
+              </a:srgbClr>
+            </a:outerShdw>
+          </a:effectLst>
+        </a:effectStyle>
+        <a:effectStyle>
+          <a:effectLst>
+            <a:outerShdw blurRad="40000" dist="23000" dir="5400000" rotWithShape="0">
+              <a:srgbClr val="000000">
+                <a:alpha val="35000"/>
+              </a:srgbClr>
+            </a:outerShdw>
+          </a:effectLst>
+          <a:scene3d>
+            <a:camera prst="orthographicFront">
+              <a:rot lat="0" lon="0" rev="0"/>
+            </a:camera>
+            <a:lightRig rig="threePt" dir="t">
+              <a:rot lat="0" lon="0" rev="1200000"/>
+            </a:lightRig>
+          </a:scene3d>
+          <a:sp3d>
+            <a:bevelT w="63500" h="25400"/>
+          </a:sp3d>
+        </a:effectStyle>
+      </a:effectStyleLst>
+      <a:bgFillStyleLst>
+        <a:solidFill>
+          <a:schemeClr val="phClr"/>
+        </a:solidFill>
+        <a:gradFill rotWithShape="1">
+          <a:gsLst>
+            <a:gs pos="0">
+              <a:schemeClr val="phClr">
+                <a:tint val="40000"/>
+                <a:satMod val="350000"/>
+              </a:schemeClr>
+            </a:gs>
+            <a:gs pos="40000">
+              <a:schemeClr val="phClr">
+                <a:tint val="45000"/>
+                <a:shade val="99000"/>
+                <a:satMod val="350000"/>
+              </a:schemeClr>
+            </a:gs>
+            <a:gs pos="100000">
+              <a:schemeClr val="phClr">
+                <a:shade val="20000"/>
+                <a:satMod val="255000"/>
+              </a:schemeClr>
+            </a:gs>
+          </a:gsLst>
+          <a:path path="circle">
+            <a:fillToRect l="50000" t="-80000" r="50000" b="180000"/>
+          </a:path>
+        </a:gradFill>
+        <a:gradFill rotWithShape="1">
+          <a:gsLst>
+            <a:gs pos="0">
+              <a:schemeClr val="phClr">
+                <a:tint val="80000"/>
+                <a:satMod val="300000"/>
+              </a:schemeClr>
+            </a:gs>
+            <a:gs pos="100000">
+              <a:schemeClr val="phClr">
+                <a:shade val="30000"/>
+                <a:satMod val="200000"/>
+              </a:schemeClr>
+            </a:gs>
+          </a:gsLst>
+          <a:path path="circle">
+            <a:fillToRect l="50000" t="50000" r="50000" b="50000"/>
+          </a:path>
+        </a:gradFill>
+      </a:bgFillStyleLst>
+    </a:fmtScheme>
+  </a:themeElements>
+  <a:objectDefaults>
+    <a:spDef>
+      <a:spPr/>
+      <a:bodyPr/>
+      <a:lstStyle/>
+      <a:style>
+        <a:lnRef idx="1">
+          <a:schemeClr val="accent1"/>
+        </a:lnRef>
+        <a:fillRef idx="3">
+          <a:schemeClr val="accent1"/>
+        </a:fillRef>
+        <a:effectRef idx="2">
+          <a:schemeClr val="accent1"/>
+        </a:effectRef>
+        <a:fontRef idx="minor">
+          <a:schemeClr val="lt1"/>
+        </a:fontRef>
+      </a:style>
+    </a:spDef>
+    <a:lnDef>
+      <a:spPr/>
+      <a:bodyPr/>
+      <a:lstStyle/>
+      <a:style>
+        <a:lnRef idx="2">
+          <a:schemeClr val="accent1"/>
+        </a:lnRef>
+        <a:fillRef idx="0">
+          <a:schemeClr val="accent1"/>
+        </a:fillRef>
+        <a:effectRef idx="1">
+          <a:schemeClr val="accent1"/>
+        </a:effectRef>
+        <a:fontRef idx="minor">
+          <a:schemeClr val="tx1"/>
+        </a:fontRef>
+      </a:style>
+    </a:lnDef>
+  </a:objectDefaults>
+  <a:extraClrSchemeLst/>
+</a:theme>
 </file>